--- a/Unit decks/Unit 04 - Direction Integrity (ABCV-MBT).pptx
+++ b/Unit decks/Unit 04 - Direction Integrity (ABCV-MBT).pptx
@@ -1521,6 +1521,23 @@
             </a:r>
             <a:endParaRPr lang="en-US" dirty="0"/>
           </a:p>
+          <a:p/>
+          <a:p>
+            <a:r>
+              <a:t>Professional insights:</a:t>
+            </a:r>
+          </a:p>
+          <a:p/>
+          <a:p>
+            <a:r>
+              <a:t>Named and avoided: The instinct to manage the appearance of a known exposure, and leave the exposure itself unaddressed, turns a survivable warning into a failure. A risk that has been named and then avoided chooses its own moment. Treat a clear warning as a directive to act.</a:t>
+            </a:r>
+          </a:p>
+          <a:p>
+            <a:r>
+              <a:t>Source: Journal, 16 June 2026 — Professional Insights: Strategy</a:t>
+            </a:r>
+          </a:p>
         </p:txBody>
       </p:sp>
       <p:sp>
@@ -1912,6 +1929,34 @@
 - ✎ Reflection Think of a current strategic objective your organisation is pursuing. What is it assuming about the world that has not yet been verified?</a:t>
             </a:r>
             <a:endParaRPr lang="en-US" dirty="0"/>
+          </a:p>
+          <a:p/>
+          <a:p>
+            <a:r>
+              <a:t>Professional insights:</a:t>
+            </a:r>
+          </a:p>
+          <a:p/>
+          <a:p>
+            <a:r>
+              <a:t>Unnamed conditions: A sound strategy fails when internal reality does not match stated intent. Until the hidden misalignment is dealt with, no amount of planning produces the result. Address what is blocking forward movement before improving the plan.</a:t>
+            </a:r>
+          </a:p>
+          <a:p>
+            <a:r>
+              <a:t>Source: Journal, 6 April 2026 — Professional Insights: Strategy</a:t>
+            </a:r>
+          </a:p>
+          <a:p/>
+          <a:p>
+            <a:r>
+              <a:t>Uncomfortably specific: A senior team often resists strategic clarity because the direction is uncomfortably specific. The reluctance is personal more than analytical. Ask: which piece of strategic direction is your function hiding from?</a:t>
+            </a:r>
+          </a:p>
+          <a:p>
+            <a:r>
+              <a:t>Source: Journal, 9 May 2026 — Professional Insights: Strategy</a:t>
+            </a:r>
           </a:p>
         </p:txBody>
       </p:sp>
@@ -2046,6 +2091,34 @@
             </a:r>
             <a:endParaRPr lang="en-US" dirty="0"/>
           </a:p>
+          <a:p/>
+          <a:p>
+            <a:r>
+              <a:t>Professional insights:</a:t>
+            </a:r>
+          </a:p>
+          <a:p/>
+          <a:p>
+            <a:r>
+              <a:t>Competition: The most effective competitive strategies target the specific assumptions on which a competitor’s position rests. Identify the foundational assumption, and the position built on it becomes unstable.</a:t>
+            </a:r>
+          </a:p>
+          <a:p>
+            <a:r>
+              <a:t>Source: Journal, 6 February 2026 — Professional Insights: Strategy</a:t>
+            </a:r>
+          </a:p>
+          <a:p/>
+          <a:p>
+            <a:r>
+              <a:t>Value Proposition · coherence: Strategy is proven by the quality and consistency of the environment it produces. Organisations weaken their credibility when branding, claims or public positioning exceed the quality of the lived experience.</a:t>
+            </a:r>
+          </a:p>
+          <a:p>
+            <a:r>
+              <a:t>Source: Journal, 16 July 2026 — Professional Insights: Strategy</a:t>
+            </a:r>
+          </a:p>
         </p:txBody>
       </p:sp>
       <p:sp>
@@ -2246,6 +2319,23 @@
             </a:r>
             <a:endParaRPr lang="en-US" dirty="0"/>
           </a:p>
+          <a:p/>
+          <a:p>
+            <a:r>
+              <a:t>Professional insights:</a:t>
+            </a:r>
+          </a:p>
+          <a:p/>
+          <a:p>
+            <a:r>
+              <a:t>Arena · who we serve: Every organisation exists to do something specific for someone specific. When it loses its sense of who it serves and what it provides, it loses the culture built around that service. Keep the specific customer and mission visible.</a:t>
+            </a:r>
+          </a:p>
+          <a:p>
+            <a:r>
+              <a:t>Source: Journal, 31 January 2026 — Professional Insights: Culture</a:t>
+            </a:r>
+          </a:p>
         </p:txBody>
       </p:sp>
       <p:sp>
@@ -2345,6 +2435,45 @@
 - ✎ Reflection For your most important current strategic objective: write one MBT condition per checkpoint. Which checkpoint was hardest to complete? What does that tell you?</a:t>
             </a:r>
             <a:endParaRPr lang="en-US" dirty="0"/>
+          </a:p>
+          <a:p/>
+          <a:p>
+            <a:r>
+              <a:t>Professional insights:</a:t>
+            </a:r>
+          </a:p>
+          <a:p/>
+          <a:p>
+            <a:r>
+              <a:t>Known, assumed, unseen: Strategic certainty should be proportional to the available evidence. Leaders must act, and they should distinguish clearly between what is known, what is assumed and what remains outside current visibility. Use this to frame every Must-Be-True.</a:t>
+            </a:r>
+          </a:p>
+          <a:p>
+            <a:r>
+              <a:t>Source: Journal, 3 September 2026 — Professional Insights: Strategy</a:t>
+            </a:r>
+          </a:p>
+          <a:p/>
+          <a:p>
+            <a:r>
+              <a:t>Today’s fix, tomorrow’s cost: A decision can solve today’s problem while creating future instability. Assess each objective by the capability, dependency, risk and future consequence it creates.</a:t>
+            </a:r>
+          </a:p>
+          <a:p>
+            <a:r>
+              <a:t>Source: Journal, 19 July 2026 — Professional Insights: Strategy</a:t>
+            </a:r>
+          </a:p>
+          <a:p/>
+          <a:p>
+            <a:r>
+              <a:t>The question behind the question: Senior teams often act on the first piece of internal data about an opportunity and miss the second-order question. On every major opportunity, ask the question behind the question before committing. Use this with Boundaries.</a:t>
+            </a:r>
+          </a:p>
+          <a:p>
+            <a:r>
+              <a:t>Source: Journal, 16 May 2026 — Professional Insights: Strategy</a:t>
+            </a:r>
           </a:p>
         </p:txBody>
       </p:sp>

--- a/Unit decks/Unit 04 - Direction Integrity (ABCV-MBT).pptx
+++ b/Unit decks/Unit 04 - Direction Integrity (ABCV-MBT).pptx
@@ -625,6 +625,33 @@
             </a:r>
             <a:endParaRPr lang="en-US" dirty="0"/>
           </a:p>
+          <a:p/>
+          <a:p>
+            <a:r>
+              <a:t>Source detail (S2R® manuscript):</a:t>
+            </a:r>
+          </a:p>
+          <a:p/>
+          <a:p>
+            <a:r>
+              <a:t>Locate the hot zones: Where does directional integrity break down across leadership mandates?</a:t>
+            </a:r>
+          </a:p>
+          <a:p>
+            <a:r>
+              <a:t>Role expertise is essential for execution, and it also creates selective attention: each leader naturally focuses on the dimension of strategy closest to their mandate.</a:t>
+            </a:r>
+          </a:p>
+          <a:p>
+            <a:r>
+              <a:t>When the ABCV–MBT checkpoints are not interrogated collectively, these functional perspectives can create directional blind spots. One executive may see customer relevance clearly while another sees operational friction. A third may detect competitive threats that others overlook.</a:t>
+            </a:r>
+          </a:p>
+          <a:p>
+            <a:r>
+              <a:t>Directional integrity therefore strengthens when each leader interrogates the strategy from their role perspective, and when the team recognises which ABCV element is most likely to be underweighted in each role.</a:t>
+            </a:r>
+          </a:p>
         </p:txBody>
       </p:sp>
       <p:sp>
@@ -792,6 +819,63 @@
             </a:r>
             <a:endParaRPr lang="en-US" dirty="0"/>
           </a:p>
+          <a:p/>
+          <a:p>
+            <a:r>
+              <a:t>Source detail (S2R® manuscript):</a:t>
+            </a:r>
+          </a:p>
+          <a:p/>
+          <a:p>
+            <a:r>
+              <a:t>Examples of how this may play out in practice. What it feels like in the organisation, by role:</a:t>
+            </a:r>
+          </a:p>
+          <a:p>
+            <a:r>
+              <a:t>CEO (Boundaries overlooked): Execution feels slower and heavier than expected despite a clear vision.</a:t>
+            </a:r>
+          </a:p>
+          <a:p>
+            <a:r>
+              <a:t>CFO (Arena overlooked): Financials look strong, but underlying demand is weakening.</a:t>
+            </a:r>
+          </a:p>
+          <a:p>
+            <a:r>
+              <a:t>COO (Competition overlooked): Operations are efficient, but the organisation is still losing ground.</a:t>
+            </a:r>
+          </a:p>
+          <a:p>
+            <a:r>
+              <a:t>CHRO (Competition overlooked): People are aligned and engaged, but results are not improving.</a:t>
+            </a:r>
+          </a:p>
+          <a:p>
+            <a:r>
+              <a:t>CTO / CIO (Arena overlooked): Well-built solutions are not being adopted or used effectively.</a:t>
+            </a:r>
+          </a:p>
+          <a:p>
+            <a:r>
+              <a:t>CMO (Boundaries overlooked): Demand is created, but delivery cannot keep up.</a:t>
+            </a:r>
+          </a:p>
+          <a:p>
+            <a:r>
+              <a:t>CCO (Value Proposition overlooked): Revenue grows, but the organisation starts losing its distinctiveness.</a:t>
+            </a:r>
+          </a:p>
+          <a:p>
+            <a:r>
+              <a:t>CPO (Arena overlooked): Costs are reduced, but it does not translate into strategic progress.</a:t>
+            </a:r>
+          </a:p>
+          <a:p>
+            <a:r>
+              <a:t>CSO (Boundaries overlooked): Strategy is clear, but execution repeatedly breaks down.</a:t>
+            </a:r>
+          </a:p>
         </p:txBody>
       </p:sp>
       <p:sp>
@@ -888,6 +972,59 @@
             </a:r>
             <a:endParaRPr lang="en-US" dirty="0"/>
           </a:p>
+          <a:p/>
+          <a:p>
+            <a:r>
+              <a:t>Source detail (S2R® manuscript):</a:t>
+            </a:r>
+          </a:p>
+          <a:p/>
+          <a:p>
+            <a:r>
+              <a:t>Collective Intelligence of Execution: the cross-leadership OKR filter.</a:t>
+            </a:r>
+          </a:p>
+          <a:p>
+            <a:r>
+              <a:t>The Converging Zone (this section) is the defining moment where a leadership team stops looking at strategy through functional silos and starts seeing it as a single, shared enterprise position.</a:t>
+            </a:r>
+          </a:p>
+          <a:p>
+            <a:r>
+              <a:t>By this stage, each leader already knows the ABCV checkpoints and has seen how “fragile” OKRs can be when their assumptions stay hidden. Now it is time to put that knowledge to work. This is where leaders apply the ABCV–MBT framework to their agreed-upon OKRs and find the common ground required to actually win.</a:t>
+            </a:r>
+          </a:p>
+          <a:p/>
+          <a:p>
+            <a:r>
+              <a:t>The power of the Converging Zone: When a team finishes this process, they leave the room with three things they did not have before:</a:t>
+            </a:r>
+          </a:p>
+          <a:p>
+            <a:r>
+              <a:t>- Shared Assumptions: those “gut feelings” are now explicit, agreed-upon pillars that everyone can see.</a:t>
+            </a:r>
+          </a:p>
+          <a:p>
+            <a:r>
+              <a:t>- Early Warning Systems: the team knows exactly where the strategy is “fragile” before a cent is spent, and can strengthen the plan before execution starts.</a:t>
+            </a:r>
+          </a:p>
+          <a:p>
+            <a:r>
+              <a:t>- Collective Ownership: the Key Result stops being “that team’s goal” and becomes an enterprise-wide commitment. Every leader now understands the support systems, the risks, and the signals they need to watch for.</a:t>
+            </a:r>
+          </a:p>
+          <a:p>
+            <a:r>
+              <a:t>Strategic principle: Strategy becomes resilient when its assumptions are named individually and owned collectively.</a:t>
+            </a:r>
+          </a:p>
+          <a:p>
+            <a:r>
+              <a:t>The Converging Zone turns well-written ambitions into battle-tested commitments grounded in reality. This is how high-performing teams turn “planning” into collective intelligence for execution.</a:t>
+            </a:r>
+          </a:p>
         </p:txBody>
       </p:sp>
       <p:sp>
@@ -1094,6 +1231,167 @@
             </a:r>
             <a:endParaRPr lang="en-US" dirty="0"/>
           </a:p>
+          <a:p/>
+          <a:p>
+            <a:r>
+              <a:t>Source detail (S2R® manuscript):</a:t>
+            </a:r>
+          </a:p>
+          <a:p/>
+          <a:p>
+            <a:r>
+              <a:t>Step 1 · The individual reality check: Before the group comes together, every executive independently completes the ABCV–MBT tool for the selected Key Result. Working through their specific functional perspective (whether it is Finance, Operations, or People), they interrogate the OKR using the four ABCV filters:</a:t>
+            </a:r>
+          </a:p>
+          <a:p>
+            <a:r>
+              <a:t>- Arena: Is this anchored in a real, long-term customer need?</a:t>
+            </a:r>
+          </a:p>
+          <a:p>
+            <a:r>
+              <a:t>- Boundaries: What friction (regulatory, structural, or behavioural) is standing in our way?</a:t>
+            </a:r>
+          </a:p>
+          <a:p>
+            <a:r>
+              <a:t>- Competition: Who else is solving this, and how might they disrupt us?</a:t>
+            </a:r>
+          </a:p>
+          <a:p>
+            <a:r>
+              <a:t>- Value Proposition: Does this actually sharpen our unique organisational “value architecture”?</a:t>
+            </a:r>
+          </a:p>
+          <a:p>
+            <a:r>
+              <a:t>For every checkpoint, each leader names the Must-Be-True condition that has to hold for this Key Result to survive. This stage is executed independently for a reason: honest reflection and unvarnished expertise are required before the group discussion starts to shape them.</a:t>
+            </a:r>
+          </a:p>
+          <a:p>
+            <a:r>
+              <a:t>Limit: Leaders conduct the ABCV–MBT working paper individually, with a maximum of 3 objectives and 2 Key Results per objective.</a:t>
+            </a:r>
+          </a:p>
+          <a:p/>
+          <a:p>
+            <a:r>
+              <a:t>Step 2 · Forging executive consensus: Once the individual work is done, the team brings their perspectives together. The purpose is collecting intelligence; nobody is there to defend an individual department. When all the leaders’ responses are collated, the truth emerges. These patterns are likely to emerge:</a:t>
+            </a:r>
+          </a:p>
+          <a:p>
+            <a:r>
+              <a:t>- Where the team is aligned.</a:t>
+            </a:r>
+          </a:p>
+          <a:p>
+            <a:r>
+              <a:t>- Where the team’s perspectives diverge (the “strategic friction”).</a:t>
+            </a:r>
+          </a:p>
+          <a:p>
+            <a:r>
+              <a:t>- Which Must-Be-True conditions are the most dangerous if they fail.</a:t>
+            </a:r>
+          </a:p>
+          <a:p>
+            <a:r>
+              <a:t>The goal is to move past functional viewpoints and adopt a collective position. Leaders walk away agreeing on the critical signals to monitor and identifying which dimension presents the greatest risk to success.</a:t>
+            </a:r>
+          </a:p>
+          <a:p/>
+          <a:p>
+            <a:r>
+              <a:t>Step 3 · Leadership ownership for the OKR (establishing execution accountability): Once the executive team finishes the heavy lifting (nailing down the OKRs, checking the “integrity” of the plan, and spotting potential roadblocks), there is one final, vital move: putting a name next to the goal.</a:t>
+            </a:r>
+          </a:p>
+          <a:p>
+            <a:r>
+              <a:t>This is called leadership ownership. It sounds formal, and its purpose is practical: preventing “strategy drift”. We have all seen it happen: a great idea starts strong, but because no one person is truly “it”, the objective starts floating between departments. Responsibility gets fuzzy, progress relies on “checking in” while nobody drives forward, and eventually the momentum just dies.</a:t>
+            </a:r>
+          </a:p>
+          <a:p>
+            <a:r>
+              <a:t>Assigning an owner anchors the strategy. It ensures that every goal has a champion at the highest level to protect its progress and keep everyone moving in the same direction.</a:t>
+            </a:r>
+          </a:p>
+          <a:p>
+            <a:r>
+              <a:t>What the Lead Owner actually does: Think of the responsible leader as the steward of the outcome. The work itself stays shared, because most big wins require a massive cross-functional effort. This leader’s job is to keep the organisation’s eyes on the prize and clear the tracks before the train hits a snag. Their real-world responsibilities include:</a:t>
+            </a:r>
+          </a:p>
+          <a:p>
+            <a:r>
+              <a:t>- Keeping Score: making sure everyone can see exactly how we are doing against our Key Results.</a:t>
+            </a:r>
+          </a:p>
+          <a:p>
+            <a:r>
+              <a:t>- Playing Connector: bridging the gaps between different teams so they actually collaborate.</a:t>
+            </a:r>
+          </a:p>
+          <a:p>
+            <a:r>
+              <a:t>- Unsticking the Gears: stepping in with the “Unclogging Tool” the moment things start to slow down.</a:t>
+            </a:r>
+          </a:p>
+          <a:p>
+            <a:r>
+              <a:t>- Calling for Backup: knowing when a barrier is too big for one team and needs the whole executive suite to weigh in.</a:t>
+            </a:r>
+          </a:p>
+          <a:p>
+            <a:r>
+              <a:t>- The Gut Check: ensuring the OKR stays true to our four core pillars: Customer Experience, Operations, Culture, and Finance.</a:t>
+            </a:r>
+          </a:p>
+          <a:p/>
+          <a:p>
+            <a:r>
+              <a:t>Step 4 · Better together, supporting partners: Because no executive is an island, every owner needs partners. These leaders bring the specific “muscles” (the budget, the people, or the systems) needed to cross the finish line. Identify key partners for the OKR.</a:t>
+            </a:r>
+          </a:p>
+          <a:p>
+            <a:r>
+              <a:t>- The CEO might champion the overall vision and keep the board aligned.</a:t>
+            </a:r>
+          </a:p>
+          <a:p>
+            <a:r>
+              <a:t>- The COO handles the “how” and keeps the daily rhythm steady.</a:t>
+            </a:r>
+          </a:p>
+          <a:p>
+            <a:r>
+              <a:t>- The CHRO ensures the team has the right skills and the right energy.</a:t>
+            </a:r>
+          </a:p>
+          <a:p>
+            <a:r>
+              <a:t>- The CFO keeps the resources flowing and the discipline sharp.</a:t>
+            </a:r>
+          </a:p>
+          <a:p>
+            <a:r>
+              <a:t>The purpose is clarity. No new hierarchy is created, and no leader is “bossing” other leaders. One person leads the charge; the others ensure their specific parts of the business are empowering that success.</a:t>
+            </a:r>
+          </a:p>
+          <a:p/>
+          <a:p>
+            <a:r>
+              <a:t>Keeping the pulse: Once ownership is set, the OKR is more than a slide in a deck: it is a living part of how leaders run the organisation. During regular reviews, the lead executive shares the wins, flags the risks, and identifies “clogs” in real time. This discipline allows the team to fix problems while they are small, so that no one is performing an autopsy on a failed project six months later.</a:t>
+            </a:r>
+          </a:p>
+          <a:p>
+            <a:r>
+              <a:t>Why this is the “make or break” step: Most strategies fail because accountability was vague; the idea itself was seldom bad. By assigning a clear owner, you close that gap. You give the objective a steward, a support system, and a clear path forward when things get messy. It reinforces a simple truth: strategy moves through systems, and it only wins when leadership is unmistakable.</a:t>
+            </a:r>
+          </a:p>
+          <a:p>
+            <a:r>
+              <a:t>Final action: Leaders update the final validated OKRs with ownership.</a:t>
+            </a:r>
+          </a:p>
         </p:txBody>
       </p:sp>
       <p:sp>
@@ -1191,6 +1489,33 @@
             </a:r>
             <a:endParaRPr lang="en-US" dirty="0"/>
           </a:p>
+          <a:p/>
+          <a:p>
+            <a:r>
+              <a:t>Source detail (S2R® manuscript):</a:t>
+            </a:r>
+          </a:p>
+          <a:p/>
+          <a:p>
+            <a:r>
+              <a:t>Card version of “Cause of Death: Match the Breakdown”, for the facilitator to draw on. The portal version described above is the one to run. Set-up:</a:t>
+            </a:r>
+          </a:p>
+          <a:p>
+            <a:r>
+              <a:t>Objective: Identify why the strategy failed by correctly matching Scenario → Investigation Question → Checkpoint.</a:t>
+            </a:r>
+          </a:p>
+          <a:p>
+            <a:r>
+              <a:t>What participants receive: Each team (or individual) is given 4 Cause of Death (scenario) cards, 4 Investigation Question cards (shuffled), and 4 checkpoint cards: Arena, Boundaries, Competition, Value Proposition.</a:t>
+            </a:r>
+          </a:p>
+          <a:p>
+            <a:r>
+              <a:t>The steps of the card version are in the notes of the next two slides.</a:t>
+            </a:r>
+          </a:p>
         </p:txBody>
       </p:sp>
       <p:sp>
@@ -1292,6 +1617,49 @@
             </a:r>
             <a:endParaRPr lang="en-US" dirty="0"/>
           </a:p>
+          <a:p/>
+          <a:p>
+            <a:r>
+              <a:t>Source detail (S2R® manuscript):</a:t>
+            </a:r>
+          </a:p>
+          <a:p/>
+          <a:p>
+            <a:r>
+              <a:t>Card version, Steps 1 to 4:</a:t>
+            </a:r>
+          </a:p>
+          <a:p>
+            <a:r>
+              <a:t>Step 1 · Read the scenario: Select one scenario. Ask: “What is actually going wrong here?” Participants must focus on the underlying issue beneath the surface symptom.</a:t>
+            </a:r>
+          </a:p>
+          <a:p>
+            <a:r>
+              <a:t>Step 2 · Match the investigation: From the shuffled cards, select the one investigation question that best explains the failure. Rule: the choice must be justified using the scenario. No guessing.</a:t>
+            </a:r>
+          </a:p>
+          <a:p>
+            <a:r>
+              <a:t>Step 3 · Assign the checkpoint: Select the strategic checkpoint where the breakdown occurred: Arena, Boundaries, Competition or Value Proposition.</a:t>
+            </a:r>
+          </a:p>
+          <a:p>
+            <a:r>
+              <a:t>Step 4 · Lock the answer: The final submission must be in this format: Scenario → Investigation Question → Checkpoint. No changes after submission.</a:t>
+            </a:r>
+          </a:p>
+          <a:p/>
+          <a:p>
+            <a:r>
+              <a:t>Optional scoring (card version): 2 points for a fully correct match; 1 point for the correct checkpoint only; additional credit for strong reasoning during the wild card discussion.</a:t>
+            </a:r>
+          </a:p>
+          <a:p>
+            <a:r>
+              <a:t>Steps 5 and 6 (reveal, discussion and the wild card) are in the notes of the answer key slide.</a:t>
+            </a:r>
+          </a:p>
         </p:txBody>
       </p:sp>
       <p:sp>
@@ -1402,6 +1770,45 @@
 Revenue grew but distinctiveness eroded. Value Proposition failure.</a:t>
             </a:r>
             <a:endParaRPr lang="en-US" dirty="0"/>
+          </a:p>
+          <a:p/>
+          <a:p>
+            <a:r>
+              <a:t>Source detail (S2R® manuscript):</a:t>
+            </a:r>
+          </a:p>
+          <a:p/>
+          <a:p>
+            <a:r>
+              <a:t>Card version, Step 5 · Reveal and discuss (facilitator-led): Reveal the correct match. Facilitator prompts:</a:t>
+            </a:r>
+          </a:p>
+          <a:p>
+            <a:r>
+              <a:t>- What led you to this conclusion?</a:t>
+            </a:r>
+          </a:p>
+          <a:p>
+            <a:r>
+              <a:t>- Where did interpretations differ across teams?</a:t>
+            </a:r>
+          </a:p>
+          <a:p>
+            <a:r>
+              <a:t>- What signals were overlooked?</a:t>
+            </a:r>
+          </a:p>
+          <a:p/>
+          <a:p>
+            <a:r>
+              <a:t>Step 6 · Wild card challenge: Introduce a variation to the scenario. Ask: “If this condition changes, does your diagnosis still hold?” Participants must decide whether to maintain their original answer or revise the checkpoint and reasoning.</a:t>
+            </a:r>
+          </a:p>
+          <a:p/>
+          <a:p>
+            <a:r>
+              <a:t>Close: Strategy failure most often comes from incorrect diagnosis; effort is rarely what is missing. If the breakdown is misidentified, the organisation will apply the wrong intervention and reinforce the problem.</a:t>
+            </a:r>
           </a:p>
         </p:txBody>
       </p:sp>
@@ -1524,6 +1931,39 @@
           <a:p/>
           <a:p>
             <a:r>
+              <a:t>Source detail (S2R® manuscript):</a:t>
+            </a:r>
+          </a:p>
+          <a:p/>
+          <a:p>
+            <a:r>
+              <a:t>The final output: The ABCV–MBT Collective Intelligence Report marks the transition from functional interpretation to true enterprise ownership.</a:t>
+            </a:r>
+          </a:p>
+          <a:p/>
+          <a:p>
+            <a:r>
+              <a:t>The outcome (resilient execution): As a result of this unit, the leadership team now possesses:</a:t>
+            </a:r>
+          </a:p>
+          <a:p>
+            <a:r>
+              <a:t>- Shared Strategic Assumptions: hidden beliefs about customers and capabilities are finally explicit.</a:t>
+            </a:r>
+          </a:p>
+          <a:p>
+            <a:r>
+              <a:t>- Early Warning Signals: the team knows exactly which conditions could destabilise an OKR during execution.</a:t>
+            </a:r>
+          </a:p>
+          <a:p>
+            <a:r>
+              <a:t>- Enterprise Ownership of Direction: the Key Result has moved from a functional task to a collective commitment.</a:t>
+            </a:r>
+          </a:p>
+          <a:p/>
+          <a:p>
+            <a:r>
               <a:t>Professional insights:</a:t>
             </a:r>
           </a:p>
@@ -1831,6 +2271,59 @@
             </a:r>
             <a:endParaRPr lang="en-US" dirty="0"/>
           </a:p>
+          <a:p/>
+          <a:p>
+            <a:r>
+              <a:t>Source detail (S2R® manuscript):</a:t>
+            </a:r>
+          </a:p>
+          <a:p/>
+          <a:p>
+            <a:r>
+              <a:t>What this section covers: The section breaks down a two-part framework designed to audit strategic integrity.</a:t>
+            </a:r>
+          </a:p>
+          <a:p>
+            <a:r>
+              <a:t>ABCV (the strategic checkpoints): a structure used to interrogate the strategy through four critical dimensions: Arena, Boundaries, Competition and Value Proposition.</a:t>
+            </a:r>
+          </a:p>
+          <a:p>
+            <a:r>
+              <a:t>MBT (Must-Be-True conditions): for every checkpoint, leaders must name the specific condition that must remain true for the goal to succeed. If an MBT condition weakens, the strategy is at risk.</a:t>
+            </a:r>
+          </a:p>
+          <a:p/>
+          <a:p>
+            <a:r>
+              <a:t>The final outcome: The purpose of the Awareness stage is to ensure that strategic priorities are:</a:t>
+            </a:r>
+          </a:p>
+          <a:p>
+            <a:r>
+              <a:t>- Anchored in customer reality.</a:t>
+            </a:r>
+          </a:p>
+          <a:p>
+            <a:r>
+              <a:t>- Designed to withstand operational constraints.</a:t>
+            </a:r>
+          </a:p>
+          <a:p>
+            <a:r>
+              <a:t>- Positioned accurately against the competitive landscape.</a:t>
+            </a:r>
+          </a:p>
+          <a:p>
+            <a:r>
+              <a:t>- Coherent with the organisation’s core value.</a:t>
+            </a:r>
+          </a:p>
+          <a:p>
+            <a:r>
+              <a:t>By naming these conditions early, leaders create an early-warning system that allows them to detect risks and pivot before a “well-written ambition” collapses under the weight of reality.</a:t>
+            </a:r>
+          </a:p>
         </p:txBody>
       </p:sp>
       <p:sp>
@@ -1929,6 +2422,28 @@
 - ✎ Reflection Think of a current strategic objective your organisation is pursuing. What is it assuming about the world that has not yet been verified?</a:t>
             </a:r>
             <a:endParaRPr lang="en-US" dirty="0"/>
+          </a:p>
+          <a:p/>
+          <a:p>
+            <a:r>
+              <a:t>Source detail (S2R® manuscript):</a:t>
+            </a:r>
+          </a:p>
+          <a:p/>
+          <a:p>
+            <a:r>
+              <a:t>Abbreviation: “Success in Practice” is shortened to SiP.</a:t>
+            </a:r>
+          </a:p>
+          <a:p>
+            <a:r>
+              <a:t>Fragile by design: If one of the Must-Be-True conditions shifts or fails, the Key Result becomes fragile by design. The discipline goes beyond ticking boxes: it ensures the OKRs are anchored in the real world, where customers are fickle, friction is real, and the competition is rarely who you think it is.</a:t>
+            </a:r>
+          </a:p>
+          <a:p>
+            <a:r>
+              <a:t>What the early-warning system protects: The checkpoints ensure our priorities are deeply integrated into the customer’s reality and the organisation’s unique strengths, so that they are more than “to-do lists” with numbers attached.</a:t>
+            </a:r>
           </a:p>
           <a:p/>
           <a:p>
@@ -2094,6 +2609,44 @@
           <a:p/>
           <a:p>
             <a:r>
+              <a:t>Source detail (S2R® manuscript):</a:t>
+            </a:r>
+          </a:p>
+          <a:p/>
+          <a:p>
+            <a:r>
+              <a:t>The four checkpoints in one line each:</a:t>
+            </a:r>
+          </a:p>
+          <a:p>
+            <a:r>
+              <a:t>Arena: defining the space by the customer’s “end game” (their true need), which reaches beyond a product category.</a:t>
+            </a:r>
+          </a:p>
+          <a:p>
+            <a:r>
+              <a:t>Boundaries: identifying the internal and external “friction” (regulations, dependencies, or resistance) that could stall progress.</a:t>
+            </a:r>
+          </a:p>
+          <a:p>
+            <a:r>
+              <a:t>Competition: identifying the true landscape of who else solves the customer’s problem, even those outside the industry.</a:t>
+            </a:r>
+          </a:p>
+          <a:p>
+            <a:r>
+              <a:t>Value Proposition: ensuring the goal actually strengthens the organisation’s unique identity and “value architecture”.</a:t>
+            </a:r>
+          </a:p>
+          <a:p/>
+          <a:p>
+            <a:r>
+              <a:t>How to read each card: Strategic Logic is the “why”. The Interrogative Anchor is the “search”. The Must-Be-True Condition is the “foundation”.</a:t>
+            </a:r>
+          </a:p>
+          <a:p/>
+          <a:p>
+            <a:r>
               <a:t>Professional insights:</a:t>
             </a:r>
           </a:p>
@@ -2215,6 +2768,23 @@
             </a:r>
             <a:endParaRPr lang="en-US" dirty="0"/>
           </a:p>
+          <a:p/>
+          <a:p>
+            <a:r>
+              <a:t>Source detail (S2R® manuscript):</a:t>
+            </a:r>
+          </a:p>
+          <a:p/>
+          <a:p>
+            <a:r>
+              <a:t>Opening (full wording): On paper, most strategic plans look bulletproof. We see clear priorities, tidy OKRs, and inspiring goals. Yet we have all seen these same plans wither once they hit the pavement of execution. Hustle and talent are rarely what is missing: the weight of unexamined assumptions kills them.</a:t>
+            </a:r>
+          </a:p>
+          <a:p>
+            <a:r>
+              <a:t>One of the most dangerous traps in strategy is how we define the space where we play.</a:t>
+            </a:r>
+          </a:p>
         </p:txBody>
       </p:sp>
       <p:sp>
@@ -2322,6 +2892,39 @@
           <a:p/>
           <a:p>
             <a:r>
+              <a:t>Source detail (S2R® manuscript):</a:t>
+            </a:r>
+          </a:p>
+          <a:p/>
+          <a:p>
+            <a:r>
+              <a:t>The “industry” illusion: We say, “We are in banking,” “We are in logistics,” or “We are in media.” It feels safe because it aligns with how we report to regulators and how the news groups us.</a:t>
+            </a:r>
+          </a:p>
+          <a:p>
+            <a:r>
+              <a:t>Customers do not wake up and think, “I need a product from the banking industry today.” A second example of what they do think: “I need to move this money before the bill is due.” When we define our world by our industry, we put on blinders.</a:t>
+            </a:r>
+          </a:p>
+          <a:p/>
+          <a:p>
+            <a:r>
+              <a:t>From industry to Arena: Think about the smartphone. If Nokia or Motorola stayed stuck in the “telecommunications industry”, they were just making phones. But the smartphone didn’t stay a phone. It became a camera, a map, a bank, and a personal assistant. It moved into multiple Arenas simultaneously.</a:t>
+            </a:r>
+          </a:p>
+          <a:p>
+            <a:r>
+              <a:t>The industry tells you who you think you are competing with. The Arena tells you who you are actually competing with.</a:t>
+            </a:r>
+          </a:p>
+          <a:p>
+            <a:r>
+              <a:t>To find your true Arena, you have to look at the Customer End Game. It is a three-dimensional human experience that reaches beyond a transaction: functional, emotional and social.</a:t>
+            </a:r>
+          </a:p>
+          <a:p/>
+          <a:p>
+            <a:r>
               <a:t>Professional insights:</a:t>
             </a:r>
           </a:p>
@@ -2435,6 +3038,65 @@
 - ✎ Reflection For your most important current strategic objective: write one MBT condition per checkpoint. Which checkpoint was hardest to complete? What does that tell you?</a:t>
             </a:r>
             <a:endParaRPr lang="en-US" dirty="0"/>
+          </a:p>
+          <a:p/>
+          <a:p>
+            <a:r>
+              <a:t>Source detail (S2R® manuscript):</a:t>
+            </a:r>
+          </a:p>
+          <a:p/>
+          <a:p>
+            <a:r>
+              <a:t>The integrity filter: Understanding your Arena is the first step. The next is to stress-test your goals against the friction of reality. This is why the Strategy2Results® programme uses the ABCV–MBT Integrity Checkpoints: four checkpoints to interrogate strategy direction (the OKRs).</a:t>
+            </a:r>
+          </a:p>
+          <a:p/>
+          <a:p>
+            <a:r>
+              <a:t>Two worked Must-Be-Trues:</a:t>
+            </a:r>
+          </a:p>
+          <a:p>
+            <a:r>
+              <a:t>- If your Key Result relies on a specific customer habit, then “Customer habit X must remain stable” is your MBT.</a:t>
+            </a:r>
+          </a:p>
+          <a:p>
+            <a:r>
+              <a:t>- If it relies on a new tech stack, then “Our infrastructure must handle 10x load” is your MBT.</a:t>
+            </a:r>
+          </a:p>
+          <a:p/>
+          <a:p>
+            <a:r>
+              <a:t>The bottom line: The checkpoints ensure your direction is:</a:t>
+            </a:r>
+          </a:p>
+          <a:p>
+            <a:r>
+              <a:t>- Grounded in what customers actually do.</a:t>
+            </a:r>
+          </a:p>
+          <a:p>
+            <a:r>
+              <a:t>- Built to survive real-world friction.</a:t>
+            </a:r>
+          </a:p>
+          <a:p>
+            <a:r>
+              <a:t>- Aware of the true competitive threats.</a:t>
+            </a:r>
+          </a:p>
+          <a:p>
+            <a:r>
+              <a:t>- True to your organisation’s unique value.</a:t>
+            </a:r>
+          </a:p>
+          <a:p>
+            <a:r>
+              <a:t>When leaders find these truths early, they plan for success and build a strategy that can survive the collision with reality.</a:t>
+            </a:r>
           </a:p>
           <a:p/>
           <a:p>

--- a/Unit decks/Unit 04 - Direction Integrity (ABCV-MBT).pptx
+++ b/Unit decks/Unit 04 - Direction Integrity (ABCV-MBT).pptx
@@ -25,6 +25,9 @@
     <p:sldId id="275" r:id="rId16"/>
     <p:sldId id="276" r:id="rId17"/>
     <p:sldId id="292" r:id="rId18"/>
+    <p:sldId id="287" r:id="rId27"/>
+    <p:sldId id="288" r:id="rId28"/>
+    <p:sldId id="293" r:id="rId29"/>
     <p:sldId id="278" r:id="rId19"/>
     <p:sldId id="279" r:id="rId20"/>
     <p:sldId id="280" r:id="rId21"/>
@@ -33,9 +36,6 @@
     <p:sldId id="283" r:id="rId24"/>
     <p:sldId id="284" r:id="rId25"/>
     <p:sldId id="286" r:id="rId26"/>
-    <p:sldId id="287" r:id="rId27"/>
-    <p:sldId id="288" r:id="rId28"/>
-    <p:sldId id="293" r:id="rId29"/>
     <p:sldId id="290" r:id="rId30"/>
   </p:sldIdLst>
   <p:sldSz cx="12192000" cy="6858000"/>
@@ -368,7 +368,7 @@
           <a:p>
             <a:r>
               <a:rPr lang="en-GB" dirty="0"/>
-              <a:t>2. Each participant produces two pieces of portfolio work: the Industry Illusion game of Section 2 and the Cause of Death game of Section 5.</a:t>
+              <a:t>2. Each participant produces two pieces of portfolio work: the Industry Illusion game of Section 2 and the Cause of Death game of Section 4.</a:t>
             </a:r>
           </a:p>
           <a:p>
@@ -395,13 +395,13 @@
           <a:p>
             <a:r>
               <a:rPr lang="en-GB" dirty="0"/>
-              <a:t>2. Participants then complete their own page on the portal, in the session or after it: the reflections, their own Industry Illusion game, the group work of Section 4 and the Cause of Death game.</a:t>
-            </a:r>
-          </a:p>
-          <a:p>
-            <a:r>
-              <a:rPr lang="en-GB" dirty="0"/>
-              <a:t>3. Section 4 on the portal is group work for the Capstone. The group agrees each entry and one member acts as scribe.</a:t>
+              <a:t>2. Participants then complete their own page on the portal, in the session or after it: the reflections, their own Industry Illusion game, the group work of Section 5 and the Cause of Death game.</a:t>
+            </a:r>
+          </a:p>
+          <a:p>
+            <a:r>
+              <a:rPr lang="en-GB" dirty="0"/>
+              <a:t>3. Section 5 on the portal is group work for the Capstone. The group agrees each entry and one member acts as scribe.</a:t>
             </a:r>
           </a:p>
           <a:p>
@@ -413,7 +413,7 @@
           <a:p>
             <a:r>
               <a:rPr lang="en-GB" dirty="0"/>
-              <a:t>4. The Industry Illusion game in Section 2 and the Cause of Death game in Section 5 are portfolio work, completed by each participant alone.</a:t>
+              <a:t>4. The Industry Illusion game in Section 2 and the Cause of Death game in Section 4 are portfolio work, completed by each participant alone.</a:t>
             </a:r>
           </a:p>
           <a:p>
@@ -2853,13 +2853,13 @@
           <a:p>
             <a:r>
               <a:rPr lang="en-GB" b="1" dirty="0"/>
-              <a:t>4. Bridge to Section 4.</a:t>
-            </a:r>
-          </a:p>
-          <a:p>
-            <a:r>
-              <a:rPr lang="en-GB" dirty="0"/>
-              <a:t>Say: "We know the checkpoints and we know our blind spots. Section 4 applies both to your own Key Results."</a:t>
+              <a:t>4. Bridge to Section 5.</a:t>
+            </a:r>
+          </a:p>
+          <a:p>
+            <a:r>
+              <a:rPr lang="en-GB" dirty="0"/>
+              <a:t>Say: "We know the checkpoints and we know our blind spots. Section 5 applies both to your own Key Results."</a:t>
             </a:r>
           </a:p>
           <a:p>
@@ -2945,7 +2945,7 @@
           <a:p>
             <a:r>
               <a:rPr lang="en-GB" b="1" dirty="0"/>
-              <a:t>SECTION 4 · INTEGRATION — COLLECTIVE</a:t>
+              <a:t>SECTION 5 · APPLICATION — IN PRACTICE</a:t>
             </a:r>
           </a:p>
           <a:p>
@@ -2960,13 +2960,13 @@
           <a:p>
             <a:r>
               <a:rPr lang="en-GB" dirty="0"/>
-              <a:t>1. 4.1: the worked example. One Key Result of the client services company from Unit 3, taken through four steps, on six slides.</a:t>
-            </a:r>
-          </a:p>
-          <a:p>
-            <a:r>
-              <a:rPr lang="en-GB" dirty="0"/>
-              <a:t>2. 4.2: the briefing for the Capstone work. Each group takes its own Unit 3 Key Results through the same four steps.</a:t>
+              <a:t>1. 5.1: the worked example. One Key Result of the client services company from Unit 3, taken through four steps, on six slides.</a:t>
+            </a:r>
+          </a:p>
+          <a:p>
+            <a:r>
+              <a:rPr lang="en-GB" dirty="0"/>
+              <a:t>2. 5.2: the briefing for the Capstone work. Each group takes its own Unit 3 Key Results through the same four steps.</a:t>
             </a:r>
           </a:p>
           <a:p>
@@ -3131,7 +3131,7 @@
           <a:p>
             <a:r>
               <a:rPr lang="en-GB" b="1" dirty="0"/>
-              <a:t>4.1 — WORKED EXAMPLE: STRESS-TESTING A KEY RESULT (4 STEPS)</a:t>
+              <a:t>5.1 — WORKED EXAMPLE: STRESS-TESTING A KEY RESULT (4 STEPS)</a:t>
             </a:r>
           </a:p>
           <a:p>
@@ -3315,7 +3315,7 @@
             </a:pPr>
             <a:r>
               <a:rPr lang="en-GB" dirty="0"/>
-              <a:t>Outcome 1 is built in Section 1 (the four ABCV checkpoints) and produced in 4.2, where each group tests its own Key Results. </a:t>
+              <a:t>Outcome 1 is built in Section 1 (the four ABCV checkpoints) and produced in 5.2, where each group tests its own Key Results. </a:t>
             </a:r>
           </a:p>
           <a:p>
@@ -3332,7 +3332,7 @@
             </a:pPr>
             <a:r>
               <a:rPr lang="en-GB" dirty="0"/>
-              <a:t>Outcome 2 is built at each checkpoint, where a Must-Be-True condition is named, and shown in 4.1 (the worked example: one Key Result, four steps, four conditions).</a:t>
+              <a:t>Outcome 2 is built at each checkpoint, where a Must-Be-True condition is named, and shown in 5.1 (the worked example: one Key Result, four steps, four conditions).</a:t>
             </a:r>
           </a:p>
           <a:p>
@@ -3362,7 +3362,7 @@
           <a:p>
             <a:r>
               <a:rPr lang="en-GB" dirty="0"/>
-              <a:t>- Outcome 4 is built in Section 3 (the blind spot of each executive role) and produced in 4.2, where the group confirms its conditions together.</a:t>
+              <a:t>- Outcome 4 is built in Section 3 (the blind spot of each executive role) and produced in 5.2, where the group confirms its conditions together.</a:t>
             </a:r>
           </a:p>
           <a:p>
@@ -3482,7 +3482,7 @@
           <a:p>
             <a:r>
               <a:rPr lang="en-GB" b="1" dirty="0"/>
-              <a:t>4.1 — WORKED EXAMPLE · STEP 1: DEFINE THE ARENA</a:t>
+              <a:t>5.1 — WORKED EXAMPLE · STEP 1: DEFINE THE ARENA</a:t>
             </a:r>
           </a:p>
           <a:p>
@@ -3662,7 +3662,7 @@
           <a:p>
             <a:r>
               <a:rPr lang="en-GB" b="1" dirty="0"/>
-              <a:t>4.1 — WORKED EXAMPLE · STEP 2: UNDERSTAND THE BOUNDARIES</a:t>
+              <a:t>5.1 — WORKED EXAMPLE · STEP 2: UNDERSTAND THE BOUNDARIES</a:t>
             </a:r>
           </a:p>
           <a:p>
@@ -3860,7 +3860,7 @@
           <a:p>
             <a:r>
               <a:rPr lang="en-GB" b="1" dirty="0"/>
-              <a:t>4.1 — WORKED EXAMPLE · STEP 3: SEE THE COMPETITION</a:t>
+              <a:t>5.1 — WORKED EXAMPLE · STEP 3: SEE THE COMPETITION</a:t>
             </a:r>
           </a:p>
           <a:p>
@@ -4058,7 +4058,7 @@
           <a:p>
             <a:r>
               <a:rPr lang="en-GB" b="1" dirty="0"/>
-              <a:t>4.1 — WORKED EXAMPLE · STEP 4: ESTABLISH THE VALUE PROPOSITION</a:t>
+              <a:t>5.1 — WORKED EXAMPLE · STEP 4: ESTABLISH THE VALUE PROPOSITION</a:t>
             </a:r>
           </a:p>
           <a:p>
@@ -4223,7 +4223,7 @@
           <a:p>
             <a:r>
               <a:rPr lang="en-GB" b="1" dirty="0"/>
-              <a:t>4.1 — WORKED EXAMPLE: FOUR STEPS, FOUR CONDITIONS</a:t>
+              <a:t>5.1 — WORKED EXAMPLE: FOUR STEPS, FOUR CONDITIONS</a:t>
             </a:r>
           </a:p>
           <a:p>
@@ -4331,7 +4331,7 @@
           <a:p>
             <a:r>
               <a:rPr lang="en-GB" b="1" dirty="0"/>
-              <a:t>4. Bridge to 4.2.</a:t>
+              <a:t>4. Bridge to 5.2.</a:t>
             </a:r>
           </a:p>
           <a:p>
@@ -4424,7 +4424,7 @@
           <a:p>
             <a:r>
               <a:rPr lang="en-GB" b="1" dirty="0"/>
-              <a:t>4.2 — STRESS-TESTING YOUR KEY RESULTS · THE FOUR STEPS (CAPSTONE WORK)</a:t>
+              <a:t>5.2 — STRESS-TESTING YOUR KEY RESULTS · THE FOUR STEPS (CAPSTONE WORK)</a:t>
             </a:r>
           </a:p>
           <a:p>
@@ -4618,25 +4618,25 @@
           <a:p>
             <a:r>
               <a:rPr lang="en-GB" dirty="0"/>
-              <a:t>“The market must support us” is too vague to verify.</a:t>
-            </a:r>
-          </a:p>
-          <a:p>
-            <a:r>
-              <a:rPr lang="en-GB" dirty="0"/>
-              <a:t>Push for precision."</a:t>
-            </a:r>
-          </a:p>
-          <a:p>
-            <a:r>
-              <a:rPr lang="en-GB" dirty="0"/>
-              <a:t>Watch for: conditions written as risks or concerns. Each must be a condition that is either true or false.</a:t>
-            </a:r>
-          </a:p>
-          <a:p>
-            <a:r>
-              <a:rPr lang="en-GB" dirty="0"/>
-              <a:t>Watch for: groups that struggle to name a condition. This is a signal that the Key Result itself may be insufficiently grounded. Use it as productive friction.</a:t>
+              <a:t>“The market must support us” becomes a condition once it names what must be true, for whom and by when.</a:t>
+            </a:r>
+          </a:p>
+          <a:p>
+            <a:r>
+              <a:rPr lang="en-GB" dirty="0"/>
+              <a:t>"</a:t>
+            </a:r>
+          </a:p>
+          <a:p>
+            <a:r>
+              <a:rPr lang="en-GB" dirty="0"/>
+              <a:t>How each condition is written: as a statement that is either true or false. The group restates a risk or a concern as the condition that must hold.</a:t>
+            </a:r>
+          </a:p>
+          <a:p>
+            <a:r>
+              <a:rPr lang="en-GB" dirty="0"/>
+              <a:t>Where a group cannot name a condition: the Key Result itself may be insufficiently grounded. The group asks itself what that tells it about the Key Result.</a:t>
             </a:r>
           </a:p>
           <a:p>
@@ -4660,7 +4660,7 @@
           <a:p>
             <a:r>
               <a:rPr lang="en-GB" dirty="0"/>
-              <a:t>Ask: "Which one MBT condition, if left unverified, represents the greatest risk to our strategy’s integrity? Who is leaving this room responsible for that verification?"</a:t>
+              <a:t>Ask: "Which one MBT condition, if left unverified, represents the greatest risk to our strategy’s integrity? Who is responsible for that verification?"</a:t>
             </a:r>
           </a:p>
           <a:p>
@@ -4675,13 +4675,13 @@
           <a:p>
             <a:r>
               <a:rPr lang="en-GB" dirty="0"/>
-              <a:t>Participants work in their groups in 4.2 of the participant file. This is Capstone work.</a:t>
-            </a:r>
-          </a:p>
-          <a:p>
-            <a:r>
-              <a:rPr lang="en-GB" dirty="0"/>
-              <a:t>1. The group’s confirmed Key Results from Unit 3 are listed in 4.2.</a:t>
+              <a:t>Participants work in their groups in 5.2 of the participant file. This is Capstone work.</a:t>
+            </a:r>
+          </a:p>
+          <a:p>
+            <a:r>
+              <a:rPr lang="en-GB" dirty="0"/>
+              <a:t>1. The group’s confirmed Key Results from Unit 3 are listed in 5.2.</a:t>
             </a:r>
           </a:p>
           <a:p>
@@ -4807,7 +4807,7 @@
           <a:p>
             <a:r>
               <a:rPr lang="en-GB" b="1" dirty="0"/>
-              <a:t>SECTION 5 · APPLICATION — IN PRACTICE</a:t>
+              <a:t>SECTION 4 · INTEGRATION — COLLECTIVE</a:t>
             </a:r>
           </a:p>
           <a:p>
@@ -4834,7 +4834,7 @@
           <a:p>
             <a:r>
               <a:rPr lang="en-GB" dirty="0"/>
-              <a:t>3. The Section 5 Reflections slide: the closing commitment.</a:t>
+              <a:t>3. The Section 4 Reflections slide: the closing commitment.</a:t>
             </a:r>
           </a:p>
           <a:p>
@@ -5209,7 +5209,7 @@
           <a:p>
             <a:r>
               <a:rPr lang="en-GB" b="1" dirty="0"/>
-              <a:t>SECTION 5 REFLECTIONS</a:t>
+              <a:t>SECTION 4 REFLECTIONS</a:t>
             </a:r>
           </a:p>
           <a:p>
@@ -5332,7 +5332,7 @@
           <a:p>
             <a:r>
               <a:rPr lang="en-GB" dirty="0"/>
-              <a:t>Participants write the Closing Commitment at the end of Section 5 of the participant file.</a:t>
+              <a:t>Participants write the Closing Commitment at the end of Section 4 of the participant file.</a:t>
             </a:r>
           </a:p>
         </p:txBody>
@@ -5514,7 +5514,7 @@
           <a:p>
             <a:r>
               <a:rPr lang="en-GB" dirty="0"/>
-              <a:t>Say: "You now complete the unit on the portal: your reflections, your own Industry Illusion game, your group’s work in Section 4, Cause of Death and your closing commitment.</a:t>
+              <a:t>Say: "You now complete the unit on the portal: your reflections, your own Industry Illusion game, your group’s work in Section 5, Cause of Death and your closing commitment.</a:t>
             </a:r>
           </a:p>
           <a:p>
@@ -5535,7 +5535,7 @@
           <a:p>
             <a:r>
               <a:rPr lang="en-GB" dirty="0"/>
-              <a:t>Participants complete every part of the participant file and submit the unit to the facilitator from the end of Section 5.</a:t>
+              <a:t>Participants complete every part of the participant file and submit the unit to the facilitator from the end of Section 4.</a:t>
             </a:r>
           </a:p>
           <a:p>
@@ -5664,7 +5664,7 @@
           <a:p>
             <a:r>
               <a:rPr lang="en-GB" dirty="0"/>
-              <a:t>2. Say plainly that Sections 1 to 3 prepare the thinking, Section 4 is where each group tests its own Key Results for the Capstone, and Section 5 is a diagnosis game each participant plays alone.</a:t>
+              <a:t>2. Say plainly that Sections 1 to 3 prepare the thinking, Section 5 is where each group tests its own Key Results for the Capstone, and Section 4 is a diagnosis game each participant plays alone.</a:t>
             </a:r>
           </a:p>
           <a:p>
@@ -5728,7 +5728,7 @@
             </a:r>
             <a:r>
               <a:rPr lang="en-GB" dirty="0"/>
-              <a:t>— Collective: one worked example, then each group takes its Unit 3 Key Results through the same four steps.</a:t>
+              <a:t>— Collective: Cause of Death, four failed strategies tested against the Industry Illusion.</a:t>
             </a:r>
           </a:p>
           <a:p>
@@ -5741,7 +5741,7 @@
             </a:r>
             <a:r>
               <a:rPr lang="en-GB" dirty="0"/>
-              <a:t>— In Practice: Cause of Death, four failed strategies tested against the Industry Illusion.</a:t>
+              <a:t>— In Practice: one worked example, then each group takes its Unit 3 Key Results through the same four steps.</a:t>
             </a:r>
           </a:p>
           <a:p>
@@ -5783,13 +5783,13 @@
           <a:p>
             <a:r>
               <a:rPr lang="en-GB" dirty="0"/>
-              <a:t>- Watch for Must-Be-True conditions written as risks or concerns. Each must be a condition that is either true or false.</a:t>
-            </a:r>
-          </a:p>
-          <a:p>
-            <a:r>
-              <a:rPr lang="en-GB" dirty="0"/>
-              <a:t>- Watch for competition defined as industry rivals only. Push for every alternative the customer can choose, including doing nothing.</a:t>
+              <a:t>- Teach: a Must-Be-True condition is written so that it is either true or false. A risk or a concern becomes a condition once it is stated as what must hold.</a:t>
+            </a:r>
+          </a:p>
+          <a:p>
+            <a:r>
+              <a:rPr lang="en-GB" dirty="0"/>
+              <a:t>- Teach: competition covers every alternative the customer can choose, including doing nothing.</a:t>
             </a:r>
           </a:p>
           <a:p>
@@ -8449,7 +8449,7 @@
                 <a:ea typeface="Cambria" pitchFamily="34" charset="-122"/>
                 <a:cs typeface="Cambria" pitchFamily="34" charset="-120"/>
               </a:rPr>
-              <a:t>1.4 Value Proposition: Coherent Advantage</a:t>
+              <a:t>1.4 · Value Proposition: Coherent Advantage</a:t>
             </a:r>
             <a:endParaRPr lang="en-US" sz="3600" dirty="0"/>
           </a:p>
@@ -11698,7 +11698,7 @@
 
 <file path=ppt/slides/slide18.xml><?xml version="1.0" encoding="utf-8"?>
 <p:sld xmlns:a="http://schemas.openxmlformats.org/drawingml/2006/main" xmlns:r="http://schemas.openxmlformats.org/officeDocument/2006/relationships" xmlns:p="http://schemas.openxmlformats.org/presentationml/2006/main">
-  <p:cSld name="Slide 23">
+  <p:cSld name="Slide 32">
     <p:bg>
       <p:bgPr>
         <a:solidFill>
@@ -11871,7 +11871,7 @@
                 <a:ea typeface="Calibri" pitchFamily="34" charset="-122"/>
                 <a:cs typeface="Calibri" pitchFamily="34" charset="-120"/>
               </a:rPr>
-              <a:t>ABCV–MBT Working Papers</a:t>
+              <a:t>Cause of Death — Match the Breakdown</a:t>
             </a:r>
             <a:endParaRPr lang="en-US" sz="2600" dirty="0"/>
           </a:p>
@@ -12005,7 +12005,7 @@
                 <a:ea typeface="Calibri" pitchFamily="34" charset="-122"/>
                 <a:cs typeface="Calibri" pitchFamily="34" charset="-120"/>
               </a:rPr>
-              <a:t>Appraise the assumptions, dependencies and uncertainties behind the organisation’s strategic objectives.</a:t>
+              <a:t>Evaluate realistic strategic failures to diagnose where directional integrity broke down.</a:t>
             </a:r>
             <a:endParaRPr lang="en-US" sz="2400" dirty="0"/>
           </a:p>
@@ -12100,7 +12100,7 @@
                 <a:ea typeface="Calibri" pitchFamily="34" charset="-122"/>
                 <a:cs typeface="Calibri" pitchFamily="34" charset="-120"/>
               </a:rPr>
-              <a:t>Demonstrate collective accountability by assigning ownership for verifying critical conditions.</a:t>
+              <a:t>Judge which integrity checkpoint would have protected the chosen direction.</a:t>
             </a:r>
             <a:endParaRPr lang="en-US" sz="2400" dirty="0"/>
           </a:p>
@@ -12116,11 +12116,11 @@
 
 <file path=ppt/slides/slide19.xml><?xml version="1.0" encoding="utf-8"?>
 <p:sld xmlns:a="http://schemas.openxmlformats.org/drawingml/2006/main" xmlns:r="http://schemas.openxmlformats.org/officeDocument/2006/relationships" xmlns:p="http://schemas.openxmlformats.org/presentationml/2006/main">
-  <p:cSld name="Slide 24">
+  <p:cSld name="Slide 33">
     <p:bg>
       <p:bgPr>
         <a:solidFill>
-          <a:srgbClr val="0F3B1C"/>
+          <a:srgbClr val="FFFFFF"/>
         </a:solidFill>
         <a:effectLst/>
       </p:bgPr>
@@ -12141,14 +12141,255 @@
       </p:grpSpPr>
       <p:sp>
         <p:nvSpPr>
-          <p:cNvPr id="2" name="Shape 0"/>
+          <p:cNvPr id="2" name="Text 0"/>
+          <p:cNvSpPr txBox="1"/>
+          <p:nvPr/>
+        </p:nvSpPr>
+        <p:spPr>
+          <a:xfrm>
+            <a:off x="548640" y="411480"/>
+            <a:ext cx="11064240" cy="868680"/>
+          </a:xfrm>
+          <a:prstGeom prst="rect">
+            <a:avLst/>
+          </a:prstGeom>
+          <a:noFill/>
+          <a:ln/>
+        </p:spPr>
+        <p:txBody>
+          <a:bodyPr wrap="square" lIns="0" tIns="0" rIns="0" bIns="0" rtlCol="0" anchor="ctr"/>
+          <a:lstStyle/>
+          <a:p>
+            <a:pPr marL="0" indent="0">
+              <a:buNone/>
+            </a:pPr>
+            <a:r>
+              <a:rPr lang="en-US" sz="3600" b="1" dirty="0">
+                <a:solidFill>
+                  <a:srgbClr val="1A5C2C"/>
+                </a:solidFill>
+                <a:latin typeface="Cambria" pitchFamily="34" charset="0"/>
+                <a:ea typeface="Cambria" pitchFamily="34" charset="-122"/>
+                <a:cs typeface="Cambria" pitchFamily="34" charset="-120"/>
+              </a:rPr>
+              <a:t>Cause of Death · Match the Breakdown</a:t>
+            </a:r>
+            <a:endParaRPr lang="en-US" sz="3600" dirty="0"/>
+          </a:p>
+        </p:txBody>
+      </p:sp>
+      <p:sp>
+        <p:nvSpPr>
+          <p:cNvPr id="3" name="Shape 1"/>
           <p:cNvSpPr/>
           <p:nvPr/>
         </p:nvSpPr>
         <p:spPr>
           <a:xfrm>
-            <a:off x="731520" y="914400"/>
-            <a:ext cx="1097280" cy="1097280"/>
+            <a:off x="548640" y="1508760"/>
+            <a:ext cx="5408676" cy="3931920"/>
+          </a:xfrm>
+          <a:prstGeom prst="roundRect">
+            <a:avLst>
+              <a:gd name="adj" fmla="val 2326"/>
+            </a:avLst>
+          </a:prstGeom>
+          <a:solidFill>
+            <a:srgbClr val="EEF4EF"/>
+          </a:solidFill>
+          <a:ln w="12700">
+            <a:solidFill>
+              <a:srgbClr val="EEF4EF"/>
+            </a:solidFill>
+            <a:prstDash val="solid"/>
+          </a:ln>
+        </p:spPr>
+        <p:txBody>
+          <a:bodyPr/>
+          <a:lstStyle/>
+          <a:p>
+            <a:endParaRPr lang="en-ZA"/>
+          </a:p>
+        </p:txBody>
+      </p:sp>
+      <p:sp>
+        <p:nvSpPr>
+          <p:cNvPr id="4" name="Shape 2"/>
+          <p:cNvSpPr/>
+          <p:nvPr/>
+        </p:nvSpPr>
+        <p:spPr>
+          <a:xfrm>
+            <a:off x="777240" y="1737360"/>
+            <a:ext cx="640080" cy="640080"/>
+          </a:xfrm>
+          <a:prstGeom prst="ellipse">
+            <a:avLst/>
+          </a:prstGeom>
+          <a:solidFill>
+            <a:srgbClr val="1A5C2C"/>
+          </a:solidFill>
+          <a:ln w="12700">
+            <a:solidFill>
+              <a:srgbClr val="1A5C2C"/>
+            </a:solidFill>
+            <a:prstDash val="solid"/>
+          </a:ln>
+        </p:spPr>
+        <p:txBody>
+          <a:bodyPr/>
+          <a:lstStyle/>
+          <a:p>
+            <a:endParaRPr lang="en-ZA"/>
+          </a:p>
+        </p:txBody>
+      </p:sp>
+      <p:pic>
+        <p:nvPicPr>
+          <p:cNvPr id="5" name="Image 0" descr="preencoded.png"/>
+          <p:cNvPicPr>
+            <a:picLocks noChangeAspect="1"/>
+          </p:cNvPicPr>
+          <p:nvPr/>
+        </p:nvPicPr>
+        <p:blipFill>
+          <a:blip r:embed="rId3"/>
+          <a:stretch>
+            <a:fillRect/>
+          </a:stretch>
+        </p:blipFill>
+        <p:spPr>
+          <a:xfrm>
+            <a:off x="937260" y="1897380"/>
+            <a:ext cx="320040" cy="320040"/>
+          </a:xfrm>
+          <a:prstGeom prst="rect">
+            <a:avLst/>
+          </a:prstGeom>
+        </p:spPr>
+      </p:pic>
+      <p:sp>
+        <p:nvSpPr>
+          <p:cNvPr id="6" name="Text 3"/>
+          <p:cNvSpPr txBox="1"/>
+          <p:nvPr/>
+        </p:nvSpPr>
+        <p:spPr>
+          <a:xfrm>
+            <a:off x="1600200" y="1691640"/>
+            <a:ext cx="4128516" cy="731520"/>
+          </a:xfrm>
+          <a:prstGeom prst="rect">
+            <a:avLst/>
+          </a:prstGeom>
+          <a:noFill/>
+          <a:ln/>
+        </p:spPr>
+        <p:txBody>
+          <a:bodyPr wrap="square" lIns="0" tIns="0" rIns="0" bIns="0" rtlCol="0" anchor="ctr"/>
+          <a:lstStyle/>
+          <a:p>
+            <a:pPr marL="0" indent="0">
+              <a:buNone/>
+            </a:pPr>
+            <a:r>
+              <a:rPr lang="en-US" sz="2600" b="1" dirty="0">
+                <a:solidFill>
+                  <a:srgbClr val="1A5C2C"/>
+                </a:solidFill>
+                <a:latin typeface="Cambria" pitchFamily="34" charset="0"/>
+                <a:ea typeface="Cambria" pitchFamily="34" charset="-122"/>
+                <a:cs typeface="Cambria" pitchFamily="34" charset="-120"/>
+              </a:rPr>
+              <a:t>1 · Find the illusion</a:t>
+            </a:r>
+            <a:endParaRPr lang="en-US" sz="2600" dirty="0"/>
+          </a:p>
+        </p:txBody>
+      </p:sp>
+      <p:sp>
+        <p:nvSpPr>
+          <p:cNvPr id="7" name="Text 4"/>
+          <p:cNvSpPr txBox="1"/>
+          <p:nvPr/>
+        </p:nvSpPr>
+        <p:spPr>
+          <a:xfrm>
+            <a:off x="777240" y="2560320"/>
+            <a:ext cx="4951476" cy="2743200"/>
+          </a:xfrm>
+          <a:prstGeom prst="rect">
+            <a:avLst/>
+          </a:prstGeom>
+          <a:noFill/>
+          <a:ln/>
+        </p:spPr>
+        <p:txBody>
+          <a:bodyPr wrap="square" lIns="0" tIns="0" rIns="0" bIns="0" rtlCol="0" anchor="t"/>
+          <a:lstStyle/>
+          <a:p>
+            <a:pPr marL="0" indent="0">
+              <a:buNone/>
+            </a:pPr>
+            <a:r>
+              <a:rPr lang="en-US" sz="2400" dirty="0">
+                <a:solidFill>
+                  <a:srgbClr val="1F2A22"/>
+                </a:solidFill>
+                <a:latin typeface="Calibri" pitchFamily="34" charset="0"/>
+                <a:ea typeface="Calibri" pitchFamily="34" charset="-122"/>
+                <a:cs typeface="Calibri" pitchFamily="34" charset="-120"/>
+              </a:rPr>
+              <a:t>Choose the investigation question the scenario answers: Familiarity, Exclusion or Complacency.</a:t>
+            </a:r>
+            <a:endParaRPr lang="en-US" sz="2400" dirty="0"/>
+          </a:p>
+        </p:txBody>
+      </p:sp>
+      <p:sp>
+        <p:nvSpPr>
+          <p:cNvPr id="8" name="Shape 5"/>
+          <p:cNvSpPr/>
+          <p:nvPr/>
+        </p:nvSpPr>
+        <p:spPr>
+          <a:xfrm>
+            <a:off x="6231636" y="1508760"/>
+            <a:ext cx="5408676" cy="3931920"/>
+          </a:xfrm>
+          <a:prstGeom prst="roundRect">
+            <a:avLst>
+              <a:gd name="adj" fmla="val 2326"/>
+            </a:avLst>
+          </a:prstGeom>
+          <a:solidFill>
+            <a:srgbClr val="1A5C2C"/>
+          </a:solidFill>
+          <a:ln w="12700">
+            <a:solidFill>
+              <a:srgbClr val="1A5C2C"/>
+            </a:solidFill>
+            <a:prstDash val="solid"/>
+          </a:ln>
+        </p:spPr>
+        <p:txBody>
+          <a:bodyPr/>
+          <a:lstStyle/>
+          <a:p>
+            <a:endParaRPr lang="en-ZA"/>
+          </a:p>
+        </p:txBody>
+      </p:sp>
+      <p:sp>
+        <p:nvSpPr>
+          <p:cNvPr id="9" name="Shape 6"/>
+          <p:cNvSpPr/>
+          <p:nvPr/>
+        </p:nvSpPr>
+        <p:spPr>
+          <a:xfrm>
+            <a:off x="6460236" y="1737360"/>
+            <a:ext cx="640080" cy="640080"/>
           </a:xfrm>
           <a:prstGeom prst="ellipse">
             <a:avLst/>
@@ -12173,22 +12414,22 @@
       </p:sp>
       <p:pic>
         <p:nvPicPr>
-          <p:cNvPr id="3" name="Image 0" descr="preencoded.png"/>
+          <p:cNvPr id="10" name="Image 1" descr="preencoded.png"/>
           <p:cNvPicPr>
             <a:picLocks noChangeAspect="1"/>
           </p:cNvPicPr>
           <p:nvPr/>
         </p:nvPicPr>
         <p:blipFill>
-          <a:blip r:embed="rId3"/>
+          <a:blip r:embed="rId4"/>
           <a:stretch>
             <a:fillRect/>
           </a:stretch>
         </p:blipFill>
         <p:spPr>
           <a:xfrm>
-            <a:off x="1005840" y="1188720"/>
-            <a:ext cx="548640" cy="548640"/>
+            <a:off x="6620256" y="1897380"/>
+            <a:ext cx="320040" cy="320040"/>
           </a:xfrm>
           <a:prstGeom prst="rect">
             <a:avLst/>
@@ -12197,14 +12438,14 @@
       </p:pic>
       <p:sp>
         <p:nvSpPr>
-          <p:cNvPr id="4" name="Text 1"/>
+          <p:cNvPr id="11" name="Text 7"/>
           <p:cNvSpPr txBox="1"/>
           <p:nvPr/>
         </p:nvSpPr>
         <p:spPr>
           <a:xfrm>
-            <a:off x="2103120" y="1097280"/>
-            <a:ext cx="9418320" cy="640080"/>
+            <a:off x="7283196" y="1691640"/>
+            <a:ext cx="4128516" cy="731520"/>
           </a:xfrm>
           <a:prstGeom prst="rect">
             <a:avLst/>
@@ -12213,7 +12454,7 @@
           <a:ln/>
         </p:spPr>
         <p:txBody>
-          <a:bodyPr wrap="square" lIns="0" tIns="0" rIns="0" bIns="0" rtlCol="0" anchor="t"/>
+          <a:bodyPr wrap="square" lIns="0" tIns="0" rIns="0" bIns="0" rtlCol="0" anchor="ctr"/>
           <a:lstStyle/>
           <a:p>
             <a:pPr marL="0" indent="0">
@@ -12221,45 +12462,6 @@
             </a:pPr>
             <a:r>
               <a:rPr lang="en-US" sz="2600" b="1" dirty="0">
-                <a:solidFill>
-                  <a:srgbClr val="C6A24C"/>
-                </a:solidFill>
-                <a:latin typeface="Calibri" pitchFamily="34" charset="0"/>
-                <a:ea typeface="Calibri" pitchFamily="34" charset="-122"/>
-                <a:cs typeface="Calibri" pitchFamily="34" charset="-120"/>
-              </a:rPr>
-              <a:t>4.1 · Worked Example: Stress-Testing a Key Result</a:t>
-            </a:r>
-            <a:endParaRPr lang="en-US" sz="2600" dirty="0"/>
-          </a:p>
-        </p:txBody>
-      </p:sp>
-      <p:sp>
-        <p:nvSpPr>
-          <p:cNvPr id="5" name="Text 2"/>
-          <p:cNvSpPr txBox="1"/>
-          <p:nvPr/>
-        </p:nvSpPr>
-        <p:spPr>
-          <a:xfrm>
-            <a:off x="2103120" y="1965960"/>
-            <a:ext cx="9418320" cy="2377440"/>
-          </a:xfrm>
-          <a:prstGeom prst="rect">
-            <a:avLst/>
-          </a:prstGeom>
-          <a:noFill/>
-          <a:ln/>
-        </p:spPr>
-        <p:txBody>
-          <a:bodyPr wrap="square" lIns="0" tIns="0" rIns="0" bIns="0" rtlCol="0" anchor="t"/>
-          <a:lstStyle/>
-          <a:p>
-            <a:pPr marL="0" indent="0">
-              <a:buNone/>
-            </a:pPr>
-            <a:r>
-              <a:rPr lang="en-US" sz="3600" i="1" dirty="0">
                 <a:solidFill>
                   <a:srgbClr val="FFFFFF"/>
                 </a:solidFill>
@@ -12267,22 +12469,22 @@
                 <a:ea typeface="Cambria" pitchFamily="34" charset="-122"/>
                 <a:cs typeface="Cambria" pitchFamily="34" charset="-120"/>
               </a:rPr>
-              <a:t>Reduce average response time to customer requests from 12 hours to 4 hours by 30 June 2027</a:t>
-            </a:r>
-            <a:endParaRPr lang="en-US" sz="3600" dirty="0"/>
-          </a:p>
-        </p:txBody>
-      </p:sp>
-      <p:sp>
-        <p:nvSpPr>
-          <p:cNvPr id="6" name="Text 3"/>
+              <a:t>2 · Find where it sits</a:t>
+            </a:r>
+            <a:endParaRPr lang="en-US" sz="2600" dirty="0"/>
+          </a:p>
+        </p:txBody>
+      </p:sp>
+      <p:sp>
+        <p:nvSpPr>
+          <p:cNvPr id="12" name="Text 8"/>
           <p:cNvSpPr txBox="1"/>
           <p:nvPr/>
         </p:nvSpPr>
         <p:spPr>
           <a:xfrm>
-            <a:off x="2103120" y="4526280"/>
-            <a:ext cx="9418320" cy="868680"/>
+            <a:off x="6460236" y="2560320"/>
+            <a:ext cx="4951476" cy="2743200"/>
           </a:xfrm>
           <a:prstGeom prst="rect">
             <a:avLst/>
@@ -12300,13 +12502,13 @@
             <a:r>
               <a:rPr lang="en-US" sz="2400" dirty="0">
                 <a:solidFill>
-                  <a:srgbClr val="E6D3A0"/>
+                  <a:srgbClr val="FFFFFF"/>
                 </a:solidFill>
                 <a:latin typeface="Calibri" pitchFamily="34" charset="0"/>
                 <a:ea typeface="Calibri" pitchFamily="34" charset="-122"/>
                 <a:cs typeface="Calibri" pitchFamily="34" charset="-120"/>
               </a:rPr>
-              <a:t>Objective: Deliver consistently fast and effortless service experiences for customers</a:t>
+              <a:t>Choose the ABCV checkpoint the illusion hid from leaders: Arena, Boundaries, Competition or Value Proposition.</a:t>
             </a:r>
             <a:endParaRPr lang="en-US" sz="2400" dirty="0"/>
           </a:p>
@@ -12314,14 +12516,48 @@
       </p:sp>
       <p:sp>
         <p:nvSpPr>
-          <p:cNvPr id="7" name="Text 4"/>
+          <p:cNvPr id="13" name="Shape 9"/>
+          <p:cNvSpPr/>
+          <p:nvPr/>
+        </p:nvSpPr>
+        <p:spPr>
+          <a:xfrm>
+            <a:off x="548640" y="5623560"/>
+            <a:ext cx="11091672" cy="777240"/>
+          </a:xfrm>
+          <a:prstGeom prst="roundRect">
+            <a:avLst>
+              <a:gd name="adj" fmla="val 11765"/>
+            </a:avLst>
+          </a:prstGeom>
+          <a:solidFill>
+            <a:srgbClr val="0F3B1C"/>
+          </a:solidFill>
+          <a:ln w="12700">
+            <a:solidFill>
+              <a:srgbClr val="0F3B1C"/>
+            </a:solidFill>
+            <a:prstDash val="solid"/>
+          </a:ln>
+        </p:spPr>
+        <p:txBody>
+          <a:bodyPr/>
+          <a:lstStyle/>
+          <a:p>
+            <a:endParaRPr lang="en-ZA"/>
+          </a:p>
+        </p:txBody>
+      </p:sp>
+      <p:sp>
+        <p:nvSpPr>
+          <p:cNvPr id="14" name="Text 10"/>
           <p:cNvSpPr txBox="1"/>
           <p:nvPr/>
         </p:nvSpPr>
         <p:spPr>
           <a:xfrm>
-            <a:off x="2103120" y="5760720"/>
-            <a:ext cx="9418320" cy="548640"/>
+            <a:off x="822960" y="5623560"/>
+            <a:ext cx="10607040" cy="777240"/>
           </a:xfrm>
           <a:prstGeom prst="rect">
             <a:avLst/>
@@ -12330,22 +12566,22 @@
           <a:ln/>
         </p:spPr>
         <p:txBody>
-          <a:bodyPr wrap="square" lIns="0" tIns="0" rIns="0" bIns="0" rtlCol="0" anchor="t"/>
+          <a:bodyPr wrap="square" lIns="0" tIns="0" rIns="0" bIns="0" rtlCol="0" anchor="ctr"/>
           <a:lstStyle/>
           <a:p>
             <a:pPr marL="0" indent="0">
               <a:buNone/>
             </a:pPr>
             <a:r>
-              <a:rPr lang="en-US" sz="2400" dirty="0">
+              <a:rPr lang="en-US" sz="2400" i="1" dirty="0">
                 <a:solidFill>
-                  <a:srgbClr val="DDE8DF"/>
+                  <a:srgbClr val="FFFFFF"/>
                 </a:solidFill>
                 <a:latin typeface="Calibri" pitchFamily="34" charset="0"/>
                 <a:ea typeface="Calibri" pitchFamily="34" charset="-122"/>
                 <a:cs typeface="Calibri" pitchFamily="34" charset="-120"/>
               </a:rPr>
-              <a:t>A client services company · from Unit 3, part 2.2</a:t>
+              <a:t>Four failed strategies. Defuse the mine before it detonates.</a:t>
             </a:r>
             <a:endParaRPr lang="en-US" sz="2400" dirty="0"/>
           </a:p>
@@ -12813,6 +13049,820 @@
 
 <file path=ppt/slides/slide20.xml><?xml version="1.0" encoding="utf-8"?>
 <p:sld xmlns:a="http://schemas.openxmlformats.org/drawingml/2006/main" xmlns:r="http://schemas.openxmlformats.org/officeDocument/2006/relationships" xmlns:p="http://schemas.openxmlformats.org/presentationml/2006/main">
+  <p:cSld>
+    <p:bg>
+      <p:bgPr>
+        <a:solidFill>
+          <a:srgbClr val="FFFFFF"/>
+        </a:solidFill>
+        <a:effectLst/>
+      </p:bgPr>
+    </p:bg>
+    <p:spTree>
+      <p:nvGrpSpPr>
+        <p:cNvPr id="1" name=""/>
+        <p:cNvGrpSpPr/>
+        <p:nvPr/>
+      </p:nvGrpSpPr>
+      <p:grpSpPr>
+        <a:xfrm>
+          <a:off x="0" y="0"/>
+          <a:ext cx="0" cy="0"/>
+          <a:chOff x="0" y="0"/>
+          <a:chExt cx="0" cy="0"/>
+        </a:xfrm>
+      </p:grpSpPr>
+      <p:sp>
+        <p:nvSpPr>
+          <p:cNvPr id="2" name="Text 0"/>
+          <p:cNvSpPr txBox="1"/>
+          <p:nvPr/>
+        </p:nvSpPr>
+        <p:spPr>
+          <a:xfrm>
+            <a:off x="548640" y="411480"/>
+            <a:ext cx="11064240" cy="868680"/>
+          </a:xfrm>
+          <a:prstGeom prst="rect">
+            <a:avLst/>
+          </a:prstGeom>
+          <a:noFill/>
+          <a:ln/>
+        </p:spPr>
+        <p:txBody>
+          <a:bodyPr wrap="square" lIns="0" tIns="0" rIns="0" bIns="0" rtlCol="0" anchor="ctr"/>
+          <a:lstStyle/>
+          <a:p>
+            <a:pPr marL="0" indent="0">
+              <a:buNone/>
+            </a:pPr>
+            <a:r>
+              <a:rPr lang="en-US" sz="3600" b="1" dirty="0">
+                <a:solidFill>
+                  <a:srgbClr val="1A5C2C"/>
+                </a:solidFill>
+                <a:latin typeface="Cambria" pitchFamily="34" charset="0"/>
+                <a:ea typeface="Cambria" pitchFamily="34" charset="-122"/>
+                <a:cs typeface="Cambria" pitchFamily="34" charset="-120"/>
+              </a:rPr>
+              <a:t>Section 4 Reflections</a:t>
+            </a:r>
+            <a:endParaRPr lang="en-US" sz="3600" dirty="0"/>
+          </a:p>
+        </p:txBody>
+      </p:sp>
+      <p:pic>
+        <p:nvPicPr>
+          <p:cNvPr id="3" name="Reflection 5" descr="Closing Commitment: What is one MBT condition your organisation is currently avoiding naming? Why? What will you do about it before your next strategic review?"/>
+          <p:cNvPicPr>
+            <a:picLocks noChangeAspect="1"/>
+          </p:cNvPicPr>
+          <p:nvPr/>
+        </p:nvPicPr>
+        <p:blipFill>
+          <a:blip r:embed="rId3"/>
+          <a:stretch>
+            <a:fillRect/>
+          </a:stretch>
+        </p:blipFill>
+        <p:spPr>
+          <a:xfrm>
+            <a:off x="1691640" y="1572768"/>
+            <a:ext cx="9921240" cy="890368"/>
+          </a:xfrm>
+          <a:prstGeom prst="rect">
+            <a:avLst/>
+          </a:prstGeom>
+        </p:spPr>
+      </p:pic>
+      <p:sp>
+        <p:nvSpPr>
+          <p:cNvPr id="4" name="Part 5"/>
+          <p:cNvSpPr/>
+          <p:nvPr/>
+        </p:nvSpPr>
+        <p:spPr>
+          <a:xfrm>
+            <a:off x="548640" y="1583611"/>
+            <a:ext cx="868680" cy="868680"/>
+          </a:xfrm>
+          <a:prstGeom prst="ellipse">
+            <a:avLst/>
+          </a:prstGeom>
+          <a:solidFill>
+            <a:srgbClr val="C6A24C"/>
+          </a:solidFill>
+          <a:ln>
+            <a:solidFill>
+              <a:srgbClr val="C6A24C"/>
+            </a:solidFill>
+          </a:ln>
+          <a:effectLst/>
+        </p:spPr>
+        <p:style>
+          <a:lnRef idx="1">
+            <a:schemeClr val="accent1"/>
+          </a:lnRef>
+          <a:fillRef idx="3">
+            <a:schemeClr val="accent1"/>
+          </a:fillRef>
+          <a:effectRef idx="2">
+            <a:schemeClr val="accent1"/>
+          </a:effectRef>
+          <a:fontRef idx="minor">
+            <a:schemeClr val="lt1"/>
+          </a:fontRef>
+        </p:style>
+        <p:txBody>
+          <a:bodyPr wrap="none" lIns="0" tIns="0" rIns="0" bIns="0" rtlCol="0" anchor="ctr"/>
+          <a:lstStyle/>
+          <a:p>
+            <a:pPr algn="ctr"/>
+            <a:r>
+              <a:rPr sz="2400" b="1">
+                <a:solidFill>
+                  <a:srgbClr val="FFFFFF"/>
+                </a:solidFill>
+                <a:latin typeface="Calibri"/>
+              </a:rPr>
+              <a:t>4</a:t>
+            </a:r>
+          </a:p>
+        </p:txBody>
+      </p:sp>
+    </p:spTree>
+  </p:cSld>
+  <p:clrMapOvr>
+    <a:masterClrMapping/>
+  </p:clrMapOvr>
+</p:sld>
+</file>
+
+<file path=ppt/slides/slide21.xml><?xml version="1.0" encoding="utf-8"?>
+<p:sld xmlns:a="http://schemas.openxmlformats.org/drawingml/2006/main" xmlns:r="http://schemas.openxmlformats.org/officeDocument/2006/relationships" xmlns:p="http://schemas.openxmlformats.org/presentationml/2006/main">
+  <p:cSld name="Slide 23">
+    <p:bg>
+      <p:bgPr>
+        <a:solidFill>
+          <a:srgbClr val="1A5C2C"/>
+        </a:solidFill>
+        <a:effectLst/>
+      </p:bgPr>
+    </p:bg>
+    <p:spTree>
+      <p:nvGrpSpPr>
+        <p:cNvPr id="1" name=""/>
+        <p:cNvGrpSpPr/>
+        <p:nvPr/>
+      </p:nvGrpSpPr>
+      <p:grpSpPr>
+        <a:xfrm>
+          <a:off x="0" y="0"/>
+          <a:ext cx="0" cy="0"/>
+          <a:chOff x="0" y="0"/>
+          <a:chExt cx="0" cy="0"/>
+        </a:xfrm>
+      </p:grpSpPr>
+      <p:sp>
+        <p:nvSpPr>
+          <p:cNvPr id="2" name="Text 0"/>
+          <p:cNvSpPr txBox="1"/>
+          <p:nvPr/>
+        </p:nvSpPr>
+        <p:spPr>
+          <a:xfrm>
+            <a:off x="457200" y="822960"/>
+            <a:ext cx="2103120" cy="2194560"/>
+          </a:xfrm>
+          <a:prstGeom prst="rect">
+            <a:avLst/>
+          </a:prstGeom>
+          <a:noFill/>
+          <a:ln/>
+        </p:spPr>
+        <p:txBody>
+          <a:bodyPr wrap="square" lIns="0" tIns="0" rIns="0" bIns="0" rtlCol="0" anchor="t"/>
+          <a:lstStyle/>
+          <a:p>
+            <a:pPr marL="0" indent="0">
+              <a:buNone/>
+            </a:pPr>
+            <a:r>
+              <a:rPr lang="en-US" sz="15000" b="1" dirty="0">
+                <a:solidFill>
+                  <a:srgbClr val="C6A24C"/>
+                </a:solidFill>
+                <a:latin typeface="Cambria" pitchFamily="34" charset="0"/>
+                <a:ea typeface="Cambria" pitchFamily="34" charset="-122"/>
+                <a:cs typeface="Cambria" pitchFamily="34" charset="-120"/>
+              </a:rPr>
+              <a:t>5</a:t>
+            </a:r>
+            <a:endParaRPr lang="en-US" sz="15000" dirty="0"/>
+          </a:p>
+        </p:txBody>
+      </p:sp>
+      <p:sp>
+        <p:nvSpPr>
+          <p:cNvPr id="3" name="Text 1"/>
+          <p:cNvSpPr txBox="1"/>
+          <p:nvPr/>
+        </p:nvSpPr>
+        <p:spPr>
+          <a:xfrm>
+            <a:off x="2743200" y="914400"/>
+            <a:ext cx="8229600" cy="457200"/>
+          </a:xfrm>
+          <a:prstGeom prst="rect">
+            <a:avLst/>
+          </a:prstGeom>
+          <a:noFill/>
+          <a:ln/>
+        </p:spPr>
+        <p:txBody>
+          <a:bodyPr wrap="square" lIns="0" tIns="0" rIns="0" bIns="0" rtlCol="0" anchor="t"/>
+          <a:lstStyle/>
+          <a:p>
+            <a:pPr marL="0" indent="0">
+              <a:buNone/>
+            </a:pPr>
+            <a:r>
+              <a:rPr lang="en-US" sz="2400" b="1" dirty="0">
+                <a:solidFill>
+                  <a:srgbClr val="E6D3A0"/>
+                </a:solidFill>
+                <a:latin typeface="Calibri" pitchFamily="34" charset="0"/>
+                <a:ea typeface="Calibri" pitchFamily="34" charset="-122"/>
+                <a:cs typeface="Calibri" pitchFamily="34" charset="-120"/>
+              </a:rPr>
+              <a:t>Section 5</a:t>
+            </a:r>
+            <a:endParaRPr lang="en-US" sz="2400" dirty="0"/>
+          </a:p>
+        </p:txBody>
+      </p:sp>
+      <p:sp>
+        <p:nvSpPr>
+          <p:cNvPr id="4" name="Text 2"/>
+          <p:cNvSpPr txBox="1"/>
+          <p:nvPr/>
+        </p:nvSpPr>
+        <p:spPr>
+          <a:xfrm>
+            <a:off x="2743200" y="1371600"/>
+            <a:ext cx="8961120" cy="868680"/>
+          </a:xfrm>
+          <a:prstGeom prst="rect">
+            <a:avLst/>
+          </a:prstGeom>
+          <a:noFill/>
+          <a:ln/>
+        </p:spPr>
+        <p:txBody>
+          <a:bodyPr wrap="square" lIns="0" tIns="0" rIns="0" bIns="0" rtlCol="0" anchor="t"/>
+          <a:lstStyle/>
+          <a:p>
+            <a:pPr marL="0" indent="0">
+              <a:buNone/>
+            </a:pPr>
+            <a:r>
+              <a:rPr lang="en-US" sz="4400" b="1" dirty="0">
+                <a:solidFill>
+                  <a:srgbClr val="FFFFFF"/>
+                </a:solidFill>
+                <a:latin typeface="Cambria" pitchFamily="34" charset="0"/>
+                <a:ea typeface="Cambria" pitchFamily="34" charset="-122"/>
+                <a:cs typeface="Cambria" pitchFamily="34" charset="-120"/>
+              </a:rPr>
+              <a:t>Application — In Practice</a:t>
+            </a:r>
+            <a:endParaRPr lang="en-US" sz="4400" dirty="0"/>
+          </a:p>
+        </p:txBody>
+      </p:sp>
+      <p:sp>
+        <p:nvSpPr>
+          <p:cNvPr id="5" name="Text 3"/>
+          <p:cNvSpPr txBox="1"/>
+          <p:nvPr/>
+        </p:nvSpPr>
+        <p:spPr>
+          <a:xfrm>
+            <a:off x="2743200" y="2240280"/>
+            <a:ext cx="8961120" cy="868680"/>
+          </a:xfrm>
+          <a:prstGeom prst="rect">
+            <a:avLst/>
+          </a:prstGeom>
+          <a:noFill/>
+          <a:ln/>
+        </p:spPr>
+        <p:txBody>
+          <a:bodyPr wrap="square" lIns="0" tIns="0" rIns="0" bIns="0" rtlCol="0" anchor="t"/>
+          <a:lstStyle/>
+          <a:p>
+            <a:pPr marL="0" indent="0">
+              <a:buNone/>
+            </a:pPr>
+            <a:r>
+              <a:rPr lang="en-US" sz="2600" i="1" dirty="0">
+                <a:solidFill>
+                  <a:srgbClr val="DDE8DF"/>
+                </a:solidFill>
+                <a:latin typeface="Calibri" pitchFamily="34" charset="0"/>
+                <a:ea typeface="Calibri" pitchFamily="34" charset="-122"/>
+                <a:cs typeface="Calibri" pitchFamily="34" charset="-120"/>
+              </a:rPr>
+              <a:t>ABCV–MBT Working Papers</a:t>
+            </a:r>
+            <a:endParaRPr lang="en-US" sz="2600" dirty="0"/>
+          </a:p>
+        </p:txBody>
+      </p:sp>
+      <p:sp>
+        <p:nvSpPr>
+          <p:cNvPr id="6" name="Text 4"/>
+          <p:cNvSpPr txBox="1"/>
+          <p:nvPr/>
+        </p:nvSpPr>
+        <p:spPr>
+          <a:xfrm>
+            <a:off x="2743200" y="3246120"/>
+            <a:ext cx="8229600" cy="457200"/>
+          </a:xfrm>
+          <a:prstGeom prst="rect">
+            <a:avLst/>
+          </a:prstGeom>
+          <a:noFill/>
+          <a:ln/>
+        </p:spPr>
+        <p:txBody>
+          <a:bodyPr wrap="square" lIns="0" tIns="0" rIns="0" bIns="0" rtlCol="0" anchor="t"/>
+          <a:lstStyle/>
+          <a:p>
+            <a:pPr marL="0" indent="0">
+              <a:buNone/>
+            </a:pPr>
+            <a:r>
+              <a:rPr lang="en-US" sz="2400" b="1" dirty="0">
+                <a:solidFill>
+                  <a:srgbClr val="C6A24C"/>
+                </a:solidFill>
+                <a:latin typeface="Calibri" pitchFamily="34" charset="0"/>
+                <a:ea typeface="Calibri" pitchFamily="34" charset="-122"/>
+                <a:cs typeface="Calibri" pitchFamily="34" charset="-120"/>
+              </a:rPr>
+              <a:t>Section learning outcomes</a:t>
+            </a:r>
+            <a:endParaRPr lang="en-US" sz="2400" dirty="0"/>
+          </a:p>
+        </p:txBody>
+      </p:sp>
+      <p:sp>
+        <p:nvSpPr>
+          <p:cNvPr id="7" name="Shape 5"/>
+          <p:cNvSpPr/>
+          <p:nvPr/>
+        </p:nvSpPr>
+        <p:spPr>
+          <a:xfrm>
+            <a:off x="2743200" y="3822192"/>
+            <a:ext cx="384048" cy="384048"/>
+          </a:xfrm>
+          <a:prstGeom prst="ellipse">
+            <a:avLst/>
+          </a:prstGeom>
+          <a:solidFill>
+            <a:srgbClr val="C6A24C"/>
+          </a:solidFill>
+          <a:ln w="12700">
+            <a:solidFill>
+              <a:srgbClr val="C6A24C"/>
+            </a:solidFill>
+            <a:prstDash val="solid"/>
+          </a:ln>
+        </p:spPr>
+        <p:txBody>
+          <a:bodyPr/>
+          <a:lstStyle/>
+          <a:p>
+            <a:endParaRPr lang="en-ZA"/>
+          </a:p>
+        </p:txBody>
+      </p:sp>
+      <p:pic>
+        <p:nvPicPr>
+          <p:cNvPr id="8" name="Image 0" descr="preencoded.png"/>
+          <p:cNvPicPr>
+            <a:picLocks noChangeAspect="1"/>
+          </p:cNvPicPr>
+          <p:nvPr/>
+        </p:nvPicPr>
+        <p:blipFill>
+          <a:blip r:embed="rId3"/>
+          <a:stretch>
+            <a:fillRect/>
+          </a:stretch>
+        </p:blipFill>
+        <p:spPr>
+          <a:xfrm>
+            <a:off x="2839212" y="3918204"/>
+            <a:ext cx="192024" cy="192024"/>
+          </a:xfrm>
+          <a:prstGeom prst="rect">
+            <a:avLst/>
+          </a:prstGeom>
+        </p:spPr>
+      </p:pic>
+      <p:sp>
+        <p:nvSpPr>
+          <p:cNvPr id="9" name="Text 6"/>
+          <p:cNvSpPr txBox="1"/>
+          <p:nvPr/>
+        </p:nvSpPr>
+        <p:spPr>
+          <a:xfrm>
+            <a:off x="3291840" y="3749040"/>
+            <a:ext cx="8412480" cy="1097280"/>
+          </a:xfrm>
+          <a:prstGeom prst="rect">
+            <a:avLst/>
+          </a:prstGeom>
+          <a:noFill/>
+          <a:ln/>
+        </p:spPr>
+        <p:txBody>
+          <a:bodyPr wrap="square" lIns="0" tIns="0" rIns="0" bIns="0" rtlCol="0" anchor="t"/>
+          <a:lstStyle/>
+          <a:p>
+            <a:pPr marL="0" indent="0">
+              <a:buNone/>
+            </a:pPr>
+            <a:r>
+              <a:rPr lang="en-US" sz="2400" dirty="0">
+                <a:solidFill>
+                  <a:srgbClr val="FFFFFF"/>
+                </a:solidFill>
+                <a:latin typeface="Calibri" pitchFamily="34" charset="0"/>
+                <a:ea typeface="Calibri" pitchFamily="34" charset="-122"/>
+                <a:cs typeface="Calibri" pitchFamily="34" charset="-120"/>
+              </a:rPr>
+              <a:t>Appraise the assumptions, dependencies and uncertainties behind the organisation’s strategic objectives.</a:t>
+            </a:r>
+            <a:endParaRPr lang="en-US" sz="2400" dirty="0"/>
+          </a:p>
+        </p:txBody>
+      </p:sp>
+      <p:sp>
+        <p:nvSpPr>
+          <p:cNvPr id="10" name="Shape 7"/>
+          <p:cNvSpPr/>
+          <p:nvPr/>
+        </p:nvSpPr>
+        <p:spPr>
+          <a:xfrm>
+            <a:off x="2743200" y="5010912"/>
+            <a:ext cx="384048" cy="384048"/>
+          </a:xfrm>
+          <a:prstGeom prst="ellipse">
+            <a:avLst/>
+          </a:prstGeom>
+          <a:solidFill>
+            <a:srgbClr val="C6A24C"/>
+          </a:solidFill>
+          <a:ln w="12700">
+            <a:solidFill>
+              <a:srgbClr val="C6A24C"/>
+            </a:solidFill>
+            <a:prstDash val="solid"/>
+          </a:ln>
+        </p:spPr>
+        <p:txBody>
+          <a:bodyPr/>
+          <a:lstStyle/>
+          <a:p>
+            <a:endParaRPr lang="en-ZA"/>
+          </a:p>
+        </p:txBody>
+      </p:sp>
+      <p:pic>
+        <p:nvPicPr>
+          <p:cNvPr id="11" name="Image 1" descr="preencoded.png"/>
+          <p:cNvPicPr>
+            <a:picLocks noChangeAspect="1"/>
+          </p:cNvPicPr>
+          <p:nvPr/>
+        </p:nvPicPr>
+        <p:blipFill>
+          <a:blip r:embed="rId3"/>
+          <a:stretch>
+            <a:fillRect/>
+          </a:stretch>
+        </p:blipFill>
+        <p:spPr>
+          <a:xfrm>
+            <a:off x="2839212" y="5106924"/>
+            <a:ext cx="192024" cy="192024"/>
+          </a:xfrm>
+          <a:prstGeom prst="rect">
+            <a:avLst/>
+          </a:prstGeom>
+        </p:spPr>
+      </p:pic>
+      <p:sp>
+        <p:nvSpPr>
+          <p:cNvPr id="12" name="Text 8"/>
+          <p:cNvSpPr txBox="1"/>
+          <p:nvPr/>
+        </p:nvSpPr>
+        <p:spPr>
+          <a:xfrm>
+            <a:off x="3291840" y="4937760"/>
+            <a:ext cx="8412480" cy="1097280"/>
+          </a:xfrm>
+          <a:prstGeom prst="rect">
+            <a:avLst/>
+          </a:prstGeom>
+          <a:noFill/>
+          <a:ln/>
+        </p:spPr>
+        <p:txBody>
+          <a:bodyPr wrap="square" lIns="0" tIns="0" rIns="0" bIns="0" rtlCol="0" anchor="t"/>
+          <a:lstStyle/>
+          <a:p>
+            <a:pPr marL="0" indent="0">
+              <a:buNone/>
+            </a:pPr>
+            <a:r>
+              <a:rPr lang="en-US" sz="2400" dirty="0">
+                <a:solidFill>
+                  <a:srgbClr val="FFFFFF"/>
+                </a:solidFill>
+                <a:latin typeface="Calibri" pitchFamily="34" charset="0"/>
+                <a:ea typeface="Calibri" pitchFamily="34" charset="-122"/>
+                <a:cs typeface="Calibri" pitchFamily="34" charset="-120"/>
+              </a:rPr>
+              <a:t>Demonstrate collective accountability by assigning ownership for verifying critical conditions.</a:t>
+            </a:r>
+            <a:endParaRPr lang="en-US" sz="2400" dirty="0"/>
+          </a:p>
+        </p:txBody>
+      </p:sp>
+    </p:spTree>
+  </p:cSld>
+  <p:clrMapOvr>
+    <a:masterClrMapping/>
+  </p:clrMapOvr>
+</p:sld>
+</file>
+
+<file path=ppt/slides/slide22.xml><?xml version="1.0" encoding="utf-8"?>
+<p:sld xmlns:a="http://schemas.openxmlformats.org/drawingml/2006/main" xmlns:r="http://schemas.openxmlformats.org/officeDocument/2006/relationships" xmlns:p="http://schemas.openxmlformats.org/presentationml/2006/main">
+  <p:cSld name="Slide 24">
+    <p:bg>
+      <p:bgPr>
+        <a:solidFill>
+          <a:srgbClr val="0F3B1C"/>
+        </a:solidFill>
+        <a:effectLst/>
+      </p:bgPr>
+    </p:bg>
+    <p:spTree>
+      <p:nvGrpSpPr>
+        <p:cNvPr id="1" name=""/>
+        <p:cNvGrpSpPr/>
+        <p:nvPr/>
+      </p:nvGrpSpPr>
+      <p:grpSpPr>
+        <a:xfrm>
+          <a:off x="0" y="0"/>
+          <a:ext cx="0" cy="0"/>
+          <a:chOff x="0" y="0"/>
+          <a:chExt cx="0" cy="0"/>
+        </a:xfrm>
+      </p:grpSpPr>
+      <p:sp>
+        <p:nvSpPr>
+          <p:cNvPr id="2" name="Shape 0"/>
+          <p:cNvSpPr/>
+          <p:nvPr/>
+        </p:nvSpPr>
+        <p:spPr>
+          <a:xfrm>
+            <a:off x="731520" y="914400"/>
+            <a:ext cx="1097280" cy="1097280"/>
+          </a:xfrm>
+          <a:prstGeom prst="ellipse">
+            <a:avLst/>
+          </a:prstGeom>
+          <a:solidFill>
+            <a:srgbClr val="C6A24C"/>
+          </a:solidFill>
+          <a:ln w="12700">
+            <a:solidFill>
+              <a:srgbClr val="C6A24C"/>
+            </a:solidFill>
+            <a:prstDash val="solid"/>
+          </a:ln>
+        </p:spPr>
+        <p:txBody>
+          <a:bodyPr/>
+          <a:lstStyle/>
+          <a:p>
+            <a:endParaRPr lang="en-ZA"/>
+          </a:p>
+        </p:txBody>
+      </p:sp>
+      <p:pic>
+        <p:nvPicPr>
+          <p:cNvPr id="3" name="Image 0" descr="preencoded.png"/>
+          <p:cNvPicPr>
+            <a:picLocks noChangeAspect="1"/>
+          </p:cNvPicPr>
+          <p:nvPr/>
+        </p:nvPicPr>
+        <p:blipFill>
+          <a:blip r:embed="rId3"/>
+          <a:stretch>
+            <a:fillRect/>
+          </a:stretch>
+        </p:blipFill>
+        <p:spPr>
+          <a:xfrm>
+            <a:off x="1005840" y="1188720"/>
+            <a:ext cx="548640" cy="548640"/>
+          </a:xfrm>
+          <a:prstGeom prst="rect">
+            <a:avLst/>
+          </a:prstGeom>
+        </p:spPr>
+      </p:pic>
+      <p:sp>
+        <p:nvSpPr>
+          <p:cNvPr id="4" name="Text 1"/>
+          <p:cNvSpPr txBox="1"/>
+          <p:nvPr/>
+        </p:nvSpPr>
+        <p:spPr>
+          <a:xfrm>
+            <a:off x="2103120" y="1097280"/>
+            <a:ext cx="9418320" cy="640080"/>
+          </a:xfrm>
+          <a:prstGeom prst="rect">
+            <a:avLst/>
+          </a:prstGeom>
+          <a:noFill/>
+          <a:ln/>
+        </p:spPr>
+        <p:txBody>
+          <a:bodyPr wrap="square" lIns="0" tIns="0" rIns="0" bIns="0" rtlCol="0" anchor="t"/>
+          <a:lstStyle/>
+          <a:p>
+            <a:pPr marL="0" indent="0">
+              <a:buNone/>
+            </a:pPr>
+            <a:r>
+              <a:rPr lang="en-US" sz="2600" b="1" dirty="0">
+                <a:solidFill>
+                  <a:srgbClr val="C6A24C"/>
+                </a:solidFill>
+                <a:latin typeface="Calibri" pitchFamily="34" charset="0"/>
+                <a:ea typeface="Calibri" pitchFamily="34" charset="-122"/>
+                <a:cs typeface="Calibri" pitchFamily="34" charset="-120"/>
+              </a:rPr>
+              <a:t>5.1 · Worked Example: Stress-Testing a Key Result</a:t>
+            </a:r>
+            <a:endParaRPr lang="en-US" sz="2600" dirty="0"/>
+          </a:p>
+        </p:txBody>
+      </p:sp>
+      <p:sp>
+        <p:nvSpPr>
+          <p:cNvPr id="5" name="Text 2"/>
+          <p:cNvSpPr txBox="1"/>
+          <p:nvPr/>
+        </p:nvSpPr>
+        <p:spPr>
+          <a:xfrm>
+            <a:off x="2103120" y="1965960"/>
+            <a:ext cx="9418320" cy="2377440"/>
+          </a:xfrm>
+          <a:prstGeom prst="rect">
+            <a:avLst/>
+          </a:prstGeom>
+          <a:noFill/>
+          <a:ln/>
+        </p:spPr>
+        <p:txBody>
+          <a:bodyPr wrap="square" lIns="0" tIns="0" rIns="0" bIns="0" rtlCol="0" anchor="t"/>
+          <a:lstStyle/>
+          <a:p>
+            <a:pPr marL="0" indent="0">
+              <a:buNone/>
+            </a:pPr>
+            <a:r>
+              <a:rPr lang="en-US" sz="3600" i="1" dirty="0">
+                <a:solidFill>
+                  <a:srgbClr val="FFFFFF"/>
+                </a:solidFill>
+                <a:latin typeface="Cambria" pitchFamily="34" charset="0"/>
+                <a:ea typeface="Cambria" pitchFamily="34" charset="-122"/>
+                <a:cs typeface="Cambria" pitchFamily="34" charset="-120"/>
+              </a:rPr>
+              <a:t>Reduce average response time to customer requests from 12 hours to 4 hours by 30 June 2027</a:t>
+            </a:r>
+            <a:endParaRPr lang="en-US" sz="3600" dirty="0"/>
+          </a:p>
+        </p:txBody>
+      </p:sp>
+      <p:sp>
+        <p:nvSpPr>
+          <p:cNvPr id="6" name="Text 3"/>
+          <p:cNvSpPr txBox="1"/>
+          <p:nvPr/>
+        </p:nvSpPr>
+        <p:spPr>
+          <a:xfrm>
+            <a:off x="2103120" y="4526280"/>
+            <a:ext cx="9418320" cy="868680"/>
+          </a:xfrm>
+          <a:prstGeom prst="rect">
+            <a:avLst/>
+          </a:prstGeom>
+          <a:noFill/>
+          <a:ln/>
+        </p:spPr>
+        <p:txBody>
+          <a:bodyPr wrap="square" lIns="0" tIns="0" rIns="0" bIns="0" rtlCol="0" anchor="t"/>
+          <a:lstStyle/>
+          <a:p>
+            <a:pPr marL="0" indent="0">
+              <a:buNone/>
+            </a:pPr>
+            <a:r>
+              <a:rPr lang="en-US" sz="2400" dirty="0">
+                <a:solidFill>
+                  <a:srgbClr val="E6D3A0"/>
+                </a:solidFill>
+                <a:latin typeface="Calibri" pitchFamily="34" charset="0"/>
+                <a:ea typeface="Calibri" pitchFamily="34" charset="-122"/>
+                <a:cs typeface="Calibri" pitchFamily="34" charset="-120"/>
+              </a:rPr>
+              <a:t>Objective: Deliver consistently fast and effortless service experiences for customers</a:t>
+            </a:r>
+            <a:endParaRPr lang="en-US" sz="2400" dirty="0"/>
+          </a:p>
+        </p:txBody>
+      </p:sp>
+      <p:sp>
+        <p:nvSpPr>
+          <p:cNvPr id="7" name="Text 4"/>
+          <p:cNvSpPr txBox="1"/>
+          <p:nvPr/>
+        </p:nvSpPr>
+        <p:spPr>
+          <a:xfrm>
+            <a:off x="2103120" y="5760720"/>
+            <a:ext cx="9418320" cy="548640"/>
+          </a:xfrm>
+          <a:prstGeom prst="rect">
+            <a:avLst/>
+          </a:prstGeom>
+          <a:noFill/>
+          <a:ln/>
+        </p:spPr>
+        <p:txBody>
+          <a:bodyPr wrap="square" lIns="0" tIns="0" rIns="0" bIns="0" rtlCol="0" anchor="t"/>
+          <a:lstStyle/>
+          <a:p>
+            <a:pPr marL="0" indent="0">
+              <a:buNone/>
+            </a:pPr>
+            <a:r>
+              <a:rPr lang="en-US" sz="2400" dirty="0">
+                <a:solidFill>
+                  <a:srgbClr val="DDE8DF"/>
+                </a:solidFill>
+                <a:latin typeface="Calibri" pitchFamily="34" charset="0"/>
+                <a:ea typeface="Calibri" pitchFamily="34" charset="-122"/>
+                <a:cs typeface="Calibri" pitchFamily="34" charset="-120"/>
+              </a:rPr>
+              <a:t>A client services company · from Unit 3, part 2.2</a:t>
+            </a:r>
+            <a:endParaRPr lang="en-US" sz="2400" dirty="0"/>
+          </a:p>
+        </p:txBody>
+      </p:sp>
+    </p:spTree>
+  </p:cSld>
+  <p:clrMapOvr>
+    <a:masterClrMapping/>
+  </p:clrMapOvr>
+</p:sld>
+</file>
+
+<file path=ppt/slides/slide23.xml><?xml version="1.0" encoding="utf-8"?>
+<p:sld xmlns:a="http://schemas.openxmlformats.org/drawingml/2006/main" xmlns:r="http://schemas.openxmlformats.org/officeDocument/2006/relationships" xmlns:p="http://schemas.openxmlformats.org/presentationml/2006/main">
   <p:cSld name="Slide 25">
     <p:bg>
       <p:bgPr>
@@ -12869,7 +13919,7 @@
                 <a:ea typeface="Cambria" pitchFamily="34" charset="-122"/>
                 <a:cs typeface="Cambria" pitchFamily="34" charset="-120"/>
               </a:rPr>
-              <a:t>4.1 · Step 1: Define the Arena</a:t>
+              <a:t>5.1 · Step 1: Define the Arena</a:t>
             </a:r>
             <a:endParaRPr lang="en-US" sz="3600" dirty="0"/>
           </a:p>
@@ -13155,7 +14205,7 @@
 </p:sld>
 </file>
 
-<file path=ppt/slides/slide21.xml><?xml version="1.0" encoding="utf-8"?>
+<file path=ppt/slides/slide24.xml><?xml version="1.0" encoding="utf-8"?>
 <p:sld xmlns:a="http://schemas.openxmlformats.org/drawingml/2006/main" xmlns:r="http://schemas.openxmlformats.org/officeDocument/2006/relationships" xmlns:p="http://schemas.openxmlformats.org/presentationml/2006/main">
   <p:cSld name="Slide 26">
     <p:bg>
@@ -13213,7 +14263,7 @@
                 <a:ea typeface="Cambria" pitchFamily="34" charset="-122"/>
                 <a:cs typeface="Cambria" pitchFamily="34" charset="-120"/>
               </a:rPr>
-              <a:t>4.1 · Step 2: Understand the Boundaries</a:t>
+              <a:t>5.1 · Step 2: Understand the Boundaries</a:t>
             </a:r>
             <a:endParaRPr lang="en-US" sz="3600" dirty="0"/>
           </a:p>
@@ -13490,7 +14540,7 @@
 </p:sld>
 </file>
 
-<file path=ppt/slides/slide22.xml><?xml version="1.0" encoding="utf-8"?>
+<file path=ppt/slides/slide25.xml><?xml version="1.0" encoding="utf-8"?>
 <p:sld xmlns:a="http://schemas.openxmlformats.org/drawingml/2006/main" xmlns:r="http://schemas.openxmlformats.org/officeDocument/2006/relationships" xmlns:p="http://schemas.openxmlformats.org/presentationml/2006/main">
   <p:cSld name="Slide 27">
     <p:bg>
@@ -13548,7 +14598,7 @@
                 <a:ea typeface="Cambria" pitchFamily="34" charset="-122"/>
                 <a:cs typeface="Cambria" pitchFamily="34" charset="-120"/>
               </a:rPr>
-              <a:t>4.1 · Step 3: See the Competition</a:t>
+              <a:t>5.1 · Step 3: See the Competition</a:t>
             </a:r>
             <a:endParaRPr lang="en-US" sz="3600" dirty="0"/>
           </a:p>
@@ -13846,7 +14896,7 @@
 </p:sld>
 </file>
 
-<file path=ppt/slides/slide23.xml><?xml version="1.0" encoding="utf-8"?>
+<file path=ppt/slides/slide26.xml><?xml version="1.0" encoding="utf-8"?>
 <p:sld xmlns:a="http://schemas.openxmlformats.org/drawingml/2006/main" xmlns:r="http://schemas.openxmlformats.org/officeDocument/2006/relationships" xmlns:p="http://schemas.openxmlformats.org/presentationml/2006/main">
   <p:cSld name="Slide 28">
     <p:bg>
@@ -13904,7 +14954,7 @@
                 <a:ea typeface="Cambria" pitchFamily="34" charset="-122"/>
                 <a:cs typeface="Cambria" pitchFamily="34" charset="-120"/>
               </a:rPr>
-              <a:t>4.1 · Step 4: Establish the Value Proposition</a:t>
+              <a:t>5.1 · Step 4: Establish the Value Proposition</a:t>
             </a:r>
             <a:endParaRPr lang="en-US" sz="3600" dirty="0"/>
           </a:p>
@@ -14190,7 +15240,7 @@
 </p:sld>
 </file>
 
-<file path=ppt/slides/slide24.xml><?xml version="1.0" encoding="utf-8"?>
+<file path=ppt/slides/slide27.xml><?xml version="1.0" encoding="utf-8"?>
 <p:sld xmlns:a="http://schemas.openxmlformats.org/drawingml/2006/main" xmlns:r="http://schemas.openxmlformats.org/officeDocument/2006/relationships" xmlns:p="http://schemas.openxmlformats.org/presentationml/2006/main">
   <p:cSld name="Slide 29">
     <p:bg>
@@ -14248,7 +15298,7 @@
                 <a:ea typeface="Cambria" pitchFamily="34" charset="-122"/>
                 <a:cs typeface="Cambria" pitchFamily="34" charset="-120"/>
               </a:rPr>
-              <a:t>4.1 · Four Steps, Four Conditions</a:t>
+              <a:t>5.1 · Four Steps, Four Conditions</a:t>
             </a:r>
             <a:endParaRPr lang="en-US" sz="3600" dirty="0"/>
           </a:p>
@@ -14759,7 +15809,7 @@
 </p:sld>
 </file>
 
-<file path=ppt/slides/slide25.xml><?xml version="1.0" encoding="utf-8"?>
+<file path=ppt/slides/slide28.xml><?xml version="1.0" encoding="utf-8"?>
 <p:sld xmlns:a="http://schemas.openxmlformats.org/drawingml/2006/main" xmlns:r="http://schemas.openxmlformats.org/officeDocument/2006/relationships" xmlns:p="http://schemas.openxmlformats.org/presentationml/2006/main">
   <p:cSld name="Slide 31">
     <p:bg>
@@ -14817,7 +15867,7 @@
                 <a:ea typeface="Cambria" pitchFamily="34" charset="-122"/>
                 <a:cs typeface="Cambria" pitchFamily="34" charset="-120"/>
               </a:rPr>
-              <a:t>4.2b · Stress Test Your Key Results: the Four Steps</a:t>
+              <a:t>5.2b · Stress Test Your Key Results: the Four Steps</a:t>
             </a:r>
             <a:endParaRPr lang="en-US" sz="3600" dirty="0"/>
           </a:p>
@@ -15317,1056 +16367,6 @@
               <a:t>At each step, name what Must Be True.</a:t>
             </a:r>
             <a:endParaRPr lang="en-US" sz="2400" dirty="0"/>
-          </a:p>
-        </p:txBody>
-      </p:sp>
-    </p:spTree>
-  </p:cSld>
-  <p:clrMapOvr>
-    <a:masterClrMapping/>
-  </p:clrMapOvr>
-</p:sld>
-</file>
-
-<file path=ppt/slides/slide26.xml><?xml version="1.0" encoding="utf-8"?>
-<p:sld xmlns:a="http://schemas.openxmlformats.org/drawingml/2006/main" xmlns:r="http://schemas.openxmlformats.org/officeDocument/2006/relationships" xmlns:p="http://schemas.openxmlformats.org/presentationml/2006/main">
-  <p:cSld name="Slide 32">
-    <p:bg>
-      <p:bgPr>
-        <a:solidFill>
-          <a:srgbClr val="1A5C2C"/>
-        </a:solidFill>
-        <a:effectLst/>
-      </p:bgPr>
-    </p:bg>
-    <p:spTree>
-      <p:nvGrpSpPr>
-        <p:cNvPr id="1" name=""/>
-        <p:cNvGrpSpPr/>
-        <p:nvPr/>
-      </p:nvGrpSpPr>
-      <p:grpSpPr>
-        <a:xfrm>
-          <a:off x="0" y="0"/>
-          <a:ext cx="0" cy="0"/>
-          <a:chOff x="0" y="0"/>
-          <a:chExt cx="0" cy="0"/>
-        </a:xfrm>
-      </p:grpSpPr>
-      <p:sp>
-        <p:nvSpPr>
-          <p:cNvPr id="2" name="Text 0"/>
-          <p:cNvSpPr txBox="1"/>
-          <p:nvPr/>
-        </p:nvSpPr>
-        <p:spPr>
-          <a:xfrm>
-            <a:off x="457200" y="822960"/>
-            <a:ext cx="2103120" cy="2194560"/>
-          </a:xfrm>
-          <a:prstGeom prst="rect">
-            <a:avLst/>
-          </a:prstGeom>
-          <a:noFill/>
-          <a:ln/>
-        </p:spPr>
-        <p:txBody>
-          <a:bodyPr wrap="square" lIns="0" tIns="0" rIns="0" bIns="0" rtlCol="0" anchor="t"/>
-          <a:lstStyle/>
-          <a:p>
-            <a:pPr marL="0" indent="0">
-              <a:buNone/>
-            </a:pPr>
-            <a:r>
-              <a:rPr lang="en-US" sz="15000" b="1" dirty="0">
-                <a:solidFill>
-                  <a:srgbClr val="C6A24C"/>
-                </a:solidFill>
-                <a:latin typeface="Cambria" pitchFamily="34" charset="0"/>
-                <a:ea typeface="Cambria" pitchFamily="34" charset="-122"/>
-                <a:cs typeface="Cambria" pitchFamily="34" charset="-120"/>
-              </a:rPr>
-              <a:t>5</a:t>
-            </a:r>
-            <a:endParaRPr lang="en-US" sz="15000" dirty="0"/>
-          </a:p>
-        </p:txBody>
-      </p:sp>
-      <p:sp>
-        <p:nvSpPr>
-          <p:cNvPr id="3" name="Text 1"/>
-          <p:cNvSpPr txBox="1"/>
-          <p:nvPr/>
-        </p:nvSpPr>
-        <p:spPr>
-          <a:xfrm>
-            <a:off x="2743200" y="914400"/>
-            <a:ext cx="8229600" cy="457200"/>
-          </a:xfrm>
-          <a:prstGeom prst="rect">
-            <a:avLst/>
-          </a:prstGeom>
-          <a:noFill/>
-          <a:ln/>
-        </p:spPr>
-        <p:txBody>
-          <a:bodyPr wrap="square" lIns="0" tIns="0" rIns="0" bIns="0" rtlCol="0" anchor="t"/>
-          <a:lstStyle/>
-          <a:p>
-            <a:pPr marL="0" indent="0">
-              <a:buNone/>
-            </a:pPr>
-            <a:r>
-              <a:rPr lang="en-US" sz="2400" b="1" dirty="0">
-                <a:solidFill>
-                  <a:srgbClr val="E6D3A0"/>
-                </a:solidFill>
-                <a:latin typeface="Calibri" pitchFamily="34" charset="0"/>
-                <a:ea typeface="Calibri" pitchFamily="34" charset="-122"/>
-                <a:cs typeface="Calibri" pitchFamily="34" charset="-120"/>
-              </a:rPr>
-              <a:t>Section 5</a:t>
-            </a:r>
-            <a:endParaRPr lang="en-US" sz="2400" dirty="0"/>
-          </a:p>
-        </p:txBody>
-      </p:sp>
-      <p:sp>
-        <p:nvSpPr>
-          <p:cNvPr id="4" name="Text 2"/>
-          <p:cNvSpPr txBox="1"/>
-          <p:nvPr/>
-        </p:nvSpPr>
-        <p:spPr>
-          <a:xfrm>
-            <a:off x="2743200" y="1371600"/>
-            <a:ext cx="8961120" cy="868680"/>
-          </a:xfrm>
-          <a:prstGeom prst="rect">
-            <a:avLst/>
-          </a:prstGeom>
-          <a:noFill/>
-          <a:ln/>
-        </p:spPr>
-        <p:txBody>
-          <a:bodyPr wrap="square" lIns="0" tIns="0" rIns="0" bIns="0" rtlCol="0" anchor="t"/>
-          <a:lstStyle/>
-          <a:p>
-            <a:pPr marL="0" indent="0">
-              <a:buNone/>
-            </a:pPr>
-            <a:r>
-              <a:rPr lang="en-US" sz="4400" b="1" dirty="0">
-                <a:solidFill>
-                  <a:srgbClr val="FFFFFF"/>
-                </a:solidFill>
-                <a:latin typeface="Cambria" pitchFamily="34" charset="0"/>
-                <a:ea typeface="Cambria" pitchFamily="34" charset="-122"/>
-                <a:cs typeface="Cambria" pitchFamily="34" charset="-120"/>
-              </a:rPr>
-              <a:t>Application — In Practice</a:t>
-            </a:r>
-            <a:endParaRPr lang="en-US" sz="4400" dirty="0"/>
-          </a:p>
-        </p:txBody>
-      </p:sp>
-      <p:sp>
-        <p:nvSpPr>
-          <p:cNvPr id="5" name="Text 3"/>
-          <p:cNvSpPr txBox="1"/>
-          <p:nvPr/>
-        </p:nvSpPr>
-        <p:spPr>
-          <a:xfrm>
-            <a:off x="2743200" y="2240280"/>
-            <a:ext cx="8961120" cy="868680"/>
-          </a:xfrm>
-          <a:prstGeom prst="rect">
-            <a:avLst/>
-          </a:prstGeom>
-          <a:noFill/>
-          <a:ln/>
-        </p:spPr>
-        <p:txBody>
-          <a:bodyPr wrap="square" lIns="0" tIns="0" rIns="0" bIns="0" rtlCol="0" anchor="t"/>
-          <a:lstStyle/>
-          <a:p>
-            <a:pPr marL="0" indent="0">
-              <a:buNone/>
-            </a:pPr>
-            <a:r>
-              <a:rPr lang="en-US" sz="2600" i="1" dirty="0">
-                <a:solidFill>
-                  <a:srgbClr val="DDE8DF"/>
-                </a:solidFill>
-                <a:latin typeface="Calibri" pitchFamily="34" charset="0"/>
-                <a:ea typeface="Calibri" pitchFamily="34" charset="-122"/>
-                <a:cs typeface="Calibri" pitchFamily="34" charset="-120"/>
-              </a:rPr>
-              <a:t>Cause of Death — Match the Breakdown</a:t>
-            </a:r>
-            <a:endParaRPr lang="en-US" sz="2600" dirty="0"/>
-          </a:p>
-        </p:txBody>
-      </p:sp>
-      <p:sp>
-        <p:nvSpPr>
-          <p:cNvPr id="6" name="Text 4"/>
-          <p:cNvSpPr txBox="1"/>
-          <p:nvPr/>
-        </p:nvSpPr>
-        <p:spPr>
-          <a:xfrm>
-            <a:off x="2743200" y="3246120"/>
-            <a:ext cx="8229600" cy="457200"/>
-          </a:xfrm>
-          <a:prstGeom prst="rect">
-            <a:avLst/>
-          </a:prstGeom>
-          <a:noFill/>
-          <a:ln/>
-        </p:spPr>
-        <p:txBody>
-          <a:bodyPr wrap="square" lIns="0" tIns="0" rIns="0" bIns="0" rtlCol="0" anchor="t"/>
-          <a:lstStyle/>
-          <a:p>
-            <a:pPr marL="0" indent="0">
-              <a:buNone/>
-            </a:pPr>
-            <a:r>
-              <a:rPr lang="en-US" sz="2400" b="1" dirty="0">
-                <a:solidFill>
-                  <a:srgbClr val="C6A24C"/>
-                </a:solidFill>
-                <a:latin typeface="Calibri" pitchFamily="34" charset="0"/>
-                <a:ea typeface="Calibri" pitchFamily="34" charset="-122"/>
-                <a:cs typeface="Calibri" pitchFamily="34" charset="-120"/>
-              </a:rPr>
-              <a:t>Section learning outcomes</a:t>
-            </a:r>
-            <a:endParaRPr lang="en-US" sz="2400" dirty="0"/>
-          </a:p>
-        </p:txBody>
-      </p:sp>
-      <p:sp>
-        <p:nvSpPr>
-          <p:cNvPr id="7" name="Shape 5"/>
-          <p:cNvSpPr/>
-          <p:nvPr/>
-        </p:nvSpPr>
-        <p:spPr>
-          <a:xfrm>
-            <a:off x="2743200" y="3822192"/>
-            <a:ext cx="384048" cy="384048"/>
-          </a:xfrm>
-          <a:prstGeom prst="ellipse">
-            <a:avLst/>
-          </a:prstGeom>
-          <a:solidFill>
-            <a:srgbClr val="C6A24C"/>
-          </a:solidFill>
-          <a:ln w="12700">
-            <a:solidFill>
-              <a:srgbClr val="C6A24C"/>
-            </a:solidFill>
-            <a:prstDash val="solid"/>
-          </a:ln>
-        </p:spPr>
-        <p:txBody>
-          <a:bodyPr/>
-          <a:lstStyle/>
-          <a:p>
-            <a:endParaRPr lang="en-ZA"/>
-          </a:p>
-        </p:txBody>
-      </p:sp>
-      <p:pic>
-        <p:nvPicPr>
-          <p:cNvPr id="8" name="Image 0" descr="preencoded.png"/>
-          <p:cNvPicPr>
-            <a:picLocks noChangeAspect="1"/>
-          </p:cNvPicPr>
-          <p:nvPr/>
-        </p:nvPicPr>
-        <p:blipFill>
-          <a:blip r:embed="rId3"/>
-          <a:stretch>
-            <a:fillRect/>
-          </a:stretch>
-        </p:blipFill>
-        <p:spPr>
-          <a:xfrm>
-            <a:off x="2839212" y="3918204"/>
-            <a:ext cx="192024" cy="192024"/>
-          </a:xfrm>
-          <a:prstGeom prst="rect">
-            <a:avLst/>
-          </a:prstGeom>
-        </p:spPr>
-      </p:pic>
-      <p:sp>
-        <p:nvSpPr>
-          <p:cNvPr id="9" name="Text 6"/>
-          <p:cNvSpPr txBox="1"/>
-          <p:nvPr/>
-        </p:nvSpPr>
-        <p:spPr>
-          <a:xfrm>
-            <a:off x="3291840" y="3749040"/>
-            <a:ext cx="8412480" cy="1097280"/>
-          </a:xfrm>
-          <a:prstGeom prst="rect">
-            <a:avLst/>
-          </a:prstGeom>
-          <a:noFill/>
-          <a:ln/>
-        </p:spPr>
-        <p:txBody>
-          <a:bodyPr wrap="square" lIns="0" tIns="0" rIns="0" bIns="0" rtlCol="0" anchor="t"/>
-          <a:lstStyle/>
-          <a:p>
-            <a:pPr marL="0" indent="0">
-              <a:buNone/>
-            </a:pPr>
-            <a:r>
-              <a:rPr lang="en-US" sz="2400" dirty="0">
-                <a:solidFill>
-                  <a:srgbClr val="FFFFFF"/>
-                </a:solidFill>
-                <a:latin typeface="Calibri" pitchFamily="34" charset="0"/>
-                <a:ea typeface="Calibri" pitchFamily="34" charset="-122"/>
-                <a:cs typeface="Calibri" pitchFamily="34" charset="-120"/>
-              </a:rPr>
-              <a:t>Evaluate realistic strategic failures to diagnose where directional integrity broke down.</a:t>
-            </a:r>
-            <a:endParaRPr lang="en-US" sz="2400" dirty="0"/>
-          </a:p>
-        </p:txBody>
-      </p:sp>
-      <p:sp>
-        <p:nvSpPr>
-          <p:cNvPr id="10" name="Shape 7"/>
-          <p:cNvSpPr/>
-          <p:nvPr/>
-        </p:nvSpPr>
-        <p:spPr>
-          <a:xfrm>
-            <a:off x="2743200" y="5010912"/>
-            <a:ext cx="384048" cy="384048"/>
-          </a:xfrm>
-          <a:prstGeom prst="ellipse">
-            <a:avLst/>
-          </a:prstGeom>
-          <a:solidFill>
-            <a:srgbClr val="C6A24C"/>
-          </a:solidFill>
-          <a:ln w="12700">
-            <a:solidFill>
-              <a:srgbClr val="C6A24C"/>
-            </a:solidFill>
-            <a:prstDash val="solid"/>
-          </a:ln>
-        </p:spPr>
-        <p:txBody>
-          <a:bodyPr/>
-          <a:lstStyle/>
-          <a:p>
-            <a:endParaRPr lang="en-ZA"/>
-          </a:p>
-        </p:txBody>
-      </p:sp>
-      <p:pic>
-        <p:nvPicPr>
-          <p:cNvPr id="11" name="Image 1" descr="preencoded.png"/>
-          <p:cNvPicPr>
-            <a:picLocks noChangeAspect="1"/>
-          </p:cNvPicPr>
-          <p:nvPr/>
-        </p:nvPicPr>
-        <p:blipFill>
-          <a:blip r:embed="rId3"/>
-          <a:stretch>
-            <a:fillRect/>
-          </a:stretch>
-        </p:blipFill>
-        <p:spPr>
-          <a:xfrm>
-            <a:off x="2839212" y="5106924"/>
-            <a:ext cx="192024" cy="192024"/>
-          </a:xfrm>
-          <a:prstGeom prst="rect">
-            <a:avLst/>
-          </a:prstGeom>
-        </p:spPr>
-      </p:pic>
-      <p:sp>
-        <p:nvSpPr>
-          <p:cNvPr id="12" name="Text 8"/>
-          <p:cNvSpPr txBox="1"/>
-          <p:nvPr/>
-        </p:nvSpPr>
-        <p:spPr>
-          <a:xfrm>
-            <a:off x="3291840" y="4937760"/>
-            <a:ext cx="8412480" cy="1097280"/>
-          </a:xfrm>
-          <a:prstGeom prst="rect">
-            <a:avLst/>
-          </a:prstGeom>
-          <a:noFill/>
-          <a:ln/>
-        </p:spPr>
-        <p:txBody>
-          <a:bodyPr wrap="square" lIns="0" tIns="0" rIns="0" bIns="0" rtlCol="0" anchor="t"/>
-          <a:lstStyle/>
-          <a:p>
-            <a:pPr marL="0" indent="0">
-              <a:buNone/>
-            </a:pPr>
-            <a:r>
-              <a:rPr lang="en-US" sz="2400" dirty="0">
-                <a:solidFill>
-                  <a:srgbClr val="FFFFFF"/>
-                </a:solidFill>
-                <a:latin typeface="Calibri" pitchFamily="34" charset="0"/>
-                <a:ea typeface="Calibri" pitchFamily="34" charset="-122"/>
-                <a:cs typeface="Calibri" pitchFamily="34" charset="-120"/>
-              </a:rPr>
-              <a:t>Judge which integrity checkpoint would have protected the chosen direction.</a:t>
-            </a:r>
-            <a:endParaRPr lang="en-US" sz="2400" dirty="0"/>
-          </a:p>
-        </p:txBody>
-      </p:sp>
-    </p:spTree>
-  </p:cSld>
-  <p:clrMapOvr>
-    <a:masterClrMapping/>
-  </p:clrMapOvr>
-</p:sld>
-</file>
-
-<file path=ppt/slides/slide27.xml><?xml version="1.0" encoding="utf-8"?>
-<p:sld xmlns:a="http://schemas.openxmlformats.org/drawingml/2006/main" xmlns:r="http://schemas.openxmlformats.org/officeDocument/2006/relationships" xmlns:p="http://schemas.openxmlformats.org/presentationml/2006/main">
-  <p:cSld name="Slide 33">
-    <p:bg>
-      <p:bgPr>
-        <a:solidFill>
-          <a:srgbClr val="FFFFFF"/>
-        </a:solidFill>
-        <a:effectLst/>
-      </p:bgPr>
-    </p:bg>
-    <p:spTree>
-      <p:nvGrpSpPr>
-        <p:cNvPr id="1" name=""/>
-        <p:cNvGrpSpPr/>
-        <p:nvPr/>
-      </p:nvGrpSpPr>
-      <p:grpSpPr>
-        <a:xfrm>
-          <a:off x="0" y="0"/>
-          <a:ext cx="0" cy="0"/>
-          <a:chOff x="0" y="0"/>
-          <a:chExt cx="0" cy="0"/>
-        </a:xfrm>
-      </p:grpSpPr>
-      <p:sp>
-        <p:nvSpPr>
-          <p:cNvPr id="2" name="Text 0"/>
-          <p:cNvSpPr txBox="1"/>
-          <p:nvPr/>
-        </p:nvSpPr>
-        <p:spPr>
-          <a:xfrm>
-            <a:off x="548640" y="411480"/>
-            <a:ext cx="11064240" cy="868680"/>
-          </a:xfrm>
-          <a:prstGeom prst="rect">
-            <a:avLst/>
-          </a:prstGeom>
-          <a:noFill/>
-          <a:ln/>
-        </p:spPr>
-        <p:txBody>
-          <a:bodyPr wrap="square" lIns="0" tIns="0" rIns="0" bIns="0" rtlCol="0" anchor="ctr"/>
-          <a:lstStyle/>
-          <a:p>
-            <a:pPr marL="0" indent="0">
-              <a:buNone/>
-            </a:pPr>
-            <a:r>
-              <a:rPr lang="en-US" sz="3600" b="1" dirty="0">
-                <a:solidFill>
-                  <a:srgbClr val="1A5C2C"/>
-                </a:solidFill>
-                <a:latin typeface="Cambria" pitchFamily="34" charset="0"/>
-                <a:ea typeface="Cambria" pitchFamily="34" charset="-122"/>
-                <a:cs typeface="Cambria" pitchFamily="34" charset="-120"/>
-              </a:rPr>
-              <a:t>Cause of Death · Match the Breakdown</a:t>
-            </a:r>
-            <a:endParaRPr lang="en-US" sz="3600" dirty="0"/>
-          </a:p>
-        </p:txBody>
-      </p:sp>
-      <p:sp>
-        <p:nvSpPr>
-          <p:cNvPr id="3" name="Shape 1"/>
-          <p:cNvSpPr/>
-          <p:nvPr/>
-        </p:nvSpPr>
-        <p:spPr>
-          <a:xfrm>
-            <a:off x="548640" y="1508760"/>
-            <a:ext cx="5408676" cy="3931920"/>
-          </a:xfrm>
-          <a:prstGeom prst="roundRect">
-            <a:avLst>
-              <a:gd name="adj" fmla="val 2326"/>
-            </a:avLst>
-          </a:prstGeom>
-          <a:solidFill>
-            <a:srgbClr val="EEF4EF"/>
-          </a:solidFill>
-          <a:ln w="12700">
-            <a:solidFill>
-              <a:srgbClr val="EEF4EF"/>
-            </a:solidFill>
-            <a:prstDash val="solid"/>
-          </a:ln>
-        </p:spPr>
-        <p:txBody>
-          <a:bodyPr/>
-          <a:lstStyle/>
-          <a:p>
-            <a:endParaRPr lang="en-ZA"/>
-          </a:p>
-        </p:txBody>
-      </p:sp>
-      <p:sp>
-        <p:nvSpPr>
-          <p:cNvPr id="4" name="Shape 2"/>
-          <p:cNvSpPr/>
-          <p:nvPr/>
-        </p:nvSpPr>
-        <p:spPr>
-          <a:xfrm>
-            <a:off x="777240" y="1737360"/>
-            <a:ext cx="640080" cy="640080"/>
-          </a:xfrm>
-          <a:prstGeom prst="ellipse">
-            <a:avLst/>
-          </a:prstGeom>
-          <a:solidFill>
-            <a:srgbClr val="1A5C2C"/>
-          </a:solidFill>
-          <a:ln w="12700">
-            <a:solidFill>
-              <a:srgbClr val="1A5C2C"/>
-            </a:solidFill>
-            <a:prstDash val="solid"/>
-          </a:ln>
-        </p:spPr>
-        <p:txBody>
-          <a:bodyPr/>
-          <a:lstStyle/>
-          <a:p>
-            <a:endParaRPr lang="en-ZA"/>
-          </a:p>
-        </p:txBody>
-      </p:sp>
-      <p:pic>
-        <p:nvPicPr>
-          <p:cNvPr id="5" name="Image 0" descr="preencoded.png"/>
-          <p:cNvPicPr>
-            <a:picLocks noChangeAspect="1"/>
-          </p:cNvPicPr>
-          <p:nvPr/>
-        </p:nvPicPr>
-        <p:blipFill>
-          <a:blip r:embed="rId3"/>
-          <a:stretch>
-            <a:fillRect/>
-          </a:stretch>
-        </p:blipFill>
-        <p:spPr>
-          <a:xfrm>
-            <a:off x="937260" y="1897380"/>
-            <a:ext cx="320040" cy="320040"/>
-          </a:xfrm>
-          <a:prstGeom prst="rect">
-            <a:avLst/>
-          </a:prstGeom>
-        </p:spPr>
-      </p:pic>
-      <p:sp>
-        <p:nvSpPr>
-          <p:cNvPr id="6" name="Text 3"/>
-          <p:cNvSpPr txBox="1"/>
-          <p:nvPr/>
-        </p:nvSpPr>
-        <p:spPr>
-          <a:xfrm>
-            <a:off x="1600200" y="1691640"/>
-            <a:ext cx="4128516" cy="731520"/>
-          </a:xfrm>
-          <a:prstGeom prst="rect">
-            <a:avLst/>
-          </a:prstGeom>
-          <a:noFill/>
-          <a:ln/>
-        </p:spPr>
-        <p:txBody>
-          <a:bodyPr wrap="square" lIns="0" tIns="0" rIns="0" bIns="0" rtlCol="0" anchor="ctr"/>
-          <a:lstStyle/>
-          <a:p>
-            <a:pPr marL="0" indent="0">
-              <a:buNone/>
-            </a:pPr>
-            <a:r>
-              <a:rPr lang="en-US" sz="2600" b="1" dirty="0">
-                <a:solidFill>
-                  <a:srgbClr val="1A5C2C"/>
-                </a:solidFill>
-                <a:latin typeface="Cambria" pitchFamily="34" charset="0"/>
-                <a:ea typeface="Cambria" pitchFamily="34" charset="-122"/>
-                <a:cs typeface="Cambria" pitchFamily="34" charset="-120"/>
-              </a:rPr>
-              <a:t>1 · Find the illusion</a:t>
-            </a:r>
-            <a:endParaRPr lang="en-US" sz="2600" dirty="0"/>
-          </a:p>
-        </p:txBody>
-      </p:sp>
-      <p:sp>
-        <p:nvSpPr>
-          <p:cNvPr id="7" name="Text 4"/>
-          <p:cNvSpPr txBox="1"/>
-          <p:nvPr/>
-        </p:nvSpPr>
-        <p:spPr>
-          <a:xfrm>
-            <a:off x="777240" y="2560320"/>
-            <a:ext cx="4951476" cy="2743200"/>
-          </a:xfrm>
-          <a:prstGeom prst="rect">
-            <a:avLst/>
-          </a:prstGeom>
-          <a:noFill/>
-          <a:ln/>
-        </p:spPr>
-        <p:txBody>
-          <a:bodyPr wrap="square" lIns="0" tIns="0" rIns="0" bIns="0" rtlCol="0" anchor="t"/>
-          <a:lstStyle/>
-          <a:p>
-            <a:pPr marL="0" indent="0">
-              <a:buNone/>
-            </a:pPr>
-            <a:r>
-              <a:rPr lang="en-US" sz="2400" dirty="0">
-                <a:solidFill>
-                  <a:srgbClr val="1F2A22"/>
-                </a:solidFill>
-                <a:latin typeface="Calibri" pitchFamily="34" charset="0"/>
-                <a:ea typeface="Calibri" pitchFamily="34" charset="-122"/>
-                <a:cs typeface="Calibri" pitchFamily="34" charset="-120"/>
-              </a:rPr>
-              <a:t>Choose the investigation question the scenario answers: Familiarity, Exclusion or Complacency.</a:t>
-            </a:r>
-            <a:endParaRPr lang="en-US" sz="2400" dirty="0"/>
-          </a:p>
-        </p:txBody>
-      </p:sp>
-      <p:sp>
-        <p:nvSpPr>
-          <p:cNvPr id="8" name="Shape 5"/>
-          <p:cNvSpPr/>
-          <p:nvPr/>
-        </p:nvSpPr>
-        <p:spPr>
-          <a:xfrm>
-            <a:off x="6231636" y="1508760"/>
-            <a:ext cx="5408676" cy="3931920"/>
-          </a:xfrm>
-          <a:prstGeom prst="roundRect">
-            <a:avLst>
-              <a:gd name="adj" fmla="val 2326"/>
-            </a:avLst>
-          </a:prstGeom>
-          <a:solidFill>
-            <a:srgbClr val="1A5C2C"/>
-          </a:solidFill>
-          <a:ln w="12700">
-            <a:solidFill>
-              <a:srgbClr val="1A5C2C"/>
-            </a:solidFill>
-            <a:prstDash val="solid"/>
-          </a:ln>
-        </p:spPr>
-        <p:txBody>
-          <a:bodyPr/>
-          <a:lstStyle/>
-          <a:p>
-            <a:endParaRPr lang="en-ZA"/>
-          </a:p>
-        </p:txBody>
-      </p:sp>
-      <p:sp>
-        <p:nvSpPr>
-          <p:cNvPr id="9" name="Shape 6"/>
-          <p:cNvSpPr/>
-          <p:nvPr/>
-        </p:nvSpPr>
-        <p:spPr>
-          <a:xfrm>
-            <a:off x="6460236" y="1737360"/>
-            <a:ext cx="640080" cy="640080"/>
-          </a:xfrm>
-          <a:prstGeom prst="ellipse">
-            <a:avLst/>
-          </a:prstGeom>
-          <a:solidFill>
-            <a:srgbClr val="C6A24C"/>
-          </a:solidFill>
-          <a:ln w="12700">
-            <a:solidFill>
-              <a:srgbClr val="C6A24C"/>
-            </a:solidFill>
-            <a:prstDash val="solid"/>
-          </a:ln>
-        </p:spPr>
-        <p:txBody>
-          <a:bodyPr/>
-          <a:lstStyle/>
-          <a:p>
-            <a:endParaRPr lang="en-ZA"/>
-          </a:p>
-        </p:txBody>
-      </p:sp>
-      <p:pic>
-        <p:nvPicPr>
-          <p:cNvPr id="10" name="Image 1" descr="preencoded.png"/>
-          <p:cNvPicPr>
-            <a:picLocks noChangeAspect="1"/>
-          </p:cNvPicPr>
-          <p:nvPr/>
-        </p:nvPicPr>
-        <p:blipFill>
-          <a:blip r:embed="rId4"/>
-          <a:stretch>
-            <a:fillRect/>
-          </a:stretch>
-        </p:blipFill>
-        <p:spPr>
-          <a:xfrm>
-            <a:off x="6620256" y="1897380"/>
-            <a:ext cx="320040" cy="320040"/>
-          </a:xfrm>
-          <a:prstGeom prst="rect">
-            <a:avLst/>
-          </a:prstGeom>
-        </p:spPr>
-      </p:pic>
-      <p:sp>
-        <p:nvSpPr>
-          <p:cNvPr id="11" name="Text 7"/>
-          <p:cNvSpPr txBox="1"/>
-          <p:nvPr/>
-        </p:nvSpPr>
-        <p:spPr>
-          <a:xfrm>
-            <a:off x="7283196" y="1691640"/>
-            <a:ext cx="4128516" cy="731520"/>
-          </a:xfrm>
-          <a:prstGeom prst="rect">
-            <a:avLst/>
-          </a:prstGeom>
-          <a:noFill/>
-          <a:ln/>
-        </p:spPr>
-        <p:txBody>
-          <a:bodyPr wrap="square" lIns="0" tIns="0" rIns="0" bIns="0" rtlCol="0" anchor="ctr"/>
-          <a:lstStyle/>
-          <a:p>
-            <a:pPr marL="0" indent="0">
-              <a:buNone/>
-            </a:pPr>
-            <a:r>
-              <a:rPr lang="en-US" sz="2600" b="1" dirty="0">
-                <a:solidFill>
-                  <a:srgbClr val="FFFFFF"/>
-                </a:solidFill>
-                <a:latin typeface="Cambria" pitchFamily="34" charset="0"/>
-                <a:ea typeface="Cambria" pitchFamily="34" charset="-122"/>
-                <a:cs typeface="Cambria" pitchFamily="34" charset="-120"/>
-              </a:rPr>
-              <a:t>2 · Find where it sits</a:t>
-            </a:r>
-            <a:endParaRPr lang="en-US" sz="2600" dirty="0"/>
-          </a:p>
-        </p:txBody>
-      </p:sp>
-      <p:sp>
-        <p:nvSpPr>
-          <p:cNvPr id="12" name="Text 8"/>
-          <p:cNvSpPr txBox="1"/>
-          <p:nvPr/>
-        </p:nvSpPr>
-        <p:spPr>
-          <a:xfrm>
-            <a:off x="6460236" y="2560320"/>
-            <a:ext cx="4951476" cy="2743200"/>
-          </a:xfrm>
-          <a:prstGeom prst="rect">
-            <a:avLst/>
-          </a:prstGeom>
-          <a:noFill/>
-          <a:ln/>
-        </p:spPr>
-        <p:txBody>
-          <a:bodyPr wrap="square" lIns="0" tIns="0" rIns="0" bIns="0" rtlCol="0" anchor="t"/>
-          <a:lstStyle/>
-          <a:p>
-            <a:pPr marL="0" indent="0">
-              <a:buNone/>
-            </a:pPr>
-            <a:r>
-              <a:rPr lang="en-US" sz="2400" dirty="0">
-                <a:solidFill>
-                  <a:srgbClr val="FFFFFF"/>
-                </a:solidFill>
-                <a:latin typeface="Calibri" pitchFamily="34" charset="0"/>
-                <a:ea typeface="Calibri" pitchFamily="34" charset="-122"/>
-                <a:cs typeface="Calibri" pitchFamily="34" charset="-120"/>
-              </a:rPr>
-              <a:t>Choose the ABCV checkpoint the illusion hid from leaders: Arena, Boundaries, Competition or Value Proposition.</a:t>
-            </a:r>
-            <a:endParaRPr lang="en-US" sz="2400" dirty="0"/>
-          </a:p>
-        </p:txBody>
-      </p:sp>
-      <p:sp>
-        <p:nvSpPr>
-          <p:cNvPr id="13" name="Shape 9"/>
-          <p:cNvSpPr/>
-          <p:nvPr/>
-        </p:nvSpPr>
-        <p:spPr>
-          <a:xfrm>
-            <a:off x="548640" y="5623560"/>
-            <a:ext cx="11091672" cy="777240"/>
-          </a:xfrm>
-          <a:prstGeom prst="roundRect">
-            <a:avLst>
-              <a:gd name="adj" fmla="val 11765"/>
-            </a:avLst>
-          </a:prstGeom>
-          <a:solidFill>
-            <a:srgbClr val="0F3B1C"/>
-          </a:solidFill>
-          <a:ln w="12700">
-            <a:solidFill>
-              <a:srgbClr val="0F3B1C"/>
-            </a:solidFill>
-            <a:prstDash val="solid"/>
-          </a:ln>
-        </p:spPr>
-        <p:txBody>
-          <a:bodyPr/>
-          <a:lstStyle/>
-          <a:p>
-            <a:endParaRPr lang="en-ZA"/>
-          </a:p>
-        </p:txBody>
-      </p:sp>
-      <p:sp>
-        <p:nvSpPr>
-          <p:cNvPr id="14" name="Text 10"/>
-          <p:cNvSpPr txBox="1"/>
-          <p:nvPr/>
-        </p:nvSpPr>
-        <p:spPr>
-          <a:xfrm>
-            <a:off x="822960" y="5623560"/>
-            <a:ext cx="10607040" cy="777240"/>
-          </a:xfrm>
-          <a:prstGeom prst="rect">
-            <a:avLst/>
-          </a:prstGeom>
-          <a:noFill/>
-          <a:ln/>
-        </p:spPr>
-        <p:txBody>
-          <a:bodyPr wrap="square" lIns="0" tIns="0" rIns="0" bIns="0" rtlCol="0" anchor="ctr"/>
-          <a:lstStyle/>
-          <a:p>
-            <a:pPr marL="0" indent="0">
-              <a:buNone/>
-            </a:pPr>
-            <a:r>
-              <a:rPr lang="en-US" sz="2400" i="1" dirty="0">
-                <a:solidFill>
-                  <a:srgbClr val="FFFFFF"/>
-                </a:solidFill>
-                <a:latin typeface="Calibri" pitchFamily="34" charset="0"/>
-                <a:ea typeface="Calibri" pitchFamily="34" charset="-122"/>
-                <a:cs typeface="Calibri" pitchFamily="34" charset="-120"/>
-              </a:rPr>
-              <a:t>Four failed strategies. Defuse the mine before it detonates.</a:t>
-            </a:r>
-            <a:endParaRPr lang="en-US" sz="2400" dirty="0"/>
-          </a:p>
-        </p:txBody>
-      </p:sp>
-    </p:spTree>
-  </p:cSld>
-  <p:clrMapOvr>
-    <a:masterClrMapping/>
-  </p:clrMapOvr>
-</p:sld>
-</file>
-
-<file path=ppt/slides/slide28.xml><?xml version="1.0" encoding="utf-8"?>
-<p:sld xmlns:a="http://schemas.openxmlformats.org/drawingml/2006/main" xmlns:r="http://schemas.openxmlformats.org/officeDocument/2006/relationships" xmlns:p="http://schemas.openxmlformats.org/presentationml/2006/main">
-  <p:cSld>
-    <p:bg>
-      <p:bgPr>
-        <a:solidFill>
-          <a:srgbClr val="FFFFFF"/>
-        </a:solidFill>
-        <a:effectLst/>
-      </p:bgPr>
-    </p:bg>
-    <p:spTree>
-      <p:nvGrpSpPr>
-        <p:cNvPr id="1" name=""/>
-        <p:cNvGrpSpPr/>
-        <p:nvPr/>
-      </p:nvGrpSpPr>
-      <p:grpSpPr>
-        <a:xfrm>
-          <a:off x="0" y="0"/>
-          <a:ext cx="0" cy="0"/>
-          <a:chOff x="0" y="0"/>
-          <a:chExt cx="0" cy="0"/>
-        </a:xfrm>
-      </p:grpSpPr>
-      <p:sp>
-        <p:nvSpPr>
-          <p:cNvPr id="2" name="Text 0"/>
-          <p:cNvSpPr txBox="1"/>
-          <p:nvPr/>
-        </p:nvSpPr>
-        <p:spPr>
-          <a:xfrm>
-            <a:off x="548640" y="411480"/>
-            <a:ext cx="11064240" cy="868680"/>
-          </a:xfrm>
-          <a:prstGeom prst="rect">
-            <a:avLst/>
-          </a:prstGeom>
-          <a:noFill/>
-          <a:ln/>
-        </p:spPr>
-        <p:txBody>
-          <a:bodyPr wrap="square" lIns="0" tIns="0" rIns="0" bIns="0" rtlCol="0" anchor="ctr"/>
-          <a:lstStyle/>
-          <a:p>
-            <a:pPr marL="0" indent="0">
-              <a:buNone/>
-            </a:pPr>
-            <a:r>
-              <a:rPr lang="en-US" sz="3600" b="1" dirty="0">
-                <a:solidFill>
-                  <a:srgbClr val="1A5C2C"/>
-                </a:solidFill>
-                <a:latin typeface="Cambria" pitchFamily="34" charset="0"/>
-                <a:ea typeface="Cambria" pitchFamily="34" charset="-122"/>
-                <a:cs typeface="Cambria" pitchFamily="34" charset="-120"/>
-              </a:rPr>
-              <a:t>Section 5 Reflections</a:t>
-            </a:r>
-            <a:endParaRPr lang="en-US" sz="3600" dirty="0"/>
-          </a:p>
-        </p:txBody>
-      </p:sp>
-      <p:pic>
-        <p:nvPicPr>
-          <p:cNvPr id="3" name="Reflection 5" descr="Closing Commitment: What is one MBT condition your organisation is currently avoiding naming? Why? What will you do about it before your next strategic review?"/>
-          <p:cNvPicPr>
-            <a:picLocks noChangeAspect="1"/>
-          </p:cNvPicPr>
-          <p:nvPr/>
-        </p:nvPicPr>
-        <p:blipFill>
-          <a:blip r:embed="rId3"/>
-          <a:stretch>
-            <a:fillRect/>
-          </a:stretch>
-        </p:blipFill>
-        <p:spPr>
-          <a:xfrm>
-            <a:off x="1691640" y="1572768"/>
-            <a:ext cx="9921240" cy="890368"/>
-          </a:xfrm>
-          <a:prstGeom prst="rect">
-            <a:avLst/>
-          </a:prstGeom>
-        </p:spPr>
-      </p:pic>
-      <p:sp>
-        <p:nvSpPr>
-          <p:cNvPr id="4" name="Part 5"/>
-          <p:cNvSpPr/>
-          <p:nvPr/>
-        </p:nvSpPr>
-        <p:spPr>
-          <a:xfrm>
-            <a:off x="548640" y="1583611"/>
-            <a:ext cx="868680" cy="868680"/>
-          </a:xfrm>
-          <a:prstGeom prst="ellipse">
-            <a:avLst/>
-          </a:prstGeom>
-          <a:solidFill>
-            <a:srgbClr val="C6A24C"/>
-          </a:solidFill>
-          <a:ln>
-            <a:solidFill>
-              <a:srgbClr val="C6A24C"/>
-            </a:solidFill>
-          </a:ln>
-          <a:effectLst/>
-        </p:spPr>
-        <p:style>
-          <a:lnRef idx="1">
-            <a:schemeClr val="accent1"/>
-          </a:lnRef>
-          <a:fillRef idx="3">
-            <a:schemeClr val="accent1"/>
-          </a:fillRef>
-          <a:effectRef idx="2">
-            <a:schemeClr val="accent1"/>
-          </a:effectRef>
-          <a:fontRef idx="minor">
-            <a:schemeClr val="lt1"/>
-          </a:fontRef>
-        </p:style>
-        <p:txBody>
-          <a:bodyPr wrap="none" lIns="0" tIns="0" rIns="0" bIns="0" rtlCol="0" anchor="ctr"/>
-          <a:lstStyle/>
-          <a:p>
-            <a:pPr algn="ctr"/>
-            <a:r>
-              <a:rPr sz="2400" b="1">
-                <a:solidFill>
-                  <a:srgbClr val="FFFFFF"/>
-                </a:solidFill>
-                <a:latin typeface="Calibri"/>
-              </a:rPr>
-              <a:t>5</a:t>
-            </a:r>
           </a:p>
         </p:txBody>
       </p:sp>
@@ -18359,7 +18359,7 @@
                 <a:ea typeface="Cambria" pitchFamily="34" charset="-122"/>
                 <a:cs typeface="Cambria" pitchFamily="34" charset="-120"/>
               </a:rPr>
-              <a:t>1.1 Arena: the Customer End Game</a:t>
+              <a:t>1.1 · Arena: the Customer End Game</a:t>
             </a:r>
             <a:endParaRPr lang="en-US" sz="3600" dirty="0"/>
           </a:p>
@@ -19008,7 +19008,7 @@
                 <a:ea typeface="Cambria" pitchFamily="34" charset="-122"/>
                 <a:cs typeface="Cambria" pitchFamily="34" charset="-120"/>
               </a:rPr>
-              <a:t>1.2 Boundaries: the Friction Architecture</a:t>
+              <a:t>1.2 · Boundaries: the Friction Architecture</a:t>
             </a:r>
             <a:endParaRPr lang="en-US" sz="3600" dirty="0"/>
           </a:p>
@@ -20088,7 +20088,7 @@
                 <a:ea typeface="Cambria" pitchFamily="34" charset="-122"/>
                 <a:cs typeface="Cambria" pitchFamily="34" charset="-120"/>
               </a:rPr>
-              <a:t>1.3 Competition: the True Landscape</a:t>
+              <a:t>1.3 · Competition: the True Landscape</a:t>
             </a:r>
             <a:endParaRPr lang="en-US" sz="3600" dirty="0"/>
           </a:p>

--- a/Unit decks/Unit 04 - Direction Integrity (ABCV-MBT).pptx
+++ b/Unit decks/Unit 04 - Direction Integrity (ABCV-MBT).pptx
@@ -1314,13 +1314,13 @@
           <a:p>
             <a:r>
               <a:rPr lang="en-GB" dirty="0"/>
-              <a:t>1. Judge whether strategic priorities respond to the outcomes customers pursue.</a:t>
-            </a:r>
-          </a:p>
-          <a:p>
-            <a:r>
-              <a:rPr lang="en-GB" dirty="0"/>
-              <a:t>2. Articulate the assumptions on which each strategic objective depends.</a:t>
+              <a:t>1. Test strategic priorities against the outcomes customers seek.</a:t>
+            </a:r>
+          </a:p>
+          <a:p>
+            <a:r>
+              <a:rPr lang="en-GB" dirty="0"/>
+              <a:t>2. Surface and challenge assumptions underpinning strategic objectives.</a:t>
             </a:r>
           </a:p>
           <a:p>
@@ -2177,13 +2177,13 @@
           <a:p>
             <a:r>
               <a:rPr lang="en-GB" dirty="0"/>
-              <a:t>1. Identify the dimensions of strategic integrity most often overlooked in their own executive function.</a:t>
-            </a:r>
-          </a:p>
-          <a:p>
-            <a:r>
-              <a:rPr lang="en-GB" dirty="0"/>
-              <a:t>2. Appraise how functional blind spots compound into enterprise-wide strategic risk.</a:t>
+              <a:t>1. Diagnose integrity blind spots arising from functional perspectives.</a:t>
+            </a:r>
+          </a:p>
+          <a:p>
+            <a:r>
+              <a:rPr lang="en-GB" dirty="0"/>
+              <a:t>2. Assess how functional blind spots combine into enterprise strategic risk.</a:t>
             </a:r>
           </a:p>
           <a:p>
@@ -2981,13 +2981,13 @@
           <a:p>
             <a:r>
               <a:rPr lang="en-GB" dirty="0"/>
-              <a:t>1. Appraise the assumptions, dependencies and uncertainties behind the organisation’s strategic objectives.</a:t>
-            </a:r>
-          </a:p>
-          <a:p>
-            <a:r>
-              <a:rPr lang="en-GB" dirty="0"/>
-              <a:t>2. Demonstrate collective accountability by assigning ownership for verifying critical conditions.</a:t>
+              <a:t>1. Validate the critical assumptions, dependencies and uncertainties behind strategic objectives.</a:t>
+            </a:r>
+          </a:p>
+          <a:p>
+            <a:r>
+              <a:rPr lang="en-GB" dirty="0"/>
+              <a:t>2. Assign and coordinate executive accountability for validating strategic conditions.</a:t>
             </a:r>
           </a:p>
           <a:p>
@@ -4855,13 +4855,13 @@
           <a:p>
             <a:r>
               <a:rPr lang="en-GB" dirty="0"/>
-              <a:t>1. Evaluate realistic strategic failures to diagnose where directional integrity broke down.</a:t>
-            </a:r>
-          </a:p>
-          <a:p>
-            <a:r>
-              <a:rPr lang="en-GB" dirty="0"/>
-              <a:t>2. Judge which integrity checkpoint would have protected the chosen direction.</a:t>
+              <a:t>1. Diagnose failures of directional integrity in realistic strategic situations.</a:t>
+            </a:r>
+          </a:p>
+          <a:p>
+            <a:r>
+              <a:rPr lang="en-GB" dirty="0"/>
+              <a:t>2. Select integrity checks that would prevent or reduce identified strategic failures.</a:t>
             </a:r>
           </a:p>
           <a:p>
@@ -5930,13 +5930,13 @@
           <a:p>
             <a:r>
               <a:rPr lang="en-GB" dirty="0"/>
-              <a:t>1. Recognise why well-formulated objectives can still lack strategic credibility.</a:t>
-            </a:r>
-          </a:p>
-          <a:p>
-            <a:r>
-              <a:rPr lang="en-GB" dirty="0"/>
-              <a:t>2. Distinguish objectives that are measurable from those that are strategically coherent.</a:t>
+              <a:t>1. Assess whether measurable objectives are also strategically credible.</a:t>
+            </a:r>
+          </a:p>
+          <a:p>
+            <a:r>
+              <a:rPr lang="en-GB" dirty="0"/>
+              <a:t>2. Evaluate objectives against customer value, strategic boundaries and competitive realities.</a:t>
             </a:r>
           </a:p>
           <a:p>
@@ -9579,7 +9579,7 @@
                 <a:ea typeface="Calibri" pitchFamily="34" charset="-122"/>
                 <a:cs typeface="Calibri" pitchFamily="34" charset="-120"/>
               </a:rPr>
-              <a:t>Judge whether strategic priorities respond to the outcomes customers pursue.</a:t>
+              <a:t>Test strategic priorities against the outcomes customers seek.</a:t>
             </a:r>
             <a:endParaRPr lang="en-US" sz="2400" dirty="0"/>
           </a:p>
@@ -9674,7 +9674,7 @@
                 <a:ea typeface="Calibri" pitchFamily="34" charset="-122"/>
                 <a:cs typeface="Calibri" pitchFamily="34" charset="-120"/>
               </a:rPr>
-              <a:t>Articulate the assumptions on which each strategic objective depends.</a:t>
+              <a:t>Surface and challenge assumptions underpinning strategic objectives.</a:t>
             </a:r>
             <a:endParaRPr lang="en-US" sz="2400" dirty="0"/>
           </a:p>
@@ -11295,7 +11295,7 @@
                 <a:ea typeface="Calibri" pitchFamily="34" charset="-122"/>
                 <a:cs typeface="Calibri" pitchFamily="34" charset="-120"/>
               </a:rPr>
-              <a:t>Identify the dimensions of strategic integrity most often overlooked in their own executive function.</a:t>
+              <a:t>Diagnose integrity blind spots arising from functional perspectives.</a:t>
             </a:r>
             <a:endParaRPr lang="en-US" sz="2400" dirty="0"/>
           </a:p>
@@ -11390,7 +11390,7 @@
                 <a:ea typeface="Calibri" pitchFamily="34" charset="-122"/>
                 <a:cs typeface="Calibri" pitchFamily="34" charset="-120"/>
               </a:rPr>
-              <a:t>Appraise how functional blind spots compound into enterprise-wide strategic risk.</a:t>
+              <a:t>Assess how functional blind spots combine into enterprise strategic risk.</a:t>
             </a:r>
             <a:endParaRPr lang="en-US" sz="2400" dirty="0"/>
           </a:p>
@@ -12005,7 +12005,7 @@
                 <a:ea typeface="Calibri" pitchFamily="34" charset="-122"/>
                 <a:cs typeface="Calibri" pitchFamily="34" charset="-120"/>
               </a:rPr>
-              <a:t>Evaluate realistic strategic failures to diagnose where directional integrity broke down.</a:t>
+              <a:t>Diagnose failures of directional integrity in realistic strategic situations.</a:t>
             </a:r>
             <a:endParaRPr lang="en-US" sz="2400" dirty="0"/>
           </a:p>
@@ -12100,7 +12100,7 @@
                 <a:ea typeface="Calibri" pitchFamily="34" charset="-122"/>
                 <a:cs typeface="Calibri" pitchFamily="34" charset="-120"/>
               </a:rPr>
-              <a:t>Judge which integrity checkpoint would have protected the chosen direction.</a:t>
+              <a:t>Select integrity checks that would prevent or reduce identified strategic failures.</a:t>
             </a:r>
             <a:endParaRPr lang="en-US" sz="2400" dirty="0"/>
           </a:p>
@@ -12748,7 +12748,7 @@
                 <a:ea typeface="Calibri" pitchFamily="34" charset="-122"/>
                 <a:cs typeface="Calibri" pitchFamily="34" charset="-120"/>
               </a:rPr>
-              <a:t>Critically evaluate the coherence and credibility of the organisation’s strategic direction.</a:t>
+              <a:t>Critically validate the coherence and credibility of strategic direction before execution.</a:t>
             </a:r>
             <a:endParaRPr lang="en-US" sz="2400" dirty="0"/>
           </a:p>
@@ -12843,7 +12843,7 @@
                 <a:ea typeface="Calibri" pitchFamily="34" charset="-122"/>
                 <a:cs typeface="Calibri" pitchFamily="34" charset="-120"/>
               </a:rPr>
-              <a:t>Appraise the assumptions, dependencies and uncertainties that influence the viability of strategic choices.</a:t>
+              <a:t>Test strategic choices against critical assumptions, dependencies and uncertainties.</a:t>
             </a:r>
             <a:endParaRPr lang="en-US" sz="2400" dirty="0"/>
           </a:p>
@@ -12938,7 +12938,7 @@
                 <a:ea typeface="Calibri" pitchFamily="34" charset="-122"/>
                 <a:cs typeface="Calibri" pitchFamily="34" charset="-120"/>
               </a:rPr>
-              <a:t>Judge the extent to which strategic priorities are differentiated, internally consistent and responsive to the operating environment.</a:t>
+              <a:t>Evaluate strategic priorities for differentiation, internal consistency and environmental fit.</a:t>
             </a:r>
             <a:endParaRPr lang="en-US" sz="2400" dirty="0"/>
           </a:p>
@@ -13033,7 +13033,7 @@
                 <a:ea typeface="Calibri" pitchFamily="34" charset="-122"/>
                 <a:cs typeface="Calibri" pitchFamily="34" charset="-120"/>
               </a:rPr>
-              <a:t>Demonstrate executive confidence and collective accountability for the integrity of the chosen direction.</a:t>
+              <a:t>Exercise collective executive judgement and accountability over strategic direction integrity.</a:t>
             </a:r>
             <a:endParaRPr lang="en-US" sz="2400" dirty="0"/>
           </a:p>
@@ -13507,7 +13507,7 @@
                 <a:ea typeface="Calibri" pitchFamily="34" charset="-122"/>
                 <a:cs typeface="Calibri" pitchFamily="34" charset="-120"/>
               </a:rPr>
-              <a:t>Appraise the assumptions, dependencies and uncertainties behind the organisation’s strategic objectives.</a:t>
+              <a:t>Validate the critical assumptions, dependencies and uncertainties behind strategic objectives.</a:t>
             </a:r>
             <a:endParaRPr lang="en-US" sz="2400" dirty="0"/>
           </a:p>
@@ -13602,7 +13602,7 @@
                 <a:ea typeface="Calibri" pitchFamily="34" charset="-122"/>
                 <a:cs typeface="Calibri" pitchFamily="34" charset="-120"/>
               </a:rPr>
-              <a:t>Demonstrate collective accountability by assigning ownership for verifying critical conditions.</a:t>
+              <a:t>Assign and coordinate executive accountability for validating strategic conditions.</a:t>
             </a:r>
             <a:endParaRPr lang="en-US" sz="2400" dirty="0"/>
           </a:p>
@@ -17456,7 +17456,7 @@
                 <a:ea typeface="Calibri" pitchFamily="34" charset="-122"/>
                 <a:cs typeface="Calibri" pitchFamily="34" charset="-120"/>
               </a:rPr>
-              <a:t>Recognise why well-formulated objectives can still lack strategic credibility.</a:t>
+              <a:t>Assess whether measurable objectives are also strategically credible.</a:t>
             </a:r>
             <a:endParaRPr lang="en-US" sz="2400" dirty="0"/>
           </a:p>
@@ -17551,7 +17551,7 @@
                 <a:ea typeface="Calibri" pitchFamily="34" charset="-122"/>
                 <a:cs typeface="Calibri" pitchFamily="34" charset="-120"/>
               </a:rPr>
-              <a:t>Distinguish objectives that are measurable from those that are strategically coherent.</a:t>
+              <a:t>Evaluate objectives against customer value, strategic boundaries and competitive realities.</a:t>
             </a:r>
             <a:endParaRPr lang="en-US" sz="2400" dirty="0"/>
           </a:p>

--- a/Unit decks/Unit 04 - Direction Integrity (ABCV-MBT).pptx
+++ b/Unit decks/Unit 04 - Direction Integrity (ABCV-MBT).pptx
@@ -401,13 +401,13 @@
           <a:p>
             <a:r>
               <a:rPr lang="en-GB" dirty="0"/>
-              <a:t>3. Section 5 on the portal is group work for the Capstone. The group agrees each entry and one member acts as scribe.</a:t>
-            </a:r>
-          </a:p>
-          <a:p>
-            <a:r>
-              <a:rPr lang="en-GB" dirty="0"/>
-              <a:t>Every member then types the agreed entries into their own page.</a:t>
+              <a:t>3. Section 5 on the portal is group work for the Capstone. The group chooses its scribe for this work.</a:t>
+            </a:r>
+          </a:p>
+          <a:p>
+            <a:r>
+              <a:rPr lang="en-GB" dirty="0"/>
+              <a:t>The scribe types what the group agrees, the entries appear on every member’s page, and each member then selects Agree.</a:t>
             </a:r>
           </a:p>
           <a:p>
@@ -4454,13 +4454,13 @@
           <a:p>
             <a:r>
               <a:rPr lang="en-GB" dirty="0"/>
-              <a:t>One member acts as scribe and types the agreed wording.</a:t>
-            </a:r>
-          </a:p>
-          <a:p>
-            <a:r>
-              <a:rPr lang="en-GB" dirty="0"/>
-              <a:t>Every member then types the agreed entries into their own page, in the session or after it."</a:t>
+              <a:t>The group chooses its scribe, who types the agreed wording.</a:t>
+            </a:r>
+          </a:p>
+          <a:p>
+            <a:r>
+              <a:rPr lang="en-GB" dirty="0"/>
+              <a:t>The entries appear on every member’s page, and each member then selects Agree."</a:t>
             </a:r>
           </a:p>
           <a:p>

--- a/Unit decks/Unit 04 - Direction Integrity (ABCV-MBT).pptx
+++ b/Unit decks/Unit 04 - Direction Integrity (ABCV-MBT).pptx
@@ -36,6 +36,7 @@
     <p:sldId id="283" r:id="rId24"/>
     <p:sldId id="284" r:id="rId25"/>
     <p:sldId id="286" r:id="rId26"/>
+    <p:sldId id="294" r:id="rId36"/>
     <p:sldId id="290" r:id="rId30"/>
   </p:sldIdLst>
   <p:sldSz cx="12192000" cy="6858000"/>
@@ -2944,106 +2945,112 @@
           <a:lstStyle/>
           <a:p>
             <a:r>
-              <a:rPr lang="en-GB" b="1" dirty="0"/>
+              <a:rPr lang="en-GB"/>
               <a:t>SECTION 5 · APPLICATION — IN PRACTICE</a:t>
             </a:r>
           </a:p>
           <a:p>
-            <a:endParaRPr lang="en-GB" dirty="0"/>
-          </a:p>
-          <a:p>
-            <a:r>
-              <a:rPr lang="en-GB" b="1" dirty="0"/>
+            <a:endParaRPr lang="en-GB"/>
+          </a:p>
+          <a:p>
+            <a:r>
+              <a:rPr lang="en-GB"/>
               <a:t>HOW THIS SECTION RUNS:</a:t>
             </a:r>
           </a:p>
           <a:p>
             <a:r>
-              <a:rPr lang="en-GB" dirty="0"/>
+              <a:rPr lang="en-GB"/>
               <a:t>1. 5.1: the worked example. One Key Result of the client services company from Unit 3, taken through four steps, on six slides.</a:t>
             </a:r>
           </a:p>
           <a:p>
             <a:r>
-              <a:rPr lang="en-GB" dirty="0"/>
+              <a:rPr lang="en-GB"/>
               <a:t>2. 5.2: the briefing for the Capstone work. Each group takes its own Unit 3 Key Results through the same four steps.</a:t>
             </a:r>
           </a:p>
           <a:p>
-            <a:endParaRPr lang="en-GB" dirty="0"/>
-          </a:p>
-          <a:p>
-            <a:r>
-              <a:rPr lang="en-GB" b="1" dirty="0"/>
+            <a:r>
+              <a:rPr lang="en-GB"/>
+              <a:t>3. 5.3: verification ownership and the executive blind spot. The group assigns each critical condition to an executive and names the checkpoint its team is most likely to overlook.</a:t>
+            </a:r>
+          </a:p>
+          <a:p>
+            <a:endParaRPr lang="en-GB"/>
+          </a:p>
+          <a:p>
+            <a:r>
+              <a:rPr lang="en-GB"/>
               <a:t>SECTION LEARNING OUTCOMES:</a:t>
             </a:r>
           </a:p>
           <a:p>
             <a:r>
-              <a:rPr lang="en-GB" dirty="0"/>
+              <a:rPr lang="en-GB"/>
               <a:t>1. Validate the critical assumptions, dependencies and uncertainties behind strategic objectives.</a:t>
             </a:r>
           </a:p>
           <a:p>
             <a:r>
-              <a:rPr lang="en-GB" dirty="0"/>
+              <a:rPr lang="en-GB"/>
               <a:t>2. Assign and coordinate executive accountability for validating strategic conditions.</a:t>
             </a:r>
           </a:p>
           <a:p>
-            <a:endParaRPr lang="en-GB" dirty="0"/>
-          </a:p>
-          <a:p>
-            <a:r>
-              <a:rPr lang="en-GB" b="1" dirty="0"/>
+            <a:endParaRPr lang="en-GB"/>
+          </a:p>
+          <a:p>
+            <a:r>
+              <a:rPr lang="en-GB"/>
               <a:t>HOW TO OPEN THE SECTION:</a:t>
             </a:r>
           </a:p>
           <a:p>
-            <a:endParaRPr lang="en-GB" dirty="0"/>
-          </a:p>
-          <a:p>
-            <a:r>
-              <a:rPr lang="en-GB" b="1" dirty="0"/>
+            <a:endParaRPr lang="en-GB"/>
+          </a:p>
+          <a:p>
+            <a:r>
+              <a:rPr lang="en-GB"/>
               <a:t>1. Say what the section does.</a:t>
             </a:r>
           </a:p>
           <a:p>
             <a:r>
-              <a:rPr lang="en-GB" dirty="0"/>
+              <a:rPr lang="en-GB"/>
               <a:t>Say: "This is where the checkpoints are applied to your own direction.</a:t>
             </a:r>
           </a:p>
           <a:p>
             <a:r>
-              <a:rPr lang="en-GB" dirty="0"/>
+              <a:rPr lang="en-GB"/>
               <a:t>Your group brings in the Key Results it confirmed in Unit 3 and takes each one through four steps.</a:t>
             </a:r>
           </a:p>
           <a:p>
             <a:r>
-              <a:rPr lang="en-GB" dirty="0"/>
+              <a:rPr lang="en-GB"/>
               <a:t>At each step it names the condition that must remain true."</a:t>
             </a:r>
           </a:p>
           <a:p>
             <a:r>
-              <a:rPr lang="en-GB" dirty="0"/>
+              <a:rPr lang="en-GB"/>
               <a:t>This is Capstone work: the confirmed outputs feed each team’s Capstone Blueprint.</a:t>
             </a:r>
           </a:p>
           <a:p>
-            <a:endParaRPr lang="en-GB" dirty="0"/>
-          </a:p>
-          <a:p>
-            <a:r>
-              <a:rPr lang="en-GB" b="1" dirty="0"/>
+            <a:endParaRPr lang="en-GB"/>
+          </a:p>
+          <a:p>
+            <a:r>
+              <a:rPr lang="en-GB"/>
               <a:t>2. Say the order.</a:t>
             </a:r>
           </a:p>
           <a:p>
             <a:r>
-              <a:rPr lang="en-GB" dirty="0"/>
+              <a:rPr lang="en-GB"/>
               <a:t>Say: "We first walk one worked example in full. Your exercise then follows the worked example step for step."</a:t>
             </a:r>
           </a:p>
@@ -4423,303 +4430,271 @@
           <a:lstStyle/>
           <a:p>
             <a:r>
-              <a:rPr lang="en-GB" b="1" dirty="0"/>
+              <a:rPr lang="en-GB"/>
               <a:t>5.2 — STRESS-TESTING YOUR KEY RESULTS · THE FOUR STEPS (CAPSTONE WORK)</a:t>
             </a:r>
           </a:p>
           <a:p>
-            <a:endParaRPr lang="en-GB" dirty="0"/>
-          </a:p>
-          <a:p>
-            <a:r>
-              <a:rPr lang="en-GB" b="1" dirty="0"/>
+            <a:endParaRPr lang="en-GB"/>
+          </a:p>
+          <a:p>
+            <a:r>
+              <a:rPr lang="en-GB"/>
               <a:t>HOW TO TEACH IT:</a:t>
             </a:r>
           </a:p>
           <a:p>
-            <a:endParaRPr lang="en-GB" b="1" dirty="0"/>
-          </a:p>
-          <a:p>
-            <a:r>
-              <a:rPr lang="en-GB" b="1" dirty="0"/>
+            <a:endParaRPr lang="en-GB"/>
+          </a:p>
+          <a:p>
+            <a:r>
+              <a:rPr lang="en-GB"/>
               <a:t>Explain how the group works, using the four lines on the slide.</a:t>
             </a:r>
           </a:p>
           <a:p>
             <a:r>
-              <a:rPr lang="en-GB" dirty="0"/>
+              <a:rPr lang="en-GB"/>
               <a:t>Say: "Your group agrees each entry.</a:t>
             </a:r>
           </a:p>
           <a:p>
             <a:r>
-              <a:rPr lang="en-GB" dirty="0"/>
+              <a:rPr lang="en-GB"/>
               <a:t>The group chooses its scribe, who types the agreed wording.</a:t>
             </a:r>
           </a:p>
           <a:p>
             <a:r>
-              <a:rPr lang="en-GB" dirty="0"/>
+              <a:rPr lang="en-GB"/>
               <a:t>The entries appear on every member’s page, and each member then selects Agree."</a:t>
             </a:r>
           </a:p>
           <a:p>
-            <a:endParaRPr lang="en-GB" dirty="0"/>
-          </a:p>
-          <a:p>
-            <a:r>
-              <a:rPr lang="en-GB" b="1" dirty="0"/>
+            <a:endParaRPr lang="en-GB"/>
+          </a:p>
+          <a:p>
+            <a:r>
+              <a:rPr lang="en-GB"/>
               <a:t>Say what the group works on.</a:t>
             </a:r>
           </a:p>
           <a:p>
             <a:r>
-              <a:rPr lang="en-GB" dirty="0"/>
+              <a:rPr lang="en-GB"/>
               <a:t>Say: "Your group does for its own Key Results what the worked example did.</a:t>
             </a:r>
           </a:p>
           <a:p>
             <a:r>
-              <a:rPr lang="en-GB" dirty="0"/>
+              <a:rPr lang="en-GB"/>
               <a:t>Your confirmed Key Results from Unit 3 are already listed on your page.</a:t>
             </a:r>
           </a:p>
           <a:p>
             <a:r>
-              <a:rPr lang="en-GB" dirty="0"/>
+              <a:rPr lang="en-GB"/>
               <a:t>No new objective or measure is added."</a:t>
             </a:r>
           </a:p>
           <a:p>
-            <a:endParaRPr lang="en-GB" dirty="0"/>
-          </a:p>
-          <a:p>
-            <a:r>
-              <a:rPr lang="en-GB" b="1" dirty="0"/>
-              <a:t>Say when the work is confirmed.</a:t>
-            </a:r>
-          </a:p>
-          <a:p>
-            <a:r>
-              <a:rPr lang="en-GB" dirty="0"/>
-              <a:t>Say: "When every Key Result has been taken through the four steps, each of you confirms the record."</a:t>
-            </a:r>
-          </a:p>
-          <a:p>
-            <a:endParaRPr lang="en-GB" b="1" dirty="0"/>
-          </a:p>
-          <a:p>
-            <a:endParaRPr lang="en-GB" dirty="0"/>
-          </a:p>
-          <a:p>
-            <a:r>
-              <a:rPr lang="en-GB" b="1" dirty="0"/>
+            <a:endParaRPr lang="en-GB"/>
+          </a:p>
+          <a:p>
+            <a:r>
+              <a:rPr lang="en-GB"/>
+              <a:t>Say what follows.</a:t>
+            </a:r>
+          </a:p>
+          <a:p>
+            <a:r>
+              <a:rPr lang="en-GB"/>
+              <a:t>Say: "When every Key Result has been taken through the four steps, your group goes on to 5.3."</a:t>
+            </a:r>
+          </a:p>
+          <a:p>
+            <a:endParaRPr lang="en-GB"/>
+          </a:p>
+          <a:p>
+            <a:endParaRPr lang="en-GB"/>
+          </a:p>
+          <a:p>
+            <a:r>
+              <a:rPr lang="en-GB"/>
               <a:t>Walk the four steps on the slide. Each one is taken for one Key Result at a time.</a:t>
             </a:r>
           </a:p>
           <a:p>
-            <a:pPr marL="171450" indent="-171450">
-              <a:buFontTx/>
-              <a:buChar char="-"/>
-            </a:pPr>
-            <a:r>
-              <a:rPr lang="en-GB" dirty="0"/>
+            <a:r>
+              <a:rPr lang="en-GB"/>
               <a:t>Step 1 · Define the Arena. The group says which customer need the Key Result serves, at three depths (functional, experiential, consequential). Then names what must remain true about that need.</a:t>
             </a:r>
           </a:p>
           <a:p>
-            <a:pPr marL="171450" indent="-171450">
-              <a:buFontTx/>
-              <a:buChar char="-"/>
-            </a:pPr>
-            <a:endParaRPr lang="en-GB" dirty="0"/>
-          </a:p>
-          <a:p>
-            <a:pPr marL="171450" indent="-171450">
-              <a:buFontTx/>
-              <a:buChar char="-"/>
-            </a:pPr>
-            <a:r>
-              <a:rPr lang="en-GB" dirty="0"/>
+            <a:endParaRPr lang="en-GB"/>
+          </a:p>
+          <a:p>
+            <a:r>
+              <a:rPr lang="en-GB"/>
               <a:t>Step 2 · Understand the Boundaries. The group lists the boundaries material enough to slow, restrict or prevent delivery of the Key Result, with the kind of each and whether it must be accepted, can be influenced or was created by the organisation itself. Then it names what must remain true for delivery.</a:t>
             </a:r>
           </a:p>
           <a:p>
-            <a:pPr marL="171450" indent="-171450">
-              <a:buFontTx/>
-              <a:buChar char="-"/>
-            </a:pPr>
-            <a:endParaRPr lang="en-GB" dirty="0"/>
-          </a:p>
-          <a:p>
-            <a:pPr marL="171450" indent="-171450">
-              <a:buFontTx/>
-              <a:buChar char="-"/>
-            </a:pPr>
-            <a:r>
-              <a:rPr lang="en-GB" dirty="0"/>
+            <a:endParaRPr lang="en-GB"/>
+          </a:p>
+          <a:p>
+            <a:r>
+              <a:rPr lang="en-GB"/>
               <a:t>Step 3 · See the Competition. The group lists who or what else can give the customer what the Key Result delivers, including alternatives outside the industry and doing nothing. Then it names what must remain true about its advantage.</a:t>
             </a:r>
           </a:p>
           <a:p>
-            <a:pPr marL="171450" indent="-171450">
-              <a:buFontTx/>
-              <a:buChar char="-"/>
-            </a:pPr>
-            <a:endParaRPr lang="en-GB" dirty="0"/>
-          </a:p>
-          <a:p>
-            <a:pPr marL="171450" indent="-171450">
-              <a:buFontTx/>
-              <a:buChar char="-"/>
-            </a:pPr>
-            <a:r>
-              <a:rPr lang="en-GB" dirty="0"/>
+            <a:endParaRPr lang="en-GB"/>
+          </a:p>
+          <a:p>
+            <a:r>
+              <a:rPr lang="en-GB"/>
               <a:t>Step 4 · Establish the Value Proposition. The group says what about the Key Result will make customers choose the organisation, using the three tests (relevant, distinctive, deliverable). Then it names what must remain true about its value architecture.</a:t>
             </a:r>
           </a:p>
           <a:p>
-            <a:pPr marL="0" indent="0">
-              <a:buFontTx/>
-              <a:buNone/>
-            </a:pPr>
-            <a:endParaRPr lang="en-GB" dirty="0"/>
-          </a:p>
-          <a:p>
-            <a:endParaRPr lang="en-GB" dirty="0"/>
-          </a:p>
-          <a:p>
-            <a:r>
-              <a:rPr lang="en-GB" b="1" dirty="0"/>
+            <a:endParaRPr lang="en-GB"/>
+          </a:p>
+          <a:p>
+            <a:endParaRPr lang="en-GB"/>
+          </a:p>
+          <a:p>
+            <a:r>
+              <a:rPr lang="en-GB"/>
               <a:t>2. Say how the questions read on the page.</a:t>
             </a:r>
           </a:p>
           <a:p>
             <a:r>
-              <a:rPr lang="en-GB" dirty="0"/>
+              <a:rPr lang="en-GB"/>
               <a:t>Say: "On your page every question names your own Key Result, word for word. You answer about that Key Result and no other."</a:t>
             </a:r>
           </a:p>
           <a:p>
-            <a:endParaRPr lang="en-GB" dirty="0"/>
-          </a:p>
-          <a:p>
-            <a:r>
-              <a:rPr lang="en-GB" b="1" dirty="0"/>
+            <a:endParaRPr lang="en-GB"/>
+          </a:p>
+          <a:p>
+            <a:r>
+              <a:rPr lang="en-GB"/>
               <a:t>3. Set the standard for a condition.</a:t>
             </a:r>
           </a:p>
           <a:p>
             <a:r>
-              <a:rPr lang="en-GB" dirty="0"/>
+              <a:rPr lang="en-GB"/>
               <a:t>Say: "The condition your group names must be specific enough that someone else could attempt to verify it.</a:t>
             </a:r>
           </a:p>
           <a:p>
             <a:r>
-              <a:rPr lang="en-GB" dirty="0"/>
+              <a:rPr lang="en-GB"/>
               <a:t>“The market must support us” becomes a condition once it names what must be true, for whom and by when.</a:t>
             </a:r>
           </a:p>
           <a:p>
             <a:r>
-              <a:rPr lang="en-GB" dirty="0"/>
+              <a:rPr lang="en-GB"/>
               <a:t>"</a:t>
             </a:r>
           </a:p>
           <a:p>
             <a:r>
-              <a:rPr lang="en-GB" dirty="0"/>
+              <a:rPr lang="en-GB"/>
               <a:t>How each condition is written: as a statement that is either true or false. The group restates a risk or a concern as the condition that must hold.</a:t>
             </a:r>
           </a:p>
           <a:p>
             <a:r>
-              <a:rPr lang="en-GB" dirty="0"/>
+              <a:rPr lang="en-GB"/>
               <a:t>Where a group cannot name a condition: the Key Result itself may be insufficiently grounded. The group asks itself what that tells it about the Key Result.</a:t>
             </a:r>
           </a:p>
           <a:p>
             <a:r>
-              <a:rPr lang="en-GB" dirty="0"/>
+              <a:rPr lang="en-GB"/>
               <a:t>Ask: "If you cannot name a Must-Be-True, what does that tell you about this Key Result?"</a:t>
             </a:r>
           </a:p>
           <a:p>
-            <a:endParaRPr lang="en-GB" dirty="0"/>
-          </a:p>
-          <a:p>
-            <a:endParaRPr lang="en-GB" dirty="0"/>
-          </a:p>
-          <a:p>
-            <a:r>
-              <a:rPr lang="en-GB" b="1" dirty="0"/>
-              <a:t>Close the section with the commitment question.</a:t>
-            </a:r>
-          </a:p>
-          <a:p>
-            <a:r>
-              <a:rPr lang="en-GB" dirty="0"/>
+            <a:endParaRPr lang="en-GB"/>
+          </a:p>
+          <a:p>
+            <a:endParaRPr lang="en-GB"/>
+          </a:p>
+          <a:p>
+            <a:r>
+              <a:rPr lang="en-GB"/>
+              <a:t>Lead into 5.3 with the question it answers.</a:t>
+            </a:r>
+          </a:p>
+          <a:p>
+            <a:r>
+              <a:rPr lang="en-GB"/>
               <a:t>Ask: "Which one MBT condition, if left unverified, represents the greatest risk to our strategy’s integrity? Who is responsible for that verification?"</a:t>
             </a:r>
           </a:p>
           <a:p>
-            <a:endParaRPr lang="en-GB" dirty="0"/>
-          </a:p>
-          <a:p>
-            <a:r>
-              <a:rPr lang="en-GB" b="1" dirty="0"/>
+            <a:endParaRPr lang="en-GB"/>
+          </a:p>
+          <a:p>
+            <a:r>
+              <a:rPr lang="en-GB"/>
               <a:t>ON THE PORTAL, AFTER THE TEACHING:</a:t>
             </a:r>
           </a:p>
           <a:p>
             <a:r>
-              <a:rPr lang="en-GB" dirty="0"/>
+              <a:rPr lang="en-GB"/>
               <a:t>Participants work in their groups in 5.2 of the participant file. This is Capstone work.</a:t>
             </a:r>
           </a:p>
           <a:p>
             <a:r>
-              <a:rPr lang="en-GB" dirty="0"/>
+              <a:rPr lang="en-GB"/>
               <a:t>1. The group’s confirmed Key Results from Unit 3 are listed in 5.2.</a:t>
             </a:r>
           </a:p>
           <a:p>
             <a:r>
-              <a:rPr lang="en-GB" dirty="0"/>
+              <a:rPr lang="en-GB"/>
               <a:t>2. The group takes one Key Result through the four steps and names the condition at each step.</a:t>
             </a:r>
           </a:p>
           <a:p>
             <a:r>
-              <a:rPr lang="en-GB" dirty="0"/>
+              <a:rPr lang="en-GB"/>
               <a:t>3. The group takes the next Key Result through the same four steps, until every Key Result is complete.</a:t>
             </a:r>
           </a:p>
           <a:p>
             <a:r>
-              <a:rPr lang="en-GB" dirty="0"/>
-              <a:t>4. A record shows the condition named at each step for every Key Result. Each participant confirms the record. Print gives a copy.</a:t>
-            </a:r>
-          </a:p>
-          <a:p>
-            <a:endParaRPr lang="en-GB" dirty="0"/>
-          </a:p>
-          <a:p>
-            <a:r>
-              <a:rPr lang="en-GB" b="1" dirty="0"/>
+              <a:rPr lang="en-GB"/>
+              <a:t>4. A record shows the condition named at each step for every Key Result. The group then goes on to 5.3.</a:t>
+            </a:r>
+          </a:p>
+          <a:p>
+            <a:endParaRPr lang="en-GB"/>
+          </a:p>
+          <a:p>
+            <a:r>
+              <a:rPr lang="en-GB"/>
               <a:t>AFTER THE SESSION:</a:t>
             </a:r>
           </a:p>
           <a:p>
             <a:r>
-              <a:rPr lang="en-GB" dirty="0"/>
+              <a:rPr lang="en-GB"/>
               <a:t>The record reaches you with each participant’s submission, under the heading ABCV–MBT: Stress-Testing the Key Results.</a:t>
             </a:r>
           </a:p>
           <a:p>
             <a:r>
-              <a:rPr lang="en-GB" dirty="0"/>
+              <a:rPr lang="en-GB"/>
               <a:t>The confirmed conditions feed boxes 4A to 4D of the team’s Capstone Blueprint.</a:t>
             </a:r>
           </a:p>
@@ -5402,161 +5377,161 @@
           <a:lstStyle/>
           <a:p>
             <a:r>
-              <a:rPr lang="en-GB" b="1" dirty="0"/>
+              <a:rPr lang="en-GB"/>
               <a:t>UNIT SUMMARY (UNIT 4 SYNTHESIS)</a:t>
             </a:r>
           </a:p>
           <a:p>
-            <a:endParaRPr lang="en-GB" dirty="0"/>
-          </a:p>
-          <a:p>
-            <a:r>
-              <a:rPr lang="en-GB" b="1" dirty="0"/>
+            <a:endParaRPr lang="en-GB"/>
+          </a:p>
+          <a:p>
+            <a:r>
+              <a:rPr lang="en-GB"/>
               <a:t>HOW TO TEACH IT:</a:t>
             </a:r>
           </a:p>
           <a:p>
-            <a:endParaRPr lang="en-GB" dirty="0"/>
-          </a:p>
-          <a:p>
-            <a:r>
-              <a:rPr lang="en-GB" b="1" dirty="0"/>
+            <a:endParaRPr lang="en-GB"/>
+          </a:p>
+          <a:p>
+            <a:r>
+              <a:rPr lang="en-GB"/>
               <a:t>1. Recap the unit, section by section.</a:t>
             </a:r>
           </a:p>
           <a:p>
             <a:r>
-              <a:rPr lang="en-GB" dirty="0"/>
+              <a:rPr lang="en-GB"/>
               <a:t>Say: "This session was about ensuring strategic direction is structurally sound before the first move of execution is made.</a:t>
             </a:r>
           </a:p>
           <a:p>
             <a:r>
-              <a:rPr lang="en-GB" dirty="0"/>
+              <a:rPr lang="en-GB"/>
               <a:t>The ABCV–MBT framework served as our strategic integrity filter."</a:t>
             </a:r>
           </a:p>
           <a:p>
             <a:r>
-              <a:rPr lang="en-GB" dirty="0"/>
+              <a:rPr lang="en-GB"/>
               <a:t>- 1 · Awareness: a well-written OKR can still rest on unnamed conditions. ABCV examines the strategic logic at four checkpoints, and a Must-Be-True condition at each makes the underlying assumption explicit.</a:t>
             </a:r>
           </a:p>
           <a:p>
             <a:r>
-              <a:rPr lang="en-GB" dirty="0"/>
+              <a:rPr lang="en-GB"/>
               <a:t>- 2 · Intelligence: industry knowledge becomes a frame, and three reinforcing traps (Familiarity, Exclusion and Complacency) turn that frame into the boundary of the world leaders examine.</a:t>
             </a:r>
           </a:p>
           <a:p>
             <a:r>
-              <a:rPr lang="en-GB" dirty="0"/>
+              <a:rPr lang="en-GB"/>
               <a:t>- 3 · Extrapolating: every executive role sees through a specialised perspective, and each has a checkpoint it most often overlooks.</a:t>
             </a:r>
           </a:p>
           <a:p>
             <a:r>
-              <a:rPr lang="en-GB" dirty="0"/>
-              <a:t>- 4 · Integration: each group takes the Key Results it confirmed in Unit 3 through four steps and names the condition that must remain true at each step.</a:t>
-            </a:r>
-          </a:p>
-          <a:p>
-            <a:r>
-              <a:rPr lang="en-GB" dirty="0"/>
-              <a:t>- 5 · Application: in Cause of Death each participant tests four failed strategies against the Industry Illusion.</a:t>
-            </a:r>
-          </a:p>
-          <a:p>
-            <a:endParaRPr lang="en-GB" dirty="0"/>
-          </a:p>
-          <a:p>
-            <a:r>
-              <a:rPr lang="en-GB" b="1" dirty="0"/>
+              <a:rPr lang="en-GB"/>
+              <a:t>- 4 · Integration: in Cause of Death each participant tests four failed strategies against the Industry Illusion.</a:t>
+            </a:r>
+          </a:p>
+          <a:p>
+            <a:r>
+              <a:rPr lang="en-GB"/>
+              <a:t>- 5 · Application: each group takes the Key Results it confirmed in Unit 3 through four steps, names the condition that must remain true at each step, assigns each critical condition to an executive and names the checkpoint its team is most likely to overlook.</a:t>
+            </a:r>
+          </a:p>
+          <a:p>
+            <a:endParaRPr lang="en-GB"/>
+          </a:p>
+          <a:p>
+            <a:r>
+              <a:rPr lang="en-GB"/>
               <a:t>2. Ask the closing question on the slide.</a:t>
             </a:r>
           </a:p>
           <a:p>
             <a:r>
-              <a:rPr lang="en-GB" dirty="0"/>
+              <a:rPr lang="en-GB"/>
               <a:t>Ask: "What is the one MBT condition your team is most likely to avoid naming? Why? And what will you do about it before the next strategic review?"</a:t>
             </a:r>
           </a:p>
           <a:p>
             <a:r>
-              <a:rPr lang="en-GB" dirty="0"/>
+              <a:rPr lang="en-GB"/>
               <a:t>Take an answer from each group.</a:t>
             </a:r>
           </a:p>
           <a:p>
-            <a:endParaRPr lang="en-GB" dirty="0"/>
-          </a:p>
-          <a:p>
-            <a:r>
-              <a:rPr lang="en-GB" b="1" dirty="0"/>
+            <a:endParaRPr lang="en-GB"/>
+          </a:p>
+          <a:p>
+            <a:r>
+              <a:rPr lang="en-GB"/>
               <a:t>3. Close the unit.</a:t>
             </a:r>
           </a:p>
           <a:p>
             <a:r>
-              <a:rPr lang="en-GB" dirty="0"/>
+              <a:rPr lang="en-GB"/>
               <a:t>Say: "The ABCV–MBT checkpoints turn your OKRs from polished aspirations into resilient execution signals, grounded in the hard realities of the enterprise system."</a:t>
             </a:r>
           </a:p>
           <a:p>
-            <a:endParaRPr lang="en-GB" dirty="0"/>
-          </a:p>
-          <a:p>
-            <a:r>
-              <a:rPr lang="en-GB" b="1" dirty="0"/>
+            <a:endParaRPr lang="en-GB"/>
+          </a:p>
+          <a:p>
+            <a:r>
+              <a:rPr lang="en-GB"/>
               <a:t>4. Say what happens on the portal.</a:t>
             </a:r>
           </a:p>
           <a:p>
             <a:r>
-              <a:rPr lang="en-GB" dirty="0"/>
+              <a:rPr lang="en-GB"/>
               <a:t>Say: "You now complete the unit on the portal: your reflections, your own Industry Illusion game, your group’s work in Section 5, Cause of Death and your closing commitment.</a:t>
             </a:r>
           </a:p>
           <a:p>
             <a:r>
-              <a:rPr lang="en-GB" dirty="0"/>
+              <a:rPr lang="en-GB"/>
               <a:t>When your page is complete, you submit the unit."</a:t>
             </a:r>
           </a:p>
           <a:p>
-            <a:endParaRPr lang="en-GB" dirty="0"/>
-          </a:p>
-          <a:p>
-            <a:r>
-              <a:rPr lang="en-GB" b="1" dirty="0"/>
+            <a:endParaRPr lang="en-GB"/>
+          </a:p>
+          <a:p>
+            <a:r>
+              <a:rPr lang="en-GB"/>
               <a:t>ON THE PORTAL, AFTER THE TEACHING:</a:t>
             </a:r>
           </a:p>
           <a:p>
             <a:r>
-              <a:rPr lang="en-GB" dirty="0"/>
+              <a:rPr lang="en-GB"/>
               <a:t>Participants complete every part of the participant file and submit the unit to the facilitator from the end of Section 4.</a:t>
             </a:r>
           </a:p>
           <a:p>
-            <a:endParaRPr lang="en-GB" dirty="0"/>
-          </a:p>
-          <a:p>
-            <a:r>
-              <a:rPr lang="en-GB" b="1" dirty="0"/>
+            <a:endParaRPr lang="en-GB"/>
+          </a:p>
+          <a:p>
+            <a:r>
+              <a:rPr lang="en-GB"/>
               <a:t>AFTER THE SESSION:</a:t>
             </a:r>
           </a:p>
           <a:p>
             <a:r>
-              <a:rPr lang="en-GB" dirty="0"/>
+              <a:rPr lang="en-GB"/>
               <a:t>Each submission reaches you in the facilitator dashboard.</a:t>
             </a:r>
           </a:p>
           <a:p>
             <a:r>
-              <a:rPr lang="en-GB" dirty="0"/>
-              <a:t>The confirmed Must-Be-True conditions feed boxes 4A to 4D of the team’s Capstone Blueprint.</a:t>
+              <a:rPr lang="en-GB"/>
+              <a:t>The group’s agreed Section 5 work feeds boxes 4A to 4F of the team’s Capstone Blueprint.</a:t>
             </a:r>
           </a:p>
         </p:txBody>
@@ -5829,6 +5804,235 @@
         <p14:creationId xmlns:p14="http://schemas.microsoft.com/office/powerpoint/2010/main" val="1024086991"/>
       </p:ext>
     </p:extLst>
+  </p:cSld>
+  <p:clrMapOvr>
+    <a:masterClrMapping/>
+  </p:clrMapOvr>
+</p:notes>
+</file>
+
+<file path=ppt/notesSlides/notesSlide30.xml><?xml version="1.0" encoding="utf-8"?>
+<p:notes xmlns:a="http://schemas.openxmlformats.org/drawingml/2006/main" xmlns:p="http://schemas.openxmlformats.org/presentationml/2006/main" xmlns:r="http://schemas.openxmlformats.org/officeDocument/2006/relationships">
+  <p:cSld>
+    <p:spTree>
+      <p:nvGrpSpPr>
+        <p:cNvPr id="1" name=""/>
+        <p:cNvGrpSpPr/>
+        <p:nvPr/>
+      </p:nvGrpSpPr>
+      <p:grpSpPr>
+        <a:xfrm>
+          <a:off x="0" y="0"/>
+          <a:ext cx="0" cy="0"/>
+          <a:chOff x="0" y="0"/>
+          <a:chExt cx="0" cy="0"/>
+        </a:xfrm>
+      </p:grpSpPr>
+      <p:sp>
+        <p:nvSpPr>
+          <p:cNvPr id="2" name="Slide Image Placeholder 1"/>
+          <p:cNvSpPr>
+            <a:spLocks noGrp="1" noRot="1" noChangeAspect="1"/>
+          </p:cNvSpPr>
+          <p:nvPr>
+            <p:ph type="sldImg"/>
+          </p:nvPr>
+        </p:nvSpPr>
+        <p:spPr/>
+      </p:sp>
+      <p:sp>
+        <p:nvSpPr>
+          <p:cNvPr id="3" name="Notes Placeholder 2"/>
+          <p:cNvSpPr>
+            <a:spLocks noGrp="1"/>
+          </p:cNvSpPr>
+          <p:nvPr>
+            <p:ph type="body" idx="1"/>
+          </p:nvPr>
+        </p:nvSpPr>
+        <p:spPr/>
+        <p:txBody>
+          <a:bodyPr/>
+          <a:lstStyle/>
+          <a:p>
+            <a:r>
+              <a:rPr lang="en-GB"/>
+              <a:t>5.3 — VERIFICATION OWNERSHIP AND EXECUTIVE BLIND SPOTS (CAPSTONE WORK)</a:t>
+            </a:r>
+          </a:p>
+          <a:p>
+            <a:endParaRPr lang="en-GB"/>
+          </a:p>
+          <a:p>
+            <a:r>
+              <a:rPr lang="en-GB"/>
+              <a:t>HOW TO TEACH IT:</a:t>
+            </a:r>
+          </a:p>
+          <a:p>
+            <a:endParaRPr lang="en-GB"/>
+          </a:p>
+          <a:p>
+            <a:r>
+              <a:rPr lang="en-GB"/>
+              <a:t>1. Say why ownership matters.</a:t>
+            </a:r>
+          </a:p>
+          <a:p>
+            <a:r>
+              <a:rPr lang="en-GB"/>
+              <a:t>Say: "Each Must-Be-True condition your group named in 5.2 holds only while someone checks it.</a:t>
+            </a:r>
+          </a:p>
+          <a:p>
+            <a:r>
+              <a:rPr lang="en-GB"/>
+              <a:t>In 5.3 your group assigns each check to an executive."</a:t>
+            </a:r>
+          </a:p>
+          <a:p>
+            <a:endParaRPr lang="en-GB"/>
+          </a:p>
+          <a:p>
+            <a:r>
+              <a:rPr lang="en-GB"/>
+              <a:t>2. Teach verification ownership.</a:t>
+            </a:r>
+          </a:p>
+          <a:p>
+            <a:r>
+              <a:rPr lang="en-GB"/>
+              <a:t>Say: "For each critical condition, name the executive accountable for verifying it, the evidence that will confirm it still holds, and the date of the first check."</a:t>
+            </a:r>
+          </a:p>
+          <a:p>
+            <a:r>
+              <a:rPr lang="en-GB"/>
+              <a:t>One executive owns each check, with evidence someone else could inspect and a date.</a:t>
+            </a:r>
+          </a:p>
+          <a:p>
+            <a:endParaRPr lang="en-GB"/>
+          </a:p>
+          <a:p>
+            <a:r>
+              <a:rPr lang="en-GB"/>
+              <a:t>3. Teach the executive blind spot.</a:t>
+            </a:r>
+          </a:p>
+          <a:p>
+            <a:r>
+              <a:rPr lang="en-GB"/>
+              <a:t>Say: "Section 3 showed that each executive role tends to overlook one checkpoint.</a:t>
+            </a:r>
+          </a:p>
+          <a:p>
+            <a:r>
+              <a:rPr lang="en-GB"/>
+              <a:t>Look around your table: which checkpoint is your executive team most likely to overlook? What is the enterprise risk if it does?"</a:t>
+            </a:r>
+          </a:p>
+          <a:p>
+            <a:endParaRPr lang="en-GB"/>
+          </a:p>
+          <a:p>
+            <a:r>
+              <a:rPr lang="en-GB"/>
+              <a:t>4. Ask the question 5.3 answers.</a:t>
+            </a:r>
+          </a:p>
+          <a:p>
+            <a:r>
+              <a:rPr lang="en-GB"/>
+              <a:t>Ask: "Which one MBT condition, if left unverified, represents the greatest risk to our strategy’s integrity? Who is responsible for that verification?"</a:t>
+            </a:r>
+          </a:p>
+          <a:p>
+            <a:endParaRPr lang="en-GB"/>
+          </a:p>
+          <a:p>
+            <a:r>
+              <a:rPr lang="en-GB"/>
+              <a:t>ON THE PORTAL, AFTER THE TEACHING:</a:t>
+            </a:r>
+          </a:p>
+          <a:p>
+            <a:r>
+              <a:rPr lang="en-GB"/>
+              <a:t>Participants work in their groups in 5.3 of the participant file. This is Capstone work, typed by the group’s scribe.</a:t>
+            </a:r>
+          </a:p>
+          <a:p>
+            <a:r>
+              <a:rPr lang="en-GB"/>
+              <a:t>1. The group reads its Must-Be-True conditions from 5.2, listed in 5.3.</a:t>
+            </a:r>
+          </a:p>
+          <a:p>
+            <a:r>
+              <a:rPr lang="en-GB"/>
+              <a:t>2. For each critical condition, the group names the executive accountable, the evidence and the date of the first check.</a:t>
+            </a:r>
+          </a:p>
+          <a:p>
+            <a:r>
+              <a:rPr lang="en-GB"/>
+              <a:t>3. The group selects the checkpoint its executive team is most likely to overlook, and states the enterprise risk.</a:t>
+            </a:r>
+          </a:p>
+          <a:p>
+            <a:r>
+              <a:rPr lang="en-GB"/>
+              <a:t>4. Each participant reads the record and selects Agree. Print gives a copy of the record.</a:t>
+            </a:r>
+          </a:p>
+          <a:p>
+            <a:endParaRPr lang="en-GB"/>
+          </a:p>
+          <a:p>
+            <a:r>
+              <a:rPr lang="en-GB"/>
+              <a:t>AFTER THE SESSION:</a:t>
+            </a:r>
+          </a:p>
+          <a:p>
+            <a:r>
+              <a:rPr lang="en-GB"/>
+              <a:t>The record reaches you with each participant’s submission, under the heading ABCV–MBT: Stress-Testing the Key Results.</a:t>
+            </a:r>
+          </a:p>
+          <a:p>
+            <a:r>
+              <a:rPr lang="en-GB"/>
+              <a:t>The agreed work feeds boxes 4A to 4F of the team’s Capstone Blueprint: the conditions in 4A to 4D, verification ownership in 4E and the executive blind spot in 4F.</a:t>
+            </a:r>
+          </a:p>
+        </p:txBody>
+      </p:sp>
+      <p:sp>
+        <p:nvSpPr>
+          <p:cNvPr id="4" name="Slide Number Placeholder 3"/>
+          <p:cNvSpPr>
+            <a:spLocks noGrp="1"/>
+          </p:cNvSpPr>
+          <p:nvPr>
+            <p:ph type="sldNum" sz="quarter" idx="10"/>
+          </p:nvPr>
+        </p:nvSpPr>
+        <p:spPr/>
+        <p:txBody>
+          <a:bodyPr/>
+          <a:lstStyle/>
+          <a:p>
+            <a:fld id="{F7021451-1387-4CA6-816F-3879F97B5CBC}" type="slidenum">
+              <a:rPr lang="en-US"/>
+              <a:t>25</a:t>
+            </a:fld>
+            <a:endParaRPr lang="en-US"/>
+          </a:p>
+        </p:txBody>
+      </p:sp>
+    </p:spTree>
   </p:cSld>
   <p:clrMapOvr>
     <a:masterClrMapping/>
@@ -17136,6 +17340,568 @@
               <a:t>— In Practice</a:t>
             </a:r>
             <a:endParaRPr lang="en-US" sz="2800" dirty="0"/>
+          </a:p>
+        </p:txBody>
+      </p:sp>
+    </p:spTree>
+  </p:cSld>
+  <p:clrMapOvr>
+    <a:masterClrMapping/>
+  </p:clrMapOvr>
+</p:sld>
+</file>
+
+<file path=ppt/slides/slide30.xml><?xml version="1.0" encoding="utf-8"?>
+<p:sld xmlns:a="http://schemas.openxmlformats.org/drawingml/2006/main" xmlns:p="http://schemas.openxmlformats.org/presentationml/2006/main" xmlns:r="http://schemas.openxmlformats.org/officeDocument/2006/relationships">
+  <p:cSld>
+    <p:bg>
+      <p:bgPr>
+        <a:solidFill>
+          <a:srgbClr val="FFFFFF"/>
+        </a:solidFill>
+        <a:effectLst/>
+      </p:bgPr>
+    </p:bg>
+    <p:spTree>
+      <p:nvGrpSpPr>
+        <p:cNvPr id="1" name=""/>
+        <p:cNvGrpSpPr/>
+        <p:nvPr/>
+      </p:nvGrpSpPr>
+      <p:grpSpPr/>
+      <p:sp>
+        <p:nvSpPr>
+          <p:cNvPr id="2" name="Text 0"/>
+          <p:cNvSpPr txBox="1"/>
+          <p:nvPr/>
+        </p:nvSpPr>
+        <p:spPr>
+          <a:xfrm>
+            <a:off x="548640" y="411480"/>
+            <a:ext cx="11064240" cy="868680"/>
+          </a:xfrm>
+          <a:prstGeom prst="rect">
+            <a:avLst/>
+          </a:prstGeom>
+          <a:noFill/>
+          <a:ln/>
+        </p:spPr>
+        <p:txBody>
+          <a:bodyPr wrap="square" lIns="0" tIns="0" rIns="0" bIns="0" rtlCol="0" anchor="ctr"/>
+          <a:lstStyle/>
+          <a:p>
+            <a:pPr marL="0" indent="0">
+              <a:buNone/>
+            </a:pPr>
+            <a:r>
+              <a:rPr lang="en-US" sz="3600" b="1" dirty="0">
+                <a:solidFill>
+                  <a:srgbClr val="1A5C2C"/>
+                </a:solidFill>
+                <a:latin typeface="Cambria" pitchFamily="34" charset="0"/>
+                <a:ea typeface="Cambria" pitchFamily="34" charset="-122"/>
+                <a:cs typeface="Cambria" pitchFamily="34" charset="-120"/>
+              </a:rPr>
+              <a:t>5.3 · Verification Ownership and Executive Blind Spots</a:t>
+            </a:r>
+            <a:endParaRPr lang="en-US" sz="3600" dirty="0"/>
+          </a:p>
+        </p:txBody>
+      </p:sp>
+      <p:sp>
+        <p:nvSpPr>
+          <p:cNvPr id="3" name="Shape 1"/>
+          <p:cNvSpPr/>
+          <p:nvPr/>
+        </p:nvSpPr>
+        <p:spPr>
+          <a:xfrm>
+            <a:off x="548640" y="1685925"/>
+            <a:ext cx="640080" cy="640080"/>
+          </a:xfrm>
+          <a:prstGeom prst="ellipse">
+            <a:avLst/>
+          </a:prstGeom>
+          <a:solidFill>
+            <a:srgbClr val="1A5C2C"/>
+          </a:solidFill>
+          <a:ln w="12700">
+            <a:solidFill>
+              <a:srgbClr val="1A5C2C"/>
+            </a:solidFill>
+            <a:prstDash val="solid"/>
+          </a:ln>
+        </p:spPr>
+        <p:txBody>
+          <a:bodyPr/>
+          <a:lstStyle/>
+          <a:p>
+            <a:endParaRPr lang="en-ZA"/>
+          </a:p>
+        </p:txBody>
+      </p:sp>
+      <p:pic>
+        <p:nvPicPr>
+          <p:cNvPr id="4" name="Image 0" descr="preencoded.png"/>
+          <p:cNvPicPr>
+            <a:picLocks noChangeAspect="1"/>
+          </p:cNvPicPr>
+          <p:nvPr/>
+        </p:nvPicPr>
+        <p:blipFill>
+          <a:blip r:embed="rId2"/>
+          <a:stretch>
+            <a:fillRect/>
+          </a:stretch>
+        </p:blipFill>
+        <p:spPr>
+          <a:xfrm>
+            <a:off x="708660" y="1845945"/>
+            <a:ext cx="320040" cy="320040"/>
+          </a:xfrm>
+          <a:prstGeom prst="rect">
+            <a:avLst/>
+          </a:prstGeom>
+        </p:spPr>
+      </p:pic>
+      <p:sp>
+        <p:nvSpPr>
+          <p:cNvPr id="5" name="Text 2"/>
+          <p:cNvSpPr txBox="1"/>
+          <p:nvPr/>
+        </p:nvSpPr>
+        <p:spPr>
+          <a:xfrm>
+            <a:off x="1508760" y="1508760"/>
+            <a:ext cx="10131552" cy="994410"/>
+          </a:xfrm>
+          <a:prstGeom prst="rect">
+            <a:avLst/>
+          </a:prstGeom>
+          <a:noFill/>
+          <a:ln/>
+        </p:spPr>
+        <p:txBody>
+          <a:bodyPr wrap="square" lIns="0" tIns="0" rIns="0" bIns="0" rtlCol="0" anchor="ctr"/>
+          <a:lstStyle/>
+          <a:p>
+            <a:pPr marL="0" indent="0">
+              <a:buNone/>
+            </a:pPr>
+            <a:r>
+              <a:rPr lang="en-US" sz="2400" b="1" dirty="0">
+                <a:solidFill>
+                  <a:srgbClr val="1A5C2C"/>
+                </a:solidFill>
+                <a:latin typeface="Cambria" pitchFamily="34" charset="0"/>
+                <a:ea typeface="Cambria" pitchFamily="34" charset="-122"/>
+                <a:cs typeface="Cambria" pitchFamily="34" charset="-120"/>
+              </a:rPr>
+              <a:t>1 · Read your conditions  </a:t>
+            </a:r>
+            <a:r>
+              <a:rPr lang="en-US" sz="2400" dirty="0">
+                <a:solidFill>
+                  <a:srgbClr val="1F2A22"/>
+                </a:solidFill>
+                <a:latin typeface="Calibri" pitchFamily="34" charset="0"/>
+                <a:ea typeface="Calibri" pitchFamily="34" charset="-122"/>
+                <a:cs typeface="Calibri" pitchFamily="34" charset="-120"/>
+              </a:rPr>
+              <a:t>the Must-Be-True conditions your group named in 5.2</a:t>
+            </a:r>
+            <a:endParaRPr lang="en-US" sz="2400" dirty="0"/>
+          </a:p>
+        </p:txBody>
+      </p:sp>
+      <p:sp>
+        <p:nvSpPr>
+          <p:cNvPr id="6" name="Shape 3"/>
+          <p:cNvSpPr/>
+          <p:nvPr/>
+        </p:nvSpPr>
+        <p:spPr>
+          <a:xfrm>
+            <a:off x="548640" y="2680335"/>
+            <a:ext cx="640080" cy="640080"/>
+          </a:xfrm>
+          <a:prstGeom prst="ellipse">
+            <a:avLst/>
+          </a:prstGeom>
+          <a:solidFill>
+            <a:srgbClr val="1A5C2C"/>
+          </a:solidFill>
+          <a:ln w="12700">
+            <a:solidFill>
+              <a:srgbClr val="1A5C2C"/>
+            </a:solidFill>
+            <a:prstDash val="solid"/>
+          </a:ln>
+        </p:spPr>
+        <p:txBody>
+          <a:bodyPr/>
+          <a:lstStyle/>
+          <a:p>
+            <a:endParaRPr lang="en-ZA"/>
+          </a:p>
+        </p:txBody>
+      </p:sp>
+      <p:pic>
+        <p:nvPicPr>
+          <p:cNvPr id="7" name="Image 1" descr="preencoded.png"/>
+          <p:cNvPicPr>
+            <a:picLocks noChangeAspect="1"/>
+          </p:cNvPicPr>
+          <p:nvPr/>
+        </p:nvPicPr>
+        <p:blipFill>
+          <a:blip r:embed="rId3"/>
+          <a:stretch>
+            <a:fillRect/>
+          </a:stretch>
+        </p:blipFill>
+        <p:spPr>
+          <a:xfrm>
+            <a:off x="708660" y="2840355"/>
+            <a:ext cx="320040" cy="320040"/>
+          </a:xfrm>
+          <a:prstGeom prst="rect">
+            <a:avLst/>
+          </a:prstGeom>
+        </p:spPr>
+      </p:pic>
+      <p:sp>
+        <p:nvSpPr>
+          <p:cNvPr id="8" name="Text 4"/>
+          <p:cNvSpPr txBox="1"/>
+          <p:nvPr/>
+        </p:nvSpPr>
+        <p:spPr>
+          <a:xfrm>
+            <a:off x="1508760" y="2503170"/>
+            <a:ext cx="10131552" cy="994410"/>
+          </a:xfrm>
+          <a:prstGeom prst="rect">
+            <a:avLst/>
+          </a:prstGeom>
+          <a:noFill/>
+          <a:ln/>
+        </p:spPr>
+        <p:txBody>
+          <a:bodyPr wrap="square" lIns="0" tIns="0" rIns="0" bIns="0" rtlCol="0" anchor="ctr"/>
+          <a:lstStyle/>
+          <a:p>
+            <a:pPr marL="0" indent="0">
+              <a:buNone/>
+            </a:pPr>
+            <a:r>
+              <a:rPr lang="en-US" sz="2400" b="1" dirty="0">
+                <a:solidFill>
+                  <a:srgbClr val="1A5C2C"/>
+                </a:solidFill>
+                <a:latin typeface="Cambria" pitchFamily="34" charset="0"/>
+                <a:ea typeface="Cambria" pitchFamily="34" charset="-122"/>
+                <a:cs typeface="Cambria" pitchFamily="34" charset="-120"/>
+              </a:rPr>
+              <a:t>2 · Verification ownership  </a:t>
+            </a:r>
+            <a:r>
+              <a:rPr lang="en-US" sz="2400" dirty="0">
+                <a:solidFill>
+                  <a:srgbClr val="1F2A22"/>
+                </a:solidFill>
+                <a:latin typeface="Calibri" pitchFamily="34" charset="0"/>
+                <a:ea typeface="Calibri" pitchFamily="34" charset="-122"/>
+                <a:cs typeface="Calibri" pitchFamily="34" charset="-120"/>
+              </a:rPr>
+              <a:t>the executive, the evidence and the date of the first check</a:t>
+            </a:r>
+            <a:endParaRPr lang="en-US" sz="2400" dirty="0"/>
+          </a:p>
+        </p:txBody>
+      </p:sp>
+      <p:sp>
+        <p:nvSpPr>
+          <p:cNvPr id="9" name="Shape 5"/>
+          <p:cNvSpPr/>
+          <p:nvPr/>
+        </p:nvSpPr>
+        <p:spPr>
+          <a:xfrm>
+            <a:off x="548640" y="3674745"/>
+            <a:ext cx="640080" cy="640080"/>
+          </a:xfrm>
+          <a:prstGeom prst="ellipse">
+            <a:avLst/>
+          </a:prstGeom>
+          <a:solidFill>
+            <a:srgbClr val="1A5C2C"/>
+          </a:solidFill>
+          <a:ln w="12700">
+            <a:solidFill>
+              <a:srgbClr val="1A5C2C"/>
+            </a:solidFill>
+            <a:prstDash val="solid"/>
+          </a:ln>
+        </p:spPr>
+        <p:txBody>
+          <a:bodyPr/>
+          <a:lstStyle/>
+          <a:p>
+            <a:endParaRPr lang="en-ZA"/>
+          </a:p>
+        </p:txBody>
+      </p:sp>
+      <p:pic>
+        <p:nvPicPr>
+          <p:cNvPr id="10" name="Image 2" descr="preencoded.png"/>
+          <p:cNvPicPr>
+            <a:picLocks noChangeAspect="1"/>
+          </p:cNvPicPr>
+          <p:nvPr/>
+        </p:nvPicPr>
+        <p:blipFill>
+          <a:blip r:embed="rId4"/>
+          <a:stretch>
+            <a:fillRect/>
+          </a:stretch>
+        </p:blipFill>
+        <p:spPr>
+          <a:xfrm>
+            <a:off x="708660" y="3834765"/>
+            <a:ext cx="320040" cy="320040"/>
+          </a:xfrm>
+          <a:prstGeom prst="rect">
+            <a:avLst/>
+          </a:prstGeom>
+        </p:spPr>
+      </p:pic>
+      <p:sp>
+        <p:nvSpPr>
+          <p:cNvPr id="11" name="Text 6"/>
+          <p:cNvSpPr txBox="1"/>
+          <p:nvPr/>
+        </p:nvSpPr>
+        <p:spPr>
+          <a:xfrm>
+            <a:off x="1508760" y="3497580"/>
+            <a:ext cx="10131552" cy="994410"/>
+          </a:xfrm>
+          <a:prstGeom prst="rect">
+            <a:avLst/>
+          </a:prstGeom>
+          <a:noFill/>
+          <a:ln/>
+        </p:spPr>
+        <p:txBody>
+          <a:bodyPr wrap="square" lIns="0" tIns="0" rIns="0" bIns="0" rtlCol="0" anchor="ctr"/>
+          <a:lstStyle/>
+          <a:p>
+            <a:pPr marL="0" indent="0">
+              <a:buNone/>
+            </a:pPr>
+            <a:r>
+              <a:rPr lang="en-US" sz="2400" b="1" dirty="0">
+                <a:solidFill>
+                  <a:srgbClr val="1A5C2C"/>
+                </a:solidFill>
+                <a:latin typeface="Cambria" pitchFamily="34" charset="0"/>
+                <a:ea typeface="Cambria" pitchFamily="34" charset="-122"/>
+                <a:cs typeface="Cambria" pitchFamily="34" charset="-120"/>
+              </a:rPr>
+              <a:t>3 · Executive blind spot  </a:t>
+            </a:r>
+            <a:r>
+              <a:rPr lang="en-US" sz="2400" dirty="0">
+                <a:solidFill>
+                  <a:srgbClr val="1F2A22"/>
+                </a:solidFill>
+                <a:latin typeface="Calibri" pitchFamily="34" charset="0"/>
+                <a:ea typeface="Calibri" pitchFamily="34" charset="-122"/>
+                <a:cs typeface="Calibri" pitchFamily="34" charset="-120"/>
+              </a:rPr>
+              <a:t>the checkpoint your team is most likely to overlook, and the risk</a:t>
+            </a:r>
+            <a:endParaRPr lang="en-US" sz="2400" dirty="0"/>
+          </a:p>
+        </p:txBody>
+      </p:sp>
+      <p:sp>
+        <p:nvSpPr>
+          <p:cNvPr id="12" name="Shape 7"/>
+          <p:cNvSpPr/>
+          <p:nvPr/>
+        </p:nvSpPr>
+        <p:spPr>
+          <a:xfrm>
+            <a:off x="548640" y="4669155"/>
+            <a:ext cx="640080" cy="640080"/>
+          </a:xfrm>
+          <a:prstGeom prst="ellipse">
+            <a:avLst/>
+          </a:prstGeom>
+          <a:solidFill>
+            <a:srgbClr val="1A5C2C"/>
+          </a:solidFill>
+          <a:ln w="12700">
+            <a:solidFill>
+              <a:srgbClr val="1A5C2C"/>
+            </a:solidFill>
+            <a:prstDash val="solid"/>
+          </a:ln>
+        </p:spPr>
+        <p:txBody>
+          <a:bodyPr/>
+          <a:lstStyle/>
+          <a:p>
+            <a:endParaRPr lang="en-ZA"/>
+          </a:p>
+        </p:txBody>
+      </p:sp>
+      <p:pic>
+        <p:nvPicPr>
+          <p:cNvPr id="13" name="Image 3" descr="preencoded.png"/>
+          <p:cNvPicPr>
+            <a:picLocks noChangeAspect="1"/>
+          </p:cNvPicPr>
+          <p:nvPr/>
+        </p:nvPicPr>
+        <p:blipFill>
+          <a:blip r:embed="rId5"/>
+          <a:stretch>
+            <a:fillRect/>
+          </a:stretch>
+        </p:blipFill>
+        <p:spPr>
+          <a:xfrm>
+            <a:off x="708660" y="4829175"/>
+            <a:ext cx="320040" cy="320040"/>
+          </a:xfrm>
+          <a:prstGeom prst="rect">
+            <a:avLst/>
+          </a:prstGeom>
+        </p:spPr>
+      </p:pic>
+      <p:sp>
+        <p:nvSpPr>
+          <p:cNvPr id="14" name="Text 8"/>
+          <p:cNvSpPr txBox="1"/>
+          <p:nvPr/>
+        </p:nvSpPr>
+        <p:spPr>
+          <a:xfrm>
+            <a:off x="1508760" y="4491990"/>
+            <a:ext cx="10131552" cy="994410"/>
+          </a:xfrm>
+          <a:prstGeom prst="rect">
+            <a:avLst/>
+          </a:prstGeom>
+          <a:noFill/>
+          <a:ln/>
+        </p:spPr>
+        <p:txBody>
+          <a:bodyPr wrap="square" lIns="0" tIns="0" rIns="0" bIns="0" rtlCol="0" anchor="ctr"/>
+          <a:lstStyle/>
+          <a:p>
+            <a:pPr marL="0" indent="0">
+              <a:buNone/>
+            </a:pPr>
+            <a:r>
+              <a:rPr lang="en-US" sz="2400" b="1" dirty="0">
+                <a:solidFill>
+                  <a:srgbClr val="1A5C2C"/>
+                </a:solidFill>
+                <a:latin typeface="Cambria" pitchFamily="34" charset="0"/>
+                <a:ea typeface="Cambria" pitchFamily="34" charset="-122"/>
+                <a:cs typeface="Cambria" pitchFamily="34" charset="-120"/>
+              </a:rPr>
+              <a:t>4 · Agree  </a:t>
+            </a:r>
+            <a:r>
+              <a:rPr lang="en-US" sz="2400" dirty="0">
+                <a:solidFill>
+                  <a:srgbClr val="1F2A22"/>
+                </a:solidFill>
+                <a:latin typeface="Calibri" pitchFamily="34" charset="0"/>
+                <a:ea typeface="Calibri" pitchFamily="34" charset="-122"/>
+                <a:cs typeface="Calibri" pitchFamily="34" charset="-120"/>
+              </a:rPr>
+              <a:t>every member agrees; the work feeds boxes 4A to 4F</a:t>
+            </a:r>
+            <a:endParaRPr lang="en-US" sz="2400" dirty="0"/>
+          </a:p>
+        </p:txBody>
+      </p:sp>
+      <p:sp>
+        <p:nvSpPr>
+          <p:cNvPr id="15" name="Shape 9"/>
+          <p:cNvSpPr/>
+          <p:nvPr/>
+        </p:nvSpPr>
+        <p:spPr>
+          <a:xfrm>
+            <a:off x="548640" y="5623560"/>
+            <a:ext cx="11091672" cy="777240"/>
+          </a:xfrm>
+          <a:prstGeom prst="roundRect">
+            <a:avLst>
+              <a:gd name="adj" fmla="val 11765"/>
+            </a:avLst>
+          </a:prstGeom>
+          <a:solidFill>
+            <a:srgbClr val="0F3B1C"/>
+          </a:solidFill>
+          <a:ln w="12700">
+            <a:solidFill>
+              <a:srgbClr val="0F3B1C"/>
+            </a:solidFill>
+            <a:prstDash val="solid"/>
+          </a:ln>
+        </p:spPr>
+        <p:txBody>
+          <a:bodyPr/>
+          <a:lstStyle/>
+          <a:p>
+            <a:endParaRPr lang="en-ZA"/>
+          </a:p>
+        </p:txBody>
+      </p:sp>
+      <p:sp>
+        <p:nvSpPr>
+          <p:cNvPr id="16" name="Text 10"/>
+          <p:cNvSpPr txBox="1"/>
+          <p:nvPr/>
+        </p:nvSpPr>
+        <p:spPr>
+          <a:xfrm>
+            <a:off x="822960" y="5623560"/>
+            <a:ext cx="10607040" cy="777240"/>
+          </a:xfrm>
+          <a:prstGeom prst="rect">
+            <a:avLst/>
+          </a:prstGeom>
+          <a:noFill/>
+          <a:ln/>
+        </p:spPr>
+        <p:txBody>
+          <a:bodyPr wrap="square" lIns="0" tIns="0" rIns="0" bIns="0" rtlCol="0" anchor="ctr"/>
+          <a:lstStyle/>
+          <a:p>
+            <a:pPr marL="0" indent="0">
+              <a:buNone/>
+            </a:pPr>
+            <a:r>
+              <a:rPr lang="en-US" sz="2400" i="1" dirty="0">
+                <a:solidFill>
+                  <a:srgbClr val="FFFFFF"/>
+                </a:solidFill>
+                <a:latin typeface="Calibri" pitchFamily="34" charset="0"/>
+                <a:ea typeface="Calibri" pitchFamily="34" charset="-122"/>
+                <a:cs typeface="Calibri" pitchFamily="34" charset="-120"/>
+              </a:rPr>
+              <a:t>Every condition has an executive who checks it.</a:t>
+            </a:r>
+            <a:endParaRPr lang="en-US" sz="2400" dirty="0"/>
           </a:p>
         </p:txBody>
       </p:sp>

--- a/Unit decks/Unit 04 - Direction Integrity (ABCV-MBT).pptx
+++ b/Unit decks/Unit 04 - Direction Integrity (ABCV-MBT).pptx
@@ -465,7 +465,7 @@
           <a:p>
             <a:r>
               <a:rPr lang="en-GB" dirty="0"/>
-              <a:t>- The confirmed Must-Be-True conditions feed boxes 4A to 4D of the team’s Capstone Blueprint.</a:t>
+              <a:t>- The confirmed Must-Be-True conditions feed boxes 4A to 4D of the team’s Capstone S2R Blueprint.</a:t>
             </a:r>
           </a:p>
         </p:txBody>
@@ -3036,7 +3036,7 @@
           <a:p>
             <a:r>
               <a:rPr lang="en-GB"/>
-              <a:t>This is Capstone work: the confirmed outputs feed each team’s Capstone Blueprint.</a:t>
+              <a:t>This is Capstone work: the confirmed outputs feed each team’s Capstone S2R Blueprint.</a:t>
             </a:r>
           </a:p>
           <a:p>
@@ -4695,7 +4695,7 @@
           <a:p>
             <a:r>
               <a:rPr lang="en-GB"/>
-              <a:t>The confirmed conditions feed boxes 4A to 4D of the team’s Capstone Blueprint.</a:t>
+              <a:t>The confirmed conditions feed boxes 4A to 4D of the team’s Capstone S2R Blueprint.</a:t>
             </a:r>
           </a:p>
         </p:txBody>
@@ -5531,7 +5531,7 @@
           <a:p>
             <a:r>
               <a:rPr lang="en-GB"/>
-              <a:t>The group’s agreed Section 5 work feeds boxes 4A to 4F of the team’s Capstone Blueprint.</a:t>
+              <a:t>The group’s agreed Section 5 work feeds boxes 4A to 4F of the team’s Capstone S2R Blueprint.</a:t>
             </a:r>
           </a:p>
         </p:txBody>
@@ -6004,7 +6004,7 @@
           <a:p>
             <a:r>
               <a:rPr lang="en-GB"/>
-              <a:t>The agreed work feeds boxes 4A to 4F of the team’s Capstone Blueprint: the conditions in 4A to 4D, verification ownership in 4E and the executive blind spot in 4F.</a:t>
+              <a:t>The agreed work feeds boxes 4A to 4F of the team’s Capstone S2R Blueprint: the conditions in 4A to 4D, verification ownership in 4E and the executive blind spot in 4F.</a:t>
             </a:r>
           </a:p>
         </p:txBody>

--- a/Unit decks/Unit 04 - Direction Integrity (ABCV-MBT).pptx
+++ b/Unit decks/Unit 04 - Direction Integrity (ABCV-MBT).pptx
@@ -311,161 +311,157 @@
           <a:lstStyle/>
           <a:p>
             <a:r>
-              <a:rPr lang="en-GB" b="1" dirty="0"/>
+              <a:rPr b="1"/>
               <a:t>UNIT 4 · DIRECTION INTEGRITY (ABCV-MBT)</a:t>
             </a:r>
           </a:p>
           <a:p>
             <a:r>
-              <a:rPr lang="en-GB" dirty="0"/>
               <a:t>Module 2 · Direction · Unit 4</a:t>
             </a:r>
           </a:p>
           <a:p>
-            <a:endParaRPr lang="en-GB" dirty="0"/>
-          </a:p>
-          <a:p>
-            <a:r>
-              <a:rPr lang="en-GB" b="1" dirty="0"/>
+            <a:r>
+              <a:t/>
+            </a:r>
+          </a:p>
+          <a:p>
+            <a:r>
+              <a:rPr b="1"/>
               <a:t>UNIT INTENT</a:t>
             </a:r>
           </a:p>
           <a:p>
             <a:r>
-              <a:rPr lang="en-GB" dirty="0"/>
               <a:t>Unit 4 tests whether the chosen direction is strategically sound. </a:t>
             </a:r>
           </a:p>
           <a:p>
             <a:r>
-              <a:rPr lang="en-GB" dirty="0"/>
               <a:t>The four ABCV checkpoints (Arena, Boundaries, Competition and Value Proposition) and their Must-Be-True conditions turn assumptions into named, verifiable conditions.</a:t>
             </a:r>
           </a:p>
           <a:p>
-            <a:endParaRPr lang="en-GB" dirty="0"/>
-          </a:p>
-          <a:p>
-            <a:r>
-              <a:rPr lang="en-GB" dirty="0"/>
+            <a:r>
+              <a:t/>
+            </a:r>
+          </a:p>
+          <a:p>
+            <a:r>
               <a:t>The Key Results tested are the ones the group confirmed in Unit 3: no new objective or metric enters the unit.</a:t>
             </a:r>
           </a:p>
           <a:p>
-            <a:endParaRPr lang="en-GB" dirty="0"/>
-          </a:p>
-          <a:p>
-            <a:r>
-              <a:rPr lang="en-GB" b="1" dirty="0"/>
+            <a:r>
+              <a:t/>
+            </a:r>
+          </a:p>
+          <a:p>
+            <a:r>
+              <a:rPr b="1"/>
               <a:t>WHAT THE UNIT PRODUCES:</a:t>
             </a:r>
           </a:p>
           <a:p>
             <a:r>
-              <a:rPr lang="en-GB" dirty="0"/>
               <a:t>1. Each group produces its ABCV–MBT record: every Key Result it confirmed in Unit 3, taken through four steps, with one Must-Be-True condition named at each step. This is Capstone work.</a:t>
             </a:r>
           </a:p>
           <a:p>
             <a:r>
-              <a:rPr lang="en-GB" dirty="0"/>
               <a:t>2. Each participant produces two pieces of portfolio work: the Industry Illusion game of Section 2 and the Cause of Death game of Section 4.</a:t>
             </a:r>
           </a:p>
           <a:p>
             <a:r>
-              <a:rPr lang="en-GB" dirty="0"/>
+              <a:rPr b="1"/>
               <a:t>3. Each participant writes four reflections, the last of them a closing commitment.</a:t>
             </a:r>
           </a:p>
           <a:p>
-            <a:endParaRPr lang="en-GB" dirty="0"/>
-          </a:p>
-          <a:p>
-            <a:r>
-              <a:rPr lang="en-GB" b="1" dirty="0"/>
+            <a:r>
+              <a:t/>
+            </a:r>
+          </a:p>
+          <a:p>
+            <a:r>
+              <a:rPr b="1"/>
               <a:t>HOW THE UNIT RUNS:</a:t>
             </a:r>
           </a:p>
           <a:p>
             <a:r>
-              <a:rPr lang="en-GB" dirty="0"/>
               <a:t>1. You teach the whole unit from this deck first, from Section 1 to the Unit Summary. The deck is the teaching material. The teaching includes the Industry Illusion game, played with the room in groups.</a:t>
             </a:r>
           </a:p>
           <a:p>
             <a:r>
-              <a:rPr lang="en-GB" dirty="0"/>
               <a:t>2. Participants then complete their own page on the portal, in the session or after it: the reflections, their own Industry Illusion game, the group work of Section 5 and the Cause of Death game.</a:t>
             </a:r>
           </a:p>
           <a:p>
             <a:r>
-              <a:rPr lang="en-GB" dirty="0"/>
               <a:t>3. Section 5 on the portal is group work for the Capstone. The group chooses its scribe for this work.</a:t>
             </a:r>
           </a:p>
           <a:p>
             <a:r>
-              <a:rPr lang="en-GB" dirty="0"/>
               <a:t>The scribe types what the group agrees, the entries appear on every member’s page, and each member then selects Agree.</a:t>
             </a:r>
           </a:p>
           <a:p>
             <a:r>
-              <a:rPr lang="en-GB" dirty="0"/>
               <a:t>4. The Industry Illusion game in Section 2 and the Cause of Death game in Section 4 are portfolio work, completed by each participant alone.</a:t>
             </a:r>
           </a:p>
           <a:p>
-            <a:endParaRPr lang="en-GB" dirty="0"/>
-          </a:p>
-          <a:p>
-            <a:r>
-              <a:rPr lang="en-GB" dirty="0"/>
+            <a:r>
+              <a:t/>
+            </a:r>
+          </a:p>
+          <a:p>
+            <a:r>
               <a:t>Each slide’s notes end with a block headed "On the portal, after the teaching" wherever participants have something to complete for that part.</a:t>
             </a:r>
           </a:p>
           <a:p>
-            <a:endParaRPr lang="en-GB" dirty="0"/>
-          </a:p>
-          <a:p>
-            <a:r>
-              <a:rPr lang="en-GB" dirty="0"/>
+            <a:r>
+              <a:t/>
+            </a:r>
+          </a:p>
+          <a:p>
+            <a:r>
               <a:t>Your preparation as facilitator:</a:t>
             </a:r>
           </a:p>
           <a:p>
             <a:r>
-              <a:rPr lang="en-GB" dirty="0"/>
               <a:t>- Read the Facilitator Guide tab and every section of the facilitator file.</a:t>
             </a:r>
           </a:p>
           <a:p>
             <a:r>
-              <a:rPr lang="en-GB" dirty="0"/>
               <a:t>- Have the facilitator file ready in your browser at Section 2, part 2.2, so that the Industry Illusion game can be shared when you reach it.</a:t>
             </a:r>
           </a:p>
           <a:p>
             <a:r>
-              <a:rPr lang="en-GB" dirty="0"/>
               <a:t>- Each group needs its confirmed Enterprise OKRs from Unit 3 in front of it: every exercise in this unit works on those Key Results.</a:t>
             </a:r>
           </a:p>
           <a:p>
-            <a:endParaRPr lang="en-GB" dirty="0"/>
-          </a:p>
-          <a:p>
-            <a:r>
-              <a:rPr lang="en-GB" dirty="0"/>
+            <a:r>
+              <a:t/>
+            </a:r>
+          </a:p>
+          <a:p>
+            <a:r>
               <a:t>Where the outputs go next:</a:t>
             </a:r>
           </a:p>
           <a:p>
             <a:r>
-              <a:rPr lang="en-GB" dirty="0"/>
-              <a:t>- The confirmed Must-Be-True conditions feed boxes 4A to 4D of the team’s Capstone S2R Blueprint.</a:t>
+              <a:t>- The confirmed Must-Be-True conditions feed boxes 4A to 4D of the team’s Capstone S2R® Blueprint; verification ownership feeds 4E and the executive blind spot 4F.</a:t>
             </a:r>
           </a:p>
         </p:txBody>
@@ -551,458 +547,537 @@
           <a:lstStyle/>
           <a:p>
             <a:r>
-              <a:rPr lang="en-GB" b="1" dirty="0"/>
+              <a:rPr b="1"/>
               <a:t>1.4 — VALUE PROPOSITION (COHERENT ADVANTAGE)</a:t>
             </a:r>
           </a:p>
           <a:p>
-            <a:endParaRPr lang="en-GB" dirty="0"/>
-          </a:p>
-          <a:p>
-            <a:r>
-              <a:rPr lang="en-GB" b="1" dirty="0"/>
+            <a:r>
+              <a:t/>
+            </a:r>
+          </a:p>
+          <a:p>
+            <a:r>
+              <a:rPr b="1"/>
               <a:t>HOW TO TEACH IT:</a:t>
             </a:r>
           </a:p>
           <a:p>
-            <a:endParaRPr lang="en-GB" dirty="0"/>
-          </a:p>
-          <a:p>
-            <a:r>
-              <a:rPr lang="en-GB" b="1" dirty="0"/>
+            <a:r>
+              <a:t/>
+            </a:r>
+          </a:p>
+          <a:p>
+            <a:r>
+              <a:rPr b="1"/>
               <a:t>1. Read the question of the checkpoint.</a:t>
             </a:r>
           </a:p>
           <a:p>
             <a:r>
-              <a:rPr lang="en-GB" dirty="0"/>
               <a:t>"Why should the customer choose the value we create?"</a:t>
             </a:r>
           </a:p>
           <a:p>
-            <a:endParaRPr lang="en-GB" dirty="0"/>
-          </a:p>
-          <a:p>
-            <a:r>
-              <a:rPr lang="en-GB" b="1" dirty="0"/>
+            <a:r>
+              <a:t/>
+            </a:r>
+          </a:p>
+          <a:p>
+            <a:r>
+              <a:rPr b="1"/>
               <a:t>2. Give the strategic logic.</a:t>
             </a:r>
           </a:p>
           <a:p>
             <a:r>
-              <a:rPr lang="en-GB" b="1" dirty="0"/>
-              <a:t>Say: </a:t>
-            </a:r>
-            <a:r>
-              <a:rPr lang="en-GB" dirty="0"/>
-              <a:t>"Strategy wins when you are distinct.</a:t>
-            </a:r>
-          </a:p>
-          <a:p>
-            <a:endParaRPr lang="en-GB" dirty="0"/>
-          </a:p>
-          <a:p>
-            <a:r>
-              <a:rPr lang="en-GB" dirty="0"/>
+              <a:rPr b="1"/>
+              <a:t>Say:</a:t>
+            </a:r>
+            <a:r>
+              <a:t> "Strategy wins when you are distinct.</a:t>
+            </a:r>
+          </a:p>
+          <a:p>
+            <a:r>
+              <a:t/>
+            </a:r>
+          </a:p>
+          <a:p>
+            <a:r>
               <a:t>Every Key Result should make your unique DNA stronger.</a:t>
             </a:r>
           </a:p>
           <a:p>
             <a:r>
-              <a:rPr lang="en-GB" dirty="0"/>
               <a:t>If a goal dilutes your brand or confuses your value, it is a distraction."</a:t>
             </a:r>
           </a:p>
           <a:p>
-            <a:endParaRPr lang="en-GB" dirty="0"/>
-          </a:p>
-          <a:p>
-            <a:r>
-              <a:rPr lang="en-GB" b="1" dirty="0"/>
-              <a:t>Say: </a:t>
-            </a:r>
-            <a:r>
-              <a:rPr lang="en-GB" dirty="0"/>
-              <a:t>"Arena established what the customer is ultimately trying to achieve.</a:t>
-            </a:r>
-          </a:p>
-          <a:p>
-            <a:r>
-              <a:rPr lang="en-GB" dirty="0"/>
+            <a:r>
+              <a:t/>
+            </a:r>
+          </a:p>
+          <a:p>
+            <a:r>
+              <a:rPr b="1"/>
+              <a:t>Say:</a:t>
+            </a:r>
+            <a:r>
+              <a:t> "Arena established what the customer is ultimately trying to achieve.</a:t>
+            </a:r>
+          </a:p>
+          <a:p>
+            <a:r>
               <a:t>Boundaries established the conditions within which we must deliver it.</a:t>
             </a:r>
           </a:p>
           <a:p>
             <a:r>
-              <a:rPr lang="en-GB" dirty="0"/>
               <a:t>Competition revealed the alternatives available to the customer.</a:t>
             </a:r>
           </a:p>
           <a:p>
             <a:r>
-              <a:rPr lang="en-GB" dirty="0"/>
               <a:t>Value Proposition now asks: given those alternatives, why should the customer choose us?"</a:t>
             </a:r>
           </a:p>
           <a:p>
-            <a:endParaRPr lang="en-GB" dirty="0"/>
-          </a:p>
-          <a:p>
-            <a:r>
-              <a:rPr lang="en-GB" b="1" dirty="0"/>
+            <a:r>
+              <a:t/>
+            </a:r>
+          </a:p>
+          <a:p>
+            <a:r>
+              <a:rPr b="1"/>
               <a:t>3. Clear away the positive attributes.</a:t>
             </a:r>
           </a:p>
           <a:p>
             <a:r>
-              <a:rPr lang="en-GB" b="1" dirty="0"/>
-              <a:t>Say: </a:t>
-            </a:r>
-            <a:r>
-              <a:rPr lang="en-GB" dirty="0"/>
-              <a:t>"A Value Proposition is more than a description of what the organisation offers.</a:t>
-            </a:r>
-          </a:p>
-          <a:p>
-            <a:r>
-              <a:rPr lang="en-GB" dirty="0"/>
+              <a:rPr b="1"/>
+              <a:t>Say:</a:t>
+            </a:r>
+            <a:r>
+              <a:t> "A Value Proposition is more than a description of what the organisation offers.</a:t>
+            </a:r>
+          </a:p>
+          <a:p>
+            <a:r>
               <a:t>High quality, customer focused, innovative, excellent service, experienced people: all of these may be positive attributes.</a:t>
             </a:r>
           </a:p>
           <a:p>
             <a:r>
-              <a:rPr lang="en-GB" dirty="0"/>
               <a:t>On their own they establish no strategic value."</a:t>
             </a:r>
           </a:p>
           <a:p>
             <a:r>
-              <a:rPr lang="en-GB" b="1" dirty="0"/>
-              <a:t>Ask</a:t>
-            </a:r>
-            <a:r>
-              <a:rPr lang="en-GB" dirty="0"/>
-              <a:t>: "What combination of value do we create that matters to this customer, in this Arena, relative to the alternatives available?"</a:t>
-            </a:r>
-          </a:p>
-          <a:p>
-            <a:endParaRPr lang="en-GB" dirty="0"/>
-          </a:p>
-          <a:p>
-            <a:r>
-              <a:rPr lang="en-GB" b="1" dirty="0"/>
+              <a:rPr b="1"/>
+              <a:t>Ask:</a:t>
+            </a:r>
+            <a:r>
+              <a:t> "What combination of value do we create that matters to this customer, in this Arena, relative to the alternatives available?"</a:t>
+            </a:r>
+          </a:p>
+          <a:p>
+            <a:r>
+              <a:t/>
+            </a:r>
+          </a:p>
+          <a:p>
+            <a:r>
+              <a:rPr b="1"/>
               <a:t>4. Teach the three tests on the slide.</a:t>
             </a:r>
           </a:p>
           <a:p>
-            <a:endParaRPr lang="en-GB" dirty="0"/>
-          </a:p>
-          <a:p>
-            <a:r>
-              <a:rPr lang="en-GB" b="1" dirty="0"/>
-              <a:t>Relevance</a:t>
-            </a:r>
-            <a:r>
-              <a:rPr lang="en-GB" dirty="0"/>
-              <a:t> — Does it matter?</a:t>
-            </a:r>
-          </a:p>
-          <a:p>
-            <a:r>
-              <a:rPr lang="en-GB" dirty="0"/>
+            <a:r>
+              <a:t/>
+            </a:r>
+          </a:p>
+          <a:p>
+            <a:r>
+              <a:t>Relevance — Does it matter?</a:t>
+            </a:r>
+          </a:p>
+          <a:p>
+            <a:r>
               <a:t>Does the value proposition address something important in the Customer End Game? If the customer does not materially value it, it is not an advantage.</a:t>
             </a:r>
           </a:p>
           <a:p>
-            <a:endParaRPr lang="en-GB" dirty="0"/>
-          </a:p>
-          <a:p>
-            <a:r>
-              <a:rPr lang="en-GB" b="1" dirty="0"/>
-              <a:t>Distinctiveness</a:t>
-            </a:r>
-            <a:r>
-              <a:rPr lang="en-GB" dirty="0"/>
-              <a:t> — Does it differentiate?</a:t>
-            </a:r>
-          </a:p>
-          <a:p>
-            <a:r>
-              <a:rPr lang="en-GB" dirty="0"/>
+            <a:r>
+              <a:t/>
+            </a:r>
+          </a:p>
+          <a:p>
+            <a:r>
+              <a:t>Distinctiveness — Does it differentiate?</a:t>
+            </a:r>
+          </a:p>
+          <a:p>
+            <a:r>
               <a:t>Is there something meaningfully different about the value created, or can credible alternatives make essentially the same claim?</a:t>
             </a:r>
           </a:p>
           <a:p>
-            <a:endParaRPr lang="en-GB" dirty="0"/>
-          </a:p>
-          <a:p>
-            <a:r>
-              <a:rPr lang="en-GB" b="1" dirty="0"/>
-              <a:t>Deliverability</a:t>
-            </a:r>
-            <a:r>
-              <a:rPr lang="en-GB" dirty="0"/>
-              <a:t> — Can we consistently produce it?</a:t>
-            </a:r>
-          </a:p>
-          <a:p>
-            <a:r>
-              <a:rPr lang="en-GB" dirty="0"/>
+            <a:r>
+              <a:t/>
+            </a:r>
+          </a:p>
+          <a:p>
+            <a:r>
+              <a:t>Deliverability — Can we consistently produce it?</a:t>
+            </a:r>
+          </a:p>
+          <a:p>
+            <a:r>
               <a:t>A promise becomes strategically valuable only when the organisation possesses the capability and system to deliver it repeatedly.</a:t>
             </a:r>
           </a:p>
           <a:p>
-            <a:endParaRPr lang="en-GB" dirty="0"/>
-          </a:p>
-          <a:p>
-            <a:r>
-              <a:rPr lang="en-GB" b="1" dirty="0"/>
+            <a:r>
+              <a:t/>
+            </a:r>
+          </a:p>
+          <a:p>
+            <a:r>
               <a:t>Read the foot of the slide: RELEVANT + DISTINCTIVE + DELIVERABLE = STRATEGIC VALUE.</a:t>
             </a:r>
           </a:p>
           <a:p>
-            <a:endParaRPr lang="en-GB" dirty="0"/>
-          </a:p>
-          <a:p>
-            <a:r>
-              <a:rPr lang="en-GB" dirty="0"/>
-              <a:t>Deepen, say: "Strategy is proven by the quality and consistency of the environment it produces.</a:t>
-            </a:r>
-          </a:p>
-          <a:p>
-            <a:r>
-              <a:rPr lang="en-GB" dirty="0"/>
+            <a:r>
+              <a:t/>
+            </a:r>
+          </a:p>
+          <a:p>
+            <a:r>
+              <a:rPr b="1"/>
+              <a:t>Deepen, say:</a:t>
+            </a:r>
+            <a:r>
+              <a:t> "Strategy is proven by the quality and consistency of the environment it produces.</a:t>
+            </a:r>
+          </a:p>
+          <a:p>
+            <a:r>
               <a:t>Organisations weaken their credibility when branding, claims or public positioning exceed the quality of the lived experience."</a:t>
             </a:r>
           </a:p>
           <a:p>
             <a:r>
-              <a:rPr lang="en-GB" dirty="0"/>
               <a:t>(Insight: Value Proposition · coherence. Source: Journal, 16 July 2026 — Professional Insights: Strategy)</a:t>
             </a:r>
           </a:p>
           <a:p>
-            <a:endParaRPr lang="en-GB" dirty="0"/>
-          </a:p>
-          <a:p>
-            <a:r>
-              <a:rPr lang="en-GB" b="1" dirty="0"/>
+            <a:r>
+              <a:t/>
+            </a:r>
+          </a:p>
+          <a:p>
+            <a:r>
+              <a:rPr b="1"/>
               <a:t>5. Give the example.</a:t>
             </a:r>
           </a:p>
           <a:p>
-            <a:endParaRPr lang="en-GB" dirty="0"/>
-          </a:p>
-          <a:p>
-            <a:r>
-              <a:rPr lang="en-GB" b="1" dirty="0"/>
+            <a:r>
+              <a:t/>
+            </a:r>
+          </a:p>
+          <a:p>
+            <a:r>
+              <a:rPr b="1"/>
               <a:t>EXAMPLE</a:t>
             </a:r>
           </a:p>
           <a:p>
             <a:r>
-              <a:rPr lang="en-ZA" b="1" dirty="0"/>
               <a:t>S2R® EXAMPLE — RELEVANCE, DISTINCTIVENESS AND DELIVERABILITY</a:t>
             </a:r>
           </a:p>
           <a:p>
             <a:r>
-              <a:rPr lang="en-ZA" b="1" dirty="0"/>
+              <a:rPr b="1"/>
               <a:t>Say:</a:t>
             </a:r>
-            <a:endParaRPr lang="en-ZA" dirty="0"/>
-          </a:p>
-          <a:p>
-            <a:r>
-              <a:rPr lang="en-ZA" dirty="0"/>
+            <a:r>
+              <a:t/>
+            </a:r>
+          </a:p>
+          <a:p>
+            <a:r>
               <a:t>"Let me illustrate how we applied these three tests when developing Strategy2Results®.</a:t>
             </a:r>
           </a:p>
           <a:p>
-            <a:endParaRPr lang="en-ZA" b="1" dirty="0"/>
-          </a:p>
-          <a:p>
-            <a:r>
-              <a:rPr lang="en-ZA" b="1" dirty="0"/>
+            <a:r>
+              <a:t/>
+            </a:r>
+          </a:p>
+          <a:p>
+            <a:r>
+              <a:rPr b="1"/>
               <a:t>1. Relevance — Does it matter?</a:t>
             </a:r>
-            <a:endParaRPr lang="en-ZA" dirty="0"/>
-          </a:p>
-          <a:p>
-            <a:r>
-              <a:rPr lang="en-ZA" dirty="0"/>
+          </a:p>
+          <a:p>
+            <a:r>
               <a:t>We began by examining a persistent organisational problem: companies invest heavily in strategy development but struggle to translate strategic intent into consistent results.</a:t>
             </a:r>
           </a:p>
           <a:p>
             <a:r>
-              <a:rPr lang="en-ZA" dirty="0"/>
               <a:t>We identified the Customer End Game as achieving measurable, sustained strategic results. This became the problem S2R® was designed to address.</a:t>
             </a:r>
           </a:p>
           <a:p>
-            <a:endParaRPr lang="en-ZA" b="1" dirty="0"/>
-          </a:p>
-          <a:p>
-            <a:r>
-              <a:rPr lang="en-ZA" b="1" dirty="0"/>
+            <a:r>
+              <a:t/>
+            </a:r>
+          </a:p>
+          <a:p>
+            <a:r>
+              <a:rPr b="1"/>
               <a:t>2. Distinctiveness — Does it differentiate?</a:t>
             </a:r>
-            <a:endParaRPr lang="en-ZA" dirty="0"/>
-          </a:p>
-          <a:p>
-            <a:r>
-              <a:rPr lang="en-ZA" dirty="0"/>
+          </a:p>
+          <a:p>
+            <a:r>
               <a:t>We then asked why organisations would choose S2R® when other strategy and execution solutions already exist.</a:t>
             </a:r>
           </a:p>
           <a:p>
             <a:r>
-              <a:rPr lang="en-ZA" dirty="0"/>
               <a:t>We identified gaps between strategy design, functional contributions and execution discipline. This informed our DIG framework: Direction, Influence and Grounding.</a:t>
             </a:r>
           </a:p>
           <a:p>
             <a:r>
-              <a:rPr lang="en-ZA" dirty="0"/>
               <a:t>We developed an integrated methodology supported by diagnostics, contribution mapping and practical execution tools. Our intended differentiation lies in connecting these elements into one coherent strategy-to-results system.</a:t>
             </a:r>
           </a:p>
           <a:p>
-            <a:endParaRPr lang="en-ZA" b="1" dirty="0"/>
-          </a:p>
-          <a:p>
-            <a:r>
-              <a:rPr lang="en-ZA" b="1" dirty="0"/>
+            <a:r>
+              <a:t/>
+            </a:r>
+          </a:p>
+          <a:p>
+            <a:r>
+              <a:rPr b="1"/>
               <a:t>3. Deliverability — Can we consistently produce it?</a:t>
             </a:r>
-            <a:endParaRPr lang="en-ZA" dirty="0"/>
-          </a:p>
-          <a:p>
-            <a:r>
-              <a:rPr lang="en-ZA" dirty="0"/>
+          </a:p>
+          <a:p>
+            <a:r>
               <a:t>We recognised that different customers need different ways to access and apply S2R®. We therefore designed three delivery models:</a:t>
             </a:r>
           </a:p>
           <a:p>
-            <a:pPr lvl="0"/>
-            <a:r>
-              <a:rPr lang="en-ZA" b="1" dirty="0"/>
-              <a:t>CESI Intensive and Flexi:</a:t>
-            </a:r>
-            <a:r>
-              <a:rPr lang="en-ZA" dirty="0"/>
-              <a:t> Two pathways to the same professional credential, developing internal strategy integration capability.</a:t>
-            </a:r>
-          </a:p>
-          <a:p>
-            <a:pPr lvl="0"/>
-            <a:r>
-              <a:rPr lang="en-ZA" b="1" dirty="0"/>
-              <a:t>Company Retreats:</a:t>
-            </a:r>
-            <a:r>
-              <a:rPr lang="en-ZA" dirty="0"/>
-              <a:t> Facilitated application of S2R® by leadership teams to address real organisational challenges and produce shared strategic outputs.</a:t>
-            </a:r>
-          </a:p>
-          <a:p>
-            <a:pPr lvl="0"/>
-            <a:r>
-              <a:rPr lang="en-ZA" b="1" dirty="0"/>
-              <a:t>Open Workshops:</a:t>
-            </a:r>
-            <a:r>
-              <a:rPr lang="en-ZA" dirty="0"/>
-              <a:t> Focused learning experiences that develop specific strategic capabilities and practical skills.</a:t>
-            </a:r>
-          </a:p>
-          <a:p>
-            <a:endParaRPr lang="en-ZA" dirty="0"/>
-          </a:p>
-          <a:p>
-            <a:r>
-              <a:rPr lang="en-ZA" dirty="0"/>
+            <a:r>
+              <a:t>CESI Intensive and Flexi: Two pathways to the same professional credential, developing internal strategy integration capability.</a:t>
+            </a:r>
+          </a:p>
+          <a:p>
+            <a:r>
+              <a:t>Company Retreats: Facilitated application of S2R® by leadership teams to address real organisational challenges and produce shared strategic outputs.</a:t>
+            </a:r>
+          </a:p>
+          <a:p>
+            <a:r>
+              <a:t>Open Workshops: Focused learning experiences that develop specific strategic capabilities and practical skills.</a:t>
+            </a:r>
+          </a:p>
+          <a:p>
+            <a:r>
+              <a:t/>
+            </a:r>
+          </a:p>
+          <a:p>
+            <a:r>
               <a:t>We established IBSL to deliver these capability-development programmes, while Impactis Consulting provides organisational diagnostics, consulting interventions and digital S2R® tools.</a:t>
             </a:r>
           </a:p>
           <a:p>
-            <a:endParaRPr lang="en-ZA" dirty="0"/>
-          </a:p>
-          <a:p>
-            <a:r>
-              <a:rPr lang="en-ZA" dirty="0"/>
+            <a:r>
+              <a:t/>
+            </a:r>
+          </a:p>
+          <a:p>
+            <a:r>
               <a:t>This creates a structured foundation for consistent delivery, with repeatability to be demonstrated through client outcomes.</a:t>
             </a:r>
           </a:p>
           <a:p>
-            <a:endParaRPr lang="en-ZA" b="1" dirty="0"/>
-          </a:p>
-          <a:p>
-            <a:r>
-              <a:rPr lang="en-ZA" b="1" dirty="0"/>
+            <a:r>
+              <a:t/>
+            </a:r>
+          </a:p>
+          <a:p>
+            <a:r>
               <a:t>Close:</a:t>
             </a:r>
-            <a:endParaRPr lang="en-ZA" dirty="0"/>
-          </a:p>
-          <a:p>
-            <a:r>
-              <a:rPr lang="en-ZA" dirty="0"/>
+          </a:p>
+          <a:p>
+            <a:r>
               <a:t>"Notice the sequence. We identified a problem customers genuinely care about, developed an approach intended to create distinctive value, and then designed the capabilities and delivery models needed to fulfil that promise.</a:t>
             </a:r>
           </a:p>
           <a:p>
             <a:r>
-              <a:rPr lang="en-ZA" b="1" dirty="0"/>
-              <a:t>That is the discipline behind testing a value proposition for Relevance, Distinctiveness and Deliverability.</a:t>
-            </a:r>
-            <a:r>
-              <a:rPr lang="en-ZA" dirty="0"/>
-              <a:t>“</a:t>
-            </a:r>
-          </a:p>
-          <a:p>
-            <a:endParaRPr lang="en-ZA" dirty="0"/>
-          </a:p>
-          <a:p>
-            <a:r>
-              <a:rPr lang="en-ZA" b="1" dirty="0"/>
-              <a:t>Say </a:t>
-            </a:r>
-            <a:r>
-              <a:rPr lang="en-ZA" dirty="0"/>
-              <a:t>apply to your Key Results</a:t>
-            </a:r>
-          </a:p>
-          <a:p>
-            <a:r>
-              <a:rPr lang="en-GB" dirty="0"/>
+              <a:t>That is the discipline behind testing a value proposition for Relevance, Distinctiveness and Deliverability.“</a:t>
+            </a:r>
+          </a:p>
+          <a:p>
+            <a:r>
+              <a:t/>
+            </a:r>
+          </a:p>
+          <a:p>
+            <a:r>
+              <a:rPr b="1"/>
+              <a:t>6. Apply it to your Key Results.</a:t>
+            </a:r>
+          </a:p>
+          <a:p>
+            <a:r>
               <a:t>Take one of the Key Results a group confirmed in Unit 3.</a:t>
             </a:r>
           </a:p>
           <a:p>
             <a:r>
-              <a:rPr lang="en-GB" dirty="0"/>
-              <a:t>Ask: "How does this goal make us more ‘us’? Does this Key Result sharpen our distinctive edge or just add noise?"</a:t>
-            </a:r>
-          </a:p>
-          <a:p>
-            <a:r>
-              <a:rPr lang="en-GB" dirty="0"/>
-              <a:t>Then ask: "What must remain true about our value architecture for this Key Result to stay coherent and profitable?"</a:t>
-            </a:r>
-          </a:p>
-          <a:p>
-            <a:r>
-              <a:rPr lang="en-GB" dirty="0"/>
+              <a:rPr b="1"/>
+              <a:t>Ask:</a:t>
+            </a:r>
+            <a:r>
+              <a:t> "How does this goal make us more ‘us’? Does this Key Result sharpen our distinctive edge or just add noise?"</a:t>
+            </a:r>
+          </a:p>
+          <a:p>
+            <a:r>
+              <a:rPr b="1"/>
+              <a:t>Then ask:</a:t>
+            </a:r>
+            <a:r>
+              <a:t> "What must remain true about our value architecture for this Key Result to stay coherent and profitable?"</a:t>
+            </a:r>
+          </a:p>
+          <a:p>
+            <a:r>
               <a:t>Hold out for a condition that is either true or false.</a:t>
             </a:r>
           </a:p>
           <a:p>
-            <a:endParaRPr lang="en-ZA" dirty="0"/>
-          </a:p>
-          <a:p>
-            <a:endParaRPr lang="en-GB" dirty="0"/>
+            <a:r>
+              <a:t>Read the two examples from the Unit 3 worked example:</a:t>
+            </a:r>
+          </a:p>
+          <a:p>
+            <a:r>
+              <a:t>- Reduce average response time to customer requests from 12 hours to 4 hours by 30 June 2027: Faster response is delivered with no loss in the quality of the answer the client receives.</a:t>
+            </a:r>
+          </a:p>
+          <a:p>
+            <a:r>
+              <a:t>- Improve operating margin from 14% to 18% by 31 December 2027: No saving reduces the service quality clients choose the company for.</a:t>
+            </a:r>
+          </a:p>
+          <a:p>
+            <a:r>
+              <a:t/>
+            </a:r>
+          </a:p>
+          <a:p>
+            <a:r>
+              <a:rPr b="1"/>
+              <a:t>7. Bring ABCV together.</a:t>
+            </a:r>
+          </a:p>
+          <a:p>
+            <a:r>
+              <a:t>Walk down the chain once:</a:t>
+            </a:r>
+          </a:p>
+          <a:p>
+            <a:r>
+              <a:t>- A — Arena: What is the customer ultimately trying to achieve? Functional, experiential, consequential.</a:t>
+            </a:r>
+          </a:p>
+          <a:p>
+            <a:r>
+              <a:t>- B — Boundaries: What could constrain our ability to deliver that outcome?</a:t>
+            </a:r>
+          </a:p>
+          <a:p>
+            <a:r>
+              <a:t>- C — Competition: Who or what else can enable the customer to achieve it?</a:t>
+            </a:r>
+          </a:p>
+          <a:p>
+            <a:r>
+              <a:t>- V — Value Proposition: Why should the customer choose the value we create?</a:t>
+            </a:r>
+          </a:p>
+          <a:p>
+            <a:r>
+              <a:t>- MBT — Must Be True: What conditions must hold for our strategic logic to remain valid?</a:t>
+            </a:r>
+          </a:p>
+          <a:p>
+            <a:r>
+              <a:rPr b="1"/>
+              <a:t>Say:</a:t>
+            </a:r>
+            <a:r>
+              <a:t> "ABCV asks whether the strategic logic underneath an OKR can survive reality."</a:t>
+            </a:r>
+          </a:p>
+          <a:p>
+            <a:r>
+              <a:t/>
+            </a:r>
+          </a:p>
+          <a:p>
+            <a:r>
+              <a:rPr b="1"/>
+              <a:t>8. Ask the question that closes the checkpoints.</a:t>
+            </a:r>
+          </a:p>
+          <a:p>
+            <a:r>
+              <a:rPr b="1"/>
+              <a:t>Ask:</a:t>
+            </a:r>
+            <a:r>
+              <a:t> "If you had to identify the single ABCV checkpoint your organisation most consistently overlooks when setting strategy, which would it be? And what has that cost you?"</a:t>
+            </a:r>
+          </a:p>
+          <a:p>
+            <a:r>
+              <a:t>Take three or four answers and note them. You return to them in Section 3.</a:t>
+            </a:r>
+          </a:p>
+          <a:p>
+            <a:r>
+              <a:t/>
+            </a:r>
+          </a:p>
+          <a:p>
+            <a:r>
+              <a:rPr b="1"/>
+              <a:t>9. Close the section.</a:t>
+            </a:r>
+          </a:p>
+          <a:p>
+            <a:r>
+              <a:rPr b="1"/>
+              <a:t>Say:</a:t>
+            </a:r>
+            <a:r>
+              <a:t> "A Key Result is strategically sound when the conditions it depends on hold at each of the four checkpoints."</a:t>
+            </a:r>
           </a:p>
         </p:txBody>
       </p:sp>
@@ -1087,121 +1162,144 @@
           <a:lstStyle/>
           <a:p>
             <a:r>
-              <a:rPr lang="en-GB" b="1" dirty="0"/>
+              <a:rPr b="1"/>
               <a:t>SECTION 1 REFLECTIONS</a:t>
             </a:r>
           </a:p>
           <a:p>
-            <a:endParaRPr lang="en-GB" dirty="0"/>
-          </a:p>
-          <a:p>
-            <a:r>
-              <a:rPr lang="en-GB" b="1" dirty="0"/>
+            <a:r>
+              <a:t/>
+            </a:r>
+          </a:p>
+          <a:p>
+            <a:r>
+              <a:rPr b="1"/>
               <a:t>HOW TO USE THIS SLIDE:</a:t>
             </a:r>
           </a:p>
           <a:p>
-            <a:endParaRPr lang="en-GB" dirty="0"/>
-          </a:p>
-          <a:p>
-            <a:r>
-              <a:rPr lang="en-GB" b="1" dirty="0"/>
+            <a:r>
+              <a:t/>
+            </a:r>
+          </a:p>
+          <a:p>
+            <a:r>
+              <a:rPr b="1"/>
               <a:t>1. Show the slide and read the two prompts aloud.</a:t>
             </a:r>
           </a:p>
           <a:p>
             <a:r>
-              <a:rPr lang="en-GB" dirty="0"/>
               <a:t>1 · Overview reflection: "Take one Key Result your group confirmed in Unit 3. What is it assuming about the world that has not yet been verified?"</a:t>
             </a:r>
           </a:p>
           <a:p>
-            <a:endParaRPr lang="en-GB" dirty="0"/>
-          </a:p>
-          <a:p>
-            <a:r>
-              <a:rPr lang="en-GB" dirty="0"/>
+            <a:r>
+              <a:t/>
+            </a:r>
+          </a:p>
+          <a:p>
+            <a:r>
               <a:t>2 · Bringing ABCV Together reflection: "Which of the four ABCV checkpoints is your organisation least likely to examine rigorously before launching a new strategic initiative? What does that pattern cost you?"</a:t>
             </a:r>
           </a:p>
           <a:p>
-            <a:endParaRPr lang="en-GB" dirty="0"/>
-          </a:p>
-          <a:p>
-            <a:r>
-              <a:rPr lang="en-GB" b="1" dirty="0"/>
+            <a:r>
+              <a:t/>
+            </a:r>
+          </a:p>
+          <a:p>
+            <a:r>
+              <a:rPr b="1"/>
               <a:t>2. Say what the reflection is for.</a:t>
             </a:r>
           </a:p>
           <a:p>
             <a:r>
-              <a:rPr lang="en-GB" dirty="0"/>
               <a:t>Point learners to the portal section that they will be required to complete with as much depth as possible.</a:t>
             </a:r>
           </a:p>
           <a:p>
             <a:r>
-              <a:rPr lang="en-GB" dirty="0"/>
               <a:t>The reflections build the learning portfolio they receive at the end of the programme.</a:t>
             </a:r>
           </a:p>
           <a:p>
-            <a:endParaRPr lang="en-GB" dirty="0"/>
-          </a:p>
-          <a:p>
-            <a:r>
-              <a:rPr lang="en-GB" dirty="0"/>
-              <a:t>Say: "You write this reflection on the portal after the teaching, with as much depth as you can."</a:t>
-            </a:r>
-          </a:p>
-          <a:p>
-            <a:endParaRPr lang="en-GB" dirty="0"/>
-          </a:p>
-          <a:p>
-            <a:r>
-              <a:rPr lang="en-GB" b="1" dirty="0"/>
+            <a:r>
+              <a:t/>
+            </a:r>
+          </a:p>
+          <a:p>
+            <a:r>
+              <a:rPr b="1"/>
+              <a:t>Say:</a:t>
+            </a:r>
+            <a:r>
+              <a:t> "You write this reflection on the portal after the teaching, with as much depth as you can."</a:t>
+            </a:r>
+          </a:p>
+          <a:p>
+            <a:r>
+              <a:t/>
+            </a:r>
+          </a:p>
+          <a:p>
+            <a:r>
+              <a:rPr b="1"/>
               <a:t>3. Set the standard.</a:t>
             </a:r>
           </a:p>
           <a:p>
             <a:r>
-              <a:rPr lang="en-GB" dirty="0"/>
-              <a:t>Say: "For the first reflection, name one real Key Result of your group and one thing it assumes. For the second, name the checkpoint and one real cost."</a:t>
-            </a:r>
-          </a:p>
-          <a:p>
-            <a:r>
-              <a:rPr lang="en-GB" dirty="0"/>
-              <a:t>Listen for: an assumption stated as a worry. Ask: "Written as a condition, is it true or false today?"</a:t>
-            </a:r>
-          </a:p>
-          <a:p>
-            <a:endParaRPr lang="en-GB" dirty="0"/>
-          </a:p>
-          <a:p>
-            <a:r>
-              <a:rPr lang="en-GB" b="1" dirty="0"/>
+              <a:rPr b="1"/>
+              <a:t>Say:</a:t>
+            </a:r>
+            <a:r>
+              <a:t> "For the first reflection, name one real Key Result of your group and one thing it assumes. For the second, name the checkpoint and one real cost."</a:t>
+            </a:r>
+          </a:p>
+          <a:p>
+            <a:r>
+              <a:rPr b="1"/>
+              <a:t>Listen for:</a:t>
+            </a:r>
+            <a:r>
+              <a:t> an assumption stated as a worry. Ask: "Written as a condition, is it true or false today?"</a:t>
+            </a:r>
+          </a:p>
+          <a:p>
+            <a:r>
+              <a:t/>
+            </a:r>
+          </a:p>
+          <a:p>
+            <a:r>
+              <a:rPr b="1"/>
               <a:t>4. Bridge to Section 2.</a:t>
             </a:r>
           </a:p>
           <a:p>
             <a:r>
-              <a:rPr lang="en-GB" dirty="0"/>
-              <a:t>Say: "We have the four checkpoints. Section 2 asks why leaders so often fail to use them."</a:t>
-            </a:r>
-          </a:p>
-          <a:p>
-            <a:endParaRPr lang="en-GB" dirty="0"/>
-          </a:p>
-          <a:p>
-            <a:r>
-              <a:rPr lang="en-GB" b="1" dirty="0"/>
+              <a:rPr b="1"/>
+              <a:t>Say:</a:t>
+            </a:r>
+            <a:r>
+              <a:t> "We have the four checkpoints. Section 2 examines why industry definitions mislead strategy, and how customer outcomes reveal the full field of competition."</a:t>
+            </a:r>
+          </a:p>
+          <a:p>
+            <a:r>
+              <a:t/>
+            </a:r>
+          </a:p>
+          <a:p>
+            <a:r>
+              <a:rPr b="1"/>
               <a:t>ON THE PORTAL, AFTER THE TEACHING:</a:t>
             </a:r>
           </a:p>
           <a:p>
             <a:r>
-              <a:rPr lang="en-GB" dirty="0"/>
               <a:t>Participants write the two reflections in Section 1 of the participant file: under the overview, and under Bringing ABCV Together.</a:t>
             </a:r>
           </a:p>
@@ -1272,101 +1370,131 @@
           <a:lstStyle/>
           <a:p>
             <a:r>
-              <a:rPr lang="en-GB" b="1" dirty="0"/>
+              <a:rPr b="1"/>
               <a:t>SECTION 2 · INTELLIGENCE — WHY</a:t>
             </a:r>
           </a:p>
           <a:p>
-            <a:endParaRPr lang="en-GB" dirty="0"/>
-          </a:p>
-          <a:p>
-            <a:r>
-              <a:rPr lang="en-GB" b="1" dirty="0"/>
+            <a:r>
+              <a:t/>
+            </a:r>
+          </a:p>
+          <a:p>
+            <a:r>
+              <a:rPr b="1"/>
               <a:t>HOW THIS SECTION RUNS:</a:t>
             </a:r>
           </a:p>
           <a:p>
             <a:r>
-              <a:rPr lang="en-GB" dirty="0"/>
+              <a:rPr b="1"/>
               <a:t>1. 2.1: the Industry Illusion and its three traps.</a:t>
             </a:r>
           </a:p>
           <a:p>
             <a:r>
-              <a:rPr lang="en-GB" dirty="0"/>
+              <a:rPr b="1"/>
               <a:t>2. 2.2: the Industry Illusion game, played with the room in groups, from the facilitator file.</a:t>
             </a:r>
           </a:p>
           <a:p>
             <a:r>
-              <a:rPr lang="en-GB" dirty="0"/>
-              <a:t>3. 2.2, after the game: the Arena question, back on the deck.</a:t>
-            </a:r>
-          </a:p>
-          <a:p>
-            <a:endParaRPr lang="en-GB" dirty="0"/>
-          </a:p>
-          <a:p>
-            <a:r>
-              <a:rPr lang="en-GB" b="1" dirty="0"/>
+              <a:t>3. 2.2, the last step of the game: Apply Arena, still on the facilitator file. Then back to the deck.</a:t>
+            </a:r>
+          </a:p>
+          <a:p>
+            <a:r>
+              <a:t/>
+            </a:r>
+          </a:p>
+          <a:p>
+            <a:r>
+              <a:rPr b="1"/>
               <a:t>SECTION LEARNING OUTCOMES:</a:t>
             </a:r>
           </a:p>
           <a:p>
             <a:r>
-              <a:rPr lang="en-GB" dirty="0"/>
+              <a:rPr b="1"/>
               <a:t>1. Test strategic priorities against the outcomes customers seek.</a:t>
             </a:r>
           </a:p>
           <a:p>
             <a:r>
-              <a:rPr lang="en-GB" dirty="0"/>
+              <a:rPr b="1"/>
               <a:t>2. Surface and challenge assumptions underpinning strategic objectives.</a:t>
             </a:r>
           </a:p>
           <a:p>
-            <a:endParaRPr lang="en-GB" dirty="0"/>
-          </a:p>
-          <a:p>
-            <a:r>
-              <a:rPr lang="en-GB" b="1" dirty="0"/>
+            <a:r>
+              <a:t/>
+            </a:r>
+          </a:p>
+          <a:p>
+            <a:r>
+              <a:rPr b="1"/>
               <a:t>HOW TO OPEN THE SECTION:</a:t>
             </a:r>
           </a:p>
           <a:p>
-            <a:endParaRPr lang="en-GB" dirty="0"/>
-          </a:p>
-          <a:p>
-            <a:r>
-              <a:rPr lang="en-GB" b="1" dirty="0"/>
+            <a:r>
+              <a:t/>
+            </a:r>
+          </a:p>
+          <a:p>
+            <a:r>
+              <a:rPr b="1"/>
               <a:t>1. Say what the section does.</a:t>
             </a:r>
           </a:p>
           <a:p>
             <a:r>
-              <a:rPr lang="en-GB" dirty="0"/>
-              <a:t>Say: "In this section you discover, through your own decisions, how an industry frame shapes what leaders notice, dismiss and trust."</a:t>
-            </a:r>
-          </a:p>
-          <a:p>
-            <a:r>
-              <a:rPr lang="en-GB" dirty="0"/>
+              <a:rPr b="1"/>
+              <a:t>Say:</a:t>
+            </a:r>
+            <a:r>
+              <a:t> "In this section you discover, through your own decisions, how an industry frame shapes what leaders notice, dismiss and trust."</a:t>
+            </a:r>
+          </a:p>
+          <a:p>
+            <a:r>
               <a:t>Section intent: the game supplies the evidence. Arena supplies the test.</a:t>
             </a:r>
           </a:p>
           <a:p>
-            <a:endParaRPr lang="en-GB" dirty="0"/>
-          </a:p>
-          <a:p>
-            <a:r>
-              <a:rPr lang="en-GB" b="1" dirty="0"/>
+            <a:r>
+              <a:t/>
+            </a:r>
+          </a:p>
+          <a:p>
+            <a:r>
+              <a:rPr b="1"/>
               <a:t>2. Read the line under the section title.</a:t>
             </a:r>
           </a:p>
           <a:p>
             <a:r>
-              <a:rPr lang="en-GB" dirty="0"/>
               <a:t>"The industry we understand becomes the boundary of the world we examine."</a:t>
+            </a:r>
+          </a:p>
+          <a:p>
+            <a:r>
+              <a:t/>
+            </a:r>
+          </a:p>
+          <a:p>
+            <a:r>
+              <a:rPr b="1"/>
+              <a:t>3. Bridge to 2.1.</a:t>
+            </a:r>
+          </a:p>
+          <a:p>
+            <a:r>
+              <a:rPr b="1"/>
+              <a:t>Say:</a:t>
+            </a:r>
+            <a:r>
+              <a:t> "Industry knowledge is where the trap begins."</a:t>
             </a:r>
           </a:p>
         </p:txBody>
@@ -1753,302 +1881,522 @@
           <a:lstStyle/>
           <a:p>
             <a:r>
-              <a:rPr lang="en-GB" b="1" dirty="0"/>
+              <a:rPr b="1"/>
               <a:t>2.2 — THE INDUSTRY ILLUSION GAME: THE FUTURE OF A UNIVERSITY (3 ROUNDS)</a:t>
             </a:r>
           </a:p>
           <a:p>
-            <a:endParaRPr lang="en-GB" dirty="0"/>
-          </a:p>
-          <a:p>
-            <a:r>
-              <a:rPr lang="en-GB" b="1" dirty="0"/>
+            <a:r>
+              <a:t/>
+            </a:r>
+          </a:p>
+          <a:p>
+            <a:r>
+              <a:rPr b="1"/>
               <a:t>HOW TO TEACH IT:</a:t>
             </a:r>
           </a:p>
           <a:p>
-            <a:endParaRPr lang="en-GB" dirty="0"/>
-          </a:p>
-          <a:p>
-            <a:r>
-              <a:rPr lang="en-GB" b="1" dirty="0"/>
+            <a:r>
+              <a:t/>
+            </a:r>
+          </a:p>
+          <a:p>
+            <a:r>
+              <a:rPr b="1"/>
               <a:t>1. Share the game.</a:t>
             </a:r>
           </a:p>
           <a:p>
             <a:r>
-              <a:rPr lang="en-GB" dirty="0"/>
               <a:t>Stop sharing the deck and share the browser window that holds the facilitator file, at Section 2, part 2.2.</a:t>
             </a:r>
           </a:p>
           <a:p>
             <a:r>
-              <a:rPr lang="en-GB" dirty="0"/>
               <a:t>Have that page ready before the lesson begins.</a:t>
             </a:r>
           </a:p>
           <a:p>
             <a:r>
-              <a:rPr lang="en-GB" dirty="0"/>
               <a:t>The page holds six steps in order: Case Brief, Round 1, Round 2, Round 3, The Reveal, Apply Arena.</a:t>
             </a:r>
           </a:p>
           <a:p>
             <a:r>
-              <a:rPr lang="en-GB" dirty="0"/>
               <a:t>Play the game with the room in groups. Each group makes its decision and defends it.</a:t>
             </a:r>
           </a:p>
           <a:p>
             <a:r>
-              <a:rPr lang="en-GB" dirty="0"/>
               <a:t>Important: do not tell participants which trap each round is testing. Do not correct their answers during the game. Capture their decisions. Reveal the traps only at the end.</a:t>
             </a:r>
           </a:p>
           <a:p>
-            <a:endParaRPr lang="en-GB" dirty="0"/>
-          </a:p>
-          <a:p>
-            <a:r>
-              <a:rPr lang="en-GB" b="1" dirty="0"/>
+            <a:r>
+              <a:t/>
+            </a:r>
+          </a:p>
+          <a:p>
+            <a:r>
+              <a:rPr b="1"/>
               <a:t>2. Give the case brief.</a:t>
             </a:r>
           </a:p>
           <a:p>
             <a:r>
-              <a:rPr lang="en-GB" b="1" dirty="0"/>
-              <a:t>Say</a:t>
-            </a:r>
-            <a:r>
-              <a:rPr lang="en-GB" dirty="0"/>
-              <a:t>: "You are the executive team of Apex University, an established private university."</a:t>
-            </a:r>
-          </a:p>
-          <a:p>
-            <a:r>
-              <a:rPr lang="en-GB" dirty="0"/>
+              <a:rPr b="1"/>
+              <a:t>Say:</a:t>
+            </a:r>
+            <a:r>
+              <a:t> "You are the executive team of Apex University, an established private university."</a:t>
+            </a:r>
+          </a:p>
+          <a:p>
+            <a:r>
               <a:t>Read the brief on the screen: 18,000 students; strong undergraduate and postgraduate programmes; recognised accreditation; a respected business school; growing online delivery; strong relationships with employers; good graduate employment outcomes; stable enrolment.</a:t>
             </a:r>
           </a:p>
           <a:p>
             <a:r>
-              <a:rPr lang="en-GB" dirty="0"/>
-              <a:t>Say: "The Board is beginning development of the university’s 2032 Strategy.</a:t>
-            </a:r>
-          </a:p>
-          <a:p>
-            <a:r>
-              <a:rPr lang="en-GB" dirty="0"/>
+              <a:rPr b="1"/>
+              <a:t>Say:</a:t>
+            </a:r>
+            <a:r>
+              <a:t> "The Board is beginning development of the university’s 2032 Strategy.</a:t>
+            </a:r>
+          </a:p>
+          <a:p>
+            <a:r>
               <a:t>Your task is to advise the Board on where it should focus its strategic attention."</a:t>
             </a:r>
           </a:p>
           <a:p>
-            <a:endParaRPr lang="en-GB" dirty="0"/>
-          </a:p>
-          <a:p>
-            <a:r>
-              <a:rPr lang="en-GB" b="1" dirty="0"/>
+            <a:r>
+              <a:t/>
+            </a:r>
+          </a:p>
+          <a:p>
+            <a:r>
+              <a:rPr b="1"/>
               <a:t>3. Round 1 — Where would you look?</a:t>
             </a:r>
           </a:p>
           <a:p>
             <a:r>
-              <a:rPr lang="en-GB" dirty="0"/>
-              <a:t>Say: "You have been asked to understand how Apex University’s environment is changing. Where would you look for intelligence?"</a:t>
-            </a:r>
-          </a:p>
-          <a:p>
-            <a:r>
-              <a:rPr lang="en-GB" dirty="0"/>
-              <a:t>Show the eight intelligence sources, A to H, on the screen.</a:t>
-            </a:r>
-          </a:p>
-          <a:p>
-            <a:r>
-              <a:rPr lang="en-GB" dirty="0"/>
-              <a:t>Say: "Select four that you would prioritise."</a:t>
-            </a:r>
-          </a:p>
-          <a:p>
-            <a:r>
-              <a:rPr lang="en-GB" dirty="0"/>
+              <a:rPr b="1"/>
+              <a:t>Say:</a:t>
+            </a:r>
+            <a:r>
+              <a:t> "You have been asked to understand how Apex University’s environment is changing. Where would you look for intelligence?"</a:t>
+            </a:r>
+          </a:p>
+          <a:p>
+            <a:r>
+              <a:t>Show the eight intelligence sources, A to H, on the screen:</a:t>
+            </a:r>
+          </a:p>
+          <a:p>
+            <a:r>
+              <a:t>A. Enrolment trends across universities</a:t>
+            </a:r>
+          </a:p>
+          <a:p>
+            <a:r>
+              <a:t>B. New programmes being introduced by competing universities</a:t>
+            </a:r>
+          </a:p>
+          <a:p>
+            <a:r>
+              <a:t>C. Changes in university rankings and reputation</a:t>
+            </a:r>
+          </a:p>
+          <a:p>
+            <a:r>
+              <a:t>D. Higher-education regulation and accreditation changes</a:t>
+            </a:r>
+          </a:p>
+          <a:p>
+            <a:r>
+              <a:t>E. Changes in how major employers assess and recruit talent</a:t>
+            </a:r>
+          </a:p>
+          <a:p>
+            <a:r>
+              <a:t>F. Growth in professional and industry credentials</a:t>
+            </a:r>
+          </a:p>
+          <a:p>
+            <a:r>
+              <a:t>G. How working adults are building new capabilities outside formal education</a:t>
+            </a:r>
+          </a:p>
+          <a:p>
+            <a:r>
+              <a:t>H. Changes in how employers recognise demonstrated skills versus qualifications</a:t>
+            </a:r>
+          </a:p>
+          <a:p>
+            <a:r>
+              <a:rPr b="1"/>
+              <a:t>Say:</a:t>
+            </a:r>
+            <a:r>
+              <a:t> "Select four that you would prioritise."</a:t>
+            </a:r>
+          </a:p>
+          <a:p>
+            <a:r>
               <a:t>Each group posts its four letters in the chat. Record the choices.</a:t>
             </a:r>
           </a:p>
           <a:p>
             <a:r>
-              <a:rPr lang="en-GB" dirty="0"/>
               <a:t>What this round tests, for you only: Familiarity. Do participants gravitate toward A to D because these are recognisably higher-education indicators? Do not reveal this.</a:t>
             </a:r>
           </a:p>
           <a:p>
-            <a:endParaRPr lang="en-GB" dirty="0"/>
-          </a:p>
-          <a:p>
-            <a:r>
-              <a:rPr lang="en-GB" b="1" dirty="0"/>
+            <a:r>
+              <a:t/>
+            </a:r>
+          </a:p>
+          <a:p>
+            <a:r>
+              <a:rPr b="1"/>
               <a:t>4. Round 2 — What deserves attention?</a:t>
             </a:r>
           </a:p>
           <a:p>
             <a:r>
-              <a:rPr lang="en-GB" dirty="0"/>
-              <a:t>Say: "Your strategy team has brought six developments to the executive committee. You only have capacity to investigate three in depth."</a:t>
-            </a:r>
-          </a:p>
-          <a:p>
-            <a:r>
-              <a:rPr lang="en-GB" dirty="0"/>
-              <a:t>Show the six signals on the screen.</a:t>
-            </a:r>
-          </a:p>
-          <a:p>
-            <a:r>
-              <a:rPr lang="en-GB" dirty="0"/>
-              <a:t>Ask: "Which three warrant immediate strategic investigation?"</a:t>
-            </a:r>
-          </a:p>
-          <a:p>
-            <a:r>
-              <a:rPr lang="en-GB" dirty="0"/>
-              <a:t>Then ask: "Which three would you deprioritise?"</a:t>
-            </a:r>
-          </a:p>
-          <a:p>
-            <a:r>
-              <a:rPr lang="en-GB" dirty="0"/>
+              <a:rPr b="1"/>
+              <a:t>Say:</a:t>
+            </a:r>
+            <a:r>
+              <a:t> "Your strategy team has brought six developments to the executive committee. You only have capacity to investigate three in depth."</a:t>
+            </a:r>
+          </a:p>
+          <a:p>
+            <a:r>
+              <a:t>Show the six signals on the screen:</a:t>
+            </a:r>
+          </a:p>
+          <a:p>
+            <a:r>
+              <a:t>- Signal 1. A competing university has launched a new Executive MBA.</a:t>
+            </a:r>
+          </a:p>
+          <a:p>
+            <a:r>
+              <a:t>- Signal 2. Applications to universities in your region are projected to grow by 8%.</a:t>
+            </a:r>
+          </a:p>
+          <a:p>
+            <a:r>
+              <a:t>- Signal 3. Several major employers are removing degree requirements from selected roles and introducing capability assessments.</a:t>
+            </a:r>
+          </a:p>
+          <a:p>
+            <a:r>
+              <a:t>- Signal 4. Working professionals are increasingly combining short courses, professional certifications and workplace experience in place of longer qualifications.</a:t>
+            </a:r>
+          </a:p>
+          <a:p>
+            <a:r>
+              <a:t>- Signal 5. A leading university has reduced fees for several postgraduate programmes.</a:t>
+            </a:r>
+          </a:p>
+          <a:p>
+            <a:r>
+              <a:t>- Signal 6. Employers are increasingly using portfolios, simulations and demonstrated capability to evaluate candidates.</a:t>
+            </a:r>
+          </a:p>
+          <a:p>
+            <a:r>
+              <a:rPr b="1"/>
+              <a:t>Ask:</a:t>
+            </a:r>
+            <a:r>
+              <a:t> "Which three warrant immediate strategic investigation?"</a:t>
+            </a:r>
+          </a:p>
+          <a:p>
+            <a:r>
+              <a:rPr b="1"/>
+              <a:t>Then ask:</a:t>
+            </a:r>
+            <a:r>
+              <a:t> "Which three would you deprioritise?"</a:t>
+            </a:r>
+          </a:p>
+          <a:p>
+            <a:r>
               <a:t>Require each group to make the decision. Capture what it excluded and, importantly, why.</a:t>
             </a:r>
           </a:p>
           <a:p>
             <a:r>
-              <a:rPr lang="en-GB" dirty="0"/>
               <a:t>What this round tests, for you only: Exclusion. Are signals 3, 4 and 6 discounted because they do not initially look like developments inside higher education? Do not reveal the trap.</a:t>
             </a:r>
           </a:p>
           <a:p>
-            <a:endParaRPr lang="en-GB" dirty="0"/>
-          </a:p>
-          <a:p>
-            <a:r>
-              <a:rPr lang="en-GB" b="1" dirty="0"/>
+            <a:r>
+              <a:t/>
+            </a:r>
+          </a:p>
+          <a:p>
+            <a:r>
+              <a:rPr b="1"/>
               <a:t>5. Round 3 — Should we be worried?</a:t>
             </a:r>
           </a:p>
           <a:p>
             <a:r>
-              <a:rPr lang="en-GB" dirty="0"/>
               <a:t>Show the Apex University performance report on the screen: enrolment +5%, revenue +7%, graduate employment 86%, accreditation strong, student satisfaction 82%, market position top 3 private university, online enrolment +12%.</a:t>
             </a:r>
           </a:p>
           <a:p>
             <a:r>
-              <a:rPr lang="en-GB" dirty="0"/>
-              <a:t>Say: "The Board asks whether the university needs to reconsider its fundamental strategic direction."</a:t>
-            </a:r>
-          </a:p>
-          <a:p>
-            <a:r>
-              <a:rPr lang="en-GB" dirty="0"/>
+              <a:rPr b="1"/>
+              <a:t>Say:</a:t>
+            </a:r>
+            <a:r>
+              <a:t> "The Board asks whether the university needs to reconsider its fundamental strategic direction."</a:t>
+            </a:r>
+          </a:p>
+          <a:p>
+            <a:r>
               <a:t>Give the three choices: A, no major change; B, adjust; C, re-examine. Each group must select one and defend it.</a:t>
             </a:r>
           </a:p>
           <a:p>
             <a:r>
-              <a:rPr lang="en-GB" dirty="0"/>
               <a:t>What this round tests, for you only: Complacency. Does strong current performance reassure participants that the university understands its future? Choice A is a reasonable answer on the page: the numbers genuinely look good.</a:t>
             </a:r>
           </a:p>
           <a:p>
-            <a:endParaRPr lang="en-GB" dirty="0"/>
-          </a:p>
-          <a:p>
-            <a:r>
-              <a:rPr lang="en-GB" b="1" dirty="0"/>
+            <a:r>
+              <a:t/>
+            </a:r>
+          </a:p>
+          <a:p>
+            <a:r>
+              <a:rPr b="1"/>
               <a:t>6. The Reveal.</a:t>
             </a:r>
           </a:p>
           <a:p>
             <a:r>
-              <a:rPr lang="en-GB" dirty="0"/>
               <a:t>Now return to their decisions, round by round.</a:t>
             </a:r>
           </a:p>
           <a:p>
             <a:r>
-              <a:rPr lang="en-GB" dirty="0"/>
               <a:t>Round 1, where did you look? Reveal Familiarity: We know this industry.</a:t>
             </a:r>
           </a:p>
           <a:p>
             <a:r>
-              <a:rPr lang="en-GB" dirty="0"/>
-              <a:t>Ask: "How much of your attention went toward the world you already recognised as higher education?"</a:t>
-            </a:r>
-          </a:p>
-          <a:p>
-            <a:r>
-              <a:rPr lang="en-GB" dirty="0"/>
+              <a:rPr b="1"/>
+              <a:t>Ask:</a:t>
+            </a:r>
+            <a:r>
+              <a:t> "How much of your attention went toward the world you already recognised as higher education?"</a:t>
+            </a:r>
+          </a:p>
+          <a:p>
+            <a:r>
               <a:t>Round 2, what did you exclude? Reveal Exclusion: We discount what doesn’t fit it.</a:t>
             </a:r>
           </a:p>
           <a:p>
             <a:r>
-              <a:rPr lang="en-GB" dirty="0"/>
-              <a:t>Ask: "Which signals did you deprioritise because they appeared to sit outside the conventional higher-education environment?"</a:t>
-            </a:r>
-          </a:p>
-          <a:p>
-            <a:r>
-              <a:rPr lang="en-GB" dirty="0"/>
+              <a:rPr b="1"/>
+              <a:t>Ask:</a:t>
+            </a:r>
+            <a:r>
+              <a:t> "Which signals did you deprioritise because they appeared to sit outside the conventional higher-education environment?"</a:t>
+            </a:r>
+          </a:p>
+          <a:p>
+            <a:r>
               <a:t>Round 3, what reassured you? Reveal Complacency: We become confident in the world we can see.</a:t>
             </a:r>
           </a:p>
           <a:p>
             <a:r>
-              <a:rPr lang="en-GB" dirty="0"/>
-              <a:t>Ask: "Did strong current performance influence how urgently you believed the university needed to question its future?"</a:t>
-            </a:r>
-          </a:p>
-          <a:p>
-            <a:r>
-              <a:rPr lang="en-GB" dirty="0"/>
+              <a:rPr b="1"/>
+              <a:t>Ask:</a:t>
+            </a:r>
+            <a:r>
+              <a:t> "Did strong current performance influence how urgently you believed the university needed to question its future?"</a:t>
+            </a:r>
+          </a:p>
+          <a:p>
+            <a:r>
+              <a:t>Then show how the illusion forms: Familiarity, then Exclusion, then Complacency, until the industry we understand becomes the boundary of the world we examine.</a:t>
+            </a:r>
+          </a:p>
+          <a:p>
+            <a:r>
               <a:t>Then give the crucial insight.</a:t>
             </a:r>
           </a:p>
           <a:p>
             <a:r>
-              <a:rPr lang="en-GB" dirty="0"/>
-              <a:t>Say: "Apex did not lack information. The question is what its industry frame caused leaders to notice, dismiss and trust."</a:t>
-            </a:r>
-          </a:p>
-          <a:p>
-            <a:endParaRPr lang="en-GB" dirty="0"/>
-          </a:p>
-          <a:p>
-            <a:r>
-              <a:rPr lang="en-GB" b="1" dirty="0"/>
-              <a:t>7. Return to the deck.</a:t>
-            </a:r>
-          </a:p>
-          <a:p>
-            <a:r>
-              <a:rPr lang="en-GB" dirty="0"/>
-              <a:t>Stop sharing the facilitator file and return to the deck. The next slide carries the Arena question.</a:t>
-            </a:r>
-          </a:p>
-          <a:p>
-            <a:endParaRPr lang="en-GB" dirty="0"/>
-          </a:p>
-          <a:p>
-            <a:r>
-              <a:rPr lang="en-GB" b="1" dirty="0"/>
+              <a:rPr b="1"/>
+              <a:t>Say:</a:t>
+            </a:r>
+            <a:r>
+              <a:t> "Apex did not lack information. The question is what its industry frame caused leaders to notice, dismiss and trust."</a:t>
+            </a:r>
+          </a:p>
+          <a:p>
+            <a:r>
+              <a:t/>
+            </a:r>
+          </a:p>
+          <a:p>
+            <a:r>
+              <a:rPr b="1"/>
+              <a:t>7. Apply Arena.</a:t>
+            </a:r>
+          </a:p>
+          <a:p>
+            <a:r>
+              <a:t>Only after the reveal, bring the room back to ABCV.</a:t>
+            </a:r>
+          </a:p>
+          <a:p>
+            <a:r>
+              <a:rPr b="1"/>
+              <a:t>Ask:</a:t>
+            </a:r>
+            <a:r>
+              <a:t> "What is the Apex learner actually trying to achieve?"</a:t>
+            </a:r>
+          </a:p>
+          <a:p>
+            <a:r>
+              <a:t>Do not give the answer. Make the groups work through the three depths of the Customer End Game taught in 1.1:</a:t>
+            </a:r>
+          </a:p>
+          <a:p>
+            <a:r>
+              <a:t>- Functional: What are they trying to achieve?</a:t>
+            </a:r>
+          </a:p>
+          <a:p>
+            <a:r>
+              <a:t>- Experiential: What matters about how they achieve it?</a:t>
+            </a:r>
+          </a:p>
+          <a:p>
+            <a:r>
+              <a:t>- Consequential: What does achieving it ultimately enable?</a:t>
+            </a:r>
+          </a:p>
+          <a:p>
+            <a:r>
+              <a:t>Then give the final challenge.</a:t>
+            </a:r>
+          </a:p>
+          <a:p>
+            <a:r>
+              <a:rPr b="1"/>
+              <a:t>Ask:</a:t>
+            </a:r>
+            <a:r>
+              <a:t> "Now look again at everything you deprioritised in Rounds 1 and 2. Does defining the Arena around the customer’s end game change what you consider strategically relevant?"</a:t>
+            </a:r>
+          </a:p>
+          <a:p>
+            <a:r>
+              <a:rPr b="1"/>
+              <a:t>Say:</a:t>
+            </a:r>
+            <a:r>
+              <a:t> "The game has not told you that you suffer from the Industry Illusion. Your own choices provide the evidence. Arena is the mechanism for testing and expanding your field of strategic attention."</a:t>
+            </a:r>
+          </a:p>
+          <a:p>
+            <a:r>
+              <a:t/>
+            </a:r>
+          </a:p>
+          <a:p>
+            <a:r>
+              <a:rPr b="1"/>
+              <a:t>8. Hand the game to the participants.</a:t>
+            </a:r>
+          </a:p>
+          <a:p>
+            <a:r>
+              <a:rPr b="1"/>
+              <a:t>Say:</a:t>
+            </a:r>
+            <a:r>
+              <a:t> "After the teaching, each of you plays the same game alone in 2.2 of your own page. Each decision locks once it is made. The Reveal opens when all three rounds are locked, and then you answer the Arena questions and the final challenge. This is portfolio work."</a:t>
+            </a:r>
+          </a:p>
+          <a:p>
+            <a:r>
+              <a:t/>
+            </a:r>
+          </a:p>
+          <a:p>
+            <a:r>
+              <a:rPr b="1"/>
+              <a:t>9. Close the section and return to the deck.</a:t>
+            </a:r>
+          </a:p>
+          <a:p>
+            <a:r>
+              <a:rPr b="1"/>
+              <a:t>Say:</a:t>
+            </a:r>
+            <a:r>
+              <a:t> "Defining the market by customer outcomes widens the field of competition leaders see and test.</a:t>
+            </a:r>
+          </a:p>
+          <a:p>
+            <a:r>
+              <a:t>Section 3 examines where directional integrity breaks down: the checkpoint each executive role is most likely to overlook."</a:t>
+            </a:r>
+          </a:p>
+          <a:p>
+            <a:r>
+              <a:t>Stop sharing the facilitator file and return to the deck.</a:t>
+            </a:r>
+          </a:p>
+          <a:p>
+            <a:r>
+              <a:t/>
+            </a:r>
+          </a:p>
+          <a:p>
+            <a:r>
+              <a:rPr b="1"/>
+              <a:t>ON THE PORTAL, AFTER THE TEACHING:</a:t>
+            </a:r>
+          </a:p>
+          <a:p>
+            <a:r>
+              <a:t>Each participant plays the Industry Illusion game alone in 2.2 of the participant file: the case brief, Rounds 1 to 3, The Reveal, then the Arena questions and the final challenge.</a:t>
+            </a:r>
+          </a:p>
+          <a:p>
+            <a:r>
+              <a:t/>
+            </a:r>
+          </a:p>
+          <a:p>
+            <a:r>
+              <a:rPr b="1"/>
               <a:t>AFTER THE SESSION:</a:t>
             </a:r>
           </a:p>
           <a:p>
             <a:r>
-              <a:rPr lang="en-GB" dirty="0"/>
               <a:t>Each participant’s own game reaches you with the submission, under the heading Industry Illusion Game.</a:t>
             </a:r>
           </a:p>
@@ -2135,107 +2483,149 @@
           <a:lstStyle/>
           <a:p>
             <a:r>
-              <a:rPr lang="en-GB" b="1" dirty="0"/>
+              <a:rPr b="1"/>
               <a:t>SECTION 3 · EXTRAPOLATING — WHERE</a:t>
             </a:r>
           </a:p>
           <a:p>
-            <a:endParaRPr lang="en-GB" dirty="0"/>
-          </a:p>
-          <a:p>
-            <a:r>
-              <a:rPr lang="en-GB" b="1" dirty="0"/>
+            <a:r>
+              <a:t/>
+            </a:r>
+          </a:p>
+          <a:p>
+            <a:r>
+              <a:rPr b="1"/>
               <a:t>HOW THIS SECTION RUNS:</a:t>
             </a:r>
           </a:p>
           <a:p>
             <a:r>
-              <a:rPr lang="en-GB" dirty="0"/>
-              <a:t>1. 3.1a: the nine executive roles and the checkpoint each most often overlooks.</a:t>
-            </a:r>
-          </a:p>
-          <a:p>
-            <a:r>
-              <a:rPr lang="en-GB" dirty="0"/>
-              <a:t>2. 3.1b: one role card in full, the CEO.</a:t>
-            </a:r>
-          </a:p>
-          <a:p>
-            <a:r>
-              <a:rPr lang="en-GB" dirty="0"/>
-              <a:t>3. The Section 3 Reflections slide: the reflection participants write on the portal after the teaching.</a:t>
-            </a:r>
-          </a:p>
-          <a:p>
-            <a:endParaRPr lang="en-GB" dirty="0"/>
-          </a:p>
-          <a:p>
-            <a:r>
-              <a:rPr lang="en-GB" b="1" dirty="0"/>
+              <a:t>1. 3.1a: the Executive Hot Zone, the ABCV checkpoint each executive role most often overlooks, and the late signals each blind spot produces.</a:t>
+            </a:r>
+          </a:p>
+          <a:p>
+            <a:r>
+              <a:t>2. The Section 3 Reflections slide: the reflection participants write on the portal after the teaching.</a:t>
+            </a:r>
+          </a:p>
+          <a:p>
+            <a:r>
+              <a:t/>
+            </a:r>
+          </a:p>
+          <a:p>
+            <a:r>
+              <a:rPr b="1"/>
               <a:t>SECTION LEARNING OUTCOMES:</a:t>
             </a:r>
           </a:p>
           <a:p>
             <a:r>
-              <a:rPr lang="en-GB" dirty="0"/>
+              <a:rPr b="1"/>
               <a:t>1. Diagnose integrity blind spots arising from functional perspectives.</a:t>
             </a:r>
           </a:p>
           <a:p>
             <a:r>
-              <a:rPr lang="en-GB" dirty="0"/>
+              <a:rPr b="1"/>
               <a:t>2. Assess how functional blind spots combine into enterprise strategic risk.</a:t>
             </a:r>
           </a:p>
           <a:p>
-            <a:endParaRPr lang="en-GB" dirty="0"/>
-          </a:p>
-          <a:p>
-            <a:r>
-              <a:rPr lang="en-GB" b="1" dirty="0"/>
+            <a:r>
+              <a:t/>
+            </a:r>
+          </a:p>
+          <a:p>
+            <a:r>
+              <a:rPr b="1"/>
               <a:t>HOW TO OPEN THE SECTION:</a:t>
             </a:r>
           </a:p>
           <a:p>
-            <a:endParaRPr lang="en-GB" dirty="0"/>
-          </a:p>
-          <a:p>
-            <a:r>
-              <a:rPr lang="en-GB" b="1" dirty="0"/>
+            <a:r>
+              <a:t/>
+            </a:r>
+          </a:p>
+          <a:p>
+            <a:r>
+              <a:rPr b="1"/>
               <a:t>1. Say what the section does.</a:t>
             </a:r>
           </a:p>
           <a:p>
             <a:r>
-              <a:rPr lang="en-GB" dirty="0"/>
-              <a:t>Say: "Every executive role is trained to protect a different part of the enterprise system.</a:t>
-            </a:r>
-          </a:p>
-          <a:p>
-            <a:r>
-              <a:rPr lang="en-GB" dirty="0"/>
+              <a:rPr b="1"/>
+              <a:t>Say:</a:t>
+            </a:r>
+            <a:r>
+              <a:t> "Every executive role is trained to protect a different part of the enterprise system.</a:t>
+            </a:r>
+          </a:p>
+          <a:p>
+            <a:r>
               <a:t>These specialisations create selective attention, and predictable strategic blind spots across the leadership mandate."</a:t>
             </a:r>
           </a:p>
           <a:p>
             <a:r>
-              <a:rPr lang="en-GB" dirty="0"/>
-              <a:t>Section intent: make the ABCV framework personal to each leader’s role. The aim is illumination. Leaders should finish knowing which ABCV checkpoint is most likely their organisational blind spot and why it creates specific downstream consequences.</a:t>
-            </a:r>
-          </a:p>
-          <a:p>
-            <a:endParaRPr lang="en-GB" dirty="0"/>
-          </a:p>
-          <a:p>
-            <a:r>
-              <a:rPr lang="en-GB" b="1" dirty="0"/>
-              <a:t>2. Return to the answers from Section 1.</a:t>
-            </a:r>
-          </a:p>
-          <a:p>
-            <a:r>
-              <a:rPr lang="en-GB" dirty="0"/>
-              <a:t>Recall the checkpoints the room named as most consistently overlooked at the end of Section 1. Section 3 shows where those answers come from.</a:t>
+              <a:t>Section intent: make the ABCV framework personal to each leader's role. The aim is illumination. Leaders should finish knowing which ABCV checkpoint is most likely their organisational blind spot and why it creates specific downstream consequences.</a:t>
+            </a:r>
+          </a:p>
+          <a:p>
+            <a:r>
+              <a:t/>
+            </a:r>
+          </a:p>
+          <a:p>
+            <a:r>
+              <a:rPr b="1"/>
+              <a:t>2. Read the two section learning outcomes from the slide.</a:t>
+            </a:r>
+          </a:p>
+          <a:p>
+            <a:r>
+              <a:t/>
+            </a:r>
+          </a:p>
+          <a:p>
+            <a:r>
+              <a:rPr b="1"/>
+              <a:t>3. Return to the answers from Section 1.</a:t>
+            </a:r>
+          </a:p>
+          <a:p>
+            <a:r>
+              <a:t>Recall the checkpoints the room named as most consistently overlooked at the end of Section 1.</a:t>
+            </a:r>
+          </a:p>
+          <a:p>
+            <a:r>
+              <a:rPr b="1"/>
+              <a:t>Say:</a:t>
+            </a:r>
+            <a:r>
+              <a:t> "Section 3 shows where those answers come from."</a:t>
+            </a:r>
+          </a:p>
+          <a:p>
+            <a:r>
+              <a:t/>
+            </a:r>
+          </a:p>
+          <a:p>
+            <a:r>
+              <a:rPr b="1"/>
+              <a:t>4. Bridge to 3.1.</a:t>
+            </a:r>
+          </a:p>
+          <a:p>
+            <a:r>
+              <a:rPr b="1"/>
+              <a:t>Say:</a:t>
+            </a:r>
+            <a:r>
+              <a:t> "We look at the executive team, role by role."</a:t>
             </a:r>
           </a:p>
         </p:txBody>
@@ -2321,358 +2711,441 @@
           <a:lstStyle/>
           <a:p>
             <a:r>
-              <a:rPr lang="en-GB" b="1" dirty="0"/>
+              <a:rPr b="1"/>
               <a:t>3.1 — THE EXECUTIVE HOT ZONE: ROLE-BASED BLIND SPOTS (9 ROLES)</a:t>
             </a:r>
           </a:p>
           <a:p>
-            <a:endParaRPr lang="en-GB" dirty="0"/>
-          </a:p>
-          <a:p>
-            <a:r>
-              <a:rPr lang="en-GB" b="1" dirty="0"/>
+            <a:r>
+              <a:t/>
+            </a:r>
+          </a:p>
+          <a:p>
+            <a:r>
+              <a:rPr b="1"/>
               <a:t>HOW TO TEACH IT:</a:t>
             </a:r>
           </a:p>
           <a:p>
-            <a:endParaRPr lang="en-GB" dirty="0"/>
-          </a:p>
-          <a:p>
-            <a:r>
-              <a:rPr lang="en-GB" dirty="0"/>
-              <a:t>The elephant story and biases will always show up as leaders give their input to the strategy.</a:t>
-            </a:r>
-          </a:p>
-          <a:p>
-            <a:endParaRPr lang="en-GB" dirty="0"/>
-          </a:p>
-          <a:p>
-            <a:r>
-              <a:rPr lang="en-GB" dirty="0"/>
-              <a:t>And what we is that the biases show up on the basis of the role the leader holds more than their character.</a:t>
-            </a:r>
-          </a:p>
-          <a:p>
-            <a:endParaRPr lang="en-GB" dirty="0"/>
-          </a:p>
-          <a:p>
-            <a:r>
-              <a:rPr lang="en-ZA" b="1" dirty="0"/>
+            <a:r>
+              <a:t/>
+            </a:r>
+          </a:p>
+          <a:p>
+            <a:r>
+              <a:rPr b="1"/>
+              <a:t>1. Link to the elephant story.</a:t>
+            </a:r>
+          </a:p>
+          <a:p>
+            <a:r>
+              <a:rPr b="1"/>
               <a:t>Say:</a:t>
             </a:r>
-            <a:endParaRPr lang="en-ZA" dirty="0"/>
-          </a:p>
-          <a:p>
-            <a:r>
-              <a:rPr lang="en-ZA" dirty="0"/>
+            <a:r>
+              <a:t> "The elephant story reminds us that biases will always show up as leaders give their input to the strategy."</a:t>
+            </a:r>
+          </a:p>
+          <a:p>
+            <a:r>
+              <a:t/>
+            </a:r>
+          </a:p>
+          <a:p>
+            <a:r>
+              <a:rPr b="1"/>
+              <a:t>Say:</a:t>
+            </a:r>
+            <a:r>
+              <a:t> "What we see is that the biases show up on the basis of the role the leader holds more than their character."</a:t>
+            </a:r>
+          </a:p>
+          <a:p>
+            <a:r>
+              <a:t/>
+            </a:r>
+          </a:p>
+          <a:p>
+            <a:r>
+              <a:rPr b="1"/>
+              <a:t>Say:</a:t>
+            </a:r>
+            <a:r>
+              <a:t/>
+            </a:r>
+          </a:p>
+          <a:p>
+            <a:r>
               <a:t>"Every executive looks at strategy through the eyes of their responsibility. That view gives them expertise, but it can also create blind spots.</a:t>
             </a:r>
           </a:p>
           <a:p>
             <a:r>
-              <a:rPr lang="en-ZA" dirty="0"/>
               <a:t>Let's examine four executives. Each is competent, each is doing their job, and each may still overlook something important about the organisation's strategic context.“</a:t>
             </a:r>
           </a:p>
           <a:p>
-            <a:endParaRPr lang="en-ZA" dirty="0"/>
-          </a:p>
-          <a:p>
-            <a:r>
-              <a:rPr lang="en-ZA" b="1" dirty="0"/>
+            <a:r>
+              <a:t/>
+            </a:r>
+          </a:p>
+          <a:p>
+            <a:r>
               <a:t>2. Walk through the four characters</a:t>
             </a:r>
           </a:p>
           <a:p>
-            <a:endParaRPr lang="en-ZA" dirty="0"/>
-          </a:p>
-          <a:p>
-            <a:r>
-              <a:rPr lang="en-ZA" b="1" dirty="0"/>
+            <a:r>
+              <a:t/>
+            </a:r>
+          </a:p>
+          <a:p>
+            <a:r>
               <a:t>CEO — Blind Spot: Boundaries</a:t>
             </a:r>
-            <a:endParaRPr lang="en-ZA" dirty="0"/>
-          </a:p>
-          <a:p>
-            <a:r>
-              <a:rPr lang="en-ZA" dirty="0"/>
+          </a:p>
+          <a:p>
+            <a:r>
               <a:t>"The CEO sees the vision and wants the organisation to move. But sometimes the excitement about where we are going overshadows the conditions that could prevent us from getting there.</a:t>
             </a:r>
           </a:p>
           <a:p>
             <a:r>
-              <a:rPr lang="en-ZA" dirty="0"/>
-              <a:t>The ABCV question becomes: </a:t>
-            </a:r>
-            <a:r>
-              <a:rPr lang="en-ZA" b="1" dirty="0"/>
-              <a:t>What boundaries could prevent us from achieving our strategic ambition, and which can we influence or redesign?</a:t>
-            </a:r>
-            <a:r>
-              <a:rPr lang="en-ZA" dirty="0"/>
-              <a:t>"</a:t>
-            </a:r>
-          </a:p>
-          <a:p>
-            <a:endParaRPr lang="en-ZA" b="1" dirty="0"/>
-          </a:p>
-          <a:p>
-            <a:r>
-              <a:rPr lang="en-ZA" b="1" dirty="0"/>
+              <a:t>The ABCV question becomes: What boundaries could prevent us from achieving our strategic ambition, and which can we influence or redesign?"</a:t>
+            </a:r>
+          </a:p>
+          <a:p>
+            <a:r>
+              <a:t/>
+            </a:r>
+          </a:p>
+          <a:p>
+            <a:r>
               <a:t>CFO — Blind Spot: Arena</a:t>
             </a:r>
-            <a:endParaRPr lang="en-ZA" dirty="0"/>
-          </a:p>
-          <a:p>
-            <a:r>
-              <a:rPr lang="en-ZA" dirty="0"/>
+          </a:p>
+          <a:p>
+            <a:r>
               <a:t>"The CFO examines financial viability, revenue, costs and returns. The numbers may look healthy, but financial performance often tells us what has happened. It says less about whether the underlying customer need is changing.</a:t>
             </a:r>
           </a:p>
           <a:p>
             <a:r>
-              <a:rPr lang="en-ZA" dirty="0"/>
               <a:t>An organisation can continue generating revenue from a business model whose relevance is gradually declining.</a:t>
             </a:r>
           </a:p>
           <a:p>
             <a:r>
-              <a:rPr lang="en-ZA" dirty="0"/>
-              <a:t>The ABCV question becomes: </a:t>
-            </a:r>
-            <a:r>
-              <a:rPr lang="en-ZA" b="1" dirty="0"/>
-              <a:t>Are we still operating in an arena where the customer need is important, relevant and sustainable?</a:t>
-            </a:r>
-            <a:r>
-              <a:rPr lang="en-ZA" dirty="0"/>
-              <a:t>"</a:t>
-            </a:r>
-          </a:p>
-          <a:p>
-            <a:endParaRPr lang="en-ZA" b="1" dirty="0"/>
-          </a:p>
-          <a:p>
-            <a:r>
-              <a:rPr lang="en-ZA" b="1" dirty="0"/>
+              <a:t>The ABCV question becomes: Are we still operating in an arena where the customer need is important, relevant and sustainable?"</a:t>
+            </a:r>
+          </a:p>
+          <a:p>
+            <a:r>
+              <a:t/>
+            </a:r>
+          </a:p>
+          <a:p>
+            <a:r>
               <a:t>CHRO — Blind Spot: Competition</a:t>
             </a:r>
-            <a:endParaRPr lang="en-ZA" dirty="0"/>
-          </a:p>
-          <a:p>
-            <a:r>
-              <a:rPr lang="en-ZA" dirty="0"/>
+          </a:p>
+          <a:p>
+            <a:r>
               <a:t>"The CHRO focuses on people capability, engagement and alignment. These are essential to execution.</a:t>
             </a:r>
           </a:p>
           <a:p>
             <a:r>
-              <a:rPr lang="en-ZA" dirty="0"/>
               <a:t>But imagine having highly motivated employees, excellent teamwork and strong performance management, all directed towards a strategy that competitors are already making irrelevant.</a:t>
             </a:r>
           </a:p>
           <a:p>
             <a:r>
-              <a:rPr lang="en-ZA" dirty="0"/>
-              <a:t>The ABCV question becomes: </a:t>
-            </a:r>
-            <a:r>
-              <a:rPr lang="en-ZA" b="1" dirty="0"/>
-              <a:t>Are we building and aligning our people's capabilities to compete effectively in the market we are targeting?</a:t>
-            </a:r>
-            <a:r>
-              <a:rPr lang="en-ZA" dirty="0"/>
-              <a:t>"</a:t>
-            </a:r>
-          </a:p>
-          <a:p>
-            <a:endParaRPr lang="en-ZA" b="1" dirty="0"/>
-          </a:p>
-          <a:p>
-            <a:r>
-              <a:rPr lang="en-ZA" b="1" dirty="0"/>
+              <a:t>The ABCV question becomes: Are we building and aligning our people's capabilities to compete effectively in the market we are targeting?"</a:t>
+            </a:r>
+          </a:p>
+          <a:p>
+            <a:r>
+              <a:t/>
+            </a:r>
+          </a:p>
+          <a:p>
+            <a:r>
               <a:t>CTO — Blind Spot: Value Proposition</a:t>
             </a:r>
-            <a:endParaRPr lang="en-ZA" dirty="0"/>
-          </a:p>
-          <a:p>
-            <a:r>
-              <a:rPr lang="en-ZA" dirty="0"/>
+          </a:p>
+          <a:p>
+            <a:r>
               <a:t>"The CTO may focus on technological capability, system performance and innovation.</a:t>
             </a:r>
           </a:p>
           <a:p>
             <a:r>
-              <a:rPr lang="en-ZA" dirty="0"/>
               <a:t>We can build a sophisticated digital platform, automate processes and introduce advanced technology. But technological excellence does not automatically translate into customer value.</a:t>
             </a:r>
           </a:p>
           <a:p>
             <a:r>
-              <a:rPr lang="en-ZA" dirty="0"/>
-              <a:t>The ABCV question becomes: </a:t>
-            </a:r>
-            <a:r>
-              <a:rPr lang="en-ZA" b="1" dirty="0"/>
-              <a:t>Does our solution create value customers genuinely care about, and is that value meaningfully different from available alternatives?</a:t>
-            </a:r>
-            <a:r>
-              <a:rPr lang="en-ZA" dirty="0"/>
-              <a:t>"</a:t>
-            </a:r>
-          </a:p>
-          <a:p>
-            <a:endParaRPr lang="en-ZA" b="1" dirty="0"/>
-          </a:p>
-          <a:p>
-            <a:r>
-              <a:rPr lang="en-ZA" b="1" dirty="0"/>
+              <a:t>The ABCV question becomes: Does our solution create value customers genuinely care about, and is that value meaningfully different from available alternatives?"</a:t>
+            </a:r>
+          </a:p>
+          <a:p>
+            <a:r>
+              <a:t/>
+            </a:r>
+          </a:p>
+          <a:p>
+            <a:r>
               <a:t>3. Draw Out the Strategic Insight</a:t>
             </a:r>
           </a:p>
           <a:p>
             <a:r>
-              <a:rPr lang="en-ZA" b="1" dirty="0"/>
+              <a:rPr b="1"/>
               <a:t>Say:</a:t>
             </a:r>
-            <a:endParaRPr lang="en-ZA" dirty="0"/>
-          </a:p>
-          <a:p>
-            <a:r>
-              <a:rPr lang="en-ZA" dirty="0"/>
+            <a:r>
+              <a:t/>
+            </a:r>
+          </a:p>
+          <a:p>
+            <a:r>
               <a:t>"Notice something interesting. None of these executives is necessarily wrong.</a:t>
             </a:r>
           </a:p>
           <a:p>
             <a:r>
-              <a:rPr lang="en-ZA" dirty="0"/>
               <a:t>The CEO is right to pursue the vision. The CFO is right to protect financial viability. The CHRO is right to develop people. The CTO is right to strengthen technological capability.</a:t>
             </a:r>
           </a:p>
           <a:p>
-            <a:endParaRPr lang="en-ZA" b="1" dirty="0"/>
-          </a:p>
-          <a:p>
-            <a:r>
-              <a:rPr lang="en-ZA" b="1" dirty="0"/>
+            <a:r>
+              <a:t/>
+            </a:r>
+          </a:p>
+          <a:p>
+            <a:r>
               <a:t>The problem emerges when each executive's functional perspective becomes the organisation's entire strategic perspective.</a:t>
             </a:r>
-            <a:endParaRPr lang="en-ZA" dirty="0"/>
-          </a:p>
-          <a:p>
-            <a:r>
-              <a:rPr lang="en-ZA" dirty="0"/>
+          </a:p>
+          <a:p>
+            <a:r>
               <a:t>That is how we can end up with a strategy that makes perfect sense within individual functions but fails when tested against the broader strategic context."</a:t>
             </a:r>
           </a:p>
           <a:p>
-            <a:endParaRPr lang="en-ZA" b="1" dirty="0"/>
-          </a:p>
-          <a:p>
-            <a:r>
-              <a:rPr lang="en-ZA" b="1" dirty="0"/>
+            <a:r>
+              <a:t/>
+            </a:r>
+          </a:p>
+          <a:p>
+            <a:r>
               <a:t>4. Engage Participants</a:t>
             </a:r>
           </a:p>
           <a:p>
             <a:r>
-              <a:rPr lang="en-ZA" b="1" dirty="0"/>
+              <a:rPr b="1"/>
               <a:t>Ask:</a:t>
             </a:r>
-            <a:endParaRPr lang="en-ZA" dirty="0"/>
-          </a:p>
-          <a:p>
-            <a:r>
-              <a:rPr lang="en-ZA" dirty="0"/>
+            <a:r>
+              <a:t/>
+            </a:r>
+          </a:p>
+          <a:p>
+            <a:r>
               <a:t>"Looking at these four characters, which blind spot do you recognise most in your organisation?"</a:t>
             </a:r>
           </a:p>
           <a:p>
             <a:r>
-              <a:rPr lang="en-ZA" dirty="0"/>
               <a:t>Take two or three responses.</a:t>
             </a:r>
           </a:p>
           <a:p>
             <a:r>
-              <a:rPr lang="en-ZA" dirty="0"/>
+              <a:rPr b="1"/>
               <a:t>Then ask:</a:t>
             </a:r>
-          </a:p>
-          <a:p>
-            <a:r>
-              <a:rPr lang="en-ZA" dirty="0"/>
+            <a:r>
+              <a:t/>
+            </a:r>
+          </a:p>
+          <a:p>
+            <a:r>
               <a:t>"Can you think of a situation where an executive was making a perfectly reasonable decision from their functional perspective, but that decision created a problem for the wider organisation?"</a:t>
             </a:r>
           </a:p>
           <a:p>
-            <a:endParaRPr lang="en-ZA" b="1" dirty="0"/>
-          </a:p>
-          <a:p>
-            <a:r>
-              <a:rPr lang="en-ZA" b="1" dirty="0"/>
+            <a:r>
+              <a:t/>
+            </a:r>
+          </a:p>
+          <a:p>
+            <a:r>
               <a:t>5. Close and Reinforce</a:t>
             </a:r>
           </a:p>
           <a:p>
             <a:r>
-              <a:rPr lang="en-ZA" b="1" dirty="0"/>
+              <a:rPr b="1"/>
               <a:t>Say:</a:t>
             </a:r>
-            <a:endParaRPr lang="en-ZA" dirty="0"/>
-          </a:p>
-          <a:p>
-            <a:r>
-              <a:rPr lang="en-ZA" dirty="0"/>
+            <a:r>
+              <a:t/>
+            </a:r>
+          </a:p>
+          <a:p>
+            <a:r>
               <a:t>"This is why ABCV matters.</a:t>
             </a:r>
           </a:p>
           <a:p>
             <a:r>
-              <a:rPr lang="en-ZA" dirty="0"/>
               <a:t>Boundaries, Arena, Competition and Value Proposition help us examine strategic direction from perspectives that individual functions may overlook.</a:t>
             </a:r>
           </a:p>
           <a:p>
             <a:r>
-              <a:rPr lang="en-ZA" dirty="0"/>
               <a:t>And remember, these are illustrative blind spots. A CEO could overlook competition, a CFO could overlook boundaries, and a CTO could overlook the arena.</a:t>
             </a:r>
           </a:p>
           <a:p>
             <a:r>
-              <a:rPr lang="en-ZA" b="1" dirty="0"/>
               <a:t>The lesson is that functional expertise gives us depth, but strategic integration gives us the enterprise view.</a:t>
             </a:r>
-            <a:endParaRPr lang="en-ZA" dirty="0"/>
-          </a:p>
-          <a:p>
-            <a:r>
-              <a:rPr lang="en-ZA" dirty="0"/>
+          </a:p>
+          <a:p>
+            <a:r>
               <a:t>When we bring these perspectives together, we improve our ability to identify the assumptions, constraints and competitive realities that could undermine our strategy before we commit to execution."</a:t>
             </a:r>
           </a:p>
           <a:p>
             <a:r>
-              <a:rPr lang="en-ZA" b="1" dirty="0"/>
               <a:t>Final reflection:</a:t>
             </a:r>
-            <a:endParaRPr lang="en-ZA" dirty="0"/>
-          </a:p>
-          <a:p>
-            <a:r>
-              <a:rPr lang="en-ZA" dirty="0"/>
+          </a:p>
+          <a:p>
+            <a:r>
               <a:t>"Which part of ABCV would your own functional expertise naturally lead you to overlook?"</a:t>
             </a:r>
           </a:p>
           <a:p>
-            <a:endParaRPr lang="en-GB" dirty="0"/>
-          </a:p>
-          <a:p>
-            <a:endParaRPr lang="en-GB" dirty="0"/>
-          </a:p>
-          <a:p>
-            <a:endParaRPr lang="en-GB" dirty="0"/>
+            <a:r>
+              <a:t/>
+            </a:r>
+          </a:p>
+          <a:p>
+            <a:r>
+              <a:rPr b="1"/>
+              <a:t>6. Read the late signals.</a:t>
+            </a:r>
+          </a:p>
+          <a:p>
+            <a:r>
+              <a:rPr b="1"/>
+              <a:t>Say:</a:t>
+            </a:r>
+            <a:r>
+              <a:t> "Each blind spot has a symptom: the question leaders only start asking when the underlying condition has already failed. These are late signals. ABCV–MBT creates early signals."</a:t>
+            </a:r>
+          </a:p>
+          <a:p>
+            <a:r>
+              <a:t>Give the symptom and the right question for the roles in the room:</a:t>
+            </a:r>
+          </a:p>
+          <a:p>
+            <a:r>
+              <a:t>- CEO · Boundaries. Symptom: "Why are we not seeing the results when our strategy is clear?" Right question: "What specific conditions must remain true for execution to sustain the pace we've planned for?"</a:t>
+            </a:r>
+          </a:p>
+          <a:p>
+            <a:r>
+              <a:t>- CFO · Arena. Symptom: "The model works… so why is performance lagging?" Right question: "Is the customer end-game we designed this model around still the right end-game?"</a:t>
+            </a:r>
+          </a:p>
+          <a:p>
+            <a:r>
+              <a:t>- COO · Competition. Symptom: "We've optimised everything — what are we missing?" Right question: "Are our efficiency gains making us meaningfully more competitive against the real alternatives customers have?"</a:t>
+            </a:r>
+          </a:p>
+          <a:p>
+            <a:r>
+              <a:t>- CHRO · Competition. Symptom: "Our people are committed — why isn't it translating?" Right question: "Are we aligning our people's energy towards the right competitive arena, or building capability for yesterday's contest?"</a:t>
+            </a:r>
+          </a:p>
+          <a:p>
+            <a:r>
+              <a:t>- CTO · Arena. Symptom: "We delivered the system — why isn't adoption there?" Right question: "Does this solution address the functional, experiential and consequential outcome the customer is actually pursuing?"</a:t>
+            </a:r>
+          </a:p>
+          <a:p>
+            <a:r>
+              <a:t>- CMO · Boundaries. Symptom: "We created demand — why can't we fulfil it?" Right question: "Do our operational boundaries allow us to fulfil the demand our marketing is designed to generate?"</a:t>
+            </a:r>
+          </a:p>
+          <a:p>
+            <a:r>
+              <a:t>- CCO · Value Proposition. Symptom: "We're closing deals — but at what cost to who we are?" Right question: "Does this deal sharpen our value architecture or compromise it for short-term volume?"</a:t>
+            </a:r>
+          </a:p>
+          <a:p>
+            <a:r>
+              <a:t>- CPO · Arena. Symptom: "We've saved money — but has it actually mattered?" Right question: "Does this cost initiative strengthen our ability to compete in the arena our customers actually operate in?"</a:t>
+            </a:r>
+          </a:p>
+          <a:p>
+            <a:r>
+              <a:t>- CSO · Boundaries. Symptom: "Why does execution keep breaking after alignment?" Right question: "Which operational friction points have we built our strategy around — and which are we still hoping won't materialise?"</a:t>
+            </a:r>
+          </a:p>
+          <a:p>
+            <a:r>
+              <a:rPr b="1"/>
+              <a:t>Ask:</a:t>
+            </a:r>
+            <a:r>
+              <a:t> "Which of these symptoms have you heard in your leadership conversations in the last quarter? What does that tell you about where your blind spot sits?"</a:t>
+            </a:r>
+          </a:p>
+          <a:p>
+            <a:r>
+              <a:rPr b="1"/>
+              <a:t>Then ask:</a:t>
+            </a:r>
+            <a:r>
+              <a:t> "Look at the gaps across all roles. Which checkpoint appears most frequently as an overlooked dimension?"</a:t>
+            </a:r>
+          </a:p>
+          <a:p>
+            <a:r>
+              <a:rPr b="1"/>
+              <a:t>Say:</a:t>
+            </a:r>
+            <a:r>
+              <a:t> "That answer is the team's most critical strategic vulnerability."</a:t>
+            </a:r>
+          </a:p>
+          <a:p>
+            <a:r>
+              <a:t/>
+            </a:r>
+          </a:p>
+          <a:p>
+            <a:r>
+              <a:rPr b="1"/>
+              <a:t>7. Close the section.</a:t>
+            </a:r>
+          </a:p>
+          <a:p>
+            <a:r>
+              <a:rPr b="1"/>
+              <a:t>Say:</a:t>
+            </a:r>
+            <a:r>
+              <a:t> "Each executive brings a predictable blind spot; collective review covers the checkpoints any one function overlooks."</a:t>
+            </a:r>
           </a:p>
         </p:txBody>
       </p:sp>
@@ -2757,124 +3230,144 @@
           <a:lstStyle/>
           <a:p>
             <a:r>
-              <a:rPr lang="en-GB" b="1" dirty="0"/>
+              <a:rPr b="1"/>
               <a:t>SECTION 3 REFLECTIONS</a:t>
             </a:r>
           </a:p>
           <a:p>
-            <a:endParaRPr lang="en-GB" dirty="0"/>
-          </a:p>
-          <a:p>
-            <a:r>
-              <a:rPr lang="en-GB" b="1" dirty="0"/>
+            <a:r>
+              <a:t/>
+            </a:r>
+          </a:p>
+          <a:p>
+            <a:r>
+              <a:rPr b="1"/>
               <a:t>HOW TO USE THIS SLIDE:</a:t>
             </a:r>
           </a:p>
           <a:p>
-            <a:endParaRPr lang="en-GB" dirty="0"/>
-          </a:p>
-          <a:p>
-            <a:r>
-              <a:rPr lang="en-GB" b="1" dirty="0"/>
+            <a:r>
+              <a:t/>
+            </a:r>
+          </a:p>
+          <a:p>
+            <a:r>
+              <a:rPr b="1"/>
               <a:t>1. Show the slide and read the prompt aloud.</a:t>
             </a:r>
           </a:p>
           <a:p>
             <a:r>
-              <a:rPr lang="en-GB" dirty="0"/>
               <a:t>3.1 Reflection: "Having explored your role’s typical blind spot: what is one MBT condition in that checkpoint that your organisation is currently assuming without confirmation? What would it take to verify it?"</a:t>
             </a:r>
           </a:p>
           <a:p>
-            <a:endParaRPr lang="en-GB" dirty="0"/>
-          </a:p>
-          <a:p>
-            <a:r>
-              <a:rPr lang="en-GB" b="1" dirty="0"/>
+            <a:r>
+              <a:t/>
+            </a:r>
+          </a:p>
+          <a:p>
+            <a:r>
+              <a:rPr b="1"/>
               <a:t>2. Say what the reflection is for.</a:t>
             </a:r>
           </a:p>
           <a:p>
             <a:r>
-              <a:rPr lang="en-GB" dirty="0"/>
               <a:t>Point learners to the portal section that they will be required to complete with as much depth as possible.</a:t>
             </a:r>
           </a:p>
           <a:p>
             <a:r>
-              <a:rPr lang="en-GB" dirty="0"/>
               <a:t>The reflections build the learning portfolio they receive at the end of the programme.</a:t>
             </a:r>
           </a:p>
           <a:p>
-            <a:endParaRPr lang="en-GB" dirty="0"/>
-          </a:p>
-          <a:p>
-            <a:r>
-              <a:rPr lang="en-GB" dirty="0"/>
-              <a:t>Say: "You write this reflection on the portal after the teaching, with as much depth as you can."</a:t>
-            </a:r>
-          </a:p>
-          <a:p>
-            <a:endParaRPr lang="en-GB" dirty="0"/>
-          </a:p>
-          <a:p>
-            <a:r>
-              <a:rPr lang="en-GB" b="1" dirty="0"/>
+            <a:r>
+              <a:t/>
+            </a:r>
+          </a:p>
+          <a:p>
+            <a:r>
+              <a:rPr b="1"/>
+              <a:t>Say:</a:t>
+            </a:r>
+            <a:r>
+              <a:t> "You write this reflection on the portal after the teaching, with as much depth as you can."</a:t>
+            </a:r>
+          </a:p>
+          <a:p>
+            <a:r>
+              <a:t/>
+            </a:r>
+          </a:p>
+          <a:p>
+            <a:r>
+              <a:rPr b="1"/>
               <a:t>3. Set the standard.</a:t>
             </a:r>
           </a:p>
           <a:p>
             <a:r>
-              <a:rPr lang="en-GB" dirty="0"/>
-              <a:t>Say: "Name the checkpoint of your role.</a:t>
-            </a:r>
-          </a:p>
-          <a:p>
-            <a:r>
-              <a:rPr lang="en-GB" dirty="0"/>
+              <a:rPr b="1"/>
+              <a:t>Say:</a:t>
+            </a:r>
+            <a:r>
+              <a:t> "Name the checkpoint of your role.</a:t>
+            </a:r>
+          </a:p>
+          <a:p>
+            <a:r>
               <a:t>Write one condition your organisation is assuming, in a form that is either true or false.</a:t>
             </a:r>
           </a:p>
           <a:p>
             <a:r>
-              <a:rPr lang="en-GB" dirty="0"/>
               <a:t>Then say what evidence would verify it and who holds that evidence."</a:t>
             </a:r>
           </a:p>
           <a:p>
             <a:r>
-              <a:rPr lang="en-GB" dirty="0"/>
-              <a:t>Listen for: a general concern where a condition is needed. Ask: "What exactly must remain true?"</a:t>
-            </a:r>
-          </a:p>
-          <a:p>
-            <a:endParaRPr lang="en-GB" dirty="0"/>
-          </a:p>
-          <a:p>
-            <a:r>
-              <a:rPr lang="en-GB" b="1" dirty="0"/>
-              <a:t>4. Bridge to Section 5.</a:t>
-            </a:r>
-          </a:p>
-          <a:p>
-            <a:r>
-              <a:rPr lang="en-GB" dirty="0"/>
-              <a:t>Say: "We know the checkpoints and we know our blind spots. Section 5 applies both to your own Key Results."</a:t>
-            </a:r>
-          </a:p>
-          <a:p>
-            <a:endParaRPr lang="en-GB" dirty="0"/>
-          </a:p>
-          <a:p>
-            <a:r>
-              <a:rPr lang="en-GB" b="1" dirty="0"/>
+              <a:rPr b="1"/>
+              <a:t>Listen for:</a:t>
+            </a:r>
+            <a:r>
+              <a:t> a general concern where a condition is needed. Ask: "What exactly must remain true?"</a:t>
+            </a:r>
+          </a:p>
+          <a:p>
+            <a:r>
+              <a:t/>
+            </a:r>
+          </a:p>
+          <a:p>
+            <a:r>
+              <a:rPr b="1"/>
+              <a:t>4. Bridge to Section 4.</a:t>
+            </a:r>
+          </a:p>
+          <a:p>
+            <a:r>
+              <a:rPr b="1"/>
+              <a:t>Say:</a:t>
+            </a:r>
+            <a:r>
+              <a:t> "We know the checkpoints and we know our blind spots. Section 4 applies the checkpoints to realistic strategic failures, matching each breakdown to its cause."</a:t>
+            </a:r>
+          </a:p>
+          <a:p>
+            <a:r>
+              <a:t/>
+            </a:r>
+          </a:p>
+          <a:p>
+            <a:r>
+              <a:rPr b="1"/>
               <a:t>ON THE PORTAL, AFTER THE TEACHING:</a:t>
             </a:r>
           </a:p>
           <a:p>
             <a:r>
-              <a:rPr lang="en-GB" dirty="0"/>
               <a:t>Participants write the reflection in Section 3 of the participant file: 3.1 Reflection.</a:t>
             </a:r>
           </a:p>
@@ -2945,113 +3438,143 @@
           <a:lstStyle/>
           <a:p>
             <a:r>
-              <a:rPr lang="en-GB"/>
+              <a:rPr b="1"/>
               <a:t>SECTION 5 · APPLICATION — IN PRACTICE</a:t>
             </a:r>
           </a:p>
           <a:p>
-            <a:endParaRPr lang="en-GB"/>
-          </a:p>
-          <a:p>
-            <a:r>
-              <a:rPr lang="en-GB"/>
+            <a:r>
+              <a:t/>
+            </a:r>
+          </a:p>
+          <a:p>
+            <a:r>
+              <a:rPr b="1"/>
               <a:t>HOW THIS SECTION RUNS:</a:t>
             </a:r>
           </a:p>
           <a:p>
             <a:r>
-              <a:rPr lang="en-GB"/>
               <a:t>1. 5.1: the worked example. One Key Result of the client services company from Unit 3, taken through four steps, on six slides.</a:t>
             </a:r>
           </a:p>
           <a:p>
             <a:r>
-              <a:rPr lang="en-GB"/>
               <a:t>2. 5.2: the briefing for the Capstone work. Each group takes its own Unit 3 Key Results through the same four steps.</a:t>
             </a:r>
           </a:p>
           <a:p>
             <a:r>
-              <a:rPr lang="en-GB"/>
               <a:t>3. 5.3: verification ownership and the executive blind spot. The group assigns each critical condition to an executive and names the checkpoint its team is most likely to overlook.</a:t>
             </a:r>
           </a:p>
           <a:p>
-            <a:endParaRPr lang="en-GB"/>
-          </a:p>
-          <a:p>
-            <a:r>
-              <a:rPr lang="en-GB"/>
+            <a:r>
+              <a:t/>
+            </a:r>
+          </a:p>
+          <a:p>
+            <a:r>
+              <a:rPr b="1"/>
               <a:t>SECTION LEARNING OUTCOMES:</a:t>
             </a:r>
           </a:p>
           <a:p>
             <a:r>
-              <a:rPr lang="en-GB"/>
+              <a:rPr b="1"/>
               <a:t>1. Validate the critical assumptions, dependencies and uncertainties behind strategic objectives.</a:t>
             </a:r>
           </a:p>
           <a:p>
             <a:r>
-              <a:rPr lang="en-GB"/>
+              <a:rPr b="1"/>
               <a:t>2. Assign and coordinate executive accountability for validating strategic conditions.</a:t>
             </a:r>
           </a:p>
           <a:p>
-            <a:endParaRPr lang="en-GB"/>
-          </a:p>
-          <a:p>
-            <a:r>
-              <a:rPr lang="en-GB"/>
+            <a:r>
+              <a:t/>
+            </a:r>
+          </a:p>
+          <a:p>
+            <a:r>
+              <a:rPr b="1"/>
               <a:t>HOW TO OPEN THE SECTION:</a:t>
             </a:r>
           </a:p>
           <a:p>
-            <a:endParaRPr lang="en-GB"/>
-          </a:p>
-          <a:p>
-            <a:r>
-              <a:rPr lang="en-GB"/>
+            <a:r>
+              <a:t/>
+            </a:r>
+          </a:p>
+          <a:p>
+            <a:r>
+              <a:rPr b="1"/>
               <a:t>1. Say what the section does.</a:t>
             </a:r>
           </a:p>
           <a:p>
             <a:r>
-              <a:rPr lang="en-GB"/>
-              <a:t>Say: "This is where the checkpoints are applied to your own direction.</a:t>
-            </a:r>
-          </a:p>
-          <a:p>
-            <a:r>
-              <a:rPr lang="en-GB"/>
+              <a:rPr b="1"/>
+              <a:t>Say:</a:t>
+            </a:r>
+            <a:r>
+              <a:t> "This is where the checkpoints are applied to your own direction.</a:t>
+            </a:r>
+          </a:p>
+          <a:p>
+            <a:r>
               <a:t>Your group brings in the Key Results it confirmed in Unit 3 and takes each one through four steps.</a:t>
             </a:r>
           </a:p>
           <a:p>
             <a:r>
-              <a:rPr lang="en-GB"/>
               <a:t>At each step it names the condition that must remain true."</a:t>
             </a:r>
           </a:p>
           <a:p>
             <a:r>
-              <a:rPr lang="en-GB"/>
-              <a:t>This is Capstone work: the confirmed outputs feed each team’s Capstone S2R Blueprint.</a:t>
-            </a:r>
-          </a:p>
-          <a:p>
-            <a:endParaRPr lang="en-GB"/>
-          </a:p>
-          <a:p>
-            <a:r>
-              <a:rPr lang="en-GB"/>
+              <a:t>This is Capstone work: the confirmed outputs feed boxes 4A to 4F of each team’s Capstone S2R® Blueprint.</a:t>
+            </a:r>
+          </a:p>
+          <a:p>
+            <a:r>
+              <a:t/>
+            </a:r>
+          </a:p>
+          <a:p>
+            <a:r>
+              <a:rPr b="1"/>
               <a:t>2. Say the order.</a:t>
             </a:r>
           </a:p>
           <a:p>
             <a:r>
-              <a:rPr lang="en-GB"/>
-              <a:t>Say: "We first walk one worked example in full. Your exercise then follows the worked example step for step."</a:t>
+              <a:rPr b="1"/>
+              <a:t>Say:</a:t>
+            </a:r>
+            <a:r>
+              <a:t> "We first walk one worked example in full. Your exercise then follows the worked example step for step."</a:t>
+            </a:r>
+          </a:p>
+          <a:p>
+            <a:r>
+              <a:t/>
+            </a:r>
+          </a:p>
+          <a:p>
+            <a:r>
+              <a:rPr b="1"/>
+              <a:t>3. Bridge to 5.1.</a:t>
+            </a:r>
+          </a:p>
+          <a:p>
+            <a:r>
+              <a:rPr b="1"/>
+              <a:t>Say:</a:t>
+            </a:r>
+            <a:r>
+              <a:t> "The example continues the client services company you met in Unit 3."</a:t>
             </a:r>
           </a:p>
         </p:txBody>
@@ -4430,272 +4953,263 @@
           <a:lstStyle/>
           <a:p>
             <a:r>
-              <a:rPr lang="en-GB"/>
+              <a:rPr b="1"/>
               <a:t>5.2 — STRESS-TESTING YOUR KEY RESULTS · THE FOUR STEPS (CAPSTONE WORK)</a:t>
             </a:r>
           </a:p>
           <a:p>
-            <a:endParaRPr lang="en-GB"/>
-          </a:p>
-          <a:p>
-            <a:r>
-              <a:rPr lang="en-GB"/>
+            <a:r>
+              <a:t/>
+            </a:r>
+          </a:p>
+          <a:p>
+            <a:r>
+              <a:rPr b="1"/>
               <a:t>HOW TO TEACH IT:</a:t>
             </a:r>
           </a:p>
           <a:p>
-            <a:endParaRPr lang="en-GB"/>
-          </a:p>
-          <a:p>
-            <a:r>
-              <a:rPr lang="en-GB"/>
-              <a:t>Explain how the group works, using the four lines on the slide.</a:t>
-            </a:r>
-          </a:p>
-          <a:p>
-            <a:r>
-              <a:rPr lang="en-GB"/>
-              <a:t>Say: "Your group agrees each entry.</a:t>
-            </a:r>
-          </a:p>
-          <a:p>
-            <a:r>
-              <a:rPr lang="en-GB"/>
+            <a:r>
+              <a:t/>
+            </a:r>
+          </a:p>
+          <a:p>
+            <a:r>
+              <a:rPr b="1"/>
+              <a:t>1. Say what the group works on.</a:t>
+            </a:r>
+          </a:p>
+          <a:p>
+            <a:r>
+              <a:rPr b="1"/>
+              <a:t>Say:</a:t>
+            </a:r>
+            <a:r>
+              <a:t> "Your group does for its own Key Results what the worked example did: the same four steps, in the same order.</a:t>
+            </a:r>
+          </a:p>
+          <a:p>
+            <a:r>
+              <a:t>Your confirmed Key Results from Unit 3 are already listed on your page. If they are missing, select Bring in from my Unit 3 page. Nothing is typed again.</a:t>
+            </a:r>
+          </a:p>
+          <a:p>
+            <a:r>
+              <a:t>No new objective or measure is added."</a:t>
+            </a:r>
+          </a:p>
+          <a:p>
+            <a:r>
+              <a:t/>
+            </a:r>
+          </a:p>
+          <a:p>
+            <a:r>
+              <a:rPr b="1"/>
+              <a:t>2. Explain how the group works.</a:t>
+            </a:r>
+          </a:p>
+          <a:p>
+            <a:r>
+              <a:rPr b="1"/>
+              <a:t>Say:</a:t>
+            </a:r>
+            <a:r>
+              <a:t> "Your group agrees each entry.</a:t>
+            </a:r>
+          </a:p>
+          <a:p>
+            <a:r>
               <a:t>The group chooses its scribe, who types the agreed wording.</a:t>
             </a:r>
           </a:p>
           <a:p>
             <a:r>
-              <a:rPr lang="en-GB"/>
-              <a:t>The entries appear on every member’s page, and each member then selects Agree."</a:t>
-            </a:r>
-          </a:p>
-          <a:p>
-            <a:endParaRPr lang="en-GB"/>
-          </a:p>
-          <a:p>
-            <a:r>
-              <a:rPr lang="en-GB"/>
-              <a:t>Say what the group works on.</a:t>
-            </a:r>
-          </a:p>
-          <a:p>
-            <a:r>
-              <a:rPr lang="en-GB"/>
-              <a:t>Say: "Your group does for its own Key Results what the worked example did.</a:t>
-            </a:r>
-          </a:p>
-          <a:p>
-            <a:r>
-              <a:rPr lang="en-GB"/>
-              <a:t>Your confirmed Key Results from Unit 3 are already listed on your page.</a:t>
-            </a:r>
-          </a:p>
-          <a:p>
-            <a:r>
-              <a:rPr lang="en-GB"/>
-              <a:t>No new objective or measure is added."</a:t>
-            </a:r>
-          </a:p>
-          <a:p>
-            <a:endParaRPr lang="en-GB"/>
-          </a:p>
-          <a:p>
-            <a:r>
-              <a:rPr lang="en-GB"/>
-              <a:t>Say what follows.</a:t>
-            </a:r>
-          </a:p>
-          <a:p>
-            <a:r>
-              <a:rPr lang="en-GB"/>
-              <a:t>Say: "When every Key Result has been taken through the four steps, your group goes on to 5.3."</a:t>
-            </a:r>
-          </a:p>
-          <a:p>
-            <a:endParaRPr lang="en-GB"/>
-          </a:p>
-          <a:p>
-            <a:endParaRPr lang="en-GB"/>
-          </a:p>
-          <a:p>
-            <a:r>
-              <a:rPr lang="en-GB"/>
-              <a:t>Walk the four steps on the slide. Each one is taken for one Key Result at a time.</a:t>
-            </a:r>
-          </a:p>
-          <a:p>
-            <a:r>
-              <a:rPr lang="en-GB"/>
-              <a:t>Step 1 · Define the Arena. The group says which customer need the Key Result serves, at three depths (functional, experiential, consequential). Then names what must remain true about that need.</a:t>
-            </a:r>
-          </a:p>
-          <a:p>
-            <a:endParaRPr lang="en-GB"/>
-          </a:p>
-          <a:p>
-            <a:r>
-              <a:rPr lang="en-GB"/>
-              <a:t>Step 2 · Understand the Boundaries. The group lists the boundaries material enough to slow, restrict or prevent delivery of the Key Result, with the kind of each and whether it must be accepted, can be influenced or was created by the organisation itself. Then it names what must remain true for delivery.</a:t>
-            </a:r>
-          </a:p>
-          <a:p>
-            <a:endParaRPr lang="en-GB"/>
-          </a:p>
-          <a:p>
-            <a:r>
-              <a:rPr lang="en-GB"/>
-              <a:t>Step 3 · See the Competition. The group lists who or what else can give the customer what the Key Result delivers, including alternatives outside the industry and doing nothing. Then it names what must remain true about its advantage.</a:t>
-            </a:r>
-          </a:p>
-          <a:p>
-            <a:endParaRPr lang="en-GB"/>
-          </a:p>
-          <a:p>
-            <a:r>
-              <a:rPr lang="en-GB"/>
-              <a:t>Step 4 · Establish the Value Proposition. The group says what about the Key Result will make customers choose the organisation, using the three tests (relevant, distinctive, deliverable). Then it names what must remain true about its value architecture.</a:t>
-            </a:r>
-          </a:p>
-          <a:p>
-            <a:endParaRPr lang="en-GB"/>
-          </a:p>
-          <a:p>
-            <a:endParaRPr lang="en-GB"/>
-          </a:p>
-          <a:p>
-            <a:r>
-              <a:rPr lang="en-GB"/>
-              <a:t>2. Say how the questions read on the page.</a:t>
-            </a:r>
-          </a:p>
-          <a:p>
-            <a:r>
-              <a:rPr lang="en-GB"/>
-              <a:t>Say: "On your page every question names your own Key Result, word for word. You answer about that Key Result and no other."</a:t>
-            </a:r>
-          </a:p>
-          <a:p>
-            <a:endParaRPr lang="en-GB"/>
-          </a:p>
-          <a:p>
-            <a:r>
-              <a:rPr lang="en-GB"/>
-              <a:t>3. Set the standard for a condition.</a:t>
-            </a:r>
-          </a:p>
-          <a:p>
-            <a:r>
-              <a:rPr lang="en-GB"/>
-              <a:t>Say: "The condition your group names must be specific enough that someone else could attempt to verify it.</a:t>
-            </a:r>
-          </a:p>
-          <a:p>
-            <a:r>
-              <a:rPr lang="en-GB"/>
-              <a:t>“The market must support us” becomes a condition once it names what must be true, for whom and by when.</a:t>
-            </a:r>
-          </a:p>
-          <a:p>
-            <a:r>
-              <a:rPr lang="en-GB"/>
-              <a:t>"</a:t>
-            </a:r>
-          </a:p>
-          <a:p>
-            <a:r>
-              <a:rPr lang="en-GB"/>
-              <a:t>How each condition is written: as a statement that is either true or false. The group restates a risk or a concern as the condition that must hold.</a:t>
-            </a:r>
-          </a:p>
-          <a:p>
-            <a:r>
-              <a:rPr lang="en-GB"/>
-              <a:t>Where a group cannot name a condition: the Key Result itself may be insufficiently grounded. The group asks itself what that tells it about the Key Result.</a:t>
-            </a:r>
-          </a:p>
-          <a:p>
-            <a:r>
-              <a:rPr lang="en-GB"/>
-              <a:t>Ask: "If you cannot name a Must-Be-True, what does that tell you about this Key Result?"</a:t>
-            </a:r>
-          </a:p>
-          <a:p>
-            <a:endParaRPr lang="en-GB"/>
-          </a:p>
-          <a:p>
-            <a:endParaRPr lang="en-GB"/>
-          </a:p>
-          <a:p>
-            <a:r>
-              <a:rPr lang="en-GB"/>
-              <a:t>Lead into 5.3 with the question it answers.</a:t>
-            </a:r>
-          </a:p>
-          <a:p>
-            <a:r>
-              <a:rPr lang="en-GB"/>
-              <a:t>Ask: "Which one MBT condition, if left unverified, represents the greatest risk to our strategy’s integrity? Who is responsible for that verification?"</a:t>
-            </a:r>
-          </a:p>
-          <a:p>
-            <a:endParaRPr lang="en-GB"/>
-          </a:p>
-          <a:p>
-            <a:r>
-              <a:rPr lang="en-GB"/>
+              <a:t>The entries appear on every member's page, and each member then selects Agree."</a:t>
+            </a:r>
+          </a:p>
+          <a:p>
+            <a:r>
+              <a:t/>
+            </a:r>
+          </a:p>
+          <a:p>
+            <a:r>
+              <a:rPr b="1"/>
+              <a:t>3. Walk the four steps on the slide. Each one is taken for one Key Result at a time.</a:t>
+            </a:r>
+          </a:p>
+          <a:p>
+            <a:r>
+              <a:t>- Step 1 · Define the Arena. The group says which customer need the Key Result serves, at three depths (functional, experiential, consequential). Then it names what must remain true about that need.</a:t>
+            </a:r>
+          </a:p>
+          <a:p>
+            <a:r>
+              <a:t>- Step 2 · Understand the Boundaries. The group lists the boundaries material enough to slow, restrict or prevent delivery of the Key Result, with the kind of each and whether it must be accepted, can be influenced or was created by the organisation itself. Then it names what must remain true for delivery.</a:t>
+            </a:r>
+          </a:p>
+          <a:p>
+            <a:r>
+              <a:t>- Step 3 · See the Competition. The group lists who or what else can give the customer what the Key Result delivers, including alternatives outside the industry and doing nothing. Then it names what must remain true about its advantage.</a:t>
+            </a:r>
+          </a:p>
+          <a:p>
+            <a:r>
+              <a:t>- Step 4 · Establish the Value Proposition. The group says what about the Key Result will make customers choose the organisation, using the three tests (relevant, distinctive, deliverable). Then it names what must remain true about its value architecture.</a:t>
+            </a:r>
+          </a:p>
+          <a:p>
+            <a:r>
+              <a:t/>
+            </a:r>
+          </a:p>
+          <a:p>
+            <a:r>
+              <a:rPr b="1"/>
+              <a:t>4. Say how the questions read on the page.</a:t>
+            </a:r>
+          </a:p>
+          <a:p>
+            <a:r>
+              <a:rPr b="1"/>
+              <a:t>Say:</a:t>
+            </a:r>
+            <a:r>
+              <a:t> "On your page every question names your own Key Result, word for word. You answer about that Key Result and no other."</a:t>
+            </a:r>
+          </a:p>
+          <a:p>
+            <a:r>
+              <a:t/>
+            </a:r>
+          </a:p>
+          <a:p>
+            <a:r>
+              <a:rPr b="1"/>
+              <a:t>5. Set the standard for a condition.</a:t>
+            </a:r>
+          </a:p>
+          <a:p>
+            <a:r>
+              <a:rPr b="1"/>
+              <a:t>Say:</a:t>
+            </a:r>
+            <a:r>
+              <a:t> "The condition your group names must be specific enough that someone else could attempt to verify it.</a:t>
+            </a:r>
+          </a:p>
+          <a:p>
+            <a:r>
+              <a:t>'The market must support us' becomes a condition once it names what must be true, for whom and by when."</a:t>
+            </a:r>
+          </a:p>
+          <a:p>
+            <a:r>
+              <a:rPr b="1"/>
+              <a:t>Say:</a:t>
+            </a:r>
+            <a:r>
+              <a:t> "Write each condition as a statement that is either true or false. Restate a risk or a concern as the condition that must hold."</a:t>
+            </a:r>
+          </a:p>
+          <a:p>
+            <a:r>
+              <a:rPr b="1"/>
+              <a:t>Ask:</a:t>
+            </a:r>
+            <a:r>
+              <a:t> "If you cannot name a Must-Be-True, what does that tell you about this Key Result?"</a:t>
+            </a:r>
+          </a:p>
+          <a:p>
+            <a:r>
+              <a:rPr b="1"/>
+              <a:t>Say:</a:t>
+            </a:r>
+            <a:r>
+              <a:t> "It may tell you the Key Result itself is not yet sufficiently grounded."</a:t>
+            </a:r>
+          </a:p>
+          <a:p>
+            <a:r>
+              <a:t/>
+            </a:r>
+          </a:p>
+          <a:p>
+            <a:r>
+              <a:rPr b="1"/>
+              <a:t>6. Bridge to 5.3.</a:t>
+            </a:r>
+          </a:p>
+          <a:p>
+            <a:r>
+              <a:rPr b="1"/>
+              <a:t>Say:</a:t>
+            </a:r>
+            <a:r>
+              <a:t> "When every Key Result has been taken through the four steps, your group goes on to 5.3."</a:t>
+            </a:r>
+          </a:p>
+          <a:p>
+            <a:r>
+              <a:rPr b="1"/>
+              <a:t>Ask:</a:t>
+            </a:r>
+            <a:r>
+              <a:t> "Which one MBT condition, if left unverified, represents the greatest risk to our strategy's integrity? Who is responsible for that verification?"</a:t>
+            </a:r>
+          </a:p>
+          <a:p>
+            <a:r>
+              <a:t/>
+            </a:r>
+          </a:p>
+          <a:p>
+            <a:r>
+              <a:rPr b="1"/>
               <a:t>ON THE PORTAL, AFTER THE TEACHING:</a:t>
             </a:r>
           </a:p>
           <a:p>
             <a:r>
-              <a:rPr lang="en-GB"/>
               <a:t>Participants work in their groups in 5.2 of the participant file. This is Capstone work.</a:t>
             </a:r>
           </a:p>
           <a:p>
             <a:r>
-              <a:rPr lang="en-GB"/>
-              <a:t>1. The group’s confirmed Key Results from Unit 3 are listed in 5.2.</a:t>
-            </a:r>
-          </a:p>
-          <a:p>
-            <a:r>
-              <a:rPr lang="en-GB"/>
-              <a:t>2. The group takes one Key Result through the four steps and names the condition at each step.</a:t>
-            </a:r>
-          </a:p>
-          <a:p>
-            <a:r>
-              <a:rPr lang="en-GB"/>
-              <a:t>3. The group takes the next Key Result through the same four steps, until every Key Result is complete.</a:t>
-            </a:r>
-          </a:p>
-          <a:p>
-            <a:r>
-              <a:rPr lang="en-GB"/>
-              <a:t>4. A record shows the condition named at each step for every Key Result. The group then goes on to 5.3.</a:t>
-            </a:r>
-          </a:p>
-          <a:p>
-            <a:endParaRPr lang="en-GB"/>
-          </a:p>
-          <a:p>
-            <a:r>
-              <a:rPr lang="en-GB"/>
+              <a:t>- The group's confirmed Key Results from Unit 3 are listed in 5.2.</a:t>
+            </a:r>
+          </a:p>
+          <a:p>
+            <a:r>
+              <a:t>- The group takes one Key Result through the four steps and names the condition at each step.</a:t>
+            </a:r>
+          </a:p>
+          <a:p>
+            <a:r>
+              <a:t>- The group takes the next Key Result through the same four steps, until every Key Result is complete.</a:t>
+            </a:r>
+          </a:p>
+          <a:p>
+            <a:r>
+              <a:t>- A record shows the condition named at each step for every Key Result. The group then goes on to 5.3.</a:t>
+            </a:r>
+          </a:p>
+          <a:p>
+            <a:r>
+              <a:t/>
+            </a:r>
+          </a:p>
+          <a:p>
+            <a:r>
+              <a:rPr b="1"/>
               <a:t>AFTER THE SESSION:</a:t>
             </a:r>
           </a:p>
           <a:p>
             <a:r>
-              <a:rPr lang="en-GB"/>
-              <a:t>The record reaches you with each participant’s submission, under the heading ABCV–MBT: Stress-Testing the Key Results.</a:t>
-            </a:r>
-          </a:p>
-          <a:p>
-            <a:r>
-              <a:rPr lang="en-GB"/>
-              <a:t>The confirmed conditions feed boxes 4A to 4D of the team’s Capstone S2R Blueprint.</a:t>
+              <a:t>The confirmed conditions feed boxes 4A to 4D of the team's Capstone S2R® Blueprint.</a:t>
             </a:r>
           </a:p>
         </p:txBody>
@@ -4781,113 +5295,146 @@
           <a:lstStyle/>
           <a:p>
             <a:r>
-              <a:rPr lang="en-GB" b="1" dirty="0"/>
+              <a:rPr b="1"/>
               <a:t>SECTION 4 · INTEGRATION — COLLECTIVE</a:t>
             </a:r>
           </a:p>
           <a:p>
-            <a:endParaRPr lang="en-GB" dirty="0"/>
-          </a:p>
-          <a:p>
-            <a:r>
-              <a:rPr lang="en-GB" b="1" dirty="0"/>
+            <a:r>
+              <a:t/>
+            </a:r>
+          </a:p>
+          <a:p>
+            <a:r>
+              <a:rPr b="1"/>
               <a:t>HOW THIS SECTION RUNS:</a:t>
             </a:r>
           </a:p>
           <a:p>
             <a:r>
-              <a:rPr lang="en-GB" dirty="0"/>
-              <a:t>1. Cause of Death: how the game is played.</a:t>
-            </a:r>
-          </a:p>
-          <a:p>
-            <a:r>
-              <a:rPr lang="en-GB" dirty="0"/>
-              <a:t>2. The four mines.</a:t>
-            </a:r>
-          </a:p>
-          <a:p>
-            <a:r>
-              <a:rPr lang="en-GB" dirty="0"/>
-              <a:t>3. The Section 4 Reflections slide: the closing commitment.</a:t>
-            </a:r>
-          </a:p>
-          <a:p>
-            <a:r>
-              <a:rPr lang="en-GB" dirty="0"/>
-              <a:t>4. The Unit Summary.</a:t>
-            </a:r>
-          </a:p>
-          <a:p>
-            <a:endParaRPr lang="en-GB" dirty="0"/>
-          </a:p>
-          <a:p>
-            <a:r>
-              <a:rPr lang="en-GB" b="1" dirty="0"/>
+              <a:rPr b="1"/>
+              <a:t>1. Cause of Death: how the game is played, the three investigation questions and the four mines.</a:t>
+            </a:r>
+          </a:p>
+          <a:p>
+            <a:r>
+              <a:rPr b="1"/>
+              <a:t>2. The Section 4 Reflections slide: the closing commitment.</a:t>
+            </a:r>
+          </a:p>
+          <a:p>
+            <a:r>
+              <a:t/>
+            </a:r>
+          </a:p>
+          <a:p>
+            <a:r>
+              <a:rPr b="1"/>
               <a:t>SECTION LEARNING OUTCOMES:</a:t>
             </a:r>
           </a:p>
           <a:p>
             <a:r>
-              <a:rPr lang="en-GB" dirty="0"/>
+              <a:rPr b="1"/>
               <a:t>1. Diagnose failures of directional integrity in realistic strategic situations.</a:t>
             </a:r>
           </a:p>
           <a:p>
             <a:r>
-              <a:rPr lang="en-GB" dirty="0"/>
+              <a:rPr b="1"/>
               <a:t>2. Select integrity checks that would prevent or reduce identified strategic failures.</a:t>
             </a:r>
           </a:p>
           <a:p>
-            <a:endParaRPr lang="en-GB" dirty="0"/>
-          </a:p>
-          <a:p>
-            <a:r>
-              <a:rPr lang="en-GB" b="1" dirty="0"/>
+            <a:r>
+              <a:t/>
+            </a:r>
+          </a:p>
+          <a:p>
+            <a:r>
+              <a:rPr b="1"/>
               <a:t>HOW TO OPEN THE SECTION:</a:t>
             </a:r>
           </a:p>
           <a:p>
-            <a:endParaRPr lang="en-GB" dirty="0"/>
-          </a:p>
-          <a:p>
-            <a:r>
-              <a:rPr lang="en-GB" b="1" dirty="0"/>
+            <a:r>
+              <a:t/>
+            </a:r>
+          </a:p>
+          <a:p>
+            <a:r>
+              <a:rPr b="1"/>
               <a:t>1. Say what the section does.</a:t>
             </a:r>
           </a:p>
           <a:p>
             <a:r>
-              <a:rPr lang="en-GB" dirty="0"/>
-              <a:t>Say: "You now apply ABCV diagnostic thinking under pressure.</a:t>
-            </a:r>
-          </a:p>
-          <a:p>
-            <a:r>
-              <a:rPr lang="en-GB" dirty="0"/>
+              <a:rPr b="1"/>
+              <a:t>Say:</a:t>
+            </a:r>
+            <a:r>
+              <a:t> "You now apply ABCV diagnostic thinking under pressure.</a:t>
+            </a:r>
+          </a:p>
+          <a:p>
+            <a:r>
               <a:t>Each scenario is a real-world strategy failure in which an Industry Illusion kept leaders from seeing the breakdown."</a:t>
             </a:r>
           </a:p>
           <a:p>
             <a:r>
-              <a:rPr lang="en-GB" dirty="0"/>
               <a:t>Section intent: participants find the illusion first, then the ABCV checkpoint where that illusion sits.</a:t>
             </a:r>
           </a:p>
           <a:p>
-            <a:endParaRPr lang="en-GB" dirty="0"/>
-          </a:p>
-          <a:p>
-            <a:r>
-              <a:rPr lang="en-GB" b="1" dirty="0"/>
-              <a:t>2. Say who plays.</a:t>
-            </a:r>
-          </a:p>
-          <a:p>
-            <a:r>
-              <a:rPr lang="en-GB" dirty="0"/>
-              <a:t>Say: "Each of you plays this game alone, on the portal, after the teaching. It is portfolio work."</a:t>
+            <a:r>
+              <a:t/>
+            </a:r>
+          </a:p>
+          <a:p>
+            <a:r>
+              <a:rPr b="1"/>
+              <a:t>2. Read the two section learning outcomes from the slide.</a:t>
+            </a:r>
+          </a:p>
+          <a:p>
+            <a:r>
+              <a:t/>
+            </a:r>
+          </a:p>
+          <a:p>
+            <a:r>
+              <a:rPr b="1"/>
+              <a:t>3. Say who plays.</a:t>
+            </a:r>
+          </a:p>
+          <a:p>
+            <a:r>
+              <a:rPr b="1"/>
+              <a:t>Say:</a:t>
+            </a:r>
+            <a:r>
+              <a:t> "Each of you plays this game alone, on the portal, after the teaching. It is portfolio work."</a:t>
+            </a:r>
+          </a:p>
+          <a:p>
+            <a:r>
+              <a:t/>
+            </a:r>
+          </a:p>
+          <a:p>
+            <a:r>
+              <a:rPr b="1"/>
+              <a:t>4. Bridge to the game.</a:t>
+            </a:r>
+          </a:p>
+          <a:p>
+            <a:r>
+              <a:rPr b="1"/>
+              <a:t>Say:</a:t>
+            </a:r>
+            <a:r>
+              <a:t> "Here is how Cause of Death works."</a:t>
             </a:r>
           </a:p>
         </p:txBody>
@@ -4973,131 +5520,246 @@
           <a:lstStyle/>
           <a:p>
             <a:r>
-              <a:rPr lang="en-GB" b="1" dirty="0"/>
+              <a:rPr b="1"/>
               <a:t>CAUSE OF DEATH — MATCH THE BREAKDOWN (2 PARTS · PORTFOLIO WORK)</a:t>
             </a:r>
           </a:p>
           <a:p>
-            <a:endParaRPr lang="en-GB" dirty="0"/>
-          </a:p>
-          <a:p>
-            <a:r>
-              <a:rPr lang="en-GB" b="1" dirty="0"/>
+            <a:r>
+              <a:t/>
+            </a:r>
+          </a:p>
+          <a:p>
+            <a:r>
+              <a:rPr b="1"/>
               <a:t>HOW TO TEACH IT:</a:t>
             </a:r>
           </a:p>
           <a:p>
-            <a:endParaRPr lang="en-GB" dirty="0"/>
-          </a:p>
-          <a:p>
-            <a:r>
-              <a:rPr lang="en-GB" b="1" dirty="0"/>
+            <a:r>
+              <a:t/>
+            </a:r>
+          </a:p>
+          <a:p>
+            <a:r>
+              <a:rPr b="1"/>
               <a:t>1. Explain the two parts on the slide.</a:t>
             </a:r>
           </a:p>
           <a:p>
             <a:r>
-              <a:rPr lang="en-GB" dirty="0"/>
-              <a:t>Say: "Each scenario is answered in two parts. First you find the illusion. Then you find where it sits."</a:t>
-            </a:r>
-          </a:p>
-          <a:p>
-            <a:r>
-              <a:rPr lang="en-GB" dirty="0"/>
+              <a:rPr b="1"/>
+              <a:t>Say:</a:t>
+            </a:r>
+            <a:r>
+              <a:t> "Each scenario is answered in two parts. First you find the illusion. Then you find where it sits."</a:t>
+            </a:r>
+          </a:p>
+          <a:p>
+            <a:r>
               <a:t>- Find the illusion: the participant chooses the investigation question the scenario answers. Each question reveals one illusion.</a:t>
             </a:r>
           </a:p>
           <a:p>
             <a:r>
-              <a:rPr lang="en-GB" dirty="0"/>
               <a:t>- Find where it sits: the participant chooses the ABCV checkpoint the illusion hid from leaders: Arena, Boundaries, Competition or Value Proposition.</a:t>
             </a:r>
           </a:p>
           <a:p>
-            <a:endParaRPr lang="en-GB" dirty="0"/>
-          </a:p>
-          <a:p>
-            <a:r>
-              <a:rPr lang="en-GB" b="1" dirty="0"/>
+            <a:r>
+              <a:t/>
+            </a:r>
+          </a:p>
+          <a:p>
+            <a:r>
+              <a:rPr b="1"/>
               <a:t>2. Read the three investigation questions.</a:t>
             </a:r>
           </a:p>
           <a:p>
             <a:r>
-              <a:rPr lang="en-GB" dirty="0"/>
               <a:t>- Question 1: What did leaders expect to continue seeing because it was what they already knew?</a:t>
             </a:r>
           </a:p>
           <a:p>
             <a:r>
-              <a:rPr lang="en-GB" dirty="0"/>
               <a:t>- Question 2: Which signal did leaders see and then discount because it did not fit their established picture?</a:t>
             </a:r>
           </a:p>
           <a:p>
             <a:r>
-              <a:rPr lang="en-GB" dirty="0"/>
               <a:t>- Question 3: Which evidence of current success did leaders treat as reassurance about the future?</a:t>
             </a:r>
           </a:p>
           <a:p>
             <a:r>
-              <a:rPr lang="en-GB" dirty="0"/>
               <a:t>Do not say which illusion each question reveals. The participants work that out.</a:t>
             </a:r>
           </a:p>
           <a:p>
-            <a:endParaRPr lang="en-GB" dirty="0"/>
-          </a:p>
-          <a:p>
-            <a:r>
-              <a:rPr lang="en-GB" b="1" dirty="0"/>
+            <a:r>
+              <a:t/>
+            </a:r>
+          </a:p>
+          <a:p>
+            <a:r>
+              <a:rPr b="1"/>
               <a:t>3. Explain the mine.</a:t>
             </a:r>
           </a:p>
           <a:p>
             <a:r>
-              <a:rPr lang="en-GB" dirty="0"/>
-              <a:t>Say: "When both parts are right, the mine is defused.</a:t>
-            </a:r>
-          </a:p>
-          <a:p>
-            <a:r>
-              <a:rPr lang="en-GB" dirty="0"/>
+              <a:rPr b="1"/>
+              <a:t>Say:</a:t>
+            </a:r>
+            <a:r>
+              <a:t> "When both parts are right, the mine is defused.</a:t>
+            </a:r>
+          </a:p>
+          <a:p>
+            <a:r>
               <a:t>A wrong answer detonates it: you read the hint and try again.</a:t>
             </a:r>
           </a:p>
           <a:p>
             <a:r>
-              <a:rPr lang="en-GB" dirty="0"/>
               <a:t>A mine defused at the first attempt earns 2 points, at a later attempt 1 point.</a:t>
             </a:r>
           </a:p>
           <a:p>
             <a:r>
-              <a:rPr lang="en-GB" dirty="0"/>
               <a:t>The maximum is 8."</a:t>
             </a:r>
           </a:p>
           <a:p>
             <a:r>
-              <a:rPr lang="en-GB" dirty="0"/>
-              <a:t>Say: "The same illusion can sit behind more than one mine."</a:t>
-            </a:r>
-          </a:p>
-          <a:p>
-            <a:endParaRPr lang="en-GB" dirty="0"/>
-          </a:p>
-          <a:p>
-            <a:r>
-              <a:rPr lang="en-GB" b="1" dirty="0"/>
-              <a:t>4. Set the standard.</a:t>
-            </a:r>
-          </a:p>
-          <a:p>
-            <a:r>
-              <a:rPr lang="en-GB" dirty="0"/>
-              <a:t>Say: "Say your reasoning to yourself before you answer. Guessing the right checkpoint for the wrong reason will surface."</a:t>
+              <a:rPr b="1"/>
+              <a:t>Say:</a:t>
+            </a:r>
+            <a:r>
+              <a:t> "The same illusion can sit behind more than one mine."</a:t>
+            </a:r>
+          </a:p>
+          <a:p>
+            <a:r>
+              <a:t/>
+            </a:r>
+          </a:p>
+          <a:p>
+            <a:r>
+              <a:rPr b="1"/>
+              <a:t>4. Introduce the four mines by name.</a:t>
+            </a:r>
+          </a:p>
+          <a:p>
+            <a:r>
+              <a:rPr b="1"/>
+              <a:t>Say:</a:t>
+            </a:r>
+            <a:r>
+              <a:t> "Four mines: The Ghost Ship, a SaaS platform with strong first-year retention; The Ferrari in the Mud, a logistics firm's new digital operations platform; The Invisible Disruption, a financial advisory firm and a fintech app; and The Identity Crisis, a boutique consulting firm under revenue pressure."</a:t>
+            </a:r>
+          </a:p>
+          <a:p>
+            <a:r>
+              <a:t>Do not say which illusion or checkpoint sits behind each mine.</a:t>
+            </a:r>
+          </a:p>
+          <a:p>
+            <a:r>
+              <a:t/>
+            </a:r>
+          </a:p>
+          <a:p>
+            <a:r>
+              <a:rPr b="1"/>
+              <a:t>5. Set the standard.</a:t>
+            </a:r>
+          </a:p>
+          <a:p>
+            <a:r>
+              <a:rPr b="1"/>
+              <a:t>Say:</a:t>
+            </a:r>
+            <a:r>
+              <a:t> "Say your reasoning to yourself before you answer. Guessing the right checkpoint for the wrong reason will surface."</a:t>
+            </a:r>
+          </a:p>
+          <a:p>
+            <a:r>
+              <a:t/>
+            </a:r>
+          </a:p>
+          <a:p>
+            <a:r>
+              <a:rPr b="1"/>
+              <a:t>6. Close the section.</a:t>
+            </a:r>
+          </a:p>
+          <a:p>
+            <a:r>
+              <a:rPr b="1"/>
+              <a:t>Say:</a:t>
+            </a:r>
+            <a:r>
+              <a:t> "Every failure in the game traces back to a checkpoint left untested; testing it early protects the direction."</a:t>
+            </a:r>
+          </a:p>
+          <a:p>
+            <a:r>
+              <a:t/>
+            </a:r>
+          </a:p>
+          <a:p>
+            <a:r>
+              <a:rPr b="1"/>
+              <a:t>ON THE PORTAL, AFTER THE TEACHING:</a:t>
+            </a:r>
+          </a:p>
+          <a:p>
+            <a:r>
+              <a:t>Each participant plays Cause of Death alone in Section 4 of the participant file, as portfolio work, defuses all four mines, then writes the closing commitment.</a:t>
+            </a:r>
+          </a:p>
+          <a:p>
+            <a:r>
+              <a:t/>
+            </a:r>
+          </a:p>
+          <a:p>
+            <a:r>
+              <a:rPr b="1"/>
+              <a:t>AFTER THE SESSION:</a:t>
+            </a:r>
+          </a:p>
+          <a:p>
+            <a:r>
+              <a:t>The result reaches you with each participant's submission. When you next meet the room, ask: "Which mine was hardest to defuse? What does that tell you about your organisation's own ABCV blind spot?"</a:t>
+            </a:r>
+          </a:p>
+          <a:p>
+            <a:r>
+              <a:t>Answer key (facilitator only):</a:t>
+            </a:r>
+          </a:p>
+          <a:p>
+            <a:r>
+              <a:t>- The Ghost Ship: Q3, Complacency · Arena. Strong retention and a quiet support desk reassured leaders that customers were committed. The customer end game had shifted, and nobody was asking what customers were now trying to achieve.</a:t>
+            </a:r>
+          </a:p>
+          <a:p>
+            <a:r>
+              <a:t>- The Ferrari in the Mud: Q1, Familiarity · Boundaries. Leaders expected this roll-out to go the way earlier ones had. The behavioural and structural boundaries (habits, incentives, middle-management routines) were never mapped.</a:t>
+            </a:r>
+          </a:p>
+          <a:p>
+            <a:r>
+              <a:t>- The Invisible Disruption: Q2, Exclusion · Competition. The firm saw the app and discounted it because it did not look like an advisory firm. Clients had an alternative route to the same outcome.</a:t>
+            </a:r>
+          </a:p>
+          <a:p>
+            <a:r>
+              <a:t>- The Identity Crisis: Q3, Complacency · Value Proposition. Rising revenue reassured the partners while the work they accepted diluted what made the firm distinct.</a:t>
             </a:r>
           </a:p>
         </p:txBody>
@@ -5183,130 +5845,164 @@
           <a:lstStyle/>
           <a:p>
             <a:r>
-              <a:rPr lang="en-GB" b="1" dirty="0"/>
+              <a:rPr b="1"/>
               <a:t>SECTION 4 REFLECTIONS</a:t>
             </a:r>
           </a:p>
           <a:p>
-            <a:endParaRPr lang="en-GB" dirty="0"/>
-          </a:p>
-          <a:p>
-            <a:r>
-              <a:rPr lang="en-GB" b="1" dirty="0"/>
+            <a:r>
+              <a:t/>
+            </a:r>
+          </a:p>
+          <a:p>
+            <a:r>
+              <a:rPr b="1"/>
               <a:t>HOW TO USE THIS SLIDE:</a:t>
             </a:r>
           </a:p>
           <a:p>
-            <a:endParaRPr lang="en-GB" dirty="0"/>
-          </a:p>
-          <a:p>
-            <a:r>
-              <a:rPr lang="en-GB" b="1" dirty="0"/>
+            <a:r>
+              <a:t/>
+            </a:r>
+          </a:p>
+          <a:p>
+            <a:r>
+              <a:rPr b="1"/>
               <a:t>1. Show the slide and read the prompt aloud.</a:t>
             </a:r>
           </a:p>
           <a:p>
             <a:r>
-              <a:rPr lang="en-GB" dirty="0"/>
               <a:t>Closing Commitment: "What is one MBT condition your organisation is currently avoiding naming? Why? What will you do about it before your next strategic review?"</a:t>
             </a:r>
           </a:p>
           <a:p>
-            <a:endParaRPr lang="en-GB" dirty="0"/>
-          </a:p>
-          <a:p>
-            <a:r>
-              <a:rPr lang="en-GB" b="1" dirty="0"/>
+            <a:r>
+              <a:t/>
+            </a:r>
+          </a:p>
+          <a:p>
+            <a:r>
+              <a:rPr b="1"/>
               <a:t>2. Say what the reflection is for.</a:t>
             </a:r>
           </a:p>
           <a:p>
             <a:r>
-              <a:rPr lang="en-GB" dirty="0"/>
               <a:t>Point learners to the portal section that they will be required to complete with as much depth as possible.</a:t>
             </a:r>
           </a:p>
           <a:p>
             <a:r>
-              <a:rPr lang="en-GB" dirty="0"/>
               <a:t>The reflections build the learning portfolio they receive at the end of the programme.</a:t>
             </a:r>
           </a:p>
           <a:p>
-            <a:endParaRPr lang="en-GB" dirty="0"/>
-          </a:p>
-          <a:p>
-            <a:r>
-              <a:rPr lang="en-GB" dirty="0"/>
-              <a:t>Say: "You write this reflection on the portal after the teaching, with as much depth as you can."</a:t>
-            </a:r>
-          </a:p>
-          <a:p>
-            <a:endParaRPr lang="en-GB" dirty="0"/>
-          </a:p>
-          <a:p>
-            <a:r>
-              <a:rPr lang="en-GB" b="1" dirty="0"/>
+            <a:r>
+              <a:t/>
+            </a:r>
+          </a:p>
+          <a:p>
+            <a:r>
+              <a:rPr b="1"/>
+              <a:t>Say:</a:t>
+            </a:r>
+            <a:r>
+              <a:t> "You write this reflection on the portal after the teaching, with as much depth as you can."</a:t>
+            </a:r>
+          </a:p>
+          <a:p>
+            <a:r>
+              <a:t/>
+            </a:r>
+          </a:p>
+          <a:p>
+            <a:r>
+              <a:rPr b="1"/>
               <a:t>3. Set the standard.</a:t>
             </a:r>
           </a:p>
           <a:p>
             <a:r>
-              <a:rPr lang="en-GB" dirty="0"/>
-              <a:t>Say: "Name one condition, in a form that is either true or false.</a:t>
-            </a:r>
-          </a:p>
-          <a:p>
-            <a:r>
-              <a:rPr lang="en-GB" dirty="0"/>
+              <a:rPr b="1"/>
+              <a:t>Say:</a:t>
+            </a:r>
+            <a:r>
+              <a:t> "Name one condition, in a form that is either true or false.</a:t>
+            </a:r>
+          </a:p>
+          <a:p>
+            <a:r>
               <a:t>Say why it is being avoided.</a:t>
             </a:r>
           </a:p>
           <a:p>
             <a:r>
-              <a:rPr lang="en-GB" dirty="0"/>
               <a:t>Then name one action and the date of your next strategic review."</a:t>
             </a:r>
           </a:p>
           <a:p>
-            <a:endParaRPr lang="en-GB" dirty="0"/>
-          </a:p>
-          <a:p>
-            <a:r>
-              <a:rPr lang="en-GB" dirty="0"/>
-              <a:t>Deepen, say: "The instinct to manage the appearance of a known exposure, and leave the exposure itself unaddressed, turns a survivable warning into a failure.</a:t>
-            </a:r>
-          </a:p>
-          <a:p>
-            <a:r>
-              <a:rPr lang="en-GB" dirty="0"/>
+            <a:r>
+              <a:t/>
+            </a:r>
+          </a:p>
+          <a:p>
+            <a:r>
+              <a:rPr b="1"/>
+              <a:t>Deepen, say:</a:t>
+            </a:r>
+            <a:r>
+              <a:t> "The instinct to manage the appearance of a known exposure, and leave the exposure itself unaddressed, turns a survivable warning into a failure.</a:t>
+            </a:r>
+          </a:p>
+          <a:p>
+            <a:r>
               <a:t>A risk that has been named and then avoided chooses its own moment.</a:t>
             </a:r>
           </a:p>
           <a:p>
             <a:r>
-              <a:rPr lang="en-GB" dirty="0"/>
               <a:t>Treat a clear warning as a directive to act."</a:t>
             </a:r>
           </a:p>
           <a:p>
             <a:r>
-              <a:rPr lang="en-GB" dirty="0"/>
               <a:t>(Insight: Named and avoided. Source: Journal, 16 June 2026 — Professional Insights: Strategy)</a:t>
             </a:r>
           </a:p>
           <a:p>
-            <a:endParaRPr lang="en-GB" dirty="0"/>
-          </a:p>
-          <a:p>
-            <a:r>
-              <a:rPr lang="en-GB" b="1" dirty="0"/>
+            <a:r>
+              <a:t/>
+            </a:r>
+          </a:p>
+          <a:p>
+            <a:r>
+              <a:rPr b="1"/>
+              <a:t>4. Bridge to Section 5.</a:t>
+            </a:r>
+          </a:p>
+          <a:p>
+            <a:r>
+              <a:rPr b="1"/>
+              <a:t>Say:</a:t>
+            </a:r>
+            <a:r>
+              <a:t> "Next, each group stress-tests its own Key Results on the four checkpoints and assigns ownership for verifying each condition."</a:t>
+            </a:r>
+          </a:p>
+          <a:p>
+            <a:r>
+              <a:t/>
+            </a:r>
+          </a:p>
+          <a:p>
+            <a:r>
+              <a:rPr b="1"/>
               <a:t>ON THE PORTAL, AFTER THE TEACHING:</a:t>
             </a:r>
           </a:p>
           <a:p>
             <a:r>
-              <a:rPr lang="en-GB" dirty="0"/>
               <a:t>Participants write the Closing Commitment at the end of Section 4 of the participant file.</a:t>
             </a:r>
           </a:p>
@@ -5377,161 +6073,201 @@
           <a:lstStyle/>
           <a:p>
             <a:r>
-              <a:rPr lang="en-GB"/>
+              <a:rPr b="1"/>
               <a:t>UNIT SUMMARY (UNIT 4 SYNTHESIS)</a:t>
             </a:r>
           </a:p>
           <a:p>
-            <a:endParaRPr lang="en-GB"/>
-          </a:p>
-          <a:p>
-            <a:r>
-              <a:rPr lang="en-GB"/>
+            <a:r>
+              <a:t/>
+            </a:r>
+          </a:p>
+          <a:p>
+            <a:r>
+              <a:rPr b="1"/>
               <a:t>HOW TO TEACH IT:</a:t>
             </a:r>
           </a:p>
           <a:p>
-            <a:endParaRPr lang="en-GB"/>
-          </a:p>
-          <a:p>
-            <a:r>
-              <a:rPr lang="en-GB"/>
+            <a:r>
+              <a:t/>
+            </a:r>
+          </a:p>
+          <a:p>
+            <a:r>
+              <a:rPr b="1"/>
               <a:t>1. Recap the unit, section by section.</a:t>
             </a:r>
           </a:p>
           <a:p>
             <a:r>
-              <a:rPr lang="en-GB"/>
-              <a:t>Say: "This session was about ensuring strategic direction is structurally sound before the first move of execution is made.</a:t>
-            </a:r>
-          </a:p>
-          <a:p>
-            <a:r>
-              <a:rPr lang="en-GB"/>
+              <a:rPr b="1"/>
+              <a:t>Say:</a:t>
+            </a:r>
+            <a:r>
+              <a:t> "This session was about ensuring strategic direction is structurally sound before the first move of execution is made.</a:t>
+            </a:r>
+          </a:p>
+          <a:p>
+            <a:r>
               <a:t>The ABCV–MBT framework served as our strategic integrity filter."</a:t>
             </a:r>
           </a:p>
           <a:p>
             <a:r>
-              <a:rPr lang="en-GB"/>
               <a:t>- 1 · Awareness: a well-written OKR can still rest on unnamed conditions. ABCV examines the strategic logic at four checkpoints, and a Must-Be-True condition at each makes the underlying assumption explicit.</a:t>
             </a:r>
           </a:p>
           <a:p>
             <a:r>
-              <a:rPr lang="en-GB"/>
               <a:t>- 2 · Intelligence: industry knowledge becomes a frame, and three reinforcing traps (Familiarity, Exclusion and Complacency) turn that frame into the boundary of the world leaders examine.</a:t>
             </a:r>
           </a:p>
           <a:p>
             <a:r>
-              <a:rPr lang="en-GB"/>
               <a:t>- 3 · Extrapolating: every executive role sees through a specialised perspective, and each has a checkpoint it most often overlooks.</a:t>
             </a:r>
           </a:p>
           <a:p>
             <a:r>
-              <a:rPr lang="en-GB"/>
               <a:t>- 4 · Integration: in Cause of Death each participant tests four failed strategies against the Industry Illusion.</a:t>
             </a:r>
           </a:p>
           <a:p>
             <a:r>
-              <a:rPr lang="en-GB"/>
               <a:t>- 5 · Application: each group takes the Key Results it confirmed in Unit 3 through four steps, names the condition that must remain true at each step, assigns each critical condition to an executive and names the checkpoint its team is most likely to overlook.</a:t>
             </a:r>
           </a:p>
           <a:p>
-            <a:endParaRPr lang="en-GB"/>
-          </a:p>
-          <a:p>
-            <a:r>
-              <a:rPr lang="en-GB"/>
+            <a:r>
+              <a:t/>
+            </a:r>
+          </a:p>
+          <a:p>
+            <a:r>
+              <a:rPr b="1"/>
               <a:t>2. Ask the closing question on the slide.</a:t>
             </a:r>
           </a:p>
           <a:p>
             <a:r>
-              <a:rPr lang="en-GB"/>
-              <a:t>Ask: "What is the one MBT condition your team is most likely to avoid naming? Why? And what will you do about it before the next strategic review?"</a:t>
-            </a:r>
-          </a:p>
-          <a:p>
-            <a:r>
-              <a:rPr lang="en-GB"/>
+              <a:rPr b="1"/>
+              <a:t>Ask:</a:t>
+            </a:r>
+            <a:r>
+              <a:t> "What is the one MBT condition your team is most likely to avoid naming? Why? And what will you do about it before the next strategic review?"</a:t>
+            </a:r>
+          </a:p>
+          <a:p>
+            <a:r>
               <a:t>Take an answer from each group.</a:t>
             </a:r>
           </a:p>
           <a:p>
-            <a:endParaRPr lang="en-GB"/>
-          </a:p>
-          <a:p>
-            <a:r>
-              <a:rPr lang="en-GB"/>
+            <a:r>
+              <a:t/>
+            </a:r>
+          </a:p>
+          <a:p>
+            <a:r>
+              <a:rPr b="1"/>
               <a:t>3. Close the unit.</a:t>
             </a:r>
           </a:p>
           <a:p>
             <a:r>
-              <a:rPr lang="en-GB"/>
-              <a:t>Say: "The ABCV–MBT checkpoints turn your OKRs from polished aspirations into resilient execution signals, grounded in the hard realities of the enterprise system."</a:t>
-            </a:r>
-          </a:p>
-          <a:p>
-            <a:endParaRPr lang="en-GB"/>
-          </a:p>
-          <a:p>
-            <a:r>
-              <a:rPr lang="en-GB"/>
+              <a:rPr b="1"/>
+              <a:t>Say:</a:t>
+            </a:r>
+            <a:r>
+              <a:t> "The ABCV–MBT checkpoints turn your OKRs from polished aspirations into resilient execution signals, grounded in the hard realities of the enterprise system."</a:t>
+            </a:r>
+          </a:p>
+          <a:p>
+            <a:r>
+              <a:t/>
+            </a:r>
+          </a:p>
+          <a:p>
+            <a:r>
+              <a:rPr b="1"/>
               <a:t>4. Say what happens on the portal.</a:t>
             </a:r>
           </a:p>
           <a:p>
             <a:r>
-              <a:rPr lang="en-GB"/>
-              <a:t>Say: "You now complete the unit on the portal: your reflections, your own Industry Illusion game, your group’s work in Section 5, Cause of Death and your closing commitment.</a:t>
-            </a:r>
-          </a:p>
-          <a:p>
-            <a:r>
-              <a:rPr lang="en-GB"/>
+              <a:rPr b="1"/>
+              <a:t>Say:</a:t>
+            </a:r>
+            <a:r>
+              <a:t> "You now complete the unit on the portal: your reflections, your own Industry Illusion game, your group’s work in Section 5, Cause of Death and your closing commitment.</a:t>
+            </a:r>
+          </a:p>
+          <a:p>
+            <a:r>
               <a:t>When your page is complete, you submit the unit."</a:t>
             </a:r>
           </a:p>
           <a:p>
-            <a:endParaRPr lang="en-GB"/>
-          </a:p>
-          <a:p>
-            <a:r>
-              <a:rPr lang="en-GB"/>
+            <a:r>
+              <a:t/>
+            </a:r>
+          </a:p>
+          <a:p>
+            <a:r>
+              <a:rPr b="1"/>
+              <a:t>5. Give the transition to Module 3.</a:t>
+            </a:r>
+          </a:p>
+          <a:p>
+            <a:r>
+              <a:rPr b="1"/>
+              <a:t>Say:</a:t>
+            </a:r>
+            <a:r>
+              <a:t> "Each group's Key Results will carry named Must-Be-True conditions and executives accountable for verifying them.</a:t>
+            </a:r>
+          </a:p>
+          <a:p>
+            <a:r>
+              <a:t>Module 3, Influence, begins with Unit 5, Aligning Heart &amp; Mind, which prepares the people who carry this direction to understand, accept and adopt it."</a:t>
+            </a:r>
+          </a:p>
+          <a:p>
+            <a:r>
+              <a:t/>
+            </a:r>
+          </a:p>
+          <a:p>
+            <a:r>
+              <a:rPr b="1"/>
               <a:t>ON THE PORTAL, AFTER THE TEACHING:</a:t>
             </a:r>
           </a:p>
           <a:p>
             <a:r>
-              <a:rPr lang="en-GB"/>
               <a:t>Participants complete every part of the participant file and submit the unit to the facilitator from the end of Section 4.</a:t>
             </a:r>
           </a:p>
           <a:p>
-            <a:endParaRPr lang="en-GB"/>
-          </a:p>
-          <a:p>
-            <a:r>
-              <a:rPr lang="en-GB"/>
+            <a:r>
+              <a:t/>
+            </a:r>
+          </a:p>
+          <a:p>
+            <a:r>
+              <a:rPr b="1"/>
               <a:t>AFTER THE SESSION:</a:t>
             </a:r>
           </a:p>
           <a:p>
             <a:r>
-              <a:rPr lang="en-GB"/>
               <a:t>Each submission reaches you in the facilitator dashboard.</a:t>
             </a:r>
           </a:p>
           <a:p>
             <a:r>
-              <a:rPr lang="en-GB"/>
-              <a:t>The group’s agreed Section 5 work feeds boxes 4A to 4F of the team’s Capstone S2R Blueprint.</a:t>
+              <a:t>The group’s agreed Section 5 work feeds boxes 4A to 4F of the team’s Capstone S2R® Blueprint.</a:t>
             </a:r>
           </a:p>
         </p:txBody>
@@ -5617,160 +6353,126 @@
           <a:lstStyle/>
           <a:p>
             <a:r>
-              <a:rPr lang="en-GB" b="1" dirty="0"/>
+              <a:rPr b="1"/>
               <a:t>FACILITATOR GUIDE · SESSION OVERVIEW</a:t>
             </a:r>
           </a:p>
           <a:p>
-            <a:endParaRPr lang="en-GB" dirty="0"/>
-          </a:p>
-          <a:p>
-            <a:r>
-              <a:rPr lang="en-GB" b="1" dirty="0"/>
+            <a:r>
+              <a:t/>
+            </a:r>
+          </a:p>
+          <a:p>
+            <a:r>
+              <a:rPr b="1"/>
               <a:t>HOW TO USE THIS SLIDE:</a:t>
             </a:r>
           </a:p>
           <a:p>
             <a:r>
-              <a:rPr lang="en-GB" dirty="0"/>
-              <a:t>1. Walk the five sections in one sentence each, using the list below.</a:t>
-            </a:r>
-          </a:p>
-          <a:p>
-            <a:r>
-              <a:rPr lang="en-GB" dirty="0"/>
-              <a:t>2. Say plainly that Sections 1 to 3 prepare the thinking, Section 5 is where each group tests its own Key Results for the Capstone, and Section 4 is a diagnosis game each participant plays alone.</a:t>
-            </a:r>
-          </a:p>
-          <a:p>
-            <a:r>
-              <a:rPr lang="en-GB" dirty="0"/>
-              <a:t>3. Tell participants how the unit runs: you teach all five sections from the deck first, and they then complete the unit on the portal, in the session or after it.</a:t>
-            </a:r>
-          </a:p>
-          <a:p>
-            <a:endParaRPr lang="en-GB" dirty="0"/>
-          </a:p>
-          <a:p>
-            <a:r>
-              <a:rPr lang="en-GB" b="1" dirty="0"/>
+              <a:rPr b="1"/>
+              <a:t>1. Walk the five sections.</a:t>
+            </a:r>
+          </a:p>
+          <a:p>
+            <a:r>
+              <a:t>Use the list below, one sentence for each section.</a:t>
+            </a:r>
+          </a:p>
+          <a:p>
+            <a:r>
+              <a:t/>
+            </a:r>
+          </a:p>
+          <a:p>
+            <a:r>
+              <a:rPr b="1"/>
+              <a:t>2. Say how the sections fit together.</a:t>
+            </a:r>
+          </a:p>
+          <a:p>
+            <a:r>
+              <a:rPr b="1"/>
+              <a:t>Say:</a:t>
+            </a:r>
+            <a:r>
+              <a:t> "Sections 1 to 3 prepare the thinking. Section 4 is a diagnosis game each of you plays alone. Section 5 is where your group tests its own Key Results for the Capstone."</a:t>
+            </a:r>
+          </a:p>
+          <a:p>
+            <a:r>
+              <a:t/>
+            </a:r>
+          </a:p>
+          <a:p>
+            <a:r>
+              <a:rPr b="1"/>
+              <a:t>3. Say how the unit runs.</a:t>
+            </a:r>
+          </a:p>
+          <a:p>
+            <a:r>
+              <a:rPr b="1"/>
+              <a:t>Say:</a:t>
+            </a:r>
+            <a:r>
+              <a:t> "I teach all five sections from this deck first. You then complete the unit on the portal, in the session or after it."</a:t>
+            </a:r>
+          </a:p>
+          <a:p>
+            <a:r>
+              <a:t/>
+            </a:r>
+          </a:p>
+          <a:p>
+            <a:r>
+              <a:rPr b="1"/>
+              <a:t>4. Bridge to Section 1.</a:t>
+            </a:r>
+          </a:p>
+          <a:p>
+            <a:r>
+              <a:rPr b="1"/>
+              <a:t>Say:</a:t>
+            </a:r>
+            <a:r>
+              <a:t> "We start with the four checkpoints."</a:t>
+            </a:r>
+          </a:p>
+          <a:p>
+            <a:r>
+              <a:t/>
+            </a:r>
+          </a:p>
+          <a:p>
+            <a:r>
+              <a:rPr b="1"/>
               <a:t>THE FIVE SECTIONS:</a:t>
             </a:r>
           </a:p>
           <a:p>
             <a:r>
-              <a:rPr lang="en-GB" b="1" dirty="0"/>
-              <a:t>- Section 1 · Awareness </a:t>
-            </a:r>
-            <a:r>
-              <a:rPr lang="en-GB" dirty="0"/>
-              <a:t>— What: the flow from Unit 3 to Unit 4, then the four ABCV checkpoints one at a time (Arena, Boundaries, Competition, Value Proposition), each with its Must-Be-True condition, then the four brought together.</a:t>
-            </a:r>
-          </a:p>
-          <a:p>
-            <a:endParaRPr lang="en-GB" dirty="0"/>
-          </a:p>
-          <a:p>
-            <a:r>
-              <a:rPr lang="en-GB" b="1" dirty="0"/>
-              <a:t>- Section 2 · Intelligence </a:t>
-            </a:r>
-            <a:r>
-              <a:rPr lang="en-GB" dirty="0"/>
-              <a:t>— Why: the Industry Illusion and its three traps (Familiarity, Exclusion, Complacency), then the Industry Illusion game on the case of a university.</a:t>
-            </a:r>
-          </a:p>
-          <a:p>
-            <a:endParaRPr lang="en-GB" dirty="0"/>
-          </a:p>
-          <a:p>
-            <a:r>
-              <a:rPr lang="en-GB" b="1" dirty="0"/>
-              <a:t>- Section 3 · Extrapolating </a:t>
-            </a:r>
-            <a:r>
-              <a:rPr lang="en-GB" dirty="0"/>
-              <a:t>— Where: the ABCV checkpoint each executive role most often overlooks.</a:t>
-            </a:r>
-          </a:p>
-          <a:p>
-            <a:endParaRPr lang="en-GB" dirty="0"/>
-          </a:p>
-          <a:p>
-            <a:r>
-              <a:rPr lang="en-GB" b="1" dirty="0"/>
-              <a:t>- Section 4 · Integration </a:t>
-            </a:r>
-            <a:r>
-              <a:rPr lang="en-GB" dirty="0"/>
-              <a:t>— Collective: Cause of Death, four failed strategies tested against the Industry Illusion.</a:t>
-            </a:r>
-          </a:p>
-          <a:p>
-            <a:endParaRPr lang="en-GB" dirty="0"/>
-          </a:p>
-          <a:p>
-            <a:r>
-              <a:rPr lang="en-GB" b="1" dirty="0"/>
-              <a:t>- Section 5 · Application </a:t>
-            </a:r>
-            <a:r>
-              <a:rPr lang="en-GB" dirty="0"/>
-              <a:t>— In Practice: one worked example, then each group takes its Unit 3 Key Results through the same four steps.</a:t>
-            </a:r>
-          </a:p>
-          <a:p>
-            <a:endParaRPr lang="en-GB" dirty="0"/>
-          </a:p>
-          <a:p>
-            <a:r>
-              <a:rPr lang="en-GB" b="1" dirty="0"/>
-              <a:t>KEY FACILITATION QUESTIONS:</a:t>
-            </a:r>
-          </a:p>
-          <a:p>
-            <a:r>
-              <a:rPr lang="en-GB" dirty="0"/>
-              <a:t>- "Who else solves your customer’s problem, including those outside your industry?"</a:t>
-            </a:r>
-          </a:p>
-          <a:p>
-            <a:r>
-              <a:rPr lang="en-GB" dirty="0"/>
-              <a:t>- "Which ABCV checkpoint is your executive function least likely to examine? What risk does that create for the enterprise?"</a:t>
-            </a:r>
-          </a:p>
-          <a:p>
-            <a:r>
-              <a:rPr lang="en-GB" dirty="0"/>
-              <a:t>- "What is the one Must-Be-True condition your team is most likely to avoid naming, and who will verify it before the next strategic review?"</a:t>
-            </a:r>
-          </a:p>
-          <a:p>
-            <a:endParaRPr lang="en-GB" dirty="0"/>
-          </a:p>
-          <a:p>
-            <a:r>
-              <a:rPr lang="en-GB" b="1" dirty="0"/>
-              <a:t>TONE AND WATCH POINTS:</a:t>
-            </a:r>
-          </a:p>
-          <a:p>
-            <a:r>
-              <a:rPr lang="en-GB" dirty="0"/>
-              <a:t>- Teach: a Must-Be-True condition is written so that it is either true or false. A risk or a concern becomes a condition once it is stated as what must hold.</a:t>
-            </a:r>
-          </a:p>
-          <a:p>
-            <a:r>
-              <a:rPr lang="en-GB" dirty="0"/>
-              <a:t>- Teach: competition covers every alternative the customer can choose, including doing nothing.</a:t>
-            </a:r>
-          </a:p>
-          <a:p>
-            <a:r>
-              <a:rPr lang="en-GB" dirty="0"/>
-              <a:t>- Insist on specific conditions.</a:t>
+              <a:t>- Section 1 · Awareness — What: four checkpoints that test whether measurable objectives are also strategically sound. The flow from Unit 3 to Unit 4, then Arena, Boundaries, Competition and Value Proposition one at a time, each with its Must-Be-True condition, then the four brought together.</a:t>
+            </a:r>
+          </a:p>
+          <a:p>
+            <a:r>
+              <a:t>- Section 2 · Intelligence — Why: how a familiar industry definition narrows the range of options leaders examine. The Industry Illusion and its three traps (Familiarity, Exclusion, Complacency), then the Industry Illusion game on the case of a university.</a:t>
+            </a:r>
+          </a:p>
+          <a:p>
+            <a:r>
+              <a:t>- Section 3 · Extrapolating — Where: the checkpoint each executive role is most likely to overlook, and why.</a:t>
+            </a:r>
+          </a:p>
+          <a:p>
+            <a:r>
+              <a:t>- Section 4 · Integration — Collective: Cause of Death, matching realistic strategic failures to the checkpoint that would have prevented them.</a:t>
+            </a:r>
+          </a:p>
+          <a:p>
+            <a:r>
+              <a:t>- Section 5 · Application — In Practice: one worked example, then each group stress-tests its Unit 3 Key Results on the four checkpoints. This is Capstone work: the confirmed outputs feed boxes 4A to 4F of the team's Capstone S2R® Blueprint.</a:t>
             </a:r>
           </a:p>
         </p:txBody>
@@ -5856,154 +6558,192 @@
           <a:lstStyle/>
           <a:p>
             <a:r>
-              <a:rPr lang="en-GB"/>
+              <a:rPr b="1"/>
               <a:t>5.3 — VERIFICATION OWNERSHIP AND EXECUTIVE BLIND SPOTS (CAPSTONE WORK)</a:t>
             </a:r>
           </a:p>
           <a:p>
-            <a:endParaRPr lang="en-GB"/>
-          </a:p>
-          <a:p>
-            <a:r>
-              <a:rPr lang="en-GB"/>
+            <a:r>
+              <a:t/>
+            </a:r>
+          </a:p>
+          <a:p>
+            <a:r>
+              <a:rPr b="1"/>
               <a:t>HOW TO TEACH IT:</a:t>
             </a:r>
           </a:p>
           <a:p>
-            <a:endParaRPr lang="en-GB"/>
-          </a:p>
-          <a:p>
-            <a:r>
-              <a:rPr lang="en-GB"/>
+            <a:r>
+              <a:t/>
+            </a:r>
+          </a:p>
+          <a:p>
+            <a:r>
+              <a:rPr b="1"/>
               <a:t>1. Say why ownership matters.</a:t>
             </a:r>
           </a:p>
           <a:p>
             <a:r>
-              <a:rPr lang="en-GB"/>
-              <a:t>Say: "Each Must-Be-True condition your group named in 5.2 holds only while someone checks it.</a:t>
-            </a:r>
-          </a:p>
-          <a:p>
-            <a:r>
-              <a:rPr lang="en-GB"/>
+              <a:rPr b="1"/>
+              <a:t>Say:</a:t>
+            </a:r>
+            <a:r>
+              <a:t> "Each Must-Be-True condition your group named in 5.2 holds only while someone checks it.</a:t>
+            </a:r>
+          </a:p>
+          <a:p>
+            <a:r>
               <a:t>In 5.3 your group assigns each check to an executive."</a:t>
             </a:r>
           </a:p>
           <a:p>
-            <a:endParaRPr lang="en-GB"/>
-          </a:p>
-          <a:p>
-            <a:r>
-              <a:rPr lang="en-GB"/>
+            <a:r>
+              <a:t/>
+            </a:r>
+          </a:p>
+          <a:p>
+            <a:r>
+              <a:rPr b="1"/>
               <a:t>2. Teach verification ownership.</a:t>
             </a:r>
           </a:p>
           <a:p>
             <a:r>
-              <a:rPr lang="en-GB"/>
-              <a:t>Say: "For each critical condition, name the executive accountable for verifying it, the evidence that will confirm it still holds, and the date of the first check."</a:t>
-            </a:r>
-          </a:p>
-          <a:p>
-            <a:r>
-              <a:rPr lang="en-GB"/>
+              <a:rPr b="1"/>
+              <a:t>Say:</a:t>
+            </a:r>
+            <a:r>
+              <a:t> "For each critical condition, name the executive accountable for verifying it, the evidence that will confirm it still holds, and the date of the first check."</a:t>
+            </a:r>
+          </a:p>
+          <a:p>
+            <a:r>
               <a:t>One executive owns each check, with evidence someone else could inspect and a date.</a:t>
             </a:r>
           </a:p>
           <a:p>
-            <a:endParaRPr lang="en-GB"/>
-          </a:p>
-          <a:p>
-            <a:r>
-              <a:rPr lang="en-GB"/>
+            <a:r>
+              <a:t/>
+            </a:r>
+          </a:p>
+          <a:p>
+            <a:r>
+              <a:rPr b="1"/>
               <a:t>3. Teach the executive blind spot.</a:t>
             </a:r>
           </a:p>
           <a:p>
             <a:r>
-              <a:rPr lang="en-GB"/>
-              <a:t>Say: "Section 3 showed that each executive role tends to overlook one checkpoint.</a:t>
-            </a:r>
-          </a:p>
-          <a:p>
-            <a:r>
-              <a:rPr lang="en-GB"/>
+              <a:rPr b="1"/>
+              <a:t>Say:</a:t>
+            </a:r>
+            <a:r>
+              <a:t> "Section 3 showed that each executive role tends to overlook one checkpoint.</a:t>
+            </a:r>
+          </a:p>
+          <a:p>
+            <a:r>
               <a:t>Look around your table: which checkpoint is your executive team most likely to overlook? What is the enterprise risk if it does?"</a:t>
             </a:r>
           </a:p>
           <a:p>
-            <a:endParaRPr lang="en-GB"/>
-          </a:p>
-          <a:p>
-            <a:r>
-              <a:rPr lang="en-GB"/>
+            <a:r>
+              <a:t/>
+            </a:r>
+          </a:p>
+          <a:p>
+            <a:r>
+              <a:rPr b="1"/>
               <a:t>4. Ask the question 5.3 answers.</a:t>
             </a:r>
           </a:p>
           <a:p>
             <a:r>
-              <a:rPr lang="en-GB"/>
-              <a:t>Ask: "Which one MBT condition, if left unverified, represents the greatest risk to our strategy’s integrity? Who is responsible for that verification?"</a:t>
-            </a:r>
-          </a:p>
-          <a:p>
-            <a:endParaRPr lang="en-GB"/>
-          </a:p>
-          <a:p>
-            <a:r>
-              <a:rPr lang="en-GB"/>
+              <a:rPr b="1"/>
+              <a:t>Ask:</a:t>
+            </a:r>
+            <a:r>
+              <a:t> "Which one MBT condition, if left unverified, represents the greatest risk to our strategy’s integrity? Who is responsible for that verification?"</a:t>
+            </a:r>
+          </a:p>
+          <a:p>
+            <a:r>
+              <a:t/>
+            </a:r>
+          </a:p>
+          <a:p>
+            <a:r>
+              <a:rPr b="1"/>
+              <a:t>5. Bridge to the Unit Summary.</a:t>
+            </a:r>
+          </a:p>
+          <a:p>
+            <a:r>
+              <a:rPr b="1"/>
+              <a:t>Say:</a:t>
+            </a:r>
+            <a:r>
+              <a:t> "Every condition has an executive who checks it. We now close the unit."</a:t>
+            </a:r>
+          </a:p>
+          <a:p>
+            <a:r>
+              <a:t/>
+            </a:r>
+          </a:p>
+          <a:p>
+            <a:r>
+              <a:rPr b="1"/>
               <a:t>ON THE PORTAL, AFTER THE TEACHING:</a:t>
             </a:r>
           </a:p>
           <a:p>
             <a:r>
-              <a:rPr lang="en-GB"/>
               <a:t>Participants work in their groups in 5.3 of the participant file. This is Capstone work, typed by the group’s scribe.</a:t>
             </a:r>
           </a:p>
           <a:p>
             <a:r>
-              <a:rPr lang="en-GB"/>
+              <a:rPr b="1"/>
               <a:t>1. The group reads its Must-Be-True conditions from 5.2, listed in 5.3.</a:t>
             </a:r>
           </a:p>
           <a:p>
             <a:r>
-              <a:rPr lang="en-GB"/>
               <a:t>2. For each critical condition, the group names the executive accountable, the evidence and the date of the first check.</a:t>
             </a:r>
           </a:p>
           <a:p>
             <a:r>
-              <a:rPr lang="en-GB"/>
               <a:t>3. The group selects the checkpoint its executive team is most likely to overlook, and states the enterprise risk.</a:t>
             </a:r>
           </a:p>
           <a:p>
             <a:r>
-              <a:rPr lang="en-GB"/>
+              <a:rPr b="1"/>
               <a:t>4. Each participant reads the record and selects Agree. Print gives a copy of the record.</a:t>
             </a:r>
           </a:p>
           <a:p>
-            <a:endParaRPr lang="en-GB"/>
-          </a:p>
-          <a:p>
-            <a:r>
-              <a:rPr lang="en-GB"/>
+            <a:r>
+              <a:t/>
+            </a:r>
+          </a:p>
+          <a:p>
+            <a:r>
+              <a:rPr b="1"/>
               <a:t>AFTER THE SESSION:</a:t>
             </a:r>
           </a:p>
           <a:p>
             <a:r>
-              <a:rPr lang="en-GB"/>
               <a:t>The record reaches you with each participant’s submission, under the heading ABCV–MBT: Stress-Testing the Key Results.</a:t>
             </a:r>
           </a:p>
           <a:p>
             <a:r>
-              <a:rPr lang="en-GB"/>
               <a:t>The agreed work feeds boxes 4A to 4F of the team’s Capstone S2R Blueprint: the conditions in 4A to 4D, verification ownership in 4E and the executive blind spot in 4F.</a:t>
             </a:r>
           </a:p>
@@ -6085,128 +6825,165 @@
           <a:lstStyle/>
           <a:p>
             <a:r>
-              <a:rPr lang="en-GB" b="1" dirty="0"/>
+              <a:rPr b="1"/>
               <a:t>SECTION 1 · AWARENESS — WHAT</a:t>
             </a:r>
           </a:p>
           <a:p>
-            <a:endParaRPr lang="en-GB" dirty="0"/>
-          </a:p>
-          <a:p>
-            <a:r>
-              <a:rPr lang="en-GB" b="1" dirty="0"/>
+            <a:r>
+              <a:t/>
+            </a:r>
+          </a:p>
+          <a:p>
+            <a:r>
+              <a:rPr b="1"/>
               <a:t>HOW THIS SECTION RUNS:</a:t>
             </a:r>
           </a:p>
           <a:p>
             <a:r>
-              <a:rPr lang="en-GB" dirty="0"/>
+              <a:rPr b="1"/>
               <a:t>1. The overview: the flow from Unit 3 to Unit 4 and the logic of the four steps.</a:t>
             </a:r>
           </a:p>
           <a:p>
             <a:r>
-              <a:rPr lang="en-GB" dirty="0"/>
               <a:t>2. 1.1 to 1.4: the four checkpoints, one at a time. Each has two slides: the checkpoint itself, then its Must-Be-True condition.</a:t>
             </a:r>
           </a:p>
           <a:p>
             <a:r>
-              <a:rPr lang="en-GB" dirty="0"/>
+              <a:rPr b="1"/>
               <a:t>3. Bringing ABCV Together: the integrated view.</a:t>
             </a:r>
           </a:p>
           <a:p>
             <a:r>
-              <a:rPr lang="en-GB" dirty="0"/>
               <a:t>4. The Section 1 Reflections slide: the two reflections participants write on the portal after the teaching.</a:t>
             </a:r>
           </a:p>
           <a:p>
-            <a:endParaRPr lang="en-GB" dirty="0"/>
-          </a:p>
-          <a:p>
-            <a:r>
-              <a:rPr lang="en-GB" b="1" dirty="0"/>
+            <a:r>
+              <a:t/>
+            </a:r>
+          </a:p>
+          <a:p>
+            <a:r>
+              <a:rPr b="1"/>
               <a:t>SECTION LEARNING OUTCOMES:</a:t>
             </a:r>
           </a:p>
           <a:p>
             <a:r>
-              <a:rPr lang="en-GB" dirty="0"/>
+              <a:rPr b="1"/>
               <a:t>1. Assess whether measurable objectives are also strategically credible.</a:t>
             </a:r>
           </a:p>
           <a:p>
             <a:r>
-              <a:rPr lang="en-GB" dirty="0"/>
+              <a:rPr b="1"/>
               <a:t>2. Evaluate objectives against customer value, strategic boundaries and competitive realities.</a:t>
             </a:r>
           </a:p>
           <a:p>
-            <a:endParaRPr lang="en-GB" dirty="0"/>
-          </a:p>
-          <a:p>
-            <a:r>
-              <a:rPr lang="en-GB" b="1" dirty="0"/>
+            <a:r>
+              <a:t/>
+            </a:r>
+          </a:p>
+          <a:p>
+            <a:r>
+              <a:rPr b="1"/>
               <a:t>HOW TO OPEN THE SECTION:</a:t>
             </a:r>
           </a:p>
           <a:p>
-            <a:endParaRPr lang="en-GB" dirty="0"/>
-          </a:p>
-          <a:p>
-            <a:r>
-              <a:rPr lang="en-GB" b="1" dirty="0"/>
+            <a:r>
+              <a:t/>
+            </a:r>
+          </a:p>
+          <a:p>
+            <a:r>
+              <a:rPr b="1"/>
               <a:t>1. Open with the question that creates the need.</a:t>
             </a:r>
           </a:p>
           <a:p>
             <a:r>
-              <a:rPr lang="en-GB" dirty="0"/>
-              <a:t>Ask: "How many of you have experienced a well-crafted strategy that fell apart once execution started because of assumptions we hadn’t named until they broke?"</a:t>
-            </a:r>
-          </a:p>
-          <a:p>
-            <a:r>
-              <a:rPr lang="en-GB" dirty="0"/>
+              <a:rPr b="1"/>
+              <a:t>Ask:</a:t>
+            </a:r>
+            <a:r>
+              <a:t> "How many of you have experienced a well-crafted strategy that fell apart once execution started because of assumptions we hadn’t named until they broke?"</a:t>
+            </a:r>
+          </a:p>
+          <a:p>
+            <a:r>
               <a:t>Pause. Use the silence.</a:t>
             </a:r>
           </a:p>
           <a:p>
-            <a:endParaRPr lang="en-GB" dirty="0"/>
-          </a:p>
-          <a:p>
-            <a:r>
-              <a:rPr lang="en-GB" b="1" dirty="0"/>
+            <a:r>
+              <a:t/>
+            </a:r>
+          </a:p>
+          <a:p>
+            <a:r>
+              <a:rPr b="1"/>
               <a:t>2. Introduce ABCV–MBT.</a:t>
             </a:r>
           </a:p>
           <a:p>
             <a:r>
-              <a:rPr lang="en-GB" dirty="0"/>
-              <a:t>Say: "ABCV–MBT is the tool that names those invisible assumptions before they become expensive failures."</a:t>
-            </a:r>
-          </a:p>
-          <a:p>
-            <a:r>
-              <a:rPr lang="en-GB" dirty="0"/>
+              <a:rPr b="1"/>
+              <a:t>Say:</a:t>
+            </a:r>
+            <a:r>
+              <a:t> "ABCV–MBT is the tool that names those invisible assumptions before they become expensive failures."</a:t>
+            </a:r>
+          </a:p>
+          <a:p>
+            <a:r>
               <a:t>Section intent: leaders must feel the danger of unnamed assumptions before they can value the discipline of naming them.</a:t>
             </a:r>
           </a:p>
           <a:p>
-            <a:endParaRPr lang="en-GB" dirty="0"/>
-          </a:p>
-          <a:p>
-            <a:r>
-              <a:rPr lang="en-GB" b="1" dirty="0"/>
+            <a:r>
+              <a:t/>
+            </a:r>
+          </a:p>
+          <a:p>
+            <a:r>
+              <a:rPr b="1"/>
               <a:t>3. Say what each group brings into the unit.</a:t>
             </a:r>
           </a:p>
           <a:p>
             <a:r>
-              <a:rPr lang="en-GB" dirty="0"/>
-              <a:t>Say: "You arrive with the Enterprise OKRs your group confirmed in Unit 3. Every exercise in this unit works on those Key Results."</a:t>
+              <a:rPr b="1"/>
+              <a:t>Say:</a:t>
+            </a:r>
+            <a:r>
+              <a:t> "You arrive with the Enterprise OKRs your group confirmed in Unit 3. Every exercise in this unit works on those Key Results."</a:t>
+            </a:r>
+          </a:p>
+          <a:p>
+            <a:r>
+              <a:t/>
+            </a:r>
+          </a:p>
+          <a:p>
+            <a:r>
+              <a:rPr b="1"/>
+              <a:t>4. Bridge to the overview.</a:t>
+            </a:r>
+          </a:p>
+          <a:p>
+            <a:r>
+              <a:rPr b="1"/>
+              <a:t>Say:</a:t>
+            </a:r>
+            <a:r>
+              <a:t> "First, the problem with well-written OKRs."</a:t>
             </a:r>
           </a:p>
         </p:txBody>
@@ -6292,212 +7069,235 @@
           <a:lstStyle/>
           <a:p>
             <a:r>
-              <a:rPr lang="en-GB" b="1" dirty="0"/>
+              <a:rPr b="1"/>
               <a:t>OVERVIEW — FROM UNIT 3 TO UNIT 4 (STRATEGIC CONTEXT)</a:t>
             </a:r>
           </a:p>
           <a:p>
-            <a:endParaRPr lang="en-GB" dirty="0"/>
-          </a:p>
-          <a:p>
-            <a:r>
-              <a:rPr lang="en-GB" b="1" dirty="0"/>
+            <a:r>
+              <a:t/>
+            </a:r>
+          </a:p>
+          <a:p>
+            <a:r>
+              <a:rPr b="1"/>
               <a:t>HOW TO TEACH IT:</a:t>
             </a:r>
           </a:p>
           <a:p>
-            <a:endParaRPr lang="en-GB" dirty="0"/>
-          </a:p>
-          <a:p>
-            <a:r>
-              <a:rPr lang="en-GB" b="1" dirty="0"/>
+            <a:r>
+              <a:t/>
+            </a:r>
+          </a:p>
+          <a:p>
+            <a:r>
+              <a:rPr b="1"/>
               <a:t>1. Read the statement on the slide aloud.</a:t>
             </a:r>
           </a:p>
           <a:p>
             <a:r>
-              <a:rPr lang="en-GB" dirty="0"/>
               <a:t>"Your group has defined its OKRs. Now the question is whether they are strategically sound."</a:t>
             </a:r>
           </a:p>
           <a:p>
-            <a:endParaRPr lang="en-GB" dirty="0"/>
-          </a:p>
-          <a:p>
-            <a:r>
-              <a:rPr lang="en-GB" b="1" dirty="0"/>
+            <a:r>
+              <a:t/>
+            </a:r>
+          </a:p>
+          <a:p>
+            <a:r>
+              <a:rPr b="1"/>
               <a:t>2. Say where the room stands.</a:t>
             </a:r>
           </a:p>
           <a:p>
             <a:r>
-              <a:rPr lang="en-GB" dirty="0"/>
-              <a:t>Say: "In Unit 3 your group translated its Success in Practice into Enterprise OKRs.</a:t>
-            </a:r>
-          </a:p>
-          <a:p>
-            <a:r>
-              <a:rPr lang="en-GB" dirty="0"/>
+              <a:rPr b="1"/>
+              <a:t>Say:</a:t>
+            </a:r>
+            <a:r>
+              <a:t> "In Unit 3 your group translated its Success in Practice into Enterprise OKRs.</a:t>
+            </a:r>
+          </a:p>
+          <a:p>
+            <a:r>
               <a:t>They are measurable, they are ambitious and they have deadlines.</a:t>
             </a:r>
           </a:p>
           <a:p>
             <a:r>
-              <a:rPr lang="en-GB" dirty="0"/>
               <a:t>The next step is to move past well-written OKRs and ask whether they are strategically sound."</a:t>
             </a:r>
           </a:p>
           <a:p>
-            <a:endParaRPr lang="en-GB" dirty="0"/>
-          </a:p>
-          <a:p>
-            <a:r>
-              <a:rPr lang="en-ZA" b="1" dirty="0"/>
-              <a:t>The GPS Analogy — Perfect Execution, Wrong Assumptions</a:t>
-            </a:r>
-          </a:p>
-          <a:p>
-            <a:r>
-              <a:rPr lang="en-ZA" b="1" dirty="0"/>
+            <a:r>
+              <a:t/>
+            </a:r>
+          </a:p>
+          <a:p>
+            <a:r>
+              <a:rPr b="1"/>
+              <a:t>3. Ask for the room's experience.</a:t>
+            </a:r>
+          </a:p>
+          <a:p>
+            <a:r>
+              <a:rPr b="1"/>
+              <a:t>Ask:</a:t>
+            </a:r>
+            <a:r>
+              <a:t> "Think of a goal that failed in your organisation. Was it a lack of effort, or was there an assumption that turned out to be wrong, one you didn't name until it broke?"</a:t>
+            </a:r>
+          </a:p>
+          <a:p>
+            <a:r>
+              <a:t>Take two or three answers.</a:t>
+            </a:r>
+          </a:p>
+          <a:p>
+            <a:r>
+              <a:rPr b="1"/>
               <a:t>Say:</a:t>
             </a:r>
-          </a:p>
-          <a:p>
-            <a:r>
-              <a:rPr lang="en-ZA" dirty="0"/>
+            <a:r>
+              <a:t> "Most strategies fail from unnamed conditions. The cost of discovering those conditions during execution is far higher than naming them now."</a:t>
+            </a:r>
+          </a:p>
+          <a:p>
+            <a:r>
+              <a:t/>
+            </a:r>
+          </a:p>
+          <a:p>
+            <a:r>
+              <a:rPr b="1"/>
+              <a:t>4. Tell the GPS story: perfect execution, wrong assumptions.</a:t>
+            </a:r>
+          </a:p>
+          <a:p>
+            <a:r>
+              <a:rPr b="1"/>
+              <a:t>Say:</a:t>
+            </a:r>
+            <a:r>
+              <a:t/>
+            </a:r>
+          </a:p>
+          <a:p>
+            <a:r>
               <a:t>"Have you ever followed your GPS so faithfully that even when the road starts looking suspicious, you keep driving?</a:t>
             </a:r>
           </a:p>
           <a:p>
             <a:r>
-              <a:rPr lang="en-ZA" dirty="0"/>
               <a:t>The road gets narrower. The tar disappears. You pass a few goats.</a:t>
             </a:r>
           </a:p>
           <a:p>
-            <a:endParaRPr lang="en-ZA" dirty="0"/>
-          </a:p>
-          <a:p>
-            <a:r>
-              <a:rPr lang="en-ZA" dirty="0"/>
-              <a:t>But the GPS confidently announces, </a:t>
-            </a:r>
-            <a:r>
-              <a:rPr lang="en-ZA" i="1" dirty="0"/>
-              <a:t>'You are on the fastest route.'</a:t>
-            </a:r>
-            <a:endParaRPr lang="en-ZA" dirty="0"/>
-          </a:p>
-          <a:p>
-            <a:r>
-              <a:rPr lang="en-ZA" dirty="0"/>
+            <a:r>
+              <a:t/>
+            </a:r>
+          </a:p>
+          <a:p>
+            <a:r>
+              <a:t>But the GPS confidently announces, 'You are on the fastest route.'</a:t>
+            </a:r>
+          </a:p>
+          <a:p>
+            <a:r>
               <a:t>And because we're committed to the destination, we keep going!</a:t>
             </a:r>
           </a:p>
           <a:p>
             <a:r>
-              <a:rPr lang="en-ZA" dirty="0"/>
               <a:t>Eventually, you arrive at a locked farm gate.</a:t>
             </a:r>
           </a:p>
           <a:p>
-            <a:endParaRPr lang="en-ZA" b="1" dirty="0"/>
-          </a:p>
-          <a:p>
-            <a:r>
-              <a:rPr lang="en-ZA" b="1" dirty="0"/>
-              <a:t>Congratulations! You have executed the instructions perfectly. You are also completely lost.</a:t>
-            </a:r>
-            <a:r>
-              <a:rPr lang="en-ZA" dirty="0"/>
-              <a:t>"</a:t>
-            </a:r>
-          </a:p>
-          <a:p>
-            <a:r>
-              <a:rPr lang="en-ZA" dirty="0"/>
+            <a:r>
+              <a:t/>
+            </a:r>
+          </a:p>
+          <a:p>
+            <a:r>
+              <a:t>Congratulations! You have executed the instructions perfectly. You are also completely lost."</a:t>
+            </a:r>
+          </a:p>
+          <a:p>
+            <a:r>
               <a:t>(Pause for laughter.)</a:t>
             </a:r>
           </a:p>
           <a:p>
-            <a:endParaRPr lang="en-ZA" dirty="0"/>
-          </a:p>
-          <a:p>
-            <a:r>
-              <a:rPr lang="en-ZA" dirty="0"/>
+            <a:r>
+              <a:t/>
+            </a:r>
+          </a:p>
+          <a:p>
+            <a:r>
               <a:t>"That's the danger with strategy.</a:t>
             </a:r>
           </a:p>
           <a:p>
-            <a:endParaRPr lang="en-ZA" dirty="0"/>
-          </a:p>
-          <a:p>
-            <a:r>
-              <a:rPr lang="en-ZA" dirty="0"/>
+            <a:r>
+              <a:t/>
+            </a:r>
+          </a:p>
+          <a:p>
+            <a:r>
               <a:t>Your OKRs can be perfectly written.</a:t>
             </a:r>
           </a:p>
           <a:p>
             <a:r>
-              <a:rPr lang="en-ZA" dirty="0"/>
               <a:t> Your targets can be measurable. Your deadlines can be clear. </a:t>
             </a:r>
           </a:p>
           <a:p>
             <a:r>
-              <a:rPr lang="en-ZA" dirty="0"/>
               <a:t>Everyone can be accountable.</a:t>
             </a:r>
           </a:p>
           <a:p>
             <a:r>
-              <a:rPr lang="en-ZA" dirty="0"/>
               <a:t>But what if the assumptions behind your chosen route are wrong?</a:t>
             </a:r>
           </a:p>
           <a:p>
             <a:r>
-              <a:rPr lang="en-ZA" b="1" dirty="0"/>
-              <a:t>You can achieve every milestone on the way to the wrong outcome.</a:t>
-            </a:r>
-            <a:r>
-              <a:rPr lang="en-ZA" dirty="0"/>
-              <a:t>"</a:t>
-            </a:r>
-          </a:p>
-          <a:p>
-            <a:endParaRPr lang="en-ZA" b="1" dirty="0"/>
-          </a:p>
-          <a:p>
-            <a:r>
-              <a:rPr lang="en-ZA" b="1" dirty="0"/>
-              <a:t>Bridge to Unit 4:</a:t>
-            </a:r>
-            <a:endParaRPr lang="en-ZA" dirty="0"/>
-          </a:p>
-          <a:p>
-            <a:r>
-              <a:rPr lang="en-ZA" dirty="0"/>
-              <a:t>"Unit 3 gave us the destination and the milestones.</a:t>
-            </a:r>
-          </a:p>
-          <a:p>
-            <a:r>
-              <a:rPr lang="en-ZA" dirty="0"/>
+              <a:t>You can achieve every milestone on the way to the wrong outcome."</a:t>
+            </a:r>
+          </a:p>
+          <a:p>
+            <a:r>
+              <a:t/>
+            </a:r>
+          </a:p>
+          <a:p>
+            <a:r>
+              <a:rPr b="1"/>
+              <a:t>5. Bridge to the four checkpoints.</a:t>
+            </a:r>
+          </a:p>
+          <a:p>
+            <a:r>
+              <a:rPr b="1"/>
+              <a:t>Say:</a:t>
+            </a:r>
+            <a:r>
+              <a:t> "Unit 3 gave us the destination and the milestones.</a:t>
+            </a:r>
+          </a:p>
+          <a:p>
+            <a:r>
               <a:t>In Unit 4, ABCV helps us interrogate the strategic context before we commit to the route.</a:t>
             </a:r>
           </a:p>
           <a:p>
             <a:r>
-              <a:rPr lang="en-ZA" dirty="0"/>
               <a:t>Because sometimes the smartest strategic decision is to question the GPS before we run out of petrol."</a:t>
             </a:r>
-          </a:p>
-          <a:p>
-            <a:br>
-              <a:rPr lang="en-ZA" dirty="0"/>
-            </a:br>
-            <a:endParaRPr lang="en-ZA" dirty="0"/>
           </a:p>
         </p:txBody>
       </p:sp>
@@ -6856,389 +7656,526 @@
           <a:lstStyle/>
           <a:p>
             <a:r>
-              <a:rPr lang="en-GB" b="1" dirty="0"/>
+              <a:rPr b="1"/>
               <a:t>1.1 — ARENA (CUSTOMER END GAME)</a:t>
             </a:r>
           </a:p>
           <a:p>
-            <a:endParaRPr lang="en-GB" dirty="0"/>
-          </a:p>
-          <a:p>
-            <a:r>
-              <a:rPr lang="en-GB" b="1" dirty="0"/>
+            <a:r>
+              <a:t/>
+            </a:r>
+          </a:p>
+          <a:p>
+            <a:r>
+              <a:rPr b="1"/>
               <a:t>HOW TO TEACH IT:</a:t>
             </a:r>
           </a:p>
           <a:p>
-            <a:endParaRPr lang="en-GB" dirty="0"/>
-          </a:p>
-          <a:p>
-            <a:r>
-              <a:rPr lang="en-GB" b="1" dirty="0"/>
+            <a:r>
+              <a:t/>
+            </a:r>
+          </a:p>
+          <a:p>
+            <a:r>
+              <a:rPr b="1"/>
               <a:t>1. Read the question of the checkpoint.</a:t>
             </a:r>
           </a:p>
           <a:p>
             <a:r>
-              <a:rPr lang="en-GB" dirty="0"/>
               <a:t>"What is the customer ultimately trying to achieve?"</a:t>
             </a:r>
           </a:p>
           <a:p>
-            <a:endParaRPr lang="en-GB" dirty="0"/>
-          </a:p>
-          <a:p>
-            <a:r>
-              <a:rPr lang="en-GB" b="1" dirty="0"/>
+            <a:r>
+              <a:t/>
+            </a:r>
+          </a:p>
+          <a:p>
+            <a:r>
+              <a:rPr b="1"/>
               <a:t>2. Give the strategic logic.</a:t>
             </a:r>
           </a:p>
           <a:p>
             <a:r>
-              <a:rPr lang="en-GB" b="1" dirty="0"/>
-              <a:t>Say</a:t>
-            </a:r>
-            <a:r>
-              <a:rPr lang="en-GB" dirty="0"/>
-              <a:t>: "Strategy starts with a shift in perspective: we compete for a customer need.</a:t>
-            </a:r>
-          </a:p>
-          <a:p>
-            <a:r>
-              <a:rPr lang="en-GB" dirty="0"/>
+              <a:rPr b="1"/>
+              <a:t>Say:</a:t>
+            </a:r>
+            <a:r>
+              <a:t> "Strategy starts with a shift in perspective: we compete for a customer need.</a:t>
+            </a:r>
+          </a:p>
+          <a:p>
+            <a:r>
               <a:t>If we define our arena by our products, we miss the forest for the trees."</a:t>
             </a:r>
           </a:p>
           <a:p>
-            <a:endParaRPr lang="en-GB" dirty="0"/>
-          </a:p>
-          <a:p>
-            <a:r>
-              <a:rPr lang="en-GB" b="1" dirty="0"/>
-              <a:t>Say: </a:t>
-            </a:r>
-            <a:r>
-              <a:rPr lang="en-GB" dirty="0"/>
-              <a:t>"Arena defines the space in which value is being sought and contested."</a:t>
-            </a:r>
-          </a:p>
-          <a:p>
-            <a:endParaRPr lang="en-GB" b="1" dirty="0"/>
-          </a:p>
-          <a:p>
-            <a:r>
-              <a:rPr lang="en-GB" b="1" dirty="0"/>
-              <a:t>Say: </a:t>
-            </a:r>
-            <a:r>
-              <a:rPr lang="en-GB" dirty="0"/>
-              <a:t>"Organisations naturally describe themselves through what they produce or the industry in which they operate: </a:t>
-            </a:r>
-          </a:p>
-          <a:p>
-            <a:r>
-              <a:rPr lang="en-GB" dirty="0"/>
+            <a:r>
+              <a:t/>
+            </a:r>
+          </a:p>
+          <a:p>
+            <a:r>
+              <a:rPr b="1"/>
+              <a:t>Say:</a:t>
+            </a:r>
+            <a:r>
+              <a:t> "Arena defines the space in which value is being sought and contested."</a:t>
+            </a:r>
+          </a:p>
+          <a:p>
+            <a:r>
+              <a:t/>
+            </a:r>
+          </a:p>
+          <a:p>
+            <a:r>
+              <a:rPr b="1"/>
+              <a:t>Say:</a:t>
+            </a:r>
+            <a:r>
+              <a:t> "Organisations naturally describe themselves through what they produce or the industry in which they operate: </a:t>
+            </a:r>
+          </a:p>
+          <a:p>
+            <a:r>
               <a:t>we are a university, </a:t>
             </a:r>
           </a:p>
           <a:p>
             <a:r>
-              <a:rPr lang="en-GB" dirty="0"/>
               <a:t>we are a bank, </a:t>
             </a:r>
           </a:p>
           <a:p>
             <a:r>
-              <a:rPr lang="en-GB" dirty="0"/>
               <a:t>we are a mine, </a:t>
             </a:r>
           </a:p>
           <a:p>
             <a:r>
-              <a:rPr lang="en-GB" dirty="0"/>
               <a:t>we provide insurance.</a:t>
             </a:r>
           </a:p>
           <a:p>
             <a:r>
-              <a:rPr lang="en-GB" dirty="0"/>
               <a:t>Those descriptions tell us something important about the organisation.</a:t>
             </a:r>
           </a:p>
           <a:p>
             <a:r>
-              <a:rPr lang="en-GB" dirty="0"/>
               <a:t>They do not necessarily tell us what customer need the organisation is ultimately trying to meet."</a:t>
             </a:r>
           </a:p>
           <a:p>
-            <a:endParaRPr lang="en-GB" dirty="0"/>
-          </a:p>
-          <a:p>
-            <a:r>
-              <a:rPr lang="en-GB" b="1" dirty="0"/>
+            <a:r>
+              <a:t/>
+            </a:r>
+          </a:p>
+          <a:p>
+            <a:r>
+              <a:rPr b="1"/>
               <a:t>3. Use the smartphone.</a:t>
             </a:r>
           </a:p>
           <a:p>
             <a:r>
-              <a:rPr lang="en-GB" dirty="0"/>
-              <a:t>Say: "Think about the smartphone.</a:t>
-            </a:r>
-          </a:p>
-          <a:p>
-            <a:r>
-              <a:rPr lang="en-GB" dirty="0"/>
+              <a:rPr b="1"/>
+              <a:t>Say:</a:t>
+            </a:r>
+            <a:r>
+              <a:t> "Think about the smartphone.</a:t>
+            </a:r>
+          </a:p>
+          <a:p>
+            <a:r>
               <a:t>Inside the telecommunications industry, Nokia and Motorola were making phones.</a:t>
             </a:r>
           </a:p>
           <a:p>
             <a:r>
-              <a:rPr lang="en-GB" dirty="0"/>
               <a:t>The smartphone became a camera, a map, a bank and a personal assistant.</a:t>
             </a:r>
           </a:p>
           <a:p>
             <a:r>
-              <a:rPr lang="en-GB" dirty="0"/>
               <a:t>It moved into multiple Arenas simultaneously."</a:t>
             </a:r>
           </a:p>
           <a:p>
-            <a:endParaRPr lang="en-GB" dirty="0"/>
-          </a:p>
-          <a:p>
-            <a:r>
-              <a:rPr lang="en-GB" dirty="0"/>
-              <a:t>Ask: "Who in your industry is playing a different game that you’re only just starting to notice?"</a:t>
-            </a:r>
-          </a:p>
-          <a:p>
-            <a:endParaRPr lang="en-GB" dirty="0"/>
-          </a:p>
-          <a:p>
-            <a:r>
-              <a:rPr lang="en-GB" b="1" dirty="0"/>
-              <a:t>Deepen, say: </a:t>
-            </a:r>
-            <a:r>
-              <a:rPr lang="en-GB" dirty="0"/>
-              <a:t>"Every organisation exists to do something specific for someone specific.</a:t>
-            </a:r>
-          </a:p>
-          <a:p>
-            <a:r>
-              <a:rPr lang="en-GB" dirty="0"/>
+            <a:r>
+              <a:t/>
+            </a:r>
+          </a:p>
+          <a:p>
+            <a:r>
+              <a:rPr b="1"/>
+              <a:t>Ask:</a:t>
+            </a:r>
+            <a:r>
+              <a:t> "Who in your industry is playing a different game that you’re only just starting to notice?"</a:t>
+            </a:r>
+          </a:p>
+          <a:p>
+            <a:r>
+              <a:t/>
+            </a:r>
+          </a:p>
+          <a:p>
+            <a:r>
+              <a:rPr b="1"/>
+              <a:t>Deepen, say:</a:t>
+            </a:r>
+            <a:r>
+              <a:t> "Every organisation exists to do something specific for someone specific.</a:t>
+            </a:r>
+          </a:p>
+          <a:p>
+            <a:r>
               <a:t>When it loses its sense of who it serves and what it provides, it loses the culture built around that service.</a:t>
             </a:r>
           </a:p>
           <a:p>
             <a:r>
-              <a:rPr lang="en-GB" dirty="0"/>
               <a:t>Keep the specific customer and mission visible."</a:t>
             </a:r>
           </a:p>
           <a:p>
             <a:r>
-              <a:rPr lang="en-GB" dirty="0"/>
               <a:t>(Insight: Arena · who we serve. Source: Journal, 31 January 2026 — Professional Insights: Culture)</a:t>
             </a:r>
           </a:p>
           <a:p>
-            <a:endParaRPr lang="en-GB" dirty="0"/>
-          </a:p>
-          <a:p>
-            <a:r>
-              <a:rPr lang="en-GB" b="1" dirty="0"/>
+            <a:r>
+              <a:t/>
+            </a:r>
+          </a:p>
+          <a:p>
+            <a:r>
+              <a:rPr b="1"/>
               <a:t>4. Teach the three depths on the slide, one at a time.</a:t>
             </a:r>
           </a:p>
           <a:p>
             <a:r>
-              <a:rPr lang="en-GB" dirty="0"/>
-              <a:t>Say: "Arena deliberately returns attention to the Customer End Game. To understand that end game properly, we interrogate it at three depths."</a:t>
-            </a:r>
-          </a:p>
-          <a:p>
-            <a:endParaRPr lang="en-GB" dirty="0"/>
-          </a:p>
-          <a:p>
-            <a:r>
-              <a:rPr lang="en-GB" b="1" dirty="0"/>
+              <a:rPr b="1"/>
+              <a:t>Say:</a:t>
+            </a:r>
+            <a:r>
+              <a:t> "Arena deliberately returns attention to the Customer End Game. To understand that end game properly, we interrogate it at three depths."</a:t>
+            </a:r>
+          </a:p>
+          <a:p>
+            <a:r>
+              <a:t/>
+            </a:r>
+          </a:p>
+          <a:p>
+            <a:r>
               <a:t>Functional — What are they trying to achieve?</a:t>
             </a:r>
           </a:p>
           <a:p>
             <a:r>
-              <a:rPr lang="en-GB" dirty="0"/>
-              <a:t>Ask: "What needs to get done, solved, accessed, changed or achieved?"</a:t>
-            </a:r>
-          </a:p>
-          <a:p>
-            <a:r>
-              <a:rPr lang="en-GB" dirty="0"/>
+              <a:rPr b="1"/>
+              <a:t>Ask:</a:t>
+            </a:r>
+            <a:r>
+              <a:t> "What needs to get done, solved, accessed, changed or achieved?"</a:t>
+            </a:r>
+          </a:p>
+          <a:p>
+            <a:r>
               <a:t>Example: A learner wants to develop relevant capability.</a:t>
             </a:r>
           </a:p>
           <a:p>
-            <a:endParaRPr lang="en-GB" dirty="0"/>
-          </a:p>
-          <a:p>
-            <a:r>
-              <a:rPr lang="en-GB" b="1" dirty="0"/>
+            <a:r>
+              <a:t/>
+            </a:r>
+          </a:p>
+          <a:p>
+            <a:r>
               <a:t>Experiential — What matters about how they achieve it?</a:t>
             </a:r>
           </a:p>
           <a:p>
             <a:r>
-              <a:rPr lang="en-GB" dirty="0"/>
-              <a:t>Ask: "What matters to the customer about the experience of achieving the functional outcome?"</a:t>
-            </a:r>
-          </a:p>
-          <a:p>
-            <a:r>
-              <a:rPr lang="en-GB" dirty="0"/>
+              <a:rPr b="1"/>
+              <a:t>Ask:</a:t>
+            </a:r>
+            <a:r>
+              <a:t> "What matters to the customer about the experience of achieving the functional outcome?"</a:t>
+            </a:r>
+          </a:p>
+          <a:p>
+            <a:r>
               <a:t>Example: For a working professional, developing capability may need to be flexible, accessible and compatible with employment.</a:t>
             </a:r>
           </a:p>
           <a:p>
-            <a:endParaRPr lang="en-GB" dirty="0"/>
-          </a:p>
-          <a:p>
-            <a:r>
-              <a:rPr lang="en-GB" b="1" dirty="0"/>
+            <a:r>
+              <a:t/>
+            </a:r>
+          </a:p>
+          <a:p>
+            <a:r>
               <a:t>Consequential — What does achieving it ultimately enable?</a:t>
             </a:r>
           </a:p>
           <a:p>
             <a:r>
-              <a:rPr lang="en-GB" dirty="0"/>
-              <a:t>Ask: "What becomes possible, better or different for the customer once this outcome has been achieved?"</a:t>
-            </a:r>
-          </a:p>
-          <a:p>
-            <a:r>
-              <a:rPr lang="en-GB" dirty="0"/>
+              <a:rPr b="1"/>
+              <a:t>Ask:</a:t>
+            </a:r>
+            <a:r>
+              <a:t> "What becomes possible, better or different for the customer once this outcome has been achieved?"</a:t>
+            </a:r>
+          </a:p>
+          <a:p>
+            <a:r>
               <a:t>Example: A learner develops capability → to progress professionally, access opportunity or improve earning potential.</a:t>
             </a:r>
           </a:p>
           <a:p>
-            <a:endParaRPr lang="en-GB" dirty="0"/>
-          </a:p>
-          <a:p>
-            <a:r>
-              <a:rPr lang="en-GB" b="1" dirty="0"/>
+            <a:r>
+              <a:t/>
+            </a:r>
+          </a:p>
+          <a:p>
+            <a:r>
+              <a:rPr b="1"/>
               <a:t>5. Read the three together.</a:t>
             </a:r>
           </a:p>
           <a:p>
             <a:r>
-              <a:rPr lang="en-GB" dirty="0"/>
-              <a:t>Say: "These are three depths of one interrogation. Together, they help define the Customer End Game."</a:t>
-            </a:r>
-          </a:p>
-          <a:p>
-            <a:endParaRPr lang="en-GB" dirty="0"/>
-          </a:p>
-          <a:p>
-            <a:endParaRPr lang="en-GB" dirty="0"/>
-          </a:p>
-          <a:p>
-            <a:r>
-              <a:rPr lang="en-GB" b="1" dirty="0"/>
+              <a:rPr b="1"/>
+              <a:t>Say:</a:t>
+            </a:r>
+            <a:r>
+              <a:t> "These are three depths of one interrogation. Together, they help define the Customer End Game."</a:t>
+            </a:r>
+          </a:p>
+          <a:p>
+            <a:r>
+              <a:t/>
+            </a:r>
+          </a:p>
+          <a:p>
+            <a:r>
+              <a:t/>
+            </a:r>
+          </a:p>
+          <a:p>
+            <a:r>
+              <a:rPr b="1"/>
               <a:t>EXAMPLE</a:t>
             </a:r>
           </a:p>
           <a:p>
             <a:r>
-              <a:rPr lang="en-GB" dirty="0"/>
               <a:t>Higher education.</a:t>
             </a:r>
           </a:p>
           <a:p>
             <a:r>
-              <a:rPr lang="en-GB" dirty="0"/>
               <a:t>Functional: Build relevant and credible capability.</a:t>
             </a:r>
           </a:p>
           <a:p>
             <a:r>
-              <a:rPr lang="en-GB" dirty="0"/>
               <a:t>Experiential: Do so through learning that is flexible, accessible and compatible with work.</a:t>
             </a:r>
           </a:p>
           <a:p>
             <a:r>
-              <a:rPr lang="en-GB" dirty="0"/>
               <a:t>Consequential: Translate that capability into career progression and economic opportunity.</a:t>
             </a:r>
           </a:p>
           <a:p>
-            <a:endParaRPr lang="en-GB" dirty="0"/>
-          </a:p>
-          <a:p>
-            <a:r>
-              <a:rPr lang="en-GB" dirty="0"/>
+            <a:r>
+              <a:t/>
+            </a:r>
+          </a:p>
+          <a:p>
+            <a:r>
               <a:t>The Arena can therefore be expressed as: Enabling working professionals to build credible capability, in ways compatible with their working lives, that advances career and economic opportunity.</a:t>
             </a:r>
           </a:p>
           <a:p>
-            <a:endParaRPr lang="en-GB" dirty="0"/>
-          </a:p>
-          <a:p>
-            <a:r>
-              <a:rPr lang="en-GB" dirty="0"/>
+            <a:r>
+              <a:t/>
+            </a:r>
+          </a:p>
+          <a:p>
+            <a:r>
               <a:t>The organisation now has a much richer strategic space to interrogate than “We provide postgraduate education.”</a:t>
             </a:r>
           </a:p>
           <a:p>
-            <a:endParaRPr lang="en-GB" dirty="0"/>
-          </a:p>
-          <a:p>
-            <a:r>
-              <a:rPr lang="en-GB" dirty="0"/>
-              <a:t>And for that statement to hold there must an assumption that we are making which we must monitor – that working professionals continue to value personal development</a:t>
-            </a:r>
-            <a:r>
-              <a:rPr lang="en-GB"/>
-              <a:t>. at </a:t>
-            </a:r>
-            <a:endParaRPr lang="en-GB" dirty="0"/>
-          </a:p>
-          <a:p>
-            <a:endParaRPr lang="en-GB" dirty="0"/>
-          </a:p>
-          <a:p>
-            <a:r>
-              <a:rPr lang="en-GB" b="1" dirty="0"/>
-              <a:t>6. Ask the room to apply the three depths.</a:t>
-            </a:r>
-          </a:p>
-          <a:p>
-            <a:r>
-              <a:rPr lang="en-GB" dirty="0"/>
+            <a:r>
+              <a:t/>
+            </a:r>
+          </a:p>
+          <a:p>
+            <a:r>
+              <a:rPr b="1"/>
+              <a:t>6. Name the Arena Must-Be-True.</a:t>
+            </a:r>
+          </a:p>
+          <a:p>
+            <a:r>
+              <a:rPr b="1"/>
+              <a:t>Ask:</a:t>
+            </a:r>
+            <a:r>
+              <a:t> "What must remain true about customer need, behaviour or demand for this Arena to remain strategically relevant?"</a:t>
+            </a:r>
+          </a:p>
+          <a:p>
+            <a:r>
+              <a:rPr b="1"/>
+              <a:t>Say:</a:t>
+            </a:r>
+            <a:r>
+              <a:t> "For that statement to hold, we are making an assumption we must monitor: working professionals must continue to value externally validated capability strongly enough to invest time and money in acquiring it.</a:t>
+            </a:r>
+          </a:p>
+          <a:p>
+            <a:r>
+              <a:t>That is an assumption leadership can now monitor."</a:t>
+            </a:r>
+          </a:p>
+          <a:p>
+            <a:r>
+              <a:t/>
+            </a:r>
+          </a:p>
+          <a:p>
+            <a:r>
+              <a:rPr b="1"/>
+              <a:t>7. Ask the room to apply the three depths.</a:t>
+            </a:r>
+          </a:p>
+          <a:p>
+            <a:r>
               <a:t>Ask leaders to apply the three depths to their primary customer. Online: ask them to post one line for each depth in the chat.</a:t>
             </a:r>
           </a:p>
           <a:p>
             <a:r>
-              <a:rPr lang="en-GB" dirty="0"/>
-              <a:t>Listen for: the experiential and consequential depths. Most leaders find these are rarely discussed in their strategy sessions. That is the blind spot.</a:t>
-            </a:r>
-          </a:p>
-          <a:p>
-            <a:endParaRPr lang="en-GB" dirty="0"/>
-          </a:p>
-          <a:p>
-            <a:r>
-              <a:rPr lang="en-GB" b="1" dirty="0"/>
-              <a:t>7. Land the line at the foot of the slide.</a:t>
-            </a:r>
-          </a:p>
-          <a:p>
-            <a:r>
-              <a:rPr lang="en-GB" dirty="0"/>
-              <a:t>Read it in full: "The Industry tells you who you think you are competing with. The Arena tells you who you are actually competing with."</a:t>
+              <a:rPr b="1"/>
+              <a:t>Listen for:</a:t>
+            </a:r>
+            <a:r>
+              <a:t> the experiential and consequential depths. Most leaders find these are rarely discussed in their strategy sessions. That is the blind spot.</a:t>
+            </a:r>
+          </a:p>
+          <a:p>
+            <a:r>
+              <a:t/>
+            </a:r>
+          </a:p>
+          <a:p>
+            <a:r>
+              <a:rPr b="1"/>
+              <a:t>8. Land the line at the foot of the slide.</a:t>
+            </a:r>
+          </a:p>
+          <a:p>
+            <a:r>
+              <a:rPr b="1"/>
+              <a:t>Read it in full:</a:t>
+            </a:r>
+            <a:r>
+              <a:t> "The Industry tells you who you think you are competing with. The Arena tells you who you are actually competing with."</a:t>
+            </a:r>
+          </a:p>
+          <a:p>
+            <a:r>
+              <a:t/>
+            </a:r>
+          </a:p>
+          <a:p>
+            <a:r>
+              <a:rPr b="1"/>
+              <a:t>9. Apply it to a Key Result.</a:t>
+            </a:r>
+          </a:p>
+          <a:p>
+            <a:r>
+              <a:t>Take one of the Key Results a group confirmed in Unit 3.</a:t>
+            </a:r>
+          </a:p>
+          <a:p>
+            <a:r>
+              <a:rPr b="1"/>
+              <a:t>Ask:</a:t>
+            </a:r>
+            <a:r>
+              <a:t> "Which part of the Customer End Game does this Key Result serve: the functional outcome, the experience of achieving it, or what achieving it enables?"</a:t>
+            </a:r>
+          </a:p>
+          <a:p>
+            <a:r>
+              <a:rPr b="1"/>
+              <a:t>Then ask:</a:t>
+            </a:r>
+            <a:r>
+              <a:t> "What must remain true about that functional, experiential or consequential need for this Key Result to stay relevant?"</a:t>
+            </a:r>
+          </a:p>
+          <a:p>
+            <a:r>
+              <a:t>Hold out for a condition that is either true or false, and ask which depth it rests on.</a:t>
+            </a:r>
+          </a:p>
+          <a:p>
+            <a:r>
+              <a:t>Read the two examples from the Unit 3 worked example:</a:t>
+            </a:r>
+          </a:p>
+          <a:p>
+            <a:r>
+              <a:t>- Reduce average response time to customer requests from 12 hours to 4 hours by 30 June 2027: Experiential. Clients continue to rank speed of response among their top three reasons for choosing a service partner.</a:t>
+            </a:r>
+          </a:p>
+          <a:p>
+            <a:r>
+              <a:t>- Improve operating margin from 14% to 18% by 31 December 2027: Consequential. Fast, consistent service continues to protect clients’ own operations, so they keep paying current price levels for it.</a:t>
+            </a:r>
+          </a:p>
+          <a:p>
+            <a:r>
+              <a:rPr b="1"/>
+              <a:t>Say:</a:t>
+            </a:r>
+            <a:r>
+              <a:t> "The same two Key Results run through all four checkpoints."</a:t>
+            </a:r>
+          </a:p>
+          <a:p>
+            <a:r>
+              <a:t/>
+            </a:r>
+          </a:p>
+          <a:p>
+            <a:r>
+              <a:rPr b="1"/>
+              <a:t>10. Bridge to 1.2.</a:t>
+            </a:r>
+          </a:p>
+          <a:p>
+            <a:r>
+              <a:rPr b="1"/>
+              <a:t>Say:</a:t>
+            </a:r>
+            <a:r>
+              <a:t> "Defining the right Arena is the first test. The organisation must also be able to deliver within it."</a:t>
             </a:r>
           </a:p>
         </p:txBody>
@@ -7324,287 +8261,378 @@
           <a:lstStyle/>
           <a:p>
             <a:r>
-              <a:rPr lang="en-GB" b="1" dirty="0"/>
+              <a:rPr b="1"/>
               <a:t>1.2 — BOUNDARIES (FRICTION ARCHITECTURE)</a:t>
             </a:r>
           </a:p>
           <a:p>
-            <a:endParaRPr lang="en-GB" dirty="0"/>
-          </a:p>
-          <a:p>
-            <a:r>
-              <a:rPr lang="en-GB" b="1" dirty="0"/>
+            <a:r>
+              <a:t/>
+            </a:r>
+          </a:p>
+          <a:p>
+            <a:r>
+              <a:rPr b="1"/>
               <a:t>HOW TO TEACH IT:</a:t>
             </a:r>
           </a:p>
           <a:p>
-            <a:endParaRPr lang="en-GB" dirty="0"/>
-          </a:p>
-          <a:p>
-            <a:r>
-              <a:rPr lang="en-GB" b="1" dirty="0"/>
+            <a:r>
+              <a:t/>
+            </a:r>
+          </a:p>
+          <a:p>
+            <a:r>
+              <a:rPr b="1"/>
               <a:t>1. Read the question of the checkpoint.</a:t>
             </a:r>
           </a:p>
           <a:p>
             <a:r>
-              <a:rPr lang="en-GB" dirty="0"/>
               <a:t>"What could constrain our ability to deliver within this Arena?"</a:t>
             </a:r>
           </a:p>
           <a:p>
-            <a:endParaRPr lang="en-GB" dirty="0"/>
-          </a:p>
-          <a:p>
-            <a:r>
-              <a:rPr lang="en-GB" b="1" dirty="0"/>
+            <a:r>
+              <a:t/>
+            </a:r>
+          </a:p>
+          <a:p>
+            <a:r>
+              <a:rPr b="1"/>
               <a:t>2. Give the strategic logic.</a:t>
             </a:r>
           </a:p>
           <a:p>
             <a:r>
-              <a:rPr lang="en-GB" b="1" dirty="0"/>
-              <a:t>Say: </a:t>
-            </a:r>
-            <a:r>
-              <a:rPr lang="en-GB" dirty="0"/>
-              <a:t>"Every arena has invisible walls: operational limits, regulations, or simple human resistance to change. A strategy that ignores friction is a wish."</a:t>
-            </a:r>
-          </a:p>
-          <a:p>
-            <a:r>
-              <a:rPr lang="en-GB" b="1" dirty="0"/>
-              <a:t>Say: </a:t>
-            </a:r>
-            <a:r>
-              <a:rPr lang="en-GB" dirty="0"/>
-              <a:t>"Every strategic choice operates within conditions that enable, restrict or shape what can actually be delivered. These are Boundaries."</a:t>
-            </a:r>
-          </a:p>
-          <a:p>
-            <a:r>
-              <a:rPr lang="en-GB" dirty="0"/>
+              <a:rPr b="1"/>
+              <a:t>Say:</a:t>
+            </a:r>
+            <a:r>
+              <a:t> "Every arena has invisible walls: operational limits, regulations, or simple human resistance to change. A strategy that ignores friction is a wish."</a:t>
+            </a:r>
+          </a:p>
+          <a:p>
+            <a:r>
+              <a:rPr b="1"/>
+              <a:t>Say:</a:t>
+            </a:r>
+            <a:r>
+              <a:t> "Every strategic choice operates within conditions that enable, restrict or shape what can actually be delivered. These are Boundaries."</a:t>
+            </a:r>
+          </a:p>
+          <a:p>
+            <a:r>
               <a:t>Key message: defining the right Arena is only the first test. The organisation must also be able to deliver within it.</a:t>
             </a:r>
           </a:p>
           <a:p>
-            <a:endParaRPr lang="en-GB" dirty="0"/>
-          </a:p>
-          <a:p>
-            <a:r>
-              <a:rPr lang="en-GB" b="1" dirty="0"/>
+            <a:r>
+              <a:t/>
+            </a:r>
+          </a:p>
+          <a:p>
+            <a:r>
+              <a:rPr b="1"/>
               <a:t>3. Walk the six kinds of boundary on the slide.</a:t>
             </a:r>
           </a:p>
           <a:p>
             <a:r>
-              <a:rPr lang="en-GB" dirty="0"/>
               <a:t>- Regulatory: laws, licences, standards, accreditation.</a:t>
             </a:r>
           </a:p>
           <a:p>
             <a:r>
-              <a:rPr lang="en-GB" dirty="0"/>
               <a:t>- Operational: processes, infrastructure, capacity, supply chains.</a:t>
             </a:r>
           </a:p>
           <a:p>
             <a:r>
-              <a:rPr lang="en-GB" dirty="0"/>
               <a:t>- Technological: systems, data, interoperability, technical capability.</a:t>
             </a:r>
           </a:p>
           <a:p>
             <a:r>
-              <a:rPr lang="en-GB" dirty="0"/>
               <a:t>- Structural: governance, decision rights, organisational dependencies.</a:t>
             </a:r>
           </a:p>
           <a:p>
             <a:r>
-              <a:rPr lang="en-GB" dirty="0"/>
               <a:t>- Financial: capital, affordability, economics, funding.</a:t>
             </a:r>
           </a:p>
           <a:p>
             <a:r>
-              <a:rPr lang="en-GB" dirty="0"/>
               <a:t>- Behavioural: capability, incentives, resistance, habits, adoption.</a:t>
             </a:r>
           </a:p>
           <a:p>
             <a:r>
-              <a:rPr lang="en-GB" dirty="0"/>
-              <a:t>Say: "The purpose is to find the boundaries material enough to affect the strategic outcome. A long risk register is of no use here."</a:t>
-            </a:r>
-          </a:p>
-          <a:p>
-            <a:endParaRPr lang="en-GB" dirty="0"/>
-          </a:p>
-          <a:p>
-            <a:r>
-              <a:rPr lang="en-GB" b="1" dirty="0"/>
+              <a:rPr b="1"/>
+              <a:t>Say:</a:t>
+            </a:r>
+            <a:r>
+              <a:t> "The purpose is to find the boundaries material enough to affect the strategic outcome. A long risk register is of no use here."</a:t>
+            </a:r>
+          </a:p>
+          <a:p>
+            <a:r>
+              <a:t/>
+            </a:r>
+          </a:p>
+          <a:p>
+            <a:r>
+              <a:rPr b="1"/>
               <a:t>4. Give the example.</a:t>
             </a:r>
           </a:p>
           <a:p>
-            <a:endParaRPr lang="en-GB" dirty="0"/>
-          </a:p>
-          <a:p>
-            <a:r>
-              <a:rPr lang="en-GB" b="1" dirty="0"/>
+            <a:r>
+              <a:t/>
+            </a:r>
+          </a:p>
+          <a:p>
+            <a:r>
+              <a:rPr b="1"/>
               <a:t>EXAMPLE</a:t>
             </a:r>
           </a:p>
           <a:p>
             <a:r>
-              <a:rPr lang="en-GB" dirty="0"/>
               <a:t>Higher education. The university’s Arena requires flexible capability development for working professionals. But:</a:t>
             </a:r>
           </a:p>
           <a:p>
             <a:r>
-              <a:rPr lang="en-GB" dirty="0"/>
               <a:t>- Programme approvals take 12 months.</a:t>
             </a:r>
           </a:p>
           <a:p>
             <a:r>
-              <a:rPr lang="en-GB" dirty="0"/>
               <a:t>- Faculty contracts are designed around semesters.</a:t>
             </a:r>
           </a:p>
           <a:p>
             <a:r>
-              <a:rPr lang="en-GB" dirty="0"/>
               <a:t>- Systems require fixed annual enrolment periods.</a:t>
             </a:r>
           </a:p>
           <a:p>
             <a:r>
-              <a:rPr lang="en-GB" dirty="0"/>
               <a:t>- Accreditation limits how credentials can be structured.</a:t>
             </a:r>
           </a:p>
           <a:p>
             <a:r>
-              <a:rPr lang="en-GB" dirty="0"/>
               <a:t>These conditions reveal the friction architecture surrounding the Arena. The Arena itself still stands.</a:t>
             </a:r>
           </a:p>
           <a:p>
-            <a:endParaRPr lang="en-GB" dirty="0"/>
-          </a:p>
-          <a:p>
-            <a:r>
-              <a:rPr lang="en-GB" b="1" dirty="0"/>
+            <a:r>
+              <a:t/>
+            </a:r>
+          </a:p>
+          <a:p>
+            <a:r>
+              <a:rPr b="1"/>
               <a:t>5. Ask the strategic question.</a:t>
             </a:r>
           </a:p>
           <a:p>
             <a:r>
-              <a:rPr lang="en-GB" dirty="0"/>
-              <a:t>Ask: "Which conditions could materially slow, restrict or prevent us from delivering the customer end game we have defined?"</a:t>
-            </a:r>
-          </a:p>
-          <a:p>
-            <a:endParaRPr lang="en-GB" dirty="0"/>
-          </a:p>
-          <a:p>
-            <a:r>
-              <a:rPr lang="en-GB" b="1" dirty="0"/>
-              <a:t>Deepen, say: </a:t>
-            </a:r>
-            <a:r>
-              <a:rPr lang="en-GB" dirty="0"/>
-              <a:t>"Senior teams often act on the first piece of internal data about an opportunity and miss the second-order question.</a:t>
-            </a:r>
-          </a:p>
-          <a:p>
-            <a:r>
-              <a:rPr lang="en-GB" dirty="0"/>
+              <a:rPr b="1"/>
+              <a:t>Ask:</a:t>
+            </a:r>
+            <a:r>
+              <a:t> "Which conditions could materially slow, restrict or prevent us from delivering the customer end game we have defined?"</a:t>
+            </a:r>
+          </a:p>
+          <a:p>
+            <a:r>
+              <a:t/>
+            </a:r>
+          </a:p>
+          <a:p>
+            <a:r>
+              <a:rPr b="1"/>
+              <a:t>Deepen, say:</a:t>
+            </a:r>
+            <a:r>
+              <a:t> "Senior teams often act on the first piece of internal data about an opportunity and miss the second-order question.</a:t>
+            </a:r>
+          </a:p>
+          <a:p>
+            <a:r>
               <a:t>On every major opportunity, ask the question behind the question before committing."</a:t>
             </a:r>
           </a:p>
           <a:p>
             <a:r>
-              <a:rPr lang="en-GB" dirty="0"/>
               <a:t>(Insight: The question behind the question. Source: Journal, 16 May 2026 — Professional Insights: Strategy)</a:t>
             </a:r>
           </a:p>
           <a:p>
-            <a:endParaRPr lang="en-GB" dirty="0"/>
-          </a:p>
-          <a:p>
-            <a:r>
-              <a:rPr lang="en-GB" b="1" dirty="0"/>
+            <a:r>
+              <a:t/>
+            </a:r>
+          </a:p>
+          <a:p>
+            <a:r>
+              <a:rPr b="1"/>
               <a:t>6. The three types of boundaries.</a:t>
             </a:r>
           </a:p>
           <a:p>
             <a:r>
-              <a:rPr lang="en-GB" dirty="0"/>
               <a:t>Distinguish between three kinds:</a:t>
             </a:r>
           </a:p>
           <a:p>
             <a:r>
-              <a:rPr lang="en-GB" dirty="0"/>
               <a:t>- A boundary we must accept. For example, legislation.</a:t>
             </a:r>
           </a:p>
           <a:p>
             <a:r>
-              <a:rPr lang="en-GB" dirty="0"/>
               <a:t>- A boundary we can influence. Perhaps an industry standard.</a:t>
             </a:r>
           </a:p>
           <a:p>
             <a:r>
-              <a:rPr lang="en-GB" dirty="0"/>
               <a:t>- A boundary we created ourselves. Perhaps an internal process, structure or policy.</a:t>
             </a:r>
           </a:p>
           <a:p>
-            <a:endParaRPr lang="en-GB" dirty="0"/>
-          </a:p>
-          <a:p>
-            <a:r>
-              <a:rPr lang="en-GB" dirty="0"/>
+            <a:r>
+              <a:t/>
+            </a:r>
+          </a:p>
+          <a:p>
+            <a:r>
               <a:t>Again for each boundary – leaders must ask "What is going to push back against us? </a:t>
             </a:r>
           </a:p>
           <a:p>
             <a:r>
-              <a:rPr lang="en-GB" dirty="0"/>
               <a:t>What internal or external friction could slow this Key Result down or stop it entirely?"</a:t>
             </a:r>
           </a:p>
           <a:p>
             <a:r>
-              <a:rPr lang="en-GB" dirty="0"/>
-              <a:t>Then ask: "What must remain true operationally or regulatorily for us to actually deliver this without breaking?"</a:t>
-            </a:r>
-          </a:p>
-          <a:p>
-            <a:r>
-              <a:rPr lang="en-GB" dirty="0"/>
+              <a:rPr b="1"/>
+              <a:t>Then ask:</a:t>
+            </a:r>
+            <a:r>
+              <a:t> "What must remain true operationally or regulatorily for us to actually deliver this without breaking?"</a:t>
+            </a:r>
+          </a:p>
+          <a:p>
+            <a:r>
               <a:t>Hold out for a condition that is either true or false.</a:t>
             </a:r>
           </a:p>
           <a:p>
-            <a:endParaRPr lang="en-GB" dirty="0"/>
-          </a:p>
-          <a:p>
-            <a:r>
-              <a:rPr lang="en-GB" dirty="0"/>
-              <a:t>Ask: "Which of your boundaries did your own organisation create?"</a:t>
-            </a:r>
-          </a:p>
-          <a:p>
-            <a:r>
-              <a:rPr lang="en-GB" dirty="0"/>
+            <a:r>
+              <a:t/>
+            </a:r>
+          </a:p>
+          <a:p>
+            <a:r>
+              <a:rPr b="1"/>
+              <a:t>Ask:</a:t>
+            </a:r>
+            <a:r>
+              <a:t> "Which of your boundaries did your own organisation create?"</a:t>
+            </a:r>
+          </a:p>
+          <a:p>
+            <a:r>
               <a:t>Stay here. The self-created boundary generates particularly useful executive discussion.</a:t>
+            </a:r>
+          </a:p>
+          <a:p>
+            <a:r>
+              <a:t/>
+            </a:r>
+          </a:p>
+          <a:p>
+            <a:r>
+              <a:rPr b="1"/>
+              <a:t>7. Name the Boundary Must-Be-True.</a:t>
+            </a:r>
+          </a:p>
+          <a:p>
+            <a:r>
+              <a:rPr b="1"/>
+              <a:t>Ask:</a:t>
+            </a:r>
+            <a:r>
+              <a:t> "What must remain true operationally, structurally or regulatorily for this strategic direction to be deliverable?"</a:t>
+            </a:r>
+          </a:p>
+          <a:p>
+            <a:r>
+              <a:rPr b="1"/>
+              <a:t>Say:</a:t>
+            </a:r>
+            <a:r>
+              <a:t> "In the university example: we must be able to approve and deploy new learning products within the timeframe demanded by the market. Now the boundary is connected directly to strategic viability."</a:t>
+            </a:r>
+          </a:p>
+          <a:p>
+            <a:r>
+              <a:t/>
+            </a:r>
+          </a:p>
+          <a:p>
+            <a:r>
+              <a:rPr b="1"/>
+              <a:t>8. Apply it to a Key Result.</a:t>
+            </a:r>
+          </a:p>
+          <a:p>
+            <a:r>
+              <a:rPr b="1"/>
+              <a:t>Say:</a:t>
+            </a:r>
+            <a:r>
+              <a:t> "If your Key Result relies on a new tech stack, then 'Our infrastructure must handle 10x load' is your Must-Be-True."</a:t>
+            </a:r>
+          </a:p>
+          <a:p>
+            <a:r>
+              <a:t>Read the two examples from the Unit 3 worked example:</a:t>
+            </a:r>
+          </a:p>
+          <a:p>
+            <a:r>
+              <a:t>- Reduce average response time to customer requests from 12 hours to 4 hours by 30 June 2027: Handovers between Commercial, Operations and Customer Service are completed inside four hours.</a:t>
+            </a:r>
+          </a:p>
+          <a:p>
+            <a:r>
+              <a:t>- Improve operating margin from 14% to 18% by 31 December 2027: Salary, input and regulatory costs stay within the planning range.</a:t>
+            </a:r>
+          </a:p>
+          <a:p>
+            <a:r>
+              <a:t/>
+            </a:r>
+          </a:p>
+          <a:p>
+            <a:r>
+              <a:rPr b="1"/>
+              <a:t>9. Bridge to 1.3.</a:t>
+            </a:r>
+          </a:p>
+          <a:p>
+            <a:r>
+              <a:rPr b="1"/>
+              <a:t>Say:</a:t>
+            </a:r>
+            <a:r>
+              <a:t> "Once we know what could constrain delivery, we ask who else the customer can turn to."</a:t>
             </a:r>
           </a:p>
         </p:txBody>
@@ -7690,329 +8718,399 @@
           <a:lstStyle/>
           <a:p>
             <a:r>
-              <a:rPr lang="en-GB" b="1" dirty="0"/>
+              <a:rPr b="1"/>
               <a:t>1.3 — COMPETITION (THE TRUE LANDSCAPE)</a:t>
             </a:r>
           </a:p>
           <a:p>
-            <a:endParaRPr lang="en-GB" dirty="0"/>
-          </a:p>
-          <a:p>
-            <a:r>
-              <a:rPr lang="en-GB" b="1" dirty="0"/>
+            <a:r>
+              <a:t/>
+            </a:r>
+          </a:p>
+          <a:p>
+            <a:r>
+              <a:rPr b="1"/>
               <a:t>HOW TO TEACH IT:</a:t>
             </a:r>
           </a:p>
           <a:p>
-            <a:endParaRPr lang="en-GB" dirty="0"/>
-          </a:p>
-          <a:p>
-            <a:r>
-              <a:rPr lang="en-GB" b="1" dirty="0"/>
+            <a:r>
+              <a:t/>
+            </a:r>
+          </a:p>
+          <a:p>
+            <a:r>
+              <a:rPr b="1"/>
               <a:t>1. Read the question of the checkpoint.</a:t>
             </a:r>
           </a:p>
           <a:p>
             <a:r>
-              <a:rPr lang="en-GB" dirty="0"/>
               <a:t>"Who or what else can satisfy the same Customer End Game?"</a:t>
             </a:r>
           </a:p>
           <a:p>
-            <a:endParaRPr lang="en-GB" dirty="0"/>
-          </a:p>
-          <a:p>
-            <a:r>
-              <a:rPr lang="en-GB" b="1" dirty="0"/>
+            <a:r>
+              <a:t/>
+            </a:r>
+          </a:p>
+          <a:p>
+            <a:r>
+              <a:rPr b="1"/>
               <a:t>2. Give the strategic logic.</a:t>
             </a:r>
           </a:p>
           <a:p>
             <a:r>
-              <a:rPr lang="en-GB" b="1" dirty="0"/>
-              <a:t>Say: </a:t>
-            </a:r>
-            <a:r>
-              <a:rPr lang="en-GB" dirty="0"/>
-              <a:t>"Once you define the Arena by the customer’s need, your ‘competitors’ change.</a:t>
-            </a:r>
-          </a:p>
-          <a:p>
-            <a:r>
-              <a:rPr lang="en-GB" dirty="0"/>
+              <a:rPr b="1"/>
+              <a:t>Say:</a:t>
+            </a:r>
+            <a:r>
+              <a:t> "Once you define the Arena by the customer’s need, your ‘competitors’ change.</a:t>
+            </a:r>
+          </a:p>
+          <a:p>
+            <a:r>
               <a:t>You are fighting anyone who solves that same problem in a different way, peers included."</a:t>
             </a:r>
           </a:p>
           <a:p>
-            <a:endParaRPr lang="en-GB" dirty="0"/>
-          </a:p>
-          <a:p>
-            <a:r>
-              <a:rPr lang="en-GB" b="1" dirty="0"/>
-              <a:t>Say: </a:t>
-            </a:r>
-            <a:r>
-              <a:rPr lang="en-GB" dirty="0"/>
-              <a:t>"Competition follows Arena deliberately.</a:t>
-            </a:r>
-          </a:p>
-          <a:p>
-            <a:r>
-              <a:rPr lang="en-GB" dirty="0"/>
+            <a:r>
+              <a:t/>
+            </a:r>
+          </a:p>
+          <a:p>
+            <a:r>
+              <a:rPr b="1"/>
+              <a:t>Say:</a:t>
+            </a:r>
+            <a:r>
+              <a:t> "Competition follows Arena deliberately.</a:t>
+            </a:r>
+          </a:p>
+          <a:p>
+            <a:r>
               <a:t>If leaders define Arena through their industry, they will probably identify competitors through their industry.</a:t>
             </a:r>
           </a:p>
           <a:p>
             <a:r>
-              <a:rPr lang="en-GB" dirty="0"/>
               <a:t>If Arena is defined around the Customer End Game, the competitive field can look very different."</a:t>
             </a:r>
           </a:p>
           <a:p>
-            <a:endParaRPr lang="en-GB" dirty="0"/>
-          </a:p>
-          <a:p>
-            <a:r>
-              <a:rPr lang="en-GB" b="1" dirty="0"/>
+            <a:r>
+              <a:t/>
+            </a:r>
+          </a:p>
+          <a:p>
+            <a:r>
+              <a:rPr b="1"/>
               <a:t>3. Read the two questions on the slide, left then right.</a:t>
             </a:r>
           </a:p>
           <a:p>
             <a:r>
-              <a:rPr lang="en-GB" dirty="0"/>
               <a:t>- Who sells something similar to us?</a:t>
             </a:r>
           </a:p>
           <a:p>
-            <a:pPr marL="0" marR="0" lvl="0" indent="0" algn="l" defTabSz="914400" rtl="0" eaLnBrk="1" fontAlgn="auto" latinLnBrk="0" hangingPunct="1">
-              <a:lnSpc>
-                <a:spcPct val="100000"/>
-              </a:lnSpc>
-              <a:spcBef>
-                <a:spcPts val="0"/>
-              </a:spcBef>
-              <a:spcAft>
-                <a:spcPts val="0"/>
-              </a:spcAft>
-              <a:buClrTx/>
-              <a:buSzTx/>
-              <a:buFontTx/>
-              <a:buNone/>
-              <a:tabLst/>
-              <a:defRPr/>
-            </a:pPr>
-            <a:r>
-              <a:rPr lang="en-GB" dirty="0"/>
+            <a:r>
               <a:t>- What alternatives does the customer have for achieving the end game? </a:t>
             </a:r>
-            <a:endParaRPr lang="en-US" sz="1200" dirty="0"/>
-          </a:p>
-          <a:p>
-            <a:endParaRPr lang="en-GB" dirty="0"/>
-          </a:p>
-          <a:p>
-            <a:r>
-              <a:rPr lang="en-GB" dirty="0"/>
+          </a:p>
+          <a:p>
+            <a:r>
+              <a:t/>
+            </a:r>
+          </a:p>
+          <a:p>
+            <a:r>
               <a:t>The critical distinction is between these two questions.</a:t>
             </a:r>
           </a:p>
           <a:p>
-            <a:endParaRPr lang="en-GB" dirty="0"/>
-          </a:p>
-          <a:p>
-            <a:r>
-              <a:rPr lang="en-GB" b="1" dirty="0"/>
-              <a:t>Say: </a:t>
-            </a:r>
-            <a:r>
-              <a:rPr lang="en-GB" dirty="0"/>
-              <a:t>"The competitor does not have to look like us, sell the same product, use the same business model or belong to the same industry.</a:t>
-            </a:r>
-          </a:p>
-          <a:p>
-            <a:r>
-              <a:rPr lang="en-GB" dirty="0"/>
+            <a:r>
+              <a:t/>
+            </a:r>
+          </a:p>
+          <a:p>
+            <a:r>
+              <a:rPr b="1"/>
+              <a:t>Say:</a:t>
+            </a:r>
+            <a:r>
+              <a:t> "The competitor does not have to look like us, sell the same product, use the same business model or belong to the same industry.</a:t>
+            </a:r>
+          </a:p>
+          <a:p>
+            <a:r>
               <a:t>It only needs to offer the customer a credible alternative route to the outcome."</a:t>
             </a:r>
           </a:p>
           <a:p>
-            <a:endParaRPr lang="en-GB" dirty="0"/>
-          </a:p>
-          <a:p>
-            <a:r>
-              <a:rPr lang="en-GB" b="1" dirty="0"/>
+            <a:r>
+              <a:t/>
+            </a:r>
+          </a:p>
+          <a:p>
+            <a:r>
+              <a:rPr b="1"/>
               <a:t>4. Give the example.</a:t>
             </a:r>
           </a:p>
           <a:p>
-            <a:endParaRPr lang="en-GB" dirty="0"/>
-          </a:p>
-          <a:p>
-            <a:r>
-              <a:rPr lang="en-GB" b="1" dirty="0"/>
+            <a:r>
+              <a:t/>
+            </a:r>
+          </a:p>
+          <a:p>
+            <a:r>
+              <a:rPr b="1"/>
               <a:t>EXAMPLE</a:t>
             </a:r>
           </a:p>
           <a:p>
             <a:r>
-              <a:rPr lang="en-GB" dirty="0"/>
               <a:t>Higher education. If we say “We provide postgraduate qualifications”, we will probably compare ourselves with other universities.</a:t>
             </a:r>
           </a:p>
           <a:p>
             <a:r>
-              <a:rPr lang="en-GB" dirty="0"/>
               <a:t>The Arena has now been defined more deeply: build credible capability, flexibly, to advance career opportunity. Who or what else can enable that? The landscape may include:</a:t>
             </a:r>
           </a:p>
           <a:p>
             <a:r>
-              <a:rPr lang="en-GB" dirty="0"/>
               <a:t>- Professional bodies.</a:t>
             </a:r>
           </a:p>
           <a:p>
             <a:r>
-              <a:rPr lang="en-GB" dirty="0"/>
               <a:t>- Corporate academies.</a:t>
             </a:r>
           </a:p>
           <a:p>
             <a:r>
-              <a:rPr lang="en-GB" dirty="0"/>
               <a:t>- Industry certifications.</a:t>
             </a:r>
           </a:p>
           <a:p>
             <a:r>
-              <a:rPr lang="en-GB" dirty="0"/>
               <a:t>- Specialist training providers.</a:t>
             </a:r>
           </a:p>
           <a:p>
             <a:r>
-              <a:rPr lang="en-GB" dirty="0"/>
               <a:t>- Digital learning platforms.</a:t>
             </a:r>
           </a:p>
           <a:p>
             <a:r>
-              <a:rPr lang="en-GB" dirty="0"/>
               <a:t>- Employer-led development.</a:t>
             </a:r>
           </a:p>
           <a:p>
             <a:r>
-              <a:rPr lang="en-GB" dirty="0"/>
               <a:t>- Alternative credential providers.</a:t>
             </a:r>
           </a:p>
           <a:p>
-            <a:endParaRPr lang="en-GB" dirty="0"/>
-          </a:p>
-          <a:p>
-            <a:r>
-              <a:rPr lang="en-GB" dirty="0"/>
+            <a:r>
+              <a:t/>
+            </a:r>
+          </a:p>
+          <a:p>
+            <a:r>
               <a:t>And potentially emerging models we have not historically classified as higher education.</a:t>
             </a:r>
           </a:p>
           <a:p>
-            <a:endParaRPr lang="en-GB" dirty="0"/>
-          </a:p>
-          <a:p>
-            <a:r>
-              <a:rPr lang="en-GB" b="1" dirty="0"/>
+            <a:r>
+              <a:t/>
+            </a:r>
+          </a:p>
+          <a:p>
+            <a:r>
+              <a:rPr b="1"/>
               <a:t>5. Widen the list of alternatives, using the right-hand card.</a:t>
             </a:r>
           </a:p>
           <a:p>
             <a:r>
-              <a:rPr lang="en-GB" b="1" dirty="0"/>
-              <a:t>Say</a:t>
-            </a:r>
-            <a:r>
-              <a:rPr lang="en-GB" dirty="0"/>
-              <a:t>: "Competition can also be: do it internally, do it themselves, use technology, postpone it, choose a completely different solution, or do nothing."</a:t>
-            </a:r>
-          </a:p>
-          <a:p>
-            <a:endParaRPr lang="en-GB" b="1" dirty="0"/>
-          </a:p>
-          <a:p>
-            <a:r>
-              <a:rPr lang="en-GB" b="1" dirty="0"/>
-              <a:t>Ask: </a:t>
-            </a:r>
-            <a:r>
-              <a:rPr lang="en-GB" dirty="0"/>
-              <a:t>"Who else solves your customer’s problem, including those outside your industry?"</a:t>
-            </a:r>
-          </a:p>
-          <a:p>
-            <a:r>
-              <a:rPr lang="en-GB" dirty="0"/>
-              <a:t>Listen for: competition defined as industry rivals only. Push for every alternative route the customer has to the outcome, including doing nothing.</a:t>
-            </a:r>
-          </a:p>
-          <a:p>
-            <a:endParaRPr lang="en-GB" dirty="0"/>
-          </a:p>
-          <a:p>
-            <a:r>
-              <a:rPr lang="en-GB" b="1" dirty="0"/>
-              <a:t>Deepen, say: </a:t>
-            </a:r>
-            <a:r>
-              <a:rPr lang="en-GB" dirty="0"/>
-              <a:t>"The most effective competitive strategies target the specific assumptions on which a competitor’s position rests.</a:t>
-            </a:r>
-          </a:p>
-          <a:p>
-            <a:r>
-              <a:rPr lang="en-GB" dirty="0"/>
+              <a:rPr b="1"/>
+              <a:t>Say:</a:t>
+            </a:r>
+            <a:r>
+              <a:t> "Competition can also be: do it internally, do it themselves, use technology, postpone it, choose a completely different solution, or do nothing."</a:t>
+            </a:r>
+          </a:p>
+          <a:p>
+            <a:r>
+              <a:t/>
+            </a:r>
+          </a:p>
+          <a:p>
+            <a:r>
+              <a:rPr b="1"/>
+              <a:t>Ask:</a:t>
+            </a:r>
+            <a:r>
+              <a:t> "Who else solves your customer’s problem, including those outside your industry?"</a:t>
+            </a:r>
+          </a:p>
+          <a:p>
+            <a:r>
+              <a:rPr b="1"/>
+              <a:t>Listen for:</a:t>
+            </a:r>
+            <a:r>
+              <a:t> competition defined as industry rivals only. Push for every alternative route the customer has to the outcome, including doing nothing.</a:t>
+            </a:r>
+          </a:p>
+          <a:p>
+            <a:r>
+              <a:t/>
+            </a:r>
+          </a:p>
+          <a:p>
+            <a:r>
+              <a:rPr b="1"/>
+              <a:t>Deepen, say:</a:t>
+            </a:r>
+            <a:r>
+              <a:t> "The most effective competitive strategies target the specific assumptions on which a competitor’s position rests.</a:t>
+            </a:r>
+          </a:p>
+          <a:p>
+            <a:r>
               <a:t>Identify the foundational assumption, and the position built on it becomes unstable."</a:t>
             </a:r>
           </a:p>
           <a:p>
             <a:r>
-              <a:rPr lang="en-GB" dirty="0"/>
               <a:t>(Insight: Competition. Source: Journal, 6 February 2026 — Professional Insights: Strategy)</a:t>
             </a:r>
           </a:p>
           <a:p>
-            <a:endParaRPr lang="en-GB" dirty="0"/>
-          </a:p>
-          <a:p>
-            <a:r>
-              <a:rPr lang="en-GB" dirty="0"/>
-              <a:t>Say: Again leaders must ask what must be true for who else is meeting the customer needs for our strategy to hold.</a:t>
-            </a:r>
-          </a:p>
-          <a:p>
-            <a:r>
-              <a:rPr lang="en-GB" dirty="0"/>
+            <a:r>
+              <a:t/>
+            </a:r>
+          </a:p>
+          <a:p>
+            <a:r>
+              <a:rPr b="1"/>
+              <a:t>Say:</a:t>
+            </a:r>
+            <a:r>
+              <a:t> Again leaders must ask what must be true for who else is meeting the customer needs for our strategy to hold.</a:t>
+            </a:r>
+          </a:p>
+          <a:p>
+            <a:r>
               <a:t>Example, from higher education: Employers and learners must continue to perceive our credential and learning experience as sufficiently valuable to justify its additional time and cost relative to alternative capability pathways.</a:t>
             </a:r>
           </a:p>
           <a:p>
             <a:r>
-              <a:rPr lang="en-GB" dirty="0"/>
-              <a:t>Say: "That assumption can be monitored. If it begins to weaken, the strategy receives an early-warning signal."</a:t>
-            </a:r>
-          </a:p>
-          <a:p>
-            <a:endParaRPr lang="en-GB" dirty="0"/>
-          </a:p>
-          <a:p>
-            <a:r>
-              <a:rPr lang="en-GB" b="1" dirty="0"/>
+              <a:rPr b="1"/>
+              <a:t>Say:</a:t>
+            </a:r>
+            <a:r>
+              <a:t> "That assumption can be monitored. If it begins to weaken, the strategy receives an early-warning signal."</a:t>
+            </a:r>
+          </a:p>
+          <a:p>
+            <a:r>
+              <a:t/>
+            </a:r>
+          </a:p>
+          <a:p>
+            <a:r>
+              <a:rPr b="1"/>
               <a:t>6. Land the point.</a:t>
             </a:r>
           </a:p>
           <a:p>
             <a:r>
-              <a:rPr lang="en-GB" b="1" dirty="0"/>
-              <a:t>Say: "The customer is choosing between routes to an outcome."</a:t>
+              <a:rPr b="1"/>
+              <a:t>Say:</a:t>
+            </a:r>
+            <a:r>
+              <a:t> "The customer is choosing between routes to an outcome."</a:t>
+            </a:r>
+          </a:p>
+          <a:p>
+            <a:r>
+              <a:rPr b="1"/>
+              <a:t>Add:</a:t>
+            </a:r>
+            <a:r>
+              <a:t> "This is where the Industry Illusion becomes strategically important. Something excluded because 'that's not our industry' may become highly relevant once the Arena has been correctly defined."</a:t>
+            </a:r>
+          </a:p>
+          <a:p>
+            <a:r>
+              <a:t/>
+            </a:r>
+          </a:p>
+          <a:p>
+            <a:r>
+              <a:rPr b="1"/>
+              <a:t>7. Apply it to a Key Result.</a:t>
+            </a:r>
+          </a:p>
+          <a:p>
+            <a:r>
+              <a:rPr b="1"/>
+              <a:t>Ask:</a:t>
+            </a:r>
+            <a:r>
+              <a:t> "Who else is solving this problem, even if they look nothing like us? Who is the alternative the customer might choose?"</a:t>
+            </a:r>
+          </a:p>
+          <a:p>
+            <a:r>
+              <a:rPr b="1"/>
+              <a:t>Then ask:</a:t>
+            </a:r>
+            <a:r>
+              <a:t> "What must remain true about our specific advantage compared to these other options?"</a:t>
+            </a:r>
+          </a:p>
+          <a:p>
+            <a:r>
+              <a:t>Read the two examples from the Unit 3 worked example:</a:t>
+            </a:r>
+          </a:p>
+          <a:p>
+            <a:r>
+              <a:t>- Reduce average response time to customer requests from 12 hours to 4 hours by 30 June 2027: A four-hour response remains faster than rival firms and clients’ in-house options provide.</a:t>
+            </a:r>
+          </a:p>
+          <a:p>
+            <a:r>
+              <a:t>- Improve operating margin from 14% to 18% by 31 December 2027: Competitors and lower-cost alternatives force no price reduction in the core client segments.</a:t>
+            </a:r>
+          </a:p>
+          <a:p>
+            <a:r>
+              <a:t/>
+            </a:r>
+          </a:p>
+          <a:p>
+            <a:r>
+              <a:rPr b="1"/>
+              <a:t>8. Bridge to 1.4.</a:t>
+            </a:r>
+          </a:p>
+          <a:p>
+            <a:r>
+              <a:rPr b="1"/>
+              <a:t>Say:</a:t>
+            </a:r>
+            <a:r>
+              <a:t> "Given those alternatives, why should the customer choose us?"</a:t>
             </a:r>
           </a:p>
         </p:txBody>
@@ -11733,8 +12831,8 @@
         </p:blipFill>
         <p:spPr>
           <a:xfrm>
-            <a:off x="13855" y="1749479"/>
-            <a:ext cx="12192000" cy="5212430"/>
+            <a:off x="288995" y="1847088"/>
+            <a:ext cx="11613704" cy="4965192"/>
           </a:xfrm>
           <a:prstGeom prst="rect">
             <a:avLst/>
@@ -16071,7 +17169,7 @@
                 <a:ea typeface="Cambria" pitchFamily="34" charset="-122"/>
                 <a:cs typeface="Cambria" pitchFamily="34" charset="-120"/>
               </a:rPr>
-              <a:t>5.2b · Stress Test Your Key Results: the Four Steps</a:t>
+              <a:t>5.2 · Stress Test Your Key Results: the Four Steps</a:t>
             </a:r>
             <a:endParaRPr lang="en-US" sz="3600" dirty="0"/>
           </a:p>
@@ -16583,12 +17681,12 @@
 </file>
 
 <file path=ppt/slides/slide29.xml><?xml version="1.0" encoding="utf-8"?>
-<p:sld xmlns:a="http://schemas.openxmlformats.org/drawingml/2006/main" xmlns:r="http://schemas.openxmlformats.org/officeDocument/2006/relationships" xmlns:p="http://schemas.openxmlformats.org/presentationml/2006/main">
-  <p:cSld name="Slide 35">
+<p:sld xmlns:a="http://schemas.openxmlformats.org/drawingml/2006/main" xmlns:p="http://schemas.openxmlformats.org/presentationml/2006/main" xmlns:r="http://schemas.openxmlformats.org/officeDocument/2006/relationships">
+  <p:cSld>
     <p:bg>
       <p:bgPr>
         <a:solidFill>
-          <a:srgbClr val="0F3B1C"/>
+          <a:srgbClr val="FFFFFF"/>
         </a:solidFill>
         <a:effectLst/>
       </p:bgPr>
@@ -16599,34 +17697,66 @@
         <p:cNvGrpSpPr/>
         <p:nvPr/>
       </p:nvGrpSpPr>
-      <p:grpSpPr>
-        <a:xfrm>
-          <a:off x="0" y="0"/>
-          <a:ext cx="0" cy="0"/>
-          <a:chOff x="0" y="0"/>
-          <a:chExt cx="0" cy="0"/>
-        </a:xfrm>
-      </p:grpSpPr>
-      <p:sp>
-        <p:nvSpPr>
-          <p:cNvPr id="2" name="Shape 0"/>
+      <p:grpSpPr/>
+      <p:sp>
+        <p:nvSpPr>
+          <p:cNvPr id="2" name="Text 0"/>
+          <p:cNvSpPr txBox="1"/>
+          <p:nvPr/>
+        </p:nvSpPr>
+        <p:spPr>
+          <a:xfrm>
+            <a:off x="548640" y="411480"/>
+            <a:ext cx="11064240" cy="868680"/>
+          </a:xfrm>
+          <a:prstGeom prst="rect">
+            <a:avLst/>
+          </a:prstGeom>
+          <a:noFill/>
+          <a:ln/>
+        </p:spPr>
+        <p:txBody>
+          <a:bodyPr wrap="square" lIns="0" tIns="0" rIns="0" bIns="0" rtlCol="0" anchor="ctr"/>
+          <a:lstStyle/>
+          <a:p>
+            <a:pPr marL="0" indent="0">
+              <a:buNone/>
+            </a:pPr>
+            <a:r>
+              <a:rPr lang="en-US" sz="3200" b="1" dirty="0">
+                <a:solidFill>
+                  <a:srgbClr val="1A5C2C"/>
+                </a:solidFill>
+                <a:latin typeface="Cambria" pitchFamily="34" charset="0"/>
+                <a:ea typeface="Cambria" pitchFamily="34" charset="-122"/>
+                <a:cs typeface="Cambria" pitchFamily="34" charset="-120"/>
+              </a:rPr>
+              <a:t>5.3 · Verification Ownership and Executive Blind Spots</a:t>
+            </a:r>
+            <a:endParaRPr lang="en-US" sz="3600" dirty="0"/>
+          </a:p>
+        </p:txBody>
+      </p:sp>
+      <p:sp>
+        <p:nvSpPr>
+          <p:cNvPr id="3" name="Shape 1"/>
           <p:cNvSpPr/>
           <p:nvPr/>
         </p:nvSpPr>
         <p:spPr>
           <a:xfrm>
-            <a:off x="731520" y="1097280"/>
-            <a:ext cx="1097280" cy="1097280"/>
+            <a:off x="548640" y="1685925"/>
+            <a:ext cx="640080" cy="640080"/>
           </a:xfrm>
           <a:prstGeom prst="ellipse">
             <a:avLst/>
           </a:prstGeom>
           <a:solidFill>
-            <a:srgbClr val="C6A24C"/>
+            <a:srgbClr val="1A5C2C"/>
           </a:solidFill>
           <a:ln w="12700">
             <a:solidFill>
-              <a:srgbClr val="C6A24C"/>
+              <a:srgbClr val="1A5C2C"/>
             </a:solidFill>
             <a:prstDash val="solid"/>
           </a:ln>
@@ -16641,7 +17771,113 @@
       </p:sp>
       <p:pic>
         <p:nvPicPr>
-          <p:cNvPr id="3" name="Image 0" descr="preencoded.png"/>
+          <p:cNvPr id="4" name="Image 0" descr="preencoded.png"/>
+          <p:cNvPicPr>
+            <a:picLocks noChangeAspect="1"/>
+          </p:cNvPicPr>
+          <p:nvPr/>
+        </p:nvPicPr>
+        <p:blipFill>
+          <a:blip r:embed="rId2"/>
+          <a:stretch>
+            <a:fillRect/>
+          </a:stretch>
+        </p:blipFill>
+        <p:spPr>
+          <a:xfrm>
+            <a:off x="708660" y="1845945"/>
+            <a:ext cx="320040" cy="320040"/>
+          </a:xfrm>
+          <a:prstGeom prst="rect">
+            <a:avLst/>
+          </a:prstGeom>
+        </p:spPr>
+      </p:pic>
+      <p:sp>
+        <p:nvSpPr>
+          <p:cNvPr id="5" name="Text 2"/>
+          <p:cNvSpPr txBox="1"/>
+          <p:nvPr/>
+        </p:nvSpPr>
+        <p:spPr>
+          <a:xfrm>
+            <a:off x="1508760" y="1508760"/>
+            <a:ext cx="10131552" cy="994410"/>
+          </a:xfrm>
+          <a:prstGeom prst="rect">
+            <a:avLst/>
+          </a:prstGeom>
+          <a:noFill/>
+          <a:ln/>
+        </p:spPr>
+        <p:txBody>
+          <a:bodyPr wrap="square" lIns="0" tIns="0" rIns="0" bIns="0" rtlCol="0" anchor="ctr"/>
+          <a:lstStyle/>
+          <a:p>
+            <a:pPr marL="0" indent="0">
+              <a:buNone/>
+            </a:pPr>
+            <a:r>
+              <a:rPr lang="en-US" sz="2400" b="1" dirty="0">
+                <a:solidFill>
+                  <a:srgbClr val="1A5C2C"/>
+                </a:solidFill>
+                <a:latin typeface="Cambria" pitchFamily="34" charset="0"/>
+                <a:ea typeface="Cambria" pitchFamily="34" charset="-122"/>
+                <a:cs typeface="Cambria" pitchFamily="34" charset="-120"/>
+              </a:rPr>
+              <a:t>1 · Read your conditions  </a:t>
+            </a:r>
+            <a:r>
+              <a:rPr lang="en-US" sz="2400" dirty="0">
+                <a:solidFill>
+                  <a:srgbClr val="1F2A22"/>
+                </a:solidFill>
+                <a:latin typeface="Calibri" pitchFamily="34" charset="0"/>
+                <a:ea typeface="Calibri" pitchFamily="34" charset="-122"/>
+                <a:cs typeface="Calibri" pitchFamily="34" charset="-120"/>
+              </a:rPr>
+              <a:t>the Must-Be-True conditions your group named in 5.2</a:t>
+            </a:r>
+            <a:endParaRPr lang="en-US" sz="2400" dirty="0"/>
+          </a:p>
+        </p:txBody>
+      </p:sp>
+      <p:sp>
+        <p:nvSpPr>
+          <p:cNvPr id="6" name="Shape 3"/>
+          <p:cNvSpPr/>
+          <p:nvPr/>
+        </p:nvSpPr>
+        <p:spPr>
+          <a:xfrm>
+            <a:off x="548640" y="2680335"/>
+            <a:ext cx="640080" cy="640080"/>
+          </a:xfrm>
+          <a:prstGeom prst="ellipse">
+            <a:avLst/>
+          </a:prstGeom>
+          <a:solidFill>
+            <a:srgbClr val="1A5C2C"/>
+          </a:solidFill>
+          <a:ln w="12700">
+            <a:solidFill>
+              <a:srgbClr val="1A5C2C"/>
+            </a:solidFill>
+            <a:prstDash val="solid"/>
+          </a:ln>
+        </p:spPr>
+        <p:txBody>
+          <a:bodyPr/>
+          <a:lstStyle/>
+          <a:p>
+            <a:endParaRPr lang="en-ZA"/>
+          </a:p>
+        </p:txBody>
+      </p:sp>
+      <p:pic>
+        <p:nvPicPr>
+          <p:cNvPr id="7" name="Image 1" descr="preencoded.png"/>
           <p:cNvPicPr>
             <a:picLocks noChangeAspect="1"/>
           </p:cNvPicPr>
@@ -16655,8 +17891,8 @@
         </p:blipFill>
         <p:spPr>
           <a:xfrm>
-            <a:off x="1005840" y="1371600"/>
-            <a:ext cx="548640" cy="548640"/>
+            <a:off x="708660" y="2840355"/>
+            <a:ext cx="320040" cy="320040"/>
           </a:xfrm>
           <a:prstGeom prst="rect">
             <a:avLst/>
@@ -16665,14 +17901,14 @@
       </p:pic>
       <p:sp>
         <p:nvSpPr>
-          <p:cNvPr id="4" name="Text 1"/>
+          <p:cNvPr id="8" name="Text 4"/>
           <p:cNvSpPr txBox="1"/>
           <p:nvPr/>
         </p:nvSpPr>
         <p:spPr>
           <a:xfrm>
-            <a:off x="2103120" y="1280160"/>
-            <a:ext cx="9144000" cy="640080"/>
+            <a:off x="1508760" y="2503170"/>
+            <a:ext cx="10131552" cy="994410"/>
           </a:xfrm>
           <a:prstGeom prst="rect">
             <a:avLst/>
@@ -16681,37 +17917,104 @@
           <a:ln/>
         </p:spPr>
         <p:txBody>
-          <a:bodyPr wrap="square" lIns="0" tIns="0" rIns="0" bIns="0" rtlCol="0" anchor="t"/>
+          <a:bodyPr wrap="square" lIns="0" tIns="0" rIns="0" bIns="0" rtlCol="0" anchor="ctr"/>
           <a:lstStyle/>
           <a:p>
             <a:pPr marL="0" indent="0">
               <a:buNone/>
             </a:pPr>
             <a:r>
-              <a:rPr lang="en-US" sz="2600" b="1" dirty="0">
+              <a:rPr lang="en-US" sz="2400" b="1" dirty="0">
                 <a:solidFill>
-                  <a:srgbClr val="C6A24C"/>
+                  <a:srgbClr val="1A5C2C"/>
+                </a:solidFill>
+                <a:latin typeface="Cambria" pitchFamily="34" charset="0"/>
+                <a:ea typeface="Cambria" pitchFamily="34" charset="-122"/>
+                <a:cs typeface="Cambria" pitchFamily="34" charset="-120"/>
+              </a:rPr>
+              <a:t>2 · Verification ownership  </a:t>
+            </a:r>
+            <a:r>
+              <a:rPr lang="en-US" sz="2400" dirty="0">
+                <a:solidFill>
+                  <a:srgbClr val="1F2A22"/>
                 </a:solidFill>
                 <a:latin typeface="Calibri" pitchFamily="34" charset="0"/>
                 <a:ea typeface="Calibri" pitchFamily="34" charset="-122"/>
                 <a:cs typeface="Calibri" pitchFamily="34" charset="-120"/>
               </a:rPr>
-              <a:t>Unit Summary · The closing question</a:t>
-            </a:r>
-            <a:endParaRPr lang="en-US" sz="2600" dirty="0"/>
-          </a:p>
-        </p:txBody>
-      </p:sp>
-      <p:sp>
-        <p:nvSpPr>
-          <p:cNvPr id="5" name="Text 2"/>
+              <a:t>the executive, the evidence and the date of the first check</a:t>
+            </a:r>
+            <a:endParaRPr lang="en-US" sz="2400" dirty="0"/>
+          </a:p>
+        </p:txBody>
+      </p:sp>
+      <p:sp>
+        <p:nvSpPr>
+          <p:cNvPr id="9" name="Shape 5"/>
+          <p:cNvSpPr/>
+          <p:nvPr/>
+        </p:nvSpPr>
+        <p:spPr>
+          <a:xfrm>
+            <a:off x="548640" y="3674745"/>
+            <a:ext cx="640080" cy="640080"/>
+          </a:xfrm>
+          <a:prstGeom prst="ellipse">
+            <a:avLst/>
+          </a:prstGeom>
+          <a:solidFill>
+            <a:srgbClr val="1A5C2C"/>
+          </a:solidFill>
+          <a:ln w="12700">
+            <a:solidFill>
+              <a:srgbClr val="1A5C2C"/>
+            </a:solidFill>
+            <a:prstDash val="solid"/>
+          </a:ln>
+        </p:spPr>
+        <p:txBody>
+          <a:bodyPr/>
+          <a:lstStyle/>
+          <a:p>
+            <a:endParaRPr lang="en-ZA"/>
+          </a:p>
+        </p:txBody>
+      </p:sp>
+      <p:pic>
+        <p:nvPicPr>
+          <p:cNvPr id="10" name="Image 2" descr="preencoded.png"/>
+          <p:cNvPicPr>
+            <a:picLocks noChangeAspect="1"/>
+          </p:cNvPicPr>
+          <p:nvPr/>
+        </p:nvPicPr>
+        <p:blipFill>
+          <a:blip r:embed="rId4"/>
+          <a:stretch>
+            <a:fillRect/>
+          </a:stretch>
+        </p:blipFill>
+        <p:spPr>
+          <a:xfrm>
+            <a:off x="708660" y="3834765"/>
+            <a:ext cx="320040" cy="320040"/>
+          </a:xfrm>
+          <a:prstGeom prst="rect">
+            <a:avLst/>
+          </a:prstGeom>
+        </p:spPr>
+      </p:pic>
+      <p:sp>
+        <p:nvSpPr>
+          <p:cNvPr id="11" name="Text 6"/>
           <p:cNvSpPr txBox="1"/>
           <p:nvPr/>
         </p:nvSpPr>
         <p:spPr>
           <a:xfrm>
-            <a:off x="2103120" y="2103120"/>
-            <a:ext cx="9418320" cy="3474720"/>
+            <a:off x="1508760" y="3497580"/>
+            <a:ext cx="10131552" cy="994410"/>
           </a:xfrm>
           <a:prstGeom prst="rect">
             <a:avLst/>
@@ -16720,24 +18023,214 @@
           <a:ln/>
         </p:spPr>
         <p:txBody>
-          <a:bodyPr wrap="square" lIns="0" tIns="0" rIns="0" bIns="0" rtlCol="0" anchor="t"/>
+          <a:bodyPr wrap="square" lIns="0" tIns="0" rIns="0" bIns="0" rtlCol="0" anchor="ctr"/>
           <a:lstStyle/>
           <a:p>
             <a:pPr marL="0" indent="0">
               <a:buNone/>
             </a:pPr>
             <a:r>
-              <a:rPr lang="en-US" sz="3600" i="1" dirty="0">
+              <a:rPr lang="en-US" sz="2400" b="1" dirty="0">
                 <a:solidFill>
-                  <a:srgbClr val="FFFFFF"/>
+                  <a:srgbClr val="1A5C2C"/>
                 </a:solidFill>
                 <a:latin typeface="Cambria" pitchFamily="34" charset="0"/>
                 <a:ea typeface="Cambria" pitchFamily="34" charset="-122"/>
                 <a:cs typeface="Cambria" pitchFamily="34" charset="-120"/>
               </a:rPr>
-              <a:t>What is the one MBT condition your team is most likely to avoid naming? Why? And what will you do about it before the next strategic review?</a:t>
-            </a:r>
-            <a:endParaRPr lang="en-US" sz="3600" dirty="0"/>
+              <a:t>3 · Executive blind spot  </a:t>
+            </a:r>
+            <a:r>
+              <a:rPr lang="en-US" sz="2400" dirty="0">
+                <a:solidFill>
+                  <a:srgbClr val="1F2A22"/>
+                </a:solidFill>
+                <a:latin typeface="Calibri" pitchFamily="34" charset="0"/>
+                <a:ea typeface="Calibri" pitchFamily="34" charset="-122"/>
+                <a:cs typeface="Calibri" pitchFamily="34" charset="-120"/>
+              </a:rPr>
+              <a:t>the checkpoint your team is most likely to overlook, and the risk</a:t>
+            </a:r>
+            <a:endParaRPr lang="en-US" sz="2400" dirty="0"/>
+          </a:p>
+        </p:txBody>
+      </p:sp>
+      <p:sp>
+        <p:nvSpPr>
+          <p:cNvPr id="12" name="Shape 7"/>
+          <p:cNvSpPr/>
+          <p:nvPr/>
+        </p:nvSpPr>
+        <p:spPr>
+          <a:xfrm>
+            <a:off x="548640" y="4669155"/>
+            <a:ext cx="640080" cy="640080"/>
+          </a:xfrm>
+          <a:prstGeom prst="ellipse">
+            <a:avLst/>
+          </a:prstGeom>
+          <a:solidFill>
+            <a:srgbClr val="1A5C2C"/>
+          </a:solidFill>
+          <a:ln w="12700">
+            <a:solidFill>
+              <a:srgbClr val="1A5C2C"/>
+            </a:solidFill>
+            <a:prstDash val="solid"/>
+          </a:ln>
+        </p:spPr>
+        <p:txBody>
+          <a:bodyPr/>
+          <a:lstStyle/>
+          <a:p>
+            <a:endParaRPr lang="en-ZA"/>
+          </a:p>
+        </p:txBody>
+      </p:sp>
+      <p:pic>
+        <p:nvPicPr>
+          <p:cNvPr id="13" name="Image 3" descr="preencoded.png"/>
+          <p:cNvPicPr>
+            <a:picLocks noChangeAspect="1"/>
+          </p:cNvPicPr>
+          <p:nvPr/>
+        </p:nvPicPr>
+        <p:blipFill>
+          <a:blip r:embed="rId5"/>
+          <a:stretch>
+            <a:fillRect/>
+          </a:stretch>
+        </p:blipFill>
+        <p:spPr>
+          <a:xfrm>
+            <a:off x="708660" y="4829175"/>
+            <a:ext cx="320040" cy="320040"/>
+          </a:xfrm>
+          <a:prstGeom prst="rect">
+            <a:avLst/>
+          </a:prstGeom>
+        </p:spPr>
+      </p:pic>
+      <p:sp>
+        <p:nvSpPr>
+          <p:cNvPr id="14" name="Text 8"/>
+          <p:cNvSpPr txBox="1"/>
+          <p:nvPr/>
+        </p:nvSpPr>
+        <p:spPr>
+          <a:xfrm>
+            <a:off x="1508760" y="4491990"/>
+            <a:ext cx="10131552" cy="994410"/>
+          </a:xfrm>
+          <a:prstGeom prst="rect">
+            <a:avLst/>
+          </a:prstGeom>
+          <a:noFill/>
+          <a:ln/>
+        </p:spPr>
+        <p:txBody>
+          <a:bodyPr wrap="square" lIns="0" tIns="0" rIns="0" bIns="0" rtlCol="0" anchor="ctr"/>
+          <a:lstStyle/>
+          <a:p>
+            <a:pPr marL="0" indent="0">
+              <a:buNone/>
+            </a:pPr>
+            <a:r>
+              <a:rPr lang="en-US" sz="2400" b="1" dirty="0">
+                <a:solidFill>
+                  <a:srgbClr val="1A5C2C"/>
+                </a:solidFill>
+                <a:latin typeface="Cambria" pitchFamily="34" charset="0"/>
+                <a:ea typeface="Cambria" pitchFamily="34" charset="-122"/>
+                <a:cs typeface="Cambria" pitchFamily="34" charset="-120"/>
+              </a:rPr>
+              <a:t>4 · Agree  </a:t>
+            </a:r>
+            <a:r>
+              <a:rPr lang="en-US" sz="2400" dirty="0">
+                <a:solidFill>
+                  <a:srgbClr val="1F2A22"/>
+                </a:solidFill>
+                <a:latin typeface="Calibri" pitchFamily="34" charset="0"/>
+                <a:ea typeface="Calibri" pitchFamily="34" charset="-122"/>
+                <a:cs typeface="Calibri" pitchFamily="34" charset="-120"/>
+              </a:rPr>
+              <a:t>every member agrees; the work feeds boxes 4A to 4F</a:t>
+            </a:r>
+            <a:endParaRPr lang="en-US" sz="2400" dirty="0"/>
+          </a:p>
+        </p:txBody>
+      </p:sp>
+      <p:sp>
+        <p:nvSpPr>
+          <p:cNvPr id="15" name="Shape 9"/>
+          <p:cNvSpPr/>
+          <p:nvPr/>
+        </p:nvSpPr>
+        <p:spPr>
+          <a:xfrm>
+            <a:off x="548640" y="5623560"/>
+            <a:ext cx="11091672" cy="777240"/>
+          </a:xfrm>
+          <a:prstGeom prst="roundRect">
+            <a:avLst>
+              <a:gd name="adj" fmla="val 11765"/>
+            </a:avLst>
+          </a:prstGeom>
+          <a:solidFill>
+            <a:srgbClr val="0F3B1C"/>
+          </a:solidFill>
+          <a:ln w="12700">
+            <a:solidFill>
+              <a:srgbClr val="0F3B1C"/>
+            </a:solidFill>
+            <a:prstDash val="solid"/>
+          </a:ln>
+        </p:spPr>
+        <p:txBody>
+          <a:bodyPr/>
+          <a:lstStyle/>
+          <a:p>
+            <a:endParaRPr lang="en-ZA"/>
+          </a:p>
+        </p:txBody>
+      </p:sp>
+      <p:sp>
+        <p:nvSpPr>
+          <p:cNvPr id="16" name="Text 10"/>
+          <p:cNvSpPr txBox="1"/>
+          <p:nvPr/>
+        </p:nvSpPr>
+        <p:spPr>
+          <a:xfrm>
+            <a:off x="822960" y="5623560"/>
+            <a:ext cx="10607040" cy="777240"/>
+          </a:xfrm>
+          <a:prstGeom prst="rect">
+            <a:avLst/>
+          </a:prstGeom>
+          <a:noFill/>
+          <a:ln/>
+        </p:spPr>
+        <p:txBody>
+          <a:bodyPr wrap="square" lIns="0" tIns="0" rIns="0" bIns="0" rtlCol="0" anchor="ctr"/>
+          <a:lstStyle/>
+          <a:p>
+            <a:pPr marL="0" indent="0">
+              <a:buNone/>
+            </a:pPr>
+            <a:r>
+              <a:rPr lang="en-US" sz="2400" i="1" dirty="0">
+                <a:solidFill>
+                  <a:srgbClr val="FFFFFF"/>
+                </a:solidFill>
+                <a:latin typeface="Calibri" pitchFamily="34" charset="0"/>
+                <a:ea typeface="Calibri" pitchFamily="34" charset="-122"/>
+                <a:cs typeface="Calibri" pitchFamily="34" charset="-120"/>
+              </a:rPr>
+              <a:t>Every condition has an executive who checks it.</a:t>
+            </a:r>
+            <a:endParaRPr lang="en-US" sz="2400" dirty="0"/>
           </a:p>
         </p:txBody>
       </p:sp>
@@ -17352,12 +18845,12 @@
 </file>
 
 <file path=ppt/slides/slide30.xml><?xml version="1.0" encoding="utf-8"?>
-<p:sld xmlns:a="http://schemas.openxmlformats.org/drawingml/2006/main" xmlns:p="http://schemas.openxmlformats.org/presentationml/2006/main" xmlns:r="http://schemas.openxmlformats.org/officeDocument/2006/relationships">
-  <p:cSld>
+<p:sld xmlns:a="http://schemas.openxmlformats.org/drawingml/2006/main" xmlns:r="http://schemas.openxmlformats.org/officeDocument/2006/relationships" xmlns:p="http://schemas.openxmlformats.org/presentationml/2006/main">
+  <p:cSld name="Slide 35">
     <p:bg>
       <p:bgPr>
         <a:solidFill>
-          <a:srgbClr val="FFFFFF"/>
+          <a:srgbClr val="0F3B1C"/>
         </a:solidFill>
         <a:effectLst/>
       </p:bgPr>
@@ -17368,66 +18861,34 @@
         <p:cNvGrpSpPr/>
         <p:nvPr/>
       </p:nvGrpSpPr>
-      <p:grpSpPr/>
-      <p:sp>
-        <p:nvSpPr>
-          <p:cNvPr id="2" name="Text 0"/>
-          <p:cNvSpPr txBox="1"/>
-          <p:nvPr/>
-        </p:nvSpPr>
-        <p:spPr>
-          <a:xfrm>
-            <a:off x="548640" y="411480"/>
-            <a:ext cx="11064240" cy="868680"/>
-          </a:xfrm>
-          <a:prstGeom prst="rect">
-            <a:avLst/>
-          </a:prstGeom>
-          <a:noFill/>
-          <a:ln/>
-        </p:spPr>
-        <p:txBody>
-          <a:bodyPr wrap="square" lIns="0" tIns="0" rIns="0" bIns="0" rtlCol="0" anchor="ctr"/>
-          <a:lstStyle/>
-          <a:p>
-            <a:pPr marL="0" indent="0">
-              <a:buNone/>
-            </a:pPr>
-            <a:r>
-              <a:rPr lang="en-US" sz="3600" b="1" dirty="0">
-                <a:solidFill>
-                  <a:srgbClr val="1A5C2C"/>
-                </a:solidFill>
-                <a:latin typeface="Cambria" pitchFamily="34" charset="0"/>
-                <a:ea typeface="Cambria" pitchFamily="34" charset="-122"/>
-                <a:cs typeface="Cambria" pitchFamily="34" charset="-120"/>
-              </a:rPr>
-              <a:t>5.3 · Verification Ownership and Executive Blind Spots</a:t>
-            </a:r>
-            <a:endParaRPr lang="en-US" sz="3600" dirty="0"/>
-          </a:p>
-        </p:txBody>
-      </p:sp>
-      <p:sp>
-        <p:nvSpPr>
-          <p:cNvPr id="3" name="Shape 1"/>
+      <p:grpSpPr>
+        <a:xfrm>
+          <a:off x="0" y="0"/>
+          <a:ext cx="0" cy="0"/>
+          <a:chOff x="0" y="0"/>
+          <a:chExt cx="0" cy="0"/>
+        </a:xfrm>
+      </p:grpSpPr>
+      <p:sp>
+        <p:nvSpPr>
+          <p:cNvPr id="2" name="Shape 0"/>
           <p:cNvSpPr/>
           <p:nvPr/>
         </p:nvSpPr>
         <p:spPr>
           <a:xfrm>
-            <a:off x="548640" y="1685925"/>
-            <a:ext cx="640080" cy="640080"/>
+            <a:off x="731520" y="1097280"/>
+            <a:ext cx="1097280" cy="1097280"/>
           </a:xfrm>
           <a:prstGeom prst="ellipse">
             <a:avLst/>
           </a:prstGeom>
           <a:solidFill>
-            <a:srgbClr val="1A5C2C"/>
+            <a:srgbClr val="C6A24C"/>
           </a:solidFill>
           <a:ln w="12700">
             <a:solidFill>
-              <a:srgbClr val="1A5C2C"/>
+              <a:srgbClr val="C6A24C"/>
             </a:solidFill>
             <a:prstDash val="solid"/>
           </a:ln>
@@ -17442,113 +18903,7 @@
       </p:sp>
       <p:pic>
         <p:nvPicPr>
-          <p:cNvPr id="4" name="Image 0" descr="preencoded.png"/>
-          <p:cNvPicPr>
-            <a:picLocks noChangeAspect="1"/>
-          </p:cNvPicPr>
-          <p:nvPr/>
-        </p:nvPicPr>
-        <p:blipFill>
-          <a:blip r:embed="rId2"/>
-          <a:stretch>
-            <a:fillRect/>
-          </a:stretch>
-        </p:blipFill>
-        <p:spPr>
-          <a:xfrm>
-            <a:off x="708660" y="1845945"/>
-            <a:ext cx="320040" cy="320040"/>
-          </a:xfrm>
-          <a:prstGeom prst="rect">
-            <a:avLst/>
-          </a:prstGeom>
-        </p:spPr>
-      </p:pic>
-      <p:sp>
-        <p:nvSpPr>
-          <p:cNvPr id="5" name="Text 2"/>
-          <p:cNvSpPr txBox="1"/>
-          <p:nvPr/>
-        </p:nvSpPr>
-        <p:spPr>
-          <a:xfrm>
-            <a:off x="1508760" y="1508760"/>
-            <a:ext cx="10131552" cy="994410"/>
-          </a:xfrm>
-          <a:prstGeom prst="rect">
-            <a:avLst/>
-          </a:prstGeom>
-          <a:noFill/>
-          <a:ln/>
-        </p:spPr>
-        <p:txBody>
-          <a:bodyPr wrap="square" lIns="0" tIns="0" rIns="0" bIns="0" rtlCol="0" anchor="ctr"/>
-          <a:lstStyle/>
-          <a:p>
-            <a:pPr marL="0" indent="0">
-              <a:buNone/>
-            </a:pPr>
-            <a:r>
-              <a:rPr lang="en-US" sz="2400" b="1" dirty="0">
-                <a:solidFill>
-                  <a:srgbClr val="1A5C2C"/>
-                </a:solidFill>
-                <a:latin typeface="Cambria" pitchFamily="34" charset="0"/>
-                <a:ea typeface="Cambria" pitchFamily="34" charset="-122"/>
-                <a:cs typeface="Cambria" pitchFamily="34" charset="-120"/>
-              </a:rPr>
-              <a:t>1 · Read your conditions  </a:t>
-            </a:r>
-            <a:r>
-              <a:rPr lang="en-US" sz="2400" dirty="0">
-                <a:solidFill>
-                  <a:srgbClr val="1F2A22"/>
-                </a:solidFill>
-                <a:latin typeface="Calibri" pitchFamily="34" charset="0"/>
-                <a:ea typeface="Calibri" pitchFamily="34" charset="-122"/>
-                <a:cs typeface="Calibri" pitchFamily="34" charset="-120"/>
-              </a:rPr>
-              <a:t>the Must-Be-True conditions your group named in 5.2</a:t>
-            </a:r>
-            <a:endParaRPr lang="en-US" sz="2400" dirty="0"/>
-          </a:p>
-        </p:txBody>
-      </p:sp>
-      <p:sp>
-        <p:nvSpPr>
-          <p:cNvPr id="6" name="Shape 3"/>
-          <p:cNvSpPr/>
-          <p:nvPr/>
-        </p:nvSpPr>
-        <p:spPr>
-          <a:xfrm>
-            <a:off x="548640" y="2680335"/>
-            <a:ext cx="640080" cy="640080"/>
-          </a:xfrm>
-          <a:prstGeom prst="ellipse">
-            <a:avLst/>
-          </a:prstGeom>
-          <a:solidFill>
-            <a:srgbClr val="1A5C2C"/>
-          </a:solidFill>
-          <a:ln w="12700">
-            <a:solidFill>
-              <a:srgbClr val="1A5C2C"/>
-            </a:solidFill>
-            <a:prstDash val="solid"/>
-          </a:ln>
-        </p:spPr>
-        <p:txBody>
-          <a:bodyPr/>
-          <a:lstStyle/>
-          <a:p>
-            <a:endParaRPr lang="en-ZA"/>
-          </a:p>
-        </p:txBody>
-      </p:sp>
-      <p:pic>
-        <p:nvPicPr>
-          <p:cNvPr id="7" name="Image 1" descr="preencoded.png"/>
+          <p:cNvPr id="3" name="Image 0" descr="preencoded.png"/>
           <p:cNvPicPr>
             <a:picLocks noChangeAspect="1"/>
           </p:cNvPicPr>
@@ -17562,8 +18917,8 @@
         </p:blipFill>
         <p:spPr>
           <a:xfrm>
-            <a:off x="708660" y="2840355"/>
-            <a:ext cx="320040" cy="320040"/>
+            <a:off x="1005840" y="1371600"/>
+            <a:ext cx="548640" cy="548640"/>
           </a:xfrm>
           <a:prstGeom prst="rect">
             <a:avLst/>
@@ -17572,14 +18927,14 @@
       </p:pic>
       <p:sp>
         <p:nvSpPr>
-          <p:cNvPr id="8" name="Text 4"/>
+          <p:cNvPr id="4" name="Text 1"/>
           <p:cNvSpPr txBox="1"/>
           <p:nvPr/>
         </p:nvSpPr>
         <p:spPr>
           <a:xfrm>
-            <a:off x="1508760" y="2503170"/>
-            <a:ext cx="10131552" cy="994410"/>
+            <a:off x="2103120" y="1280160"/>
+            <a:ext cx="9144000" cy="640080"/>
           </a:xfrm>
           <a:prstGeom prst="rect">
             <a:avLst/>
@@ -17588,320 +18943,63 @@
           <a:ln/>
         </p:spPr>
         <p:txBody>
-          <a:bodyPr wrap="square" lIns="0" tIns="0" rIns="0" bIns="0" rtlCol="0" anchor="ctr"/>
+          <a:bodyPr wrap="square" lIns="0" tIns="0" rIns="0" bIns="0" rtlCol="0" anchor="t"/>
           <a:lstStyle/>
           <a:p>
             <a:pPr marL="0" indent="0">
               <a:buNone/>
             </a:pPr>
             <a:r>
-              <a:rPr lang="en-US" sz="2400" b="1" dirty="0">
+              <a:rPr lang="en-US" sz="2600" b="1" dirty="0">
                 <a:solidFill>
-                  <a:srgbClr val="1A5C2C"/>
+                  <a:srgbClr val="C6A24C"/>
+                </a:solidFill>
+                <a:latin typeface="Calibri" pitchFamily="34" charset="0"/>
+                <a:ea typeface="Calibri" pitchFamily="34" charset="-122"/>
+                <a:cs typeface="Calibri" pitchFamily="34" charset="-120"/>
+              </a:rPr>
+              <a:t>Unit Summary · The closing question</a:t>
+            </a:r>
+            <a:endParaRPr lang="en-US" sz="2600" dirty="0"/>
+          </a:p>
+        </p:txBody>
+      </p:sp>
+      <p:sp>
+        <p:nvSpPr>
+          <p:cNvPr id="5" name="Text 2"/>
+          <p:cNvSpPr txBox="1"/>
+          <p:nvPr/>
+        </p:nvSpPr>
+        <p:spPr>
+          <a:xfrm>
+            <a:off x="2103120" y="2103120"/>
+            <a:ext cx="9418320" cy="3474720"/>
+          </a:xfrm>
+          <a:prstGeom prst="rect">
+            <a:avLst/>
+          </a:prstGeom>
+          <a:noFill/>
+          <a:ln/>
+        </p:spPr>
+        <p:txBody>
+          <a:bodyPr wrap="square" lIns="0" tIns="0" rIns="0" bIns="0" rtlCol="0" anchor="t"/>
+          <a:lstStyle/>
+          <a:p>
+            <a:pPr marL="0" indent="0">
+              <a:buNone/>
+            </a:pPr>
+            <a:r>
+              <a:rPr lang="en-US" sz="3600" i="1" dirty="0">
+                <a:solidFill>
+                  <a:srgbClr val="FFFFFF"/>
                 </a:solidFill>
                 <a:latin typeface="Cambria" pitchFamily="34" charset="0"/>
                 <a:ea typeface="Cambria" pitchFamily="34" charset="-122"/>
                 <a:cs typeface="Cambria" pitchFamily="34" charset="-120"/>
               </a:rPr>
-              <a:t>2 · Verification ownership  </a:t>
-            </a:r>
-            <a:r>
-              <a:rPr lang="en-US" sz="2400" dirty="0">
-                <a:solidFill>
-                  <a:srgbClr val="1F2A22"/>
-                </a:solidFill>
-                <a:latin typeface="Calibri" pitchFamily="34" charset="0"/>
-                <a:ea typeface="Calibri" pitchFamily="34" charset="-122"/>
-                <a:cs typeface="Calibri" pitchFamily="34" charset="-120"/>
-              </a:rPr>
-              <a:t>the executive, the evidence and the date of the first check</a:t>
-            </a:r>
-            <a:endParaRPr lang="en-US" sz="2400" dirty="0"/>
-          </a:p>
-        </p:txBody>
-      </p:sp>
-      <p:sp>
-        <p:nvSpPr>
-          <p:cNvPr id="9" name="Shape 5"/>
-          <p:cNvSpPr/>
-          <p:nvPr/>
-        </p:nvSpPr>
-        <p:spPr>
-          <a:xfrm>
-            <a:off x="548640" y="3674745"/>
-            <a:ext cx="640080" cy="640080"/>
-          </a:xfrm>
-          <a:prstGeom prst="ellipse">
-            <a:avLst/>
-          </a:prstGeom>
-          <a:solidFill>
-            <a:srgbClr val="1A5C2C"/>
-          </a:solidFill>
-          <a:ln w="12700">
-            <a:solidFill>
-              <a:srgbClr val="1A5C2C"/>
-            </a:solidFill>
-            <a:prstDash val="solid"/>
-          </a:ln>
-        </p:spPr>
-        <p:txBody>
-          <a:bodyPr/>
-          <a:lstStyle/>
-          <a:p>
-            <a:endParaRPr lang="en-ZA"/>
-          </a:p>
-        </p:txBody>
-      </p:sp>
-      <p:pic>
-        <p:nvPicPr>
-          <p:cNvPr id="10" name="Image 2" descr="preencoded.png"/>
-          <p:cNvPicPr>
-            <a:picLocks noChangeAspect="1"/>
-          </p:cNvPicPr>
-          <p:nvPr/>
-        </p:nvPicPr>
-        <p:blipFill>
-          <a:blip r:embed="rId4"/>
-          <a:stretch>
-            <a:fillRect/>
-          </a:stretch>
-        </p:blipFill>
-        <p:spPr>
-          <a:xfrm>
-            <a:off x="708660" y="3834765"/>
-            <a:ext cx="320040" cy="320040"/>
-          </a:xfrm>
-          <a:prstGeom prst="rect">
-            <a:avLst/>
-          </a:prstGeom>
-        </p:spPr>
-      </p:pic>
-      <p:sp>
-        <p:nvSpPr>
-          <p:cNvPr id="11" name="Text 6"/>
-          <p:cNvSpPr txBox="1"/>
-          <p:nvPr/>
-        </p:nvSpPr>
-        <p:spPr>
-          <a:xfrm>
-            <a:off x="1508760" y="3497580"/>
-            <a:ext cx="10131552" cy="994410"/>
-          </a:xfrm>
-          <a:prstGeom prst="rect">
-            <a:avLst/>
-          </a:prstGeom>
-          <a:noFill/>
-          <a:ln/>
-        </p:spPr>
-        <p:txBody>
-          <a:bodyPr wrap="square" lIns="0" tIns="0" rIns="0" bIns="0" rtlCol="0" anchor="ctr"/>
-          <a:lstStyle/>
-          <a:p>
-            <a:pPr marL="0" indent="0">
-              <a:buNone/>
-            </a:pPr>
-            <a:r>
-              <a:rPr lang="en-US" sz="2400" b="1" dirty="0">
-                <a:solidFill>
-                  <a:srgbClr val="1A5C2C"/>
-                </a:solidFill>
-                <a:latin typeface="Cambria" pitchFamily="34" charset="0"/>
-                <a:ea typeface="Cambria" pitchFamily="34" charset="-122"/>
-                <a:cs typeface="Cambria" pitchFamily="34" charset="-120"/>
-              </a:rPr>
-              <a:t>3 · Executive blind spot  </a:t>
-            </a:r>
-            <a:r>
-              <a:rPr lang="en-US" sz="2400" dirty="0">
-                <a:solidFill>
-                  <a:srgbClr val="1F2A22"/>
-                </a:solidFill>
-                <a:latin typeface="Calibri" pitchFamily="34" charset="0"/>
-                <a:ea typeface="Calibri" pitchFamily="34" charset="-122"/>
-                <a:cs typeface="Calibri" pitchFamily="34" charset="-120"/>
-              </a:rPr>
-              <a:t>the checkpoint your team is most likely to overlook, and the risk</a:t>
-            </a:r>
-            <a:endParaRPr lang="en-US" sz="2400" dirty="0"/>
-          </a:p>
-        </p:txBody>
-      </p:sp>
-      <p:sp>
-        <p:nvSpPr>
-          <p:cNvPr id="12" name="Shape 7"/>
-          <p:cNvSpPr/>
-          <p:nvPr/>
-        </p:nvSpPr>
-        <p:spPr>
-          <a:xfrm>
-            <a:off x="548640" y="4669155"/>
-            <a:ext cx="640080" cy="640080"/>
-          </a:xfrm>
-          <a:prstGeom prst="ellipse">
-            <a:avLst/>
-          </a:prstGeom>
-          <a:solidFill>
-            <a:srgbClr val="1A5C2C"/>
-          </a:solidFill>
-          <a:ln w="12700">
-            <a:solidFill>
-              <a:srgbClr val="1A5C2C"/>
-            </a:solidFill>
-            <a:prstDash val="solid"/>
-          </a:ln>
-        </p:spPr>
-        <p:txBody>
-          <a:bodyPr/>
-          <a:lstStyle/>
-          <a:p>
-            <a:endParaRPr lang="en-ZA"/>
-          </a:p>
-        </p:txBody>
-      </p:sp>
-      <p:pic>
-        <p:nvPicPr>
-          <p:cNvPr id="13" name="Image 3" descr="preencoded.png"/>
-          <p:cNvPicPr>
-            <a:picLocks noChangeAspect="1"/>
-          </p:cNvPicPr>
-          <p:nvPr/>
-        </p:nvPicPr>
-        <p:blipFill>
-          <a:blip r:embed="rId5"/>
-          <a:stretch>
-            <a:fillRect/>
-          </a:stretch>
-        </p:blipFill>
-        <p:spPr>
-          <a:xfrm>
-            <a:off x="708660" y="4829175"/>
-            <a:ext cx="320040" cy="320040"/>
-          </a:xfrm>
-          <a:prstGeom prst="rect">
-            <a:avLst/>
-          </a:prstGeom>
-        </p:spPr>
-      </p:pic>
-      <p:sp>
-        <p:nvSpPr>
-          <p:cNvPr id="14" name="Text 8"/>
-          <p:cNvSpPr txBox="1"/>
-          <p:nvPr/>
-        </p:nvSpPr>
-        <p:spPr>
-          <a:xfrm>
-            <a:off x="1508760" y="4491990"/>
-            <a:ext cx="10131552" cy="994410"/>
-          </a:xfrm>
-          <a:prstGeom prst="rect">
-            <a:avLst/>
-          </a:prstGeom>
-          <a:noFill/>
-          <a:ln/>
-        </p:spPr>
-        <p:txBody>
-          <a:bodyPr wrap="square" lIns="0" tIns="0" rIns="0" bIns="0" rtlCol="0" anchor="ctr"/>
-          <a:lstStyle/>
-          <a:p>
-            <a:pPr marL="0" indent="0">
-              <a:buNone/>
-            </a:pPr>
-            <a:r>
-              <a:rPr lang="en-US" sz="2400" b="1" dirty="0">
-                <a:solidFill>
-                  <a:srgbClr val="1A5C2C"/>
-                </a:solidFill>
-                <a:latin typeface="Cambria" pitchFamily="34" charset="0"/>
-                <a:ea typeface="Cambria" pitchFamily="34" charset="-122"/>
-                <a:cs typeface="Cambria" pitchFamily="34" charset="-120"/>
-              </a:rPr>
-              <a:t>4 · Agree  </a:t>
-            </a:r>
-            <a:r>
-              <a:rPr lang="en-US" sz="2400" dirty="0">
-                <a:solidFill>
-                  <a:srgbClr val="1F2A22"/>
-                </a:solidFill>
-                <a:latin typeface="Calibri" pitchFamily="34" charset="0"/>
-                <a:ea typeface="Calibri" pitchFamily="34" charset="-122"/>
-                <a:cs typeface="Calibri" pitchFamily="34" charset="-120"/>
-              </a:rPr>
-              <a:t>every member agrees; the work feeds boxes 4A to 4F</a:t>
-            </a:r>
-            <a:endParaRPr lang="en-US" sz="2400" dirty="0"/>
-          </a:p>
-        </p:txBody>
-      </p:sp>
-      <p:sp>
-        <p:nvSpPr>
-          <p:cNvPr id="15" name="Shape 9"/>
-          <p:cNvSpPr/>
-          <p:nvPr/>
-        </p:nvSpPr>
-        <p:spPr>
-          <a:xfrm>
-            <a:off x="548640" y="5623560"/>
-            <a:ext cx="11091672" cy="777240"/>
-          </a:xfrm>
-          <a:prstGeom prst="roundRect">
-            <a:avLst>
-              <a:gd name="adj" fmla="val 11765"/>
-            </a:avLst>
-          </a:prstGeom>
-          <a:solidFill>
-            <a:srgbClr val="0F3B1C"/>
-          </a:solidFill>
-          <a:ln w="12700">
-            <a:solidFill>
-              <a:srgbClr val="0F3B1C"/>
-            </a:solidFill>
-            <a:prstDash val="solid"/>
-          </a:ln>
-        </p:spPr>
-        <p:txBody>
-          <a:bodyPr/>
-          <a:lstStyle/>
-          <a:p>
-            <a:endParaRPr lang="en-ZA"/>
-          </a:p>
-        </p:txBody>
-      </p:sp>
-      <p:sp>
-        <p:nvSpPr>
-          <p:cNvPr id="16" name="Text 10"/>
-          <p:cNvSpPr txBox="1"/>
-          <p:nvPr/>
-        </p:nvSpPr>
-        <p:spPr>
-          <a:xfrm>
-            <a:off x="822960" y="5623560"/>
-            <a:ext cx="10607040" cy="777240"/>
-          </a:xfrm>
-          <a:prstGeom prst="rect">
-            <a:avLst/>
-          </a:prstGeom>
-          <a:noFill/>
-          <a:ln/>
-        </p:spPr>
-        <p:txBody>
-          <a:bodyPr wrap="square" lIns="0" tIns="0" rIns="0" bIns="0" rtlCol="0" anchor="ctr"/>
-          <a:lstStyle/>
-          <a:p>
-            <a:pPr marL="0" indent="0">
-              <a:buNone/>
-            </a:pPr>
-            <a:r>
-              <a:rPr lang="en-US" sz="2400" i="1" dirty="0">
-                <a:solidFill>
-                  <a:srgbClr val="FFFFFF"/>
-                </a:solidFill>
-                <a:latin typeface="Calibri" pitchFamily="34" charset="0"/>
-                <a:ea typeface="Calibri" pitchFamily="34" charset="-122"/>
-                <a:cs typeface="Calibri" pitchFamily="34" charset="-120"/>
-              </a:rPr>
-              <a:t>Every condition has an executive who checks it.</a:t>
-            </a:r>
-            <a:endParaRPr lang="en-US" sz="2400" dirty="0"/>
+              <a:t>What is the one MBT condition your team is most likely to avoid naming? Why? And what will you do about it before the next strategic review?</a:t>
+            </a:r>
+            <a:endParaRPr lang="en-US" sz="3600" dirty="0"/>
           </a:p>
         </p:txBody>
       </p:sp>
@@ -21132,8 +22230,8 @@
         </p:nvSpPr>
         <p:spPr>
           <a:xfrm>
-            <a:off x="548639" y="5372723"/>
-            <a:ext cx="11390515" cy="646331"/>
+            <a:off x="548639" y="5029200"/>
+            <a:ext cx="11390515" cy="1234440"/>
           </a:xfrm>
           <a:prstGeom prst="rect">
             <a:avLst/>

--- a/Unit decks/Unit 04 - Direction Integrity (ABCV-MBT).pptx
+++ b/Unit decks/Unit 04 - Direction Integrity (ABCV-MBT).pptx
@@ -3077,7 +3077,7 @@
           </a:p>
           <a:p>
             <a:r>
-              <a:t>- CTO · Arena. Symptom: "We delivered the system — why isn't adoption there?" Right question: "Does this solution address the functional, experiential and consequential outcome the customer is actually pursuing?"</a:t>
+              <a:t>- CTO · Value Proposition. Symptom: "We delivered the system — why isn't adoption there?" Right question: "Does this solution create value the customer recognises, and does it set us apart from the alternatives they have?"</a:t>
             </a:r>
           </a:p>
           <a:p>

--- a/Unit decks/Unit 04 - Direction Integrity (ABCV-MBT).pptx
+++ b/Unit decks/Unit 04 - Direction Integrity (ABCV-MBT).pptx
@@ -461,7 +461,7 @@
           </a:p>
           <a:p>
             <a:r>
-              <a:t>- The confirmed Must-Be-True conditions feed boxes 4A to 4D of the team’s Capstone S2R® Blueprint; verification ownership feeds 4E and the executive blind spot 4F.</a:t>
+              <a:t>- The confirmed Must-Be-True conditions feed boxes 4A to 4D of the team’s Capstone S2R® Blueprint; accountability assignment feeds 4E and the executive blind spot 4F.</a:t>
             </a:r>
           </a:p>
         </p:txBody>
@@ -3465,7 +3465,7 @@
           </a:p>
           <a:p>
             <a:r>
-              <a:t>3. 5.3: verification ownership and the executive blind spot. The group assigns each critical condition to an executive and names the checkpoint its team is most likely to overlook.</a:t>
+              <a:t>3. 5.3: accountability assignment and the executive blind spot. The group assigns each critical condition to an executive and names the checkpoint its team is most likely to overlook.</a:t>
             </a:r>
           </a:p>
           <a:p>
@@ -5212,6 +5212,11 @@
               <a:t>The confirmed conditions feed boxes 4A to 4D of the team's Capstone S2R® Blueprint.</a:t>
             </a:r>
           </a:p>
+          <a:p>
+            <a:r>
+              <a:t>Close the group work with Our Position. Say: "When your record is complete, write as a group a short summary statement of your team's position from this unit, in the unit's own terms. Every member agrees it with the rest of the record. It closes this unit's section of your Capstone S2R Blueprint and guides the assessors through your work."</a:t>
+            </a:r>
+          </a:p>
         </p:txBody>
       </p:sp>
       <p:sp>
@@ -6606,7 +6611,7 @@
           <a:p>
             <a:r>
               <a:rPr b="1"/>
-              <a:t>2. Teach verification ownership.</a:t>
+              <a:t>2. Teach accountability assignment.</a:t>
             </a:r>
           </a:p>
           <a:p>
@@ -6744,7 +6749,7 @@
           </a:p>
           <a:p>
             <a:r>
-              <a:t>The agreed work feeds boxes 4A to 4F of the team’s Capstone S2R Blueprint: the conditions in 4A to 4D, verification ownership in 4E and the executive blind spot in 4F.</a:t>
+              <a:t>The agreed work feeds boxes 4A to 4F of the team’s Capstone S2R Blueprint: the conditions in 4A to 4D, accountability assignment in 4E and the executive blind spot in 4F.</a:t>
             </a:r>
           </a:p>
         </p:txBody>
@@ -17731,7 +17736,7 @@
                 <a:ea typeface="Cambria" pitchFamily="34" charset="-122"/>
                 <a:cs typeface="Cambria" pitchFamily="34" charset="-120"/>
               </a:rPr>
-              <a:t>5.3 · Verification Ownership and Executive Blind Spots</a:t>
+              <a:t>5.3 · Accountability Assignment and Executive Blind Spots</a:t>
             </a:r>
             <a:endParaRPr lang="en-US" sz="3600" dirty="0"/>
           </a:p>
@@ -17932,7 +17937,7 @@
                 <a:ea typeface="Cambria" pitchFamily="34" charset="-122"/>
                 <a:cs typeface="Cambria" pitchFamily="34" charset="-120"/>
               </a:rPr>
-              <a:t>2 · Verification ownership  </a:t>
+              <a:t>2 · Accountability assignment  </a:t>
             </a:r>
             <a:r>
               <a:rPr lang="en-US" sz="2400" dirty="0">
